--- a/fichiers/presentation/PresSpe.pptx
+++ b/fichiers/presentation/PresSpe.pptx
@@ -2,18 +2,29 @@
 <file path=ppt/presentation.xml><?xml version="1.0" encoding="utf-8"?>
 <p:presentation xmlns:a="http://schemas.openxmlformats.org/drawingml/2006/main" xmlns:r="http://schemas.openxmlformats.org/officeDocument/2006/relationships" xmlns:p="http://schemas.openxmlformats.org/presentationml/2006/main" saveSubsetFonts="1">
   <p:sldMasterIdLst>
-    <p:sldMasterId id="2147483648" r:id="rId1"/>
+    <p:sldMasterId id="2147483797" r:id="rId1"/>
   </p:sldMasterIdLst>
+  <p:notesMasterIdLst>
+    <p:notesMasterId r:id="rId11"/>
+  </p:notesMasterIdLst>
   <p:sldIdLst>
     <p:sldId id="256" r:id="rId2"/>
+    <p:sldId id="257" r:id="rId3"/>
+    <p:sldId id="258" r:id="rId4"/>
+    <p:sldId id="259" r:id="rId5"/>
+    <p:sldId id="260" r:id="rId6"/>
+    <p:sldId id="261" r:id="rId7"/>
+    <p:sldId id="262" r:id="rId8"/>
+    <p:sldId id="263" r:id="rId9"/>
+    <p:sldId id="264" r:id="rId10"/>
   </p:sldIdLst>
   <p:sldSz cx="12192000" cy="6858000"/>
   <p:notesSz cx="6858000" cy="9144000"/>
   <p:defaultTextStyle>
     <a:defPPr>
-      <a:defRPr lang="fr-FR"/>
+      <a:defRPr lang="en-US"/>
     </a:defPPr>
-    <a:lvl1pPr marL="0" algn="l" defTabSz="914400" rtl="0" eaLnBrk="1" latinLnBrk="0" hangingPunct="1">
+    <a:lvl1pPr marL="0" algn="l" defTabSz="457200" rtl="0" eaLnBrk="1" latinLnBrk="0" hangingPunct="1">
       <a:defRPr sz="1800" kern="1200">
         <a:solidFill>
           <a:schemeClr val="tx1"/>
@@ -23,7 +34,7 @@
         <a:cs typeface="+mn-cs"/>
       </a:defRPr>
     </a:lvl1pPr>
-    <a:lvl2pPr marL="457200" algn="l" defTabSz="914400" rtl="0" eaLnBrk="1" latinLnBrk="0" hangingPunct="1">
+    <a:lvl2pPr marL="457200" algn="l" defTabSz="457200" rtl="0" eaLnBrk="1" latinLnBrk="0" hangingPunct="1">
       <a:defRPr sz="1800" kern="1200">
         <a:solidFill>
           <a:schemeClr val="tx1"/>
@@ -33,7 +44,7 @@
         <a:cs typeface="+mn-cs"/>
       </a:defRPr>
     </a:lvl2pPr>
-    <a:lvl3pPr marL="914400" algn="l" defTabSz="914400" rtl="0" eaLnBrk="1" latinLnBrk="0" hangingPunct="1">
+    <a:lvl3pPr marL="914400" algn="l" defTabSz="457200" rtl="0" eaLnBrk="1" latinLnBrk="0" hangingPunct="1">
       <a:defRPr sz="1800" kern="1200">
         <a:solidFill>
           <a:schemeClr val="tx1"/>
@@ -43,7 +54,7 @@
         <a:cs typeface="+mn-cs"/>
       </a:defRPr>
     </a:lvl3pPr>
-    <a:lvl4pPr marL="1371600" algn="l" defTabSz="914400" rtl="0" eaLnBrk="1" latinLnBrk="0" hangingPunct="1">
+    <a:lvl4pPr marL="1371600" algn="l" defTabSz="457200" rtl="0" eaLnBrk="1" latinLnBrk="0" hangingPunct="1">
       <a:defRPr sz="1800" kern="1200">
         <a:solidFill>
           <a:schemeClr val="tx1"/>
@@ -53,7 +64,7 @@
         <a:cs typeface="+mn-cs"/>
       </a:defRPr>
     </a:lvl4pPr>
-    <a:lvl5pPr marL="1828800" algn="l" defTabSz="914400" rtl="0" eaLnBrk="1" latinLnBrk="0" hangingPunct="1">
+    <a:lvl5pPr marL="1828800" algn="l" defTabSz="457200" rtl="0" eaLnBrk="1" latinLnBrk="0" hangingPunct="1">
       <a:defRPr sz="1800" kern="1200">
         <a:solidFill>
           <a:schemeClr val="tx1"/>
@@ -63,7 +74,7 @@
         <a:cs typeface="+mn-cs"/>
       </a:defRPr>
     </a:lvl5pPr>
-    <a:lvl6pPr marL="2286000" algn="l" defTabSz="914400" rtl="0" eaLnBrk="1" latinLnBrk="0" hangingPunct="1">
+    <a:lvl6pPr marL="2286000" algn="l" defTabSz="457200" rtl="0" eaLnBrk="1" latinLnBrk="0" hangingPunct="1">
       <a:defRPr sz="1800" kern="1200">
         <a:solidFill>
           <a:schemeClr val="tx1"/>
@@ -73,7 +84,7 @@
         <a:cs typeface="+mn-cs"/>
       </a:defRPr>
     </a:lvl6pPr>
-    <a:lvl7pPr marL="2743200" algn="l" defTabSz="914400" rtl="0" eaLnBrk="1" latinLnBrk="0" hangingPunct="1">
+    <a:lvl7pPr marL="2743200" algn="l" defTabSz="457200" rtl="0" eaLnBrk="1" latinLnBrk="0" hangingPunct="1">
       <a:defRPr sz="1800" kern="1200">
         <a:solidFill>
           <a:schemeClr val="tx1"/>
@@ -83,7 +94,7 @@
         <a:cs typeface="+mn-cs"/>
       </a:defRPr>
     </a:lvl7pPr>
-    <a:lvl8pPr marL="3200400" algn="l" defTabSz="914400" rtl="0" eaLnBrk="1" latinLnBrk="0" hangingPunct="1">
+    <a:lvl8pPr marL="3200400" algn="l" defTabSz="457200" rtl="0" eaLnBrk="1" latinLnBrk="0" hangingPunct="1">
       <a:defRPr sz="1800" kern="1200">
         <a:solidFill>
           <a:schemeClr val="tx1"/>
@@ -93,7 +104,7 @@
         <a:cs typeface="+mn-cs"/>
       </a:defRPr>
     </a:lvl8pPr>
-    <a:lvl9pPr marL="3657600" algn="l" defTabSz="914400" rtl="0" eaLnBrk="1" latinLnBrk="0" hangingPunct="1">
+    <a:lvl9pPr marL="3657600" algn="l" defTabSz="457200" rtl="0" eaLnBrk="1" latinLnBrk="0" hangingPunct="1">
       <a:defRPr sz="1800" kern="1200">
         <a:solidFill>
           <a:schemeClr val="tx1"/>
@@ -104,12 +115,64 @@
       </a:defRPr>
     </a:lvl9pPr>
   </p:defaultTextStyle>
+  <p:extLst>
+    <p:ext uri="{521415D9-36F7-43E2-AB2F-B90AF26B5E84}">
+      <p14:sectionLst xmlns:p14="http://schemas.microsoft.com/office/powerpoint/2010/main">
+        <p14:section name="Présentation" id="{74BC9097-585B-485D-BC93-0177D576A349}">
+          <p14:sldIdLst>
+            <p14:sldId id="256"/>
+          </p14:sldIdLst>
+        </p14:section>
+        <p14:section name="Sommaire" id="{418974AC-9ED8-4844-A7B6-44AB019734F8}">
+          <p14:sldIdLst>
+            <p14:sldId id="257"/>
+          </p14:sldIdLst>
+        </p14:section>
+        <p14:section name="Présentation du système" id="{74DEC717-5837-470B-A99A-3F477BCBD0C6}">
+          <p14:sldIdLst>
+            <p14:sldId id="258"/>
+            <p14:sldId id="259"/>
+          </p14:sldIdLst>
+        </p14:section>
+        <p14:section name="Présentation des manipulations réalisées" id="{D02495CD-48A6-40B1-A35C-76DF5395AF5B}">
+          <p14:sldIdLst>
+            <p14:sldId id="260"/>
+            <p14:sldId id="261"/>
+          </p14:sldIdLst>
+        </p14:section>
+        <p14:section name="Présentation de la séquence pédagogique" id="{78D1BA11-83C6-4016-B96D-76C97B425BD7}">
+          <p14:sldIdLst>
+            <p14:sldId id="262"/>
+            <p14:sldId id="263"/>
+            <p14:sldId id="264"/>
+          </p14:sldIdLst>
+        </p14:section>
+        <p14:section name="Terminale SI" id="{13ED0719-2399-4B12-B8F8-A3BF216056C7}">
+          <p14:sldIdLst/>
+        </p14:section>
+        <p14:section name="Terminale STI2D" id="{A1FD940E-7CC3-4994-84FF-F5481451CF84}">
+          <p14:sldIdLst/>
+        </p14:section>
+        <p14:section name="PT/PTSI" id="{523287D0-82AF-4373-81BD-973A9A71F0CE}">
+          <p14:sldIdLst/>
+        </p14:section>
+      </p14:sectionLst>
+    </p:ext>
+    <p:ext uri="{EFAFB233-063F-42B5-8137-9DF3F51BA10A}">
+      <p15:sldGuideLst xmlns:p15="http://schemas.microsoft.com/office/powerpoint/2012/main"/>
+    </p:ext>
+  </p:extLst>
 </p:presentation>
 </file>
 
-<file path=ppt/slideLayouts/slideLayout1.xml><?xml version="1.0" encoding="utf-8"?>
-<p:sldLayout xmlns:a="http://schemas.openxmlformats.org/drawingml/2006/main" xmlns:r="http://schemas.openxmlformats.org/officeDocument/2006/relationships" xmlns:p="http://schemas.openxmlformats.org/presentationml/2006/main" type="title" preserve="1">
-  <p:cSld name="Diapositive de titre">
+<file path=ppt/notesMasters/notesMaster1.xml><?xml version="1.0" encoding="utf-8"?>
+<p:notesMaster xmlns:a="http://schemas.openxmlformats.org/drawingml/2006/main" xmlns:r="http://schemas.openxmlformats.org/officeDocument/2006/relationships" xmlns:p="http://schemas.openxmlformats.org/presentationml/2006/main">
+  <p:cSld>
+    <p:bg>
+      <p:bgRef idx="1001">
+        <a:schemeClr val="bg1"/>
+      </p:bgRef>
+    </p:bg>
     <p:spTree>
       <p:nvGrpSpPr>
         <p:cNvPr id="1" name=""/>
@@ -126,133 +189,63 @@
       </p:grpSpPr>
       <p:sp>
         <p:nvSpPr>
-          <p:cNvPr id="2" name="Titre 1">
-            <a:extLst>
-              <a:ext uri="{FF2B5EF4-FFF2-40B4-BE49-F238E27FC236}">
-                <a16:creationId xmlns:a16="http://schemas.microsoft.com/office/drawing/2014/main" id="{215BDA67-0942-3E00-287F-134D24A6A4A4}"/>
-              </a:ext>
-            </a:extLst>
-          </p:cNvPr>
-          <p:cNvSpPr>
-            <a:spLocks noGrp="1"/>
-          </p:cNvSpPr>
-          <p:nvPr>
-            <p:ph type="ctrTitle"/>
+          <p:cNvPr id="2" name="Espace réservé de l'en-tête 1"/>
+          <p:cNvSpPr>
+            <a:spLocks noGrp="1"/>
+          </p:cNvSpPr>
+          <p:nvPr>
+            <p:ph type="hdr" sz="quarter"/>
           </p:nvPr>
         </p:nvSpPr>
         <p:spPr>
           <a:xfrm>
-            <a:off x="1524000" y="1122363"/>
-            <a:ext cx="9144000" cy="2387600"/>
+            <a:off x="0" y="0"/>
+            <a:ext cx="2971800" cy="458788"/>
           </a:xfrm>
+          <a:prstGeom prst="rect">
+            <a:avLst/>
+          </a:prstGeom>
         </p:spPr>
         <p:txBody>
-          <a:bodyPr anchor="b"/>
+          <a:bodyPr vert="horz" lIns="91440" tIns="45720" rIns="91440" bIns="45720" rtlCol="0"/>
           <a:lstStyle>
-            <a:lvl1pPr algn="ctr">
-              <a:defRPr sz="6000"/>
+            <a:lvl1pPr algn="l">
+              <a:defRPr sz="1200"/>
             </a:lvl1pPr>
           </a:lstStyle>
           <a:p>
-            <a:r>
-              <a:rPr lang="fr-FR"/>
-              <a:t>Modifiez le style du titre</a:t>
-            </a:r>
-          </a:p>
-        </p:txBody>
-      </p:sp>
-      <p:sp>
-        <p:nvSpPr>
-          <p:cNvPr id="3" name="Sous-titre 2">
-            <a:extLst>
-              <a:ext uri="{FF2B5EF4-FFF2-40B4-BE49-F238E27FC236}">
-                <a16:creationId xmlns:a16="http://schemas.microsoft.com/office/drawing/2014/main" id="{17197472-824A-0EE2-14D8-1A9AB3C1FC1A}"/>
-              </a:ext>
-            </a:extLst>
-          </p:cNvPr>
-          <p:cNvSpPr>
-            <a:spLocks noGrp="1"/>
-          </p:cNvSpPr>
-          <p:nvPr>
-            <p:ph type="subTitle" idx="1"/>
+            <a:endParaRPr lang="fr-FR"/>
+          </a:p>
+        </p:txBody>
+      </p:sp>
+      <p:sp>
+        <p:nvSpPr>
+          <p:cNvPr id="3" name="Espace réservé de la date 2"/>
+          <p:cNvSpPr>
+            <a:spLocks noGrp="1"/>
+          </p:cNvSpPr>
+          <p:nvPr>
+            <p:ph type="dt" idx="1"/>
           </p:nvPr>
         </p:nvSpPr>
         <p:spPr>
           <a:xfrm>
-            <a:off x="1524000" y="3602038"/>
-            <a:ext cx="9144000" cy="1655762"/>
+            <a:off x="3884613" y="0"/>
+            <a:ext cx="2971800" cy="458788"/>
           </a:xfrm>
+          <a:prstGeom prst="rect">
+            <a:avLst/>
+          </a:prstGeom>
         </p:spPr>
         <p:txBody>
-          <a:bodyPr/>
+          <a:bodyPr vert="horz" lIns="91440" tIns="45720" rIns="91440" bIns="45720" rtlCol="0"/>
           <a:lstStyle>
-            <a:lvl1pPr marL="0" indent="0" algn="ctr">
-              <a:buNone/>
-              <a:defRPr sz="2400"/>
+            <a:lvl1pPr algn="r">
+              <a:defRPr sz="1200"/>
             </a:lvl1pPr>
-            <a:lvl2pPr marL="457200" indent="0" algn="ctr">
-              <a:buNone/>
-              <a:defRPr sz="2000"/>
-            </a:lvl2pPr>
-            <a:lvl3pPr marL="914400" indent="0" algn="ctr">
-              <a:buNone/>
-              <a:defRPr sz="1800"/>
-            </a:lvl3pPr>
-            <a:lvl4pPr marL="1371600" indent="0" algn="ctr">
-              <a:buNone/>
-              <a:defRPr sz="1600"/>
-            </a:lvl4pPr>
-            <a:lvl5pPr marL="1828800" indent="0" algn="ctr">
-              <a:buNone/>
-              <a:defRPr sz="1600"/>
-            </a:lvl5pPr>
-            <a:lvl6pPr marL="2286000" indent="0" algn="ctr">
-              <a:buNone/>
-              <a:defRPr sz="1600"/>
-            </a:lvl6pPr>
-            <a:lvl7pPr marL="2743200" indent="0" algn="ctr">
-              <a:buNone/>
-              <a:defRPr sz="1600"/>
-            </a:lvl7pPr>
-            <a:lvl8pPr marL="3200400" indent="0" algn="ctr">
-              <a:buNone/>
-              <a:defRPr sz="1600"/>
-            </a:lvl8pPr>
-            <a:lvl9pPr marL="3657600" indent="0" algn="ctr">
-              <a:buNone/>
-              <a:defRPr sz="1600"/>
-            </a:lvl9pPr>
           </a:lstStyle>
           <a:p>
-            <a:r>
-              <a:rPr lang="fr-FR"/>
-              <a:t>Modifiez le style des sous-titres du masque</a:t>
-            </a:r>
-          </a:p>
-        </p:txBody>
-      </p:sp>
-      <p:sp>
-        <p:nvSpPr>
-          <p:cNvPr id="4" name="Espace réservé de la date 3">
-            <a:extLst>
-              <a:ext uri="{FF2B5EF4-FFF2-40B4-BE49-F238E27FC236}">
-                <a16:creationId xmlns:a16="http://schemas.microsoft.com/office/drawing/2014/main" id="{DB42C0FF-9389-BA23-0C1C-03FF2E0EB6F2}"/>
-              </a:ext>
-            </a:extLst>
-          </p:cNvPr>
-          <p:cNvSpPr>
-            <a:spLocks noGrp="1"/>
-          </p:cNvSpPr>
-          <p:nvPr>
-            <p:ph type="dt" sz="half" idx="10"/>
-          </p:nvPr>
-        </p:nvSpPr>
-        <p:spPr/>
-        <p:txBody>
-          <a:bodyPr/>
-          <a:lstStyle/>
-          <a:p>
-            <a:fld id="{8FDA8C4C-A59A-44C9-A053-D8C84F7CDD73}" type="datetimeFigureOut">
+            <a:fld id="{1438A7C7-51D5-4CE9-848C-73CCDCB5AD2A}" type="datetimeFigureOut">
               <a:rPr lang="fr-FR" smtClean="0"/>
               <a:t>05/06/2026</a:t>
             </a:fld>
@@ -262,23 +255,31 @@
       </p:sp>
       <p:sp>
         <p:nvSpPr>
-          <p:cNvPr id="5" name="Espace réservé du pied de page 4">
-            <a:extLst>
-              <a:ext uri="{FF2B5EF4-FFF2-40B4-BE49-F238E27FC236}">
-                <a16:creationId xmlns:a16="http://schemas.microsoft.com/office/drawing/2014/main" id="{D3E1A553-5E62-8300-8BD8-202F286275D9}"/>
-              </a:ext>
-            </a:extLst>
-          </p:cNvPr>
-          <p:cNvSpPr>
-            <a:spLocks noGrp="1"/>
-          </p:cNvSpPr>
-          <p:nvPr>
-            <p:ph type="ftr" sz="quarter" idx="11"/>
-          </p:nvPr>
-        </p:nvSpPr>
-        <p:spPr/>
-        <p:txBody>
-          <a:bodyPr/>
+          <p:cNvPr id="4" name="Espace réservé de l'image des diapositives 3"/>
+          <p:cNvSpPr>
+            <a:spLocks noGrp="1" noRot="1" noChangeAspect="1"/>
+          </p:cNvSpPr>
+          <p:nvPr>
+            <p:ph type="sldImg" idx="2"/>
+          </p:nvPr>
+        </p:nvSpPr>
+        <p:spPr>
+          <a:xfrm>
+            <a:off x="685800" y="1143000"/>
+            <a:ext cx="5486400" cy="3086100"/>
+          </a:xfrm>
+          <a:prstGeom prst="rect">
+            <a:avLst/>
+          </a:prstGeom>
+          <a:noFill/>
+          <a:ln w="12700">
+            <a:solidFill>
+              <a:prstClr val="black"/>
+            </a:solidFill>
+          </a:ln>
+        </p:spPr>
+        <p:txBody>
+          <a:bodyPr vert="horz" lIns="91440" tIns="45720" rIns="91440" bIns="45720" rtlCol="0" anchor="ctr"/>
           <a:lstStyle/>
           <a:p>
             <a:endParaRPr lang="fr-FR"/>
@@ -287,26 +288,122 @@
       </p:sp>
       <p:sp>
         <p:nvSpPr>
-          <p:cNvPr id="6" name="Espace réservé du numéro de diapositive 5">
-            <a:extLst>
-              <a:ext uri="{FF2B5EF4-FFF2-40B4-BE49-F238E27FC236}">
-                <a16:creationId xmlns:a16="http://schemas.microsoft.com/office/drawing/2014/main" id="{07451863-AD11-B68D-4794-3B00093494A7}"/>
-              </a:ext>
-            </a:extLst>
-          </p:cNvPr>
-          <p:cNvSpPr>
-            <a:spLocks noGrp="1"/>
-          </p:cNvSpPr>
-          <p:nvPr>
-            <p:ph type="sldNum" sz="quarter" idx="12"/>
-          </p:nvPr>
-        </p:nvSpPr>
-        <p:spPr/>
-        <p:txBody>
-          <a:bodyPr/>
-          <a:lstStyle/>
-          <a:p>
-            <a:fld id="{4CB94DCF-0D6D-46D6-8AE7-040528F48D4F}" type="slidenum">
+          <p:cNvPr id="5" name="Espace réservé des notes 4"/>
+          <p:cNvSpPr>
+            <a:spLocks noGrp="1"/>
+          </p:cNvSpPr>
+          <p:nvPr>
+            <p:ph type="body" sz="quarter" idx="3"/>
+          </p:nvPr>
+        </p:nvSpPr>
+        <p:spPr>
+          <a:xfrm>
+            <a:off x="685800" y="4400550"/>
+            <a:ext cx="5486400" cy="3600450"/>
+          </a:xfrm>
+          <a:prstGeom prst="rect">
+            <a:avLst/>
+          </a:prstGeom>
+        </p:spPr>
+        <p:txBody>
+          <a:bodyPr vert="horz" lIns="91440" tIns="45720" rIns="91440" bIns="45720" rtlCol="0"/>
+          <a:lstStyle/>
+          <a:p>
+            <a:pPr lvl="0"/>
+            <a:r>
+              <a:rPr lang="fr-FR"/>
+              <a:t>Cliquez pour modifier les styles du texte du masque</a:t>
+            </a:r>
+          </a:p>
+          <a:p>
+            <a:pPr lvl="1"/>
+            <a:r>
+              <a:rPr lang="fr-FR"/>
+              <a:t>Deuxième niveau</a:t>
+            </a:r>
+          </a:p>
+          <a:p>
+            <a:pPr lvl="2"/>
+            <a:r>
+              <a:rPr lang="fr-FR"/>
+              <a:t>Troisième niveau</a:t>
+            </a:r>
+          </a:p>
+          <a:p>
+            <a:pPr lvl="3"/>
+            <a:r>
+              <a:rPr lang="fr-FR"/>
+              <a:t>Quatrième niveau</a:t>
+            </a:r>
+          </a:p>
+          <a:p>
+            <a:pPr lvl="4"/>
+            <a:r>
+              <a:rPr lang="fr-FR"/>
+              <a:t>Cinquième niveau</a:t>
+            </a:r>
+          </a:p>
+        </p:txBody>
+      </p:sp>
+      <p:sp>
+        <p:nvSpPr>
+          <p:cNvPr id="6" name="Espace réservé du pied de page 5"/>
+          <p:cNvSpPr>
+            <a:spLocks noGrp="1"/>
+          </p:cNvSpPr>
+          <p:nvPr>
+            <p:ph type="ftr" sz="quarter" idx="4"/>
+          </p:nvPr>
+        </p:nvSpPr>
+        <p:spPr>
+          <a:xfrm>
+            <a:off x="0" y="8685213"/>
+            <a:ext cx="2971800" cy="458787"/>
+          </a:xfrm>
+          <a:prstGeom prst="rect">
+            <a:avLst/>
+          </a:prstGeom>
+        </p:spPr>
+        <p:txBody>
+          <a:bodyPr vert="horz" lIns="91440" tIns="45720" rIns="91440" bIns="45720" rtlCol="0" anchor="b"/>
+          <a:lstStyle>
+            <a:lvl1pPr algn="l">
+              <a:defRPr sz="1200"/>
+            </a:lvl1pPr>
+          </a:lstStyle>
+          <a:p>
+            <a:endParaRPr lang="fr-FR"/>
+          </a:p>
+        </p:txBody>
+      </p:sp>
+      <p:sp>
+        <p:nvSpPr>
+          <p:cNvPr id="7" name="Espace réservé du numéro de diapositive 6"/>
+          <p:cNvSpPr>
+            <a:spLocks noGrp="1"/>
+          </p:cNvSpPr>
+          <p:nvPr>
+            <p:ph type="sldNum" sz="quarter" idx="5"/>
+          </p:nvPr>
+        </p:nvSpPr>
+        <p:spPr>
+          <a:xfrm>
+            <a:off x="3884613" y="8685213"/>
+            <a:ext cx="2971800" cy="458787"/>
+          </a:xfrm>
+          <a:prstGeom prst="rect">
+            <a:avLst/>
+          </a:prstGeom>
+        </p:spPr>
+        <p:txBody>
+          <a:bodyPr vert="horz" lIns="91440" tIns="45720" rIns="91440" bIns="45720" rtlCol="0" anchor="b"/>
+          <a:lstStyle>
+            <a:lvl1pPr algn="r">
+              <a:defRPr sz="1200"/>
+            </a:lvl1pPr>
+          </a:lstStyle>
+          <a:p>
+            <a:fld id="{F9B025D0-A47D-4AF2-993F-F9C2E2046C51}" type="slidenum">
               <a:rPr lang="fr-FR" smtClean="0"/>
               <a:t>‹N°›</a:t>
             </a:fld>
@@ -317,12 +414,511 @@
     </p:spTree>
     <p:extLst>
       <p:ext uri="{BB962C8B-B14F-4D97-AF65-F5344CB8AC3E}">
-        <p14:creationId xmlns:p14="http://schemas.microsoft.com/office/powerpoint/2010/main" val="545798550"/>
+        <p14:creationId xmlns:p14="http://schemas.microsoft.com/office/powerpoint/2010/main" val="4153299152"/>
+      </p:ext>
+    </p:extLst>
+  </p:cSld>
+  <p:clrMap bg1="lt1" tx1="dk1" bg2="lt2" tx2="dk2" accent1="accent1" accent2="accent2" accent3="accent3" accent4="accent4" accent5="accent5" accent6="accent6" hlink="hlink" folHlink="folHlink"/>
+  <p:notesStyle>
+    <a:lvl1pPr marL="0" algn="l" defTabSz="914400" rtl="0" eaLnBrk="1" latinLnBrk="0" hangingPunct="1">
+      <a:defRPr sz="1200" kern="1200">
+        <a:solidFill>
+          <a:schemeClr val="tx1"/>
+        </a:solidFill>
+        <a:latin typeface="+mn-lt"/>
+        <a:ea typeface="+mn-ea"/>
+        <a:cs typeface="+mn-cs"/>
+      </a:defRPr>
+    </a:lvl1pPr>
+    <a:lvl2pPr marL="457200" algn="l" defTabSz="914400" rtl="0" eaLnBrk="1" latinLnBrk="0" hangingPunct="1">
+      <a:defRPr sz="1200" kern="1200">
+        <a:solidFill>
+          <a:schemeClr val="tx1"/>
+        </a:solidFill>
+        <a:latin typeface="+mn-lt"/>
+        <a:ea typeface="+mn-ea"/>
+        <a:cs typeface="+mn-cs"/>
+      </a:defRPr>
+    </a:lvl2pPr>
+    <a:lvl3pPr marL="914400" algn="l" defTabSz="914400" rtl="0" eaLnBrk="1" latinLnBrk="0" hangingPunct="1">
+      <a:defRPr sz="1200" kern="1200">
+        <a:solidFill>
+          <a:schemeClr val="tx1"/>
+        </a:solidFill>
+        <a:latin typeface="+mn-lt"/>
+        <a:ea typeface="+mn-ea"/>
+        <a:cs typeface="+mn-cs"/>
+      </a:defRPr>
+    </a:lvl3pPr>
+    <a:lvl4pPr marL="1371600" algn="l" defTabSz="914400" rtl="0" eaLnBrk="1" latinLnBrk="0" hangingPunct="1">
+      <a:defRPr sz="1200" kern="1200">
+        <a:solidFill>
+          <a:schemeClr val="tx1"/>
+        </a:solidFill>
+        <a:latin typeface="+mn-lt"/>
+        <a:ea typeface="+mn-ea"/>
+        <a:cs typeface="+mn-cs"/>
+      </a:defRPr>
+    </a:lvl4pPr>
+    <a:lvl5pPr marL="1828800" algn="l" defTabSz="914400" rtl="0" eaLnBrk="1" latinLnBrk="0" hangingPunct="1">
+      <a:defRPr sz="1200" kern="1200">
+        <a:solidFill>
+          <a:schemeClr val="tx1"/>
+        </a:solidFill>
+        <a:latin typeface="+mn-lt"/>
+        <a:ea typeface="+mn-ea"/>
+        <a:cs typeface="+mn-cs"/>
+      </a:defRPr>
+    </a:lvl5pPr>
+    <a:lvl6pPr marL="2286000" algn="l" defTabSz="914400" rtl="0" eaLnBrk="1" latinLnBrk="0" hangingPunct="1">
+      <a:defRPr sz="1200" kern="1200">
+        <a:solidFill>
+          <a:schemeClr val="tx1"/>
+        </a:solidFill>
+        <a:latin typeface="+mn-lt"/>
+        <a:ea typeface="+mn-ea"/>
+        <a:cs typeface="+mn-cs"/>
+      </a:defRPr>
+    </a:lvl6pPr>
+    <a:lvl7pPr marL="2743200" algn="l" defTabSz="914400" rtl="0" eaLnBrk="1" latinLnBrk="0" hangingPunct="1">
+      <a:defRPr sz="1200" kern="1200">
+        <a:solidFill>
+          <a:schemeClr val="tx1"/>
+        </a:solidFill>
+        <a:latin typeface="+mn-lt"/>
+        <a:ea typeface="+mn-ea"/>
+        <a:cs typeface="+mn-cs"/>
+      </a:defRPr>
+    </a:lvl7pPr>
+    <a:lvl8pPr marL="3200400" algn="l" defTabSz="914400" rtl="0" eaLnBrk="1" latinLnBrk="0" hangingPunct="1">
+      <a:defRPr sz="1200" kern="1200">
+        <a:solidFill>
+          <a:schemeClr val="tx1"/>
+        </a:solidFill>
+        <a:latin typeface="+mn-lt"/>
+        <a:ea typeface="+mn-ea"/>
+        <a:cs typeface="+mn-cs"/>
+      </a:defRPr>
+    </a:lvl8pPr>
+    <a:lvl9pPr marL="3657600" algn="l" defTabSz="914400" rtl="0" eaLnBrk="1" latinLnBrk="0" hangingPunct="1">
+      <a:defRPr sz="1200" kern="1200">
+        <a:solidFill>
+          <a:schemeClr val="tx1"/>
+        </a:solidFill>
+        <a:latin typeface="+mn-lt"/>
+        <a:ea typeface="+mn-ea"/>
+        <a:cs typeface="+mn-cs"/>
+      </a:defRPr>
+    </a:lvl9pPr>
+  </p:notesStyle>
+</p:notesMaster>
+</file>
+
+<file path=ppt/slideLayouts/slideLayout1.xml><?xml version="1.0" encoding="utf-8"?>
+<p:sldLayout xmlns:a="http://schemas.openxmlformats.org/drawingml/2006/main" xmlns:r="http://schemas.openxmlformats.org/officeDocument/2006/relationships" xmlns:p="http://schemas.openxmlformats.org/presentationml/2006/main" showMasterSp="0" type="title" preserve="1">
+  <p:cSld name="Diapositive de titre">
+    <p:bg>
+      <p:bgPr>
+        <a:solidFill>
+          <a:schemeClr val="bg2"/>
+        </a:solidFill>
+        <a:effectLst/>
+      </p:bgPr>
+    </p:bg>
+    <p:spTree>
+      <p:nvGrpSpPr>
+        <p:cNvPr id="1" name=""/>
+        <p:cNvGrpSpPr/>
+        <p:nvPr/>
+      </p:nvGrpSpPr>
+      <p:grpSpPr>
+        <a:xfrm>
+          <a:off x="0" y="0"/>
+          <a:ext cx="0" cy="0"/>
+          <a:chOff x="0" y="0"/>
+          <a:chExt cx="0" cy="0"/>
+        </a:xfrm>
+      </p:grpSpPr>
+      <p:sp>
+        <p:nvSpPr>
+          <p:cNvPr id="2" name="Title 1"/>
+          <p:cNvSpPr>
+            <a:spLocks noGrp="1"/>
+          </p:cNvSpPr>
+          <p:nvPr>
+            <p:ph type="ctrTitle"/>
+          </p:nvPr>
+        </p:nvSpPr>
+        <p:spPr>
+          <a:xfrm>
+            <a:off x="1915128" y="1788454"/>
+            <a:ext cx="8361229" cy="2098226"/>
+          </a:xfrm>
+        </p:spPr>
+        <p:txBody>
+          <a:bodyPr anchor="b">
+            <a:noAutofit/>
+          </a:bodyPr>
+          <a:lstStyle>
+            <a:lvl1pPr algn="ctr">
+              <a:defRPr sz="7200" cap="all" baseline="0">
+                <a:solidFill>
+                  <a:schemeClr val="tx2"/>
+                </a:solidFill>
+              </a:defRPr>
+            </a:lvl1pPr>
+          </a:lstStyle>
+          <a:p>
+            <a:r>
+              <a:rPr lang="fr-FR"/>
+              <a:t>Modifiez le style du titre</a:t>
+            </a:r>
+            <a:endParaRPr lang="en-US" dirty="0"/>
+          </a:p>
+        </p:txBody>
+      </p:sp>
+      <p:sp>
+        <p:nvSpPr>
+          <p:cNvPr id="3" name="Subtitle 2"/>
+          <p:cNvSpPr>
+            <a:spLocks noGrp="1"/>
+          </p:cNvSpPr>
+          <p:nvPr>
+            <p:ph type="subTitle" idx="1"/>
+          </p:nvPr>
+        </p:nvSpPr>
+        <p:spPr>
+          <a:xfrm>
+            <a:off x="2679906" y="3956279"/>
+            <a:ext cx="6831673" cy="1086237"/>
+          </a:xfrm>
+        </p:spPr>
+        <p:txBody>
+          <a:bodyPr>
+            <a:normAutofit/>
+          </a:bodyPr>
+          <a:lstStyle>
+            <a:lvl1pPr marL="0" indent="0" algn="ctr">
+              <a:lnSpc>
+                <a:spcPct val="112000"/>
+              </a:lnSpc>
+              <a:spcBef>
+                <a:spcPts val="0"/>
+              </a:spcBef>
+              <a:spcAft>
+                <a:spcPts val="0"/>
+              </a:spcAft>
+              <a:buNone/>
+              <a:defRPr sz="2300"/>
+            </a:lvl1pPr>
+            <a:lvl2pPr marL="457200" indent="0" algn="ctr">
+              <a:buNone/>
+              <a:defRPr sz="2000"/>
+            </a:lvl2pPr>
+            <a:lvl3pPr marL="914400" indent="0" algn="ctr">
+              <a:buNone/>
+              <a:defRPr sz="1800"/>
+            </a:lvl3pPr>
+            <a:lvl4pPr marL="1371600" indent="0" algn="ctr">
+              <a:buNone/>
+              <a:defRPr sz="1600"/>
+            </a:lvl4pPr>
+            <a:lvl5pPr marL="1828800" indent="0" algn="ctr">
+              <a:buNone/>
+              <a:defRPr sz="1600"/>
+            </a:lvl5pPr>
+            <a:lvl6pPr marL="2286000" indent="0" algn="ctr">
+              <a:buNone/>
+              <a:defRPr sz="1600"/>
+            </a:lvl6pPr>
+            <a:lvl7pPr marL="2743200" indent="0" algn="ctr">
+              <a:buNone/>
+              <a:defRPr sz="1600"/>
+            </a:lvl7pPr>
+            <a:lvl8pPr marL="3200400" indent="0" algn="ctr">
+              <a:buNone/>
+              <a:defRPr sz="1600"/>
+            </a:lvl8pPr>
+            <a:lvl9pPr marL="3657600" indent="0" algn="ctr">
+              <a:buNone/>
+              <a:defRPr sz="1600"/>
+            </a:lvl9pPr>
+          </a:lstStyle>
+          <a:p>
+            <a:r>
+              <a:rPr lang="fr-FR"/>
+              <a:t>Modifiez le style des sous-titres du masque</a:t>
+            </a:r>
+            <a:endParaRPr lang="en-US" dirty="0"/>
+          </a:p>
+        </p:txBody>
+      </p:sp>
+      <p:sp>
+        <p:nvSpPr>
+          <p:cNvPr id="4" name="Date Placeholder 3"/>
+          <p:cNvSpPr>
+            <a:spLocks noGrp="1"/>
+          </p:cNvSpPr>
+          <p:nvPr>
+            <p:ph type="dt" sz="half" idx="10"/>
+          </p:nvPr>
+        </p:nvSpPr>
+        <p:spPr>
+          <a:xfrm>
+            <a:off x="752858" y="6453386"/>
+            <a:ext cx="1607944" cy="404614"/>
+          </a:xfrm>
+        </p:spPr>
+        <p:txBody>
+          <a:bodyPr/>
+          <a:lstStyle>
+            <a:lvl1pPr>
+              <a:defRPr baseline="0">
+                <a:solidFill>
+                  <a:schemeClr val="tx2"/>
+                </a:solidFill>
+              </a:defRPr>
+            </a:lvl1pPr>
+          </a:lstStyle>
+          <a:p>
+            <a:fld id="{25BF4BE5-493C-4950-8611-4B73EBA124A3}" type="datetime1">
+              <a:rPr lang="fr-FR" smtClean="0"/>
+              <a:t>05/06/2026</a:t>
+            </a:fld>
+            <a:endParaRPr lang="fr-FR"/>
+          </a:p>
+        </p:txBody>
+      </p:sp>
+      <p:sp>
+        <p:nvSpPr>
+          <p:cNvPr id="5" name="Footer Placeholder 4"/>
+          <p:cNvSpPr>
+            <a:spLocks noGrp="1"/>
+          </p:cNvSpPr>
+          <p:nvPr>
+            <p:ph type="ftr" sz="quarter" idx="11"/>
+          </p:nvPr>
+        </p:nvSpPr>
+        <p:spPr>
+          <a:xfrm>
+            <a:off x="2584054" y="6453386"/>
+            <a:ext cx="7023377" cy="404614"/>
+          </a:xfrm>
+        </p:spPr>
+        <p:txBody>
+          <a:bodyPr/>
+          <a:lstStyle>
+            <a:lvl1pPr algn="ctr">
+              <a:defRPr baseline="0">
+                <a:solidFill>
+                  <a:schemeClr val="tx2"/>
+                </a:solidFill>
+              </a:defRPr>
+            </a:lvl1pPr>
+          </a:lstStyle>
+          <a:p>
+            <a:endParaRPr lang="fr-FR"/>
+          </a:p>
+        </p:txBody>
+      </p:sp>
+      <p:grpSp>
+        <p:nvGrpSpPr>
+          <p:cNvPr id="7" name="Group 6"/>
+          <p:cNvGrpSpPr/>
+          <p:nvPr/>
+        </p:nvGrpSpPr>
+        <p:grpSpPr>
+          <a:xfrm>
+            <a:off x="752858" y="744469"/>
+            <a:ext cx="10674117" cy="5349671"/>
+            <a:chOff x="752858" y="744469"/>
+            <a:chExt cx="10674117" cy="5349671"/>
+          </a:xfrm>
+        </p:grpSpPr>
+        <p:sp>
+          <p:nvSpPr>
+            <p:cNvPr id="11" name="Freeform 6"/>
+            <p:cNvSpPr/>
+            <p:nvPr/>
+          </p:nvSpPr>
+          <p:spPr bwMode="auto">
+            <a:xfrm>
+              <a:off x="8151962" y="1685652"/>
+              <a:ext cx="3275013" cy="4408488"/>
+            </a:xfrm>
+            <a:custGeom>
+              <a:avLst/>
+              <a:gdLst/>
+              <a:ahLst/>
+              <a:cxnLst/>
+              <a:rect l="l" t="t" r="r" b="b"/>
+              <a:pathLst>
+                <a:path w="10000" h="10000">
+                  <a:moveTo>
+                    <a:pt x="8761" y="0"/>
+                  </a:moveTo>
+                  <a:lnTo>
+                    <a:pt x="10000" y="0"/>
+                  </a:lnTo>
+                  <a:lnTo>
+                    <a:pt x="10000" y="10000"/>
+                  </a:lnTo>
+                  <a:lnTo>
+                    <a:pt x="0" y="10000"/>
+                  </a:lnTo>
+                  <a:lnTo>
+                    <a:pt x="0" y="9126"/>
+                  </a:lnTo>
+                  <a:lnTo>
+                    <a:pt x="8761" y="9127"/>
+                  </a:lnTo>
+                  <a:lnTo>
+                    <a:pt x="8761" y="0"/>
+                  </a:lnTo>
+                  <a:close/>
+                </a:path>
+              </a:pathLst>
+            </a:custGeom>
+            <a:solidFill>
+              <a:schemeClr val="tx2"/>
+            </a:solidFill>
+            <a:ln w="0">
+              <a:noFill/>
+              <a:prstDash val="solid"/>
+              <a:round/>
+              <a:headEnd/>
+              <a:tailEnd/>
+            </a:ln>
+          </p:spPr>
+          <p:txBody>
+            <a:bodyPr/>
+            <a:lstStyle/>
+            <a:p>
+              <a:endParaRPr lang="fr-FR"/>
+            </a:p>
+          </p:txBody>
+        </p:sp>
+        <p:sp>
+          <p:nvSpPr>
+            <p:cNvPr id="14" name="Freeform 6"/>
+            <p:cNvSpPr/>
+            <p:nvPr/>
+          </p:nvSpPr>
+          <p:spPr bwMode="auto">
+            <a:xfrm flipH="1" flipV="1">
+              <a:off x="752858" y="744469"/>
+              <a:ext cx="3275668" cy="4408488"/>
+            </a:xfrm>
+            <a:custGeom>
+              <a:avLst/>
+              <a:gdLst/>
+              <a:ahLst/>
+              <a:cxnLst/>
+              <a:rect l="l" t="t" r="r" b="b"/>
+              <a:pathLst>
+                <a:path w="10002" h="10000">
+                  <a:moveTo>
+                    <a:pt x="8763" y="0"/>
+                  </a:moveTo>
+                  <a:lnTo>
+                    <a:pt x="10002" y="0"/>
+                  </a:lnTo>
+                  <a:lnTo>
+                    <a:pt x="10002" y="10000"/>
+                  </a:lnTo>
+                  <a:lnTo>
+                    <a:pt x="2" y="10000"/>
+                  </a:lnTo>
+                  <a:cubicBezTo>
+                    <a:pt x="-2" y="9698"/>
+                    <a:pt x="4" y="9427"/>
+                    <a:pt x="0" y="9125"/>
+                  </a:cubicBezTo>
+                  <a:lnTo>
+                    <a:pt x="8763" y="9128"/>
+                  </a:lnTo>
+                  <a:lnTo>
+                    <a:pt x="8763" y="0"/>
+                  </a:lnTo>
+                  <a:close/>
+                </a:path>
+              </a:pathLst>
+            </a:custGeom>
+            <a:solidFill>
+              <a:schemeClr val="tx2"/>
+            </a:solidFill>
+            <a:ln w="0">
+              <a:noFill/>
+              <a:prstDash val="solid"/>
+              <a:round/>
+              <a:headEnd/>
+              <a:tailEnd/>
+            </a:ln>
+          </p:spPr>
+          <p:txBody>
+            <a:bodyPr/>
+            <a:lstStyle/>
+            <a:p>
+              <a:endParaRPr lang="fr-FR"/>
+            </a:p>
+          </p:txBody>
+        </p:sp>
+      </p:grpSp>
+      <p:sp>
+        <p:nvSpPr>
+          <p:cNvPr id="8" name="Slide Number Placeholder 5">
+            <a:extLst>
+              <a:ext uri="{FF2B5EF4-FFF2-40B4-BE49-F238E27FC236}">
+                <a16:creationId xmlns:a16="http://schemas.microsoft.com/office/drawing/2014/main" id="{091231E6-B321-0B67-D767-F5F0AAFD25FA}"/>
+              </a:ext>
+            </a:extLst>
+          </p:cNvPr>
+          <p:cNvSpPr>
+            <a:spLocks noGrp="1"/>
+          </p:cNvSpPr>
+          <p:nvPr>
+            <p:ph type="sldNum" sz="quarter" idx="4"/>
+          </p:nvPr>
+        </p:nvSpPr>
+        <p:spPr>
+          <a:xfrm>
+            <a:off x="10457474" y="6342017"/>
+            <a:ext cx="1596292" cy="404614"/>
+          </a:xfrm>
+          <a:prstGeom prst="rect">
+            <a:avLst/>
+          </a:prstGeom>
+        </p:spPr>
+        <p:txBody>
+          <a:bodyPr vert="horz" lIns="91440" tIns="45720" rIns="91440" bIns="45720" rtlCol="0" anchor="ctr"/>
+          <a:lstStyle>
+            <a:lvl1pPr algn="r">
+              <a:defRPr sz="2000" baseline="0">
+                <a:solidFill>
+                  <a:schemeClr val="tx2"/>
+                </a:solidFill>
+              </a:defRPr>
+            </a:lvl1pPr>
+          </a:lstStyle>
+          <a:p>
+            <a:fld id="{40743BAD-0FD4-4AFD-913F-F1B3782AF393}" type="slidenum">
+              <a:rPr lang="fr-FR" smtClean="0"/>
+              <a:pPr/>
+              <a:t>‹N°›</a:t>
+            </a:fld>
+            <a:endParaRPr lang="fr-FR" dirty="0"/>
+          </a:p>
+        </p:txBody>
+      </p:sp>
+    </p:spTree>
+    <p:extLst>
+      <p:ext uri="{BB962C8B-B14F-4D97-AF65-F5344CB8AC3E}">
+        <p14:creationId xmlns:p14="http://schemas.microsoft.com/office/powerpoint/2010/main" val="2715977468"/>
       </p:ext>
     </p:extLst>
   </p:cSld>
   <p:clrMapOvr>
-    <a:masterClrMapping/>
+    <a:overrideClrMapping bg1="lt1" tx1="dk1" bg2="lt2" tx2="dk2" accent1="accent1" accent2="accent2" accent3="accent3" accent4="accent4" accent5="accent5" accent6="accent6" hlink="hlink" folHlink="folHlink"/>
   </p:clrMapOvr>
 </p:sldLayout>
 </file>
@@ -346,13 +942,7 @@
       </p:grpSpPr>
       <p:sp>
         <p:nvSpPr>
-          <p:cNvPr id="2" name="Titre 1">
-            <a:extLst>
-              <a:ext uri="{FF2B5EF4-FFF2-40B4-BE49-F238E27FC236}">
-                <a16:creationId xmlns:a16="http://schemas.microsoft.com/office/drawing/2014/main" id="{878107A8-094E-A482-8FEB-AAA2A8DBD1D7}"/>
-              </a:ext>
-            </a:extLst>
-          </p:cNvPr>
+          <p:cNvPr id="2" name="Title 1"/>
           <p:cNvSpPr>
             <a:spLocks noGrp="1"/>
           </p:cNvSpPr>
@@ -369,18 +959,13 @@
               <a:rPr lang="fr-FR"/>
               <a:t>Modifiez le style du titre</a:t>
             </a:r>
-          </a:p>
-        </p:txBody>
-      </p:sp>
-      <p:sp>
-        <p:nvSpPr>
-          <p:cNvPr id="3" name="Espace réservé du texte vertical 2">
-            <a:extLst>
-              <a:ext uri="{FF2B5EF4-FFF2-40B4-BE49-F238E27FC236}">
-                <a16:creationId xmlns:a16="http://schemas.microsoft.com/office/drawing/2014/main" id="{981B214C-35D9-D08B-346B-B1887507AC5C}"/>
-              </a:ext>
-            </a:extLst>
-          </p:cNvPr>
+            <a:endParaRPr lang="en-US" dirty="0"/>
+          </a:p>
+        </p:txBody>
+      </p:sp>
+      <p:sp>
+        <p:nvSpPr>
+          <p:cNvPr id="3" name="Vertical Text Placeholder 2"/>
           <p:cNvSpPr>
             <a:spLocks noGrp="1"/>
           </p:cNvSpPr>
@@ -388,69 +973,69 @@
             <p:ph type="body" orient="vert" idx="1"/>
           </p:nvPr>
         </p:nvSpPr>
+        <p:spPr>
+          <a:xfrm>
+            <a:off x="1371600" y="2295525"/>
+            <a:ext cx="9601200" cy="3571875"/>
+          </a:xfrm>
+        </p:spPr>
+        <p:txBody>
+          <a:bodyPr vert="eaVert"/>
+          <a:lstStyle/>
+          <a:p>
+            <a:pPr lvl="0"/>
+            <a:r>
+              <a:rPr lang="fr-FR"/>
+              <a:t>Cliquez pour modifier les styles du texte du masque</a:t>
+            </a:r>
+          </a:p>
+          <a:p>
+            <a:pPr lvl="1"/>
+            <a:r>
+              <a:rPr lang="fr-FR"/>
+              <a:t>Deuxième niveau</a:t>
+            </a:r>
+          </a:p>
+          <a:p>
+            <a:pPr lvl="2"/>
+            <a:r>
+              <a:rPr lang="fr-FR"/>
+              <a:t>Troisième niveau</a:t>
+            </a:r>
+          </a:p>
+          <a:p>
+            <a:pPr lvl="3"/>
+            <a:r>
+              <a:rPr lang="fr-FR"/>
+              <a:t>Quatrième niveau</a:t>
+            </a:r>
+          </a:p>
+          <a:p>
+            <a:pPr lvl="4"/>
+            <a:r>
+              <a:rPr lang="fr-FR"/>
+              <a:t>Cinquième niveau</a:t>
+            </a:r>
+            <a:endParaRPr lang="en-US" dirty="0"/>
+          </a:p>
+        </p:txBody>
+      </p:sp>
+      <p:sp>
+        <p:nvSpPr>
+          <p:cNvPr id="4" name="Date Placeholder 3"/>
+          <p:cNvSpPr>
+            <a:spLocks noGrp="1"/>
+          </p:cNvSpPr>
+          <p:nvPr>
+            <p:ph type="dt" sz="half" idx="10"/>
+          </p:nvPr>
+        </p:nvSpPr>
         <p:spPr/>
         <p:txBody>
-          <a:bodyPr vert="eaVert"/>
-          <a:lstStyle/>
-          <a:p>
-            <a:pPr lvl="0"/>
-            <a:r>
-              <a:rPr lang="fr-FR"/>
-              <a:t>Cliquez pour modifier les styles du texte du masque</a:t>
-            </a:r>
-          </a:p>
-          <a:p>
-            <a:pPr lvl="1"/>
-            <a:r>
-              <a:rPr lang="fr-FR"/>
-              <a:t>Deuxième niveau</a:t>
-            </a:r>
-          </a:p>
-          <a:p>
-            <a:pPr lvl="2"/>
-            <a:r>
-              <a:rPr lang="fr-FR"/>
-              <a:t>Troisième niveau</a:t>
-            </a:r>
-          </a:p>
-          <a:p>
-            <a:pPr lvl="3"/>
-            <a:r>
-              <a:rPr lang="fr-FR"/>
-              <a:t>Quatrième niveau</a:t>
-            </a:r>
-          </a:p>
-          <a:p>
-            <a:pPr lvl="4"/>
-            <a:r>
-              <a:rPr lang="fr-FR"/>
-              <a:t>Cinquième niveau</a:t>
-            </a:r>
-          </a:p>
-        </p:txBody>
-      </p:sp>
-      <p:sp>
-        <p:nvSpPr>
-          <p:cNvPr id="4" name="Espace réservé de la date 3">
-            <a:extLst>
-              <a:ext uri="{FF2B5EF4-FFF2-40B4-BE49-F238E27FC236}">
-                <a16:creationId xmlns:a16="http://schemas.microsoft.com/office/drawing/2014/main" id="{548A8512-3E2E-170E-4418-4A8005917657}"/>
-              </a:ext>
-            </a:extLst>
-          </p:cNvPr>
-          <p:cNvSpPr>
-            <a:spLocks noGrp="1"/>
-          </p:cNvSpPr>
-          <p:nvPr>
-            <p:ph type="dt" sz="half" idx="10"/>
-          </p:nvPr>
-        </p:nvSpPr>
-        <p:spPr/>
-        <p:txBody>
-          <a:bodyPr/>
-          <a:lstStyle/>
-          <a:p>
-            <a:fld id="{8FDA8C4C-A59A-44C9-A053-D8C84F7CDD73}" type="datetimeFigureOut">
+          <a:bodyPr/>
+          <a:lstStyle/>
+          <a:p>
+            <a:fld id="{7440509C-B4B3-4DBB-BCC9-40D57FCA4C66}" type="datetime1">
               <a:rPr lang="fr-FR" smtClean="0"/>
               <a:t>05/06/2026</a:t>
             </a:fld>
@@ -460,13 +1045,7 @@
       </p:sp>
       <p:sp>
         <p:nvSpPr>
-          <p:cNvPr id="5" name="Espace réservé du pied de page 4">
-            <a:extLst>
-              <a:ext uri="{FF2B5EF4-FFF2-40B4-BE49-F238E27FC236}">
-                <a16:creationId xmlns:a16="http://schemas.microsoft.com/office/drawing/2014/main" id="{46CCA197-6AF7-6DA1-CDBD-C8594A8CCA94}"/>
-              </a:ext>
-            </a:extLst>
-          </p:cNvPr>
+          <p:cNvPr id="5" name="Footer Placeholder 4"/>
           <p:cNvSpPr>
             <a:spLocks noGrp="1"/>
           </p:cNvSpPr>
@@ -485,13 +1064,7 @@
       </p:sp>
       <p:sp>
         <p:nvSpPr>
-          <p:cNvPr id="6" name="Espace réservé du numéro de diapositive 5">
-            <a:extLst>
-              <a:ext uri="{FF2B5EF4-FFF2-40B4-BE49-F238E27FC236}">
-                <a16:creationId xmlns:a16="http://schemas.microsoft.com/office/drawing/2014/main" id="{B2F1C10D-294F-0568-2F41-ED0DD7A2159E}"/>
-              </a:ext>
-            </a:extLst>
-          </p:cNvPr>
+          <p:cNvPr id="6" name="Slide Number Placeholder 5"/>
           <p:cNvSpPr>
             <a:spLocks noGrp="1"/>
           </p:cNvSpPr>
@@ -504,7 +1077,7 @@
           <a:bodyPr/>
           <a:lstStyle/>
           <a:p>
-            <a:fld id="{4CB94DCF-0D6D-46D6-8AE7-040528F48D4F}" type="slidenum">
+            <a:fld id="{40743BAD-0FD4-4AFD-913F-F1B3782AF393}" type="slidenum">
               <a:rPr lang="fr-FR" smtClean="0"/>
               <a:t>‹N°›</a:t>
             </a:fld>
@@ -515,7 +1088,7 @@
     </p:spTree>
     <p:extLst>
       <p:ext uri="{BB962C8B-B14F-4D97-AF65-F5344CB8AC3E}">
-        <p14:creationId xmlns:p14="http://schemas.microsoft.com/office/powerpoint/2010/main" val="798078804"/>
+        <p14:creationId xmlns:p14="http://schemas.microsoft.com/office/powerpoint/2010/main" val="2942386817"/>
       </p:ext>
     </p:extLst>
   </p:cSld>
@@ -544,13 +1117,7 @@
       </p:grpSpPr>
       <p:sp>
         <p:nvSpPr>
-          <p:cNvPr id="2" name="Titre vertical 1">
-            <a:extLst>
-              <a:ext uri="{FF2B5EF4-FFF2-40B4-BE49-F238E27FC236}">
-                <a16:creationId xmlns:a16="http://schemas.microsoft.com/office/drawing/2014/main" id="{9E58F5AD-D991-0F7C-96D7-EA43496A2427}"/>
-              </a:ext>
-            </a:extLst>
-          </p:cNvPr>
+          <p:cNvPr id="2" name="Vertical Title 1"/>
           <p:cNvSpPr>
             <a:spLocks noGrp="1"/>
           </p:cNvSpPr>
@@ -560,8 +1127,8 @@
         </p:nvSpPr>
         <p:spPr>
           <a:xfrm>
-            <a:off x="8724900" y="365125"/>
-            <a:ext cx="2628900" cy="5811838"/>
+            <a:off x="9596561" y="624156"/>
+            <a:ext cx="1565766" cy="5243244"/>
           </a:xfrm>
         </p:spPr>
         <p:txBody>
@@ -572,18 +1139,13 @@
               <a:rPr lang="fr-FR"/>
               <a:t>Modifiez le style du titre</a:t>
             </a:r>
-          </a:p>
-        </p:txBody>
-      </p:sp>
-      <p:sp>
-        <p:nvSpPr>
-          <p:cNvPr id="3" name="Espace réservé du texte vertical 2">
-            <a:extLst>
-              <a:ext uri="{FF2B5EF4-FFF2-40B4-BE49-F238E27FC236}">
-                <a16:creationId xmlns:a16="http://schemas.microsoft.com/office/drawing/2014/main" id="{BFD79277-8E59-35CD-1477-39DEB1BC8D9F}"/>
-              </a:ext>
-            </a:extLst>
-          </p:cNvPr>
+            <a:endParaRPr lang="en-US" dirty="0"/>
+          </a:p>
+        </p:txBody>
+      </p:sp>
+      <p:sp>
+        <p:nvSpPr>
+          <p:cNvPr id="3" name="Vertical Text Placeholder 2"/>
           <p:cNvSpPr>
             <a:spLocks noGrp="1"/>
           </p:cNvSpPr>
@@ -593,8 +1155,8 @@
         </p:nvSpPr>
         <p:spPr>
           <a:xfrm>
-            <a:off x="838200" y="365125"/>
-            <a:ext cx="7734300" cy="5811838"/>
+            <a:off x="1371600" y="624156"/>
+            <a:ext cx="8179641" cy="5243244"/>
           </a:xfrm>
         </p:spPr>
         <p:txBody>
@@ -634,18 +1196,13 @@
               <a:rPr lang="fr-FR"/>
               <a:t>Cinquième niveau</a:t>
             </a:r>
-          </a:p>
-        </p:txBody>
-      </p:sp>
-      <p:sp>
-        <p:nvSpPr>
-          <p:cNvPr id="4" name="Espace réservé de la date 3">
-            <a:extLst>
-              <a:ext uri="{FF2B5EF4-FFF2-40B4-BE49-F238E27FC236}">
-                <a16:creationId xmlns:a16="http://schemas.microsoft.com/office/drawing/2014/main" id="{99E6660E-ED54-FC78-A603-25DCE74F571B}"/>
-              </a:ext>
-            </a:extLst>
-          </p:cNvPr>
+            <a:endParaRPr lang="en-US" dirty="0"/>
+          </a:p>
+        </p:txBody>
+      </p:sp>
+      <p:sp>
+        <p:nvSpPr>
+          <p:cNvPr id="4" name="Date Placeholder 3"/>
           <p:cNvSpPr>
             <a:spLocks noGrp="1"/>
           </p:cNvSpPr>
@@ -658,7 +1215,7 @@
           <a:bodyPr/>
           <a:lstStyle/>
           <a:p>
-            <a:fld id="{8FDA8C4C-A59A-44C9-A053-D8C84F7CDD73}" type="datetimeFigureOut">
+            <a:fld id="{F751CFBF-E380-4D91-9539-BDFDF7AF5C45}" type="datetime1">
               <a:rPr lang="fr-FR" smtClean="0"/>
               <a:t>05/06/2026</a:t>
             </a:fld>
@@ -668,13 +1225,7 @@
       </p:sp>
       <p:sp>
         <p:nvSpPr>
-          <p:cNvPr id="5" name="Espace réservé du pied de page 4">
-            <a:extLst>
-              <a:ext uri="{FF2B5EF4-FFF2-40B4-BE49-F238E27FC236}">
-                <a16:creationId xmlns:a16="http://schemas.microsoft.com/office/drawing/2014/main" id="{1CD83D4C-5750-88DB-EF9F-C2C993FC1466}"/>
-              </a:ext>
-            </a:extLst>
-          </p:cNvPr>
+          <p:cNvPr id="5" name="Footer Placeholder 4"/>
           <p:cNvSpPr>
             <a:spLocks noGrp="1"/>
           </p:cNvSpPr>
@@ -693,13 +1244,7 @@
       </p:sp>
       <p:sp>
         <p:nvSpPr>
-          <p:cNvPr id="6" name="Espace réservé du numéro de diapositive 5">
-            <a:extLst>
-              <a:ext uri="{FF2B5EF4-FFF2-40B4-BE49-F238E27FC236}">
-                <a16:creationId xmlns:a16="http://schemas.microsoft.com/office/drawing/2014/main" id="{3A7EC87A-F0F8-F37A-92E4-39EA9025DE98}"/>
-              </a:ext>
-            </a:extLst>
-          </p:cNvPr>
+          <p:cNvPr id="6" name="Slide Number Placeholder 5"/>
           <p:cNvSpPr>
             <a:spLocks noGrp="1"/>
           </p:cNvSpPr>
@@ -712,7 +1257,7 @@
           <a:bodyPr/>
           <a:lstStyle/>
           <a:p>
-            <a:fld id="{4CB94DCF-0D6D-46D6-8AE7-040528F48D4F}" type="slidenum">
+            <a:fld id="{40743BAD-0FD4-4AFD-913F-F1B3782AF393}" type="slidenum">
               <a:rPr lang="fr-FR" smtClean="0"/>
               <a:t>‹N°›</a:t>
             </a:fld>
@@ -723,7 +1268,7 @@
     </p:spTree>
     <p:extLst>
       <p:ext uri="{BB962C8B-B14F-4D97-AF65-F5344CB8AC3E}">
-        <p14:creationId xmlns:p14="http://schemas.microsoft.com/office/powerpoint/2010/main" val="3721065336"/>
+        <p14:creationId xmlns:p14="http://schemas.microsoft.com/office/powerpoint/2010/main" val="2267696210"/>
       </p:ext>
     </p:extLst>
   </p:cSld>
@@ -752,13 +1297,7 @@
       </p:grpSpPr>
       <p:sp>
         <p:nvSpPr>
-          <p:cNvPr id="2" name="Titre 1">
-            <a:extLst>
-              <a:ext uri="{FF2B5EF4-FFF2-40B4-BE49-F238E27FC236}">
-                <a16:creationId xmlns:a16="http://schemas.microsoft.com/office/drawing/2014/main" id="{A38AC634-A531-A164-4100-FB8D63DDFC43}"/>
-              </a:ext>
-            </a:extLst>
-          </p:cNvPr>
+          <p:cNvPr id="2" name="Title 1"/>
           <p:cNvSpPr>
             <a:spLocks noGrp="1"/>
           </p:cNvSpPr>
@@ -775,18 +1314,13 @@
               <a:rPr lang="fr-FR"/>
               <a:t>Modifiez le style du titre</a:t>
             </a:r>
-          </a:p>
-        </p:txBody>
-      </p:sp>
-      <p:sp>
-        <p:nvSpPr>
-          <p:cNvPr id="3" name="Espace réservé du contenu 2">
-            <a:extLst>
-              <a:ext uri="{FF2B5EF4-FFF2-40B4-BE49-F238E27FC236}">
-                <a16:creationId xmlns:a16="http://schemas.microsoft.com/office/drawing/2014/main" id="{CB1406F4-BE43-D26F-417E-46CA89827F70}"/>
-              </a:ext>
-            </a:extLst>
-          </p:cNvPr>
+            <a:endParaRPr lang="en-US" dirty="0"/>
+          </a:p>
+        </p:txBody>
+      </p:sp>
+      <p:sp>
+        <p:nvSpPr>
+          <p:cNvPr id="3" name="Content Placeholder 2"/>
           <p:cNvSpPr>
             <a:spLocks noGrp="1"/>
           </p:cNvSpPr>
@@ -832,18 +1366,13 @@
               <a:rPr lang="fr-FR"/>
               <a:t>Cinquième niveau</a:t>
             </a:r>
-          </a:p>
-        </p:txBody>
-      </p:sp>
-      <p:sp>
-        <p:nvSpPr>
-          <p:cNvPr id="4" name="Espace réservé de la date 3">
-            <a:extLst>
-              <a:ext uri="{FF2B5EF4-FFF2-40B4-BE49-F238E27FC236}">
-                <a16:creationId xmlns:a16="http://schemas.microsoft.com/office/drawing/2014/main" id="{5BE26211-894D-D8D6-518F-D85537A4DA04}"/>
-              </a:ext>
-            </a:extLst>
-          </p:cNvPr>
+            <a:endParaRPr lang="en-US" dirty="0"/>
+          </a:p>
+        </p:txBody>
+      </p:sp>
+      <p:sp>
+        <p:nvSpPr>
+          <p:cNvPr id="4" name="Date Placeholder 3"/>
           <p:cNvSpPr>
             <a:spLocks noGrp="1"/>
           </p:cNvSpPr>
@@ -856,7 +1385,7 @@
           <a:bodyPr/>
           <a:lstStyle/>
           <a:p>
-            <a:fld id="{8FDA8C4C-A59A-44C9-A053-D8C84F7CDD73}" type="datetimeFigureOut">
+            <a:fld id="{D2B74F8F-65AC-4766-A2F7-69AD9EC8EDDE}" type="datetime1">
               <a:rPr lang="fr-FR" smtClean="0"/>
               <a:t>05/06/2026</a:t>
             </a:fld>
@@ -866,13 +1395,7 @@
       </p:sp>
       <p:sp>
         <p:nvSpPr>
-          <p:cNvPr id="5" name="Espace réservé du pied de page 4">
-            <a:extLst>
-              <a:ext uri="{FF2B5EF4-FFF2-40B4-BE49-F238E27FC236}">
-                <a16:creationId xmlns:a16="http://schemas.microsoft.com/office/drawing/2014/main" id="{9F83B004-4F7F-9BC7-A00C-FF78B6AAF623}"/>
-              </a:ext>
-            </a:extLst>
-          </p:cNvPr>
+          <p:cNvPr id="5" name="Footer Placeholder 4"/>
           <p:cNvSpPr>
             <a:spLocks noGrp="1"/>
           </p:cNvSpPr>
@@ -891,13 +1414,7 @@
       </p:sp>
       <p:sp>
         <p:nvSpPr>
-          <p:cNvPr id="6" name="Espace réservé du numéro de diapositive 5">
-            <a:extLst>
-              <a:ext uri="{FF2B5EF4-FFF2-40B4-BE49-F238E27FC236}">
-                <a16:creationId xmlns:a16="http://schemas.microsoft.com/office/drawing/2014/main" id="{E533CCF9-B01D-1D5A-9839-8BA31B550649}"/>
-              </a:ext>
-            </a:extLst>
-          </p:cNvPr>
+          <p:cNvPr id="6" name="Slide Number Placeholder 5"/>
           <p:cNvSpPr>
             <a:spLocks noGrp="1"/>
           </p:cNvSpPr>
@@ -910,7 +1427,7 @@
           <a:bodyPr/>
           <a:lstStyle/>
           <a:p>
-            <a:fld id="{4CB94DCF-0D6D-46D6-8AE7-040528F48D4F}" type="slidenum">
+            <a:fld id="{40743BAD-0FD4-4AFD-913F-F1B3782AF393}" type="slidenum">
               <a:rPr lang="fr-FR" smtClean="0"/>
               <a:t>‹N°›</a:t>
             </a:fld>
@@ -921,7 +1438,7 @@
     </p:spTree>
     <p:extLst>
       <p:ext uri="{BB962C8B-B14F-4D97-AF65-F5344CB8AC3E}">
-        <p14:creationId xmlns:p14="http://schemas.microsoft.com/office/powerpoint/2010/main" val="3302346662"/>
+        <p14:creationId xmlns:p14="http://schemas.microsoft.com/office/powerpoint/2010/main" val="3363033253"/>
       </p:ext>
     </p:extLst>
   </p:cSld>
@@ -932,8 +1449,13 @@
 </file>
 
 <file path=ppt/slideLayouts/slideLayout3.xml><?xml version="1.0" encoding="utf-8"?>
-<p:sldLayout xmlns:a="http://schemas.openxmlformats.org/drawingml/2006/main" xmlns:r="http://schemas.openxmlformats.org/officeDocument/2006/relationships" xmlns:p="http://schemas.openxmlformats.org/presentationml/2006/main" type="secHead" preserve="1">
+<p:sldLayout xmlns:a="http://schemas.openxmlformats.org/drawingml/2006/main" xmlns:r="http://schemas.openxmlformats.org/officeDocument/2006/relationships" xmlns:p="http://schemas.openxmlformats.org/presentationml/2006/main" showMasterSp="0" type="secHead" preserve="1">
   <p:cSld name="Titre de section">
+    <p:bg>
+      <p:bgRef idx="1001">
+        <a:schemeClr val="bg2"/>
+      </p:bgRef>
+    </p:bg>
     <p:spTree>
       <p:nvGrpSpPr>
         <p:cNvPr id="1" name=""/>
@@ -950,13 +1472,7 @@
       </p:grpSpPr>
       <p:sp>
         <p:nvSpPr>
-          <p:cNvPr id="2" name="Titre 1">
-            <a:extLst>
-              <a:ext uri="{FF2B5EF4-FFF2-40B4-BE49-F238E27FC236}">
-                <a16:creationId xmlns:a16="http://schemas.microsoft.com/office/drawing/2014/main" id="{606D91D2-47AC-2A7A-9657-163D90A989AF}"/>
-              </a:ext>
-            </a:extLst>
-          </p:cNvPr>
+          <p:cNvPr id="2" name="Title 1"/>
           <p:cNvSpPr>
             <a:spLocks noGrp="1"/>
           </p:cNvSpPr>
@@ -966,15 +1482,21 @@
         </p:nvSpPr>
         <p:spPr>
           <a:xfrm>
-            <a:off x="831850" y="1709738"/>
-            <a:ext cx="10515600" cy="2852737"/>
+            <a:off x="765025" y="1301360"/>
+            <a:ext cx="9612971" cy="2852737"/>
           </a:xfrm>
         </p:spPr>
         <p:txBody>
-          <a:bodyPr anchor="b"/>
+          <a:bodyPr anchor="b">
+            <a:normAutofit/>
+          </a:bodyPr>
           <a:lstStyle>
-            <a:lvl1pPr>
-              <a:defRPr sz="6000"/>
+            <a:lvl1pPr algn="r">
+              <a:defRPr sz="7200" cap="all" baseline="0">
+                <a:solidFill>
+                  <a:schemeClr val="tx2"/>
+                </a:solidFill>
+              </a:defRPr>
             </a:lvl1pPr>
           </a:lstStyle>
           <a:p>
@@ -982,18 +1504,13 @@
               <a:rPr lang="fr-FR"/>
               <a:t>Modifiez le style du titre</a:t>
             </a:r>
-          </a:p>
-        </p:txBody>
-      </p:sp>
-      <p:sp>
-        <p:nvSpPr>
-          <p:cNvPr id="3" name="Espace réservé du texte 2">
-            <a:extLst>
-              <a:ext uri="{FF2B5EF4-FFF2-40B4-BE49-F238E27FC236}">
-                <a16:creationId xmlns:a16="http://schemas.microsoft.com/office/drawing/2014/main" id="{A9F74AD2-436D-E600-67A7-25E8FA4E079C}"/>
-              </a:ext>
-            </a:extLst>
-          </p:cNvPr>
+            <a:endParaRPr lang="en-US" dirty="0"/>
+          </a:p>
+        </p:txBody>
+      </p:sp>
+      <p:sp>
+        <p:nvSpPr>
+          <p:cNvPr id="3" name="Text Placeholder 2"/>
           <p:cNvSpPr>
             <a:spLocks noGrp="1"/>
           </p:cNvSpPr>
@@ -1003,20 +1520,27 @@
         </p:nvSpPr>
         <p:spPr>
           <a:xfrm>
-            <a:off x="831850" y="4589463"/>
-            <a:ext cx="10515600" cy="1500187"/>
+            <a:off x="765025" y="4216328"/>
+            <a:ext cx="9612971" cy="1143324"/>
           </a:xfrm>
         </p:spPr>
         <p:txBody>
           <a:bodyPr/>
           <a:lstStyle>
-            <a:lvl1pPr marL="0" indent="0">
+            <a:lvl1pPr marL="0" indent="0" algn="r">
+              <a:lnSpc>
+                <a:spcPct val="112000"/>
+              </a:lnSpc>
+              <a:spcBef>
+                <a:spcPts val="0"/>
+              </a:spcBef>
+              <a:spcAft>
+                <a:spcPts val="0"/>
+              </a:spcAft>
               <a:buNone/>
               <a:defRPr sz="2400">
                 <a:solidFill>
-                  <a:schemeClr val="tx1">
-                    <a:tint val="82000"/>
-                  </a:schemeClr>
+                  <a:schemeClr val="tx2"/>
                 </a:solidFill>
               </a:defRPr>
             </a:lvl1pPr>
@@ -1025,7 +1549,7 @@
               <a:defRPr sz="2000">
                 <a:solidFill>
                   <a:schemeClr val="tx1">
-                    <a:tint val="82000"/>
+                    <a:tint val="75000"/>
                   </a:schemeClr>
                 </a:solidFill>
               </a:defRPr>
@@ -1035,7 +1559,7 @@
               <a:defRPr sz="1800">
                 <a:solidFill>
                   <a:schemeClr val="tx1">
-                    <a:tint val="82000"/>
+                    <a:tint val="75000"/>
                   </a:schemeClr>
                 </a:solidFill>
               </a:defRPr>
@@ -1045,7 +1569,7 @@
               <a:defRPr sz="1600">
                 <a:solidFill>
                   <a:schemeClr val="tx1">
-                    <a:tint val="82000"/>
+                    <a:tint val="75000"/>
                   </a:schemeClr>
                 </a:solidFill>
               </a:defRPr>
@@ -1055,7 +1579,7 @@
               <a:defRPr sz="1600">
                 <a:solidFill>
                   <a:schemeClr val="tx1">
-                    <a:tint val="82000"/>
+                    <a:tint val="75000"/>
                   </a:schemeClr>
                 </a:solidFill>
               </a:defRPr>
@@ -1065,7 +1589,7 @@
               <a:defRPr sz="1600">
                 <a:solidFill>
                   <a:schemeClr val="tx1">
-                    <a:tint val="82000"/>
+                    <a:tint val="75000"/>
                   </a:schemeClr>
                 </a:solidFill>
               </a:defRPr>
@@ -1075,7 +1599,7 @@
               <a:defRPr sz="1600">
                 <a:solidFill>
                   <a:schemeClr val="tx1">
-                    <a:tint val="82000"/>
+                    <a:tint val="75000"/>
                   </a:schemeClr>
                 </a:solidFill>
               </a:defRPr>
@@ -1085,7 +1609,7 @@
               <a:defRPr sz="1600">
                 <a:solidFill>
                   <a:schemeClr val="tx1">
-                    <a:tint val="82000"/>
+                    <a:tint val="75000"/>
                   </a:schemeClr>
                 </a:solidFill>
               </a:defRPr>
@@ -1095,7 +1619,7 @@
               <a:defRPr sz="1600">
                 <a:solidFill>
                   <a:schemeClr val="tx1">
-                    <a:tint val="82000"/>
+                    <a:tint val="75000"/>
                   </a:schemeClr>
                 </a:solidFill>
               </a:defRPr>
@@ -1112,13 +1636,7 @@
       </p:sp>
       <p:sp>
         <p:nvSpPr>
-          <p:cNvPr id="4" name="Espace réservé de la date 3">
-            <a:extLst>
-              <a:ext uri="{FF2B5EF4-FFF2-40B4-BE49-F238E27FC236}">
-                <a16:creationId xmlns:a16="http://schemas.microsoft.com/office/drawing/2014/main" id="{927245BB-2EFC-CD50-38D8-356A70868E1C}"/>
-              </a:ext>
-            </a:extLst>
-          </p:cNvPr>
+          <p:cNvPr id="4" name="Date Placeholder 3"/>
           <p:cNvSpPr>
             <a:spLocks noGrp="1"/>
           </p:cNvSpPr>
@@ -1126,12 +1644,25 @@
             <p:ph type="dt" sz="half" idx="10"/>
           </p:nvPr>
         </p:nvSpPr>
-        <p:spPr/>
-        <p:txBody>
-          <a:bodyPr/>
-          <a:lstStyle/>
-          <a:p>
-            <a:fld id="{8FDA8C4C-A59A-44C9-A053-D8C84F7CDD73}" type="datetimeFigureOut">
+        <p:spPr>
+          <a:xfrm>
+            <a:off x="738908" y="6453386"/>
+            <a:ext cx="1622409" cy="404614"/>
+          </a:xfrm>
+        </p:spPr>
+        <p:txBody>
+          <a:bodyPr/>
+          <a:lstStyle>
+            <a:lvl1pPr>
+              <a:defRPr>
+                <a:solidFill>
+                  <a:schemeClr val="tx2"/>
+                </a:solidFill>
+              </a:defRPr>
+            </a:lvl1pPr>
+          </a:lstStyle>
+          <a:p>
+            <a:fld id="{B4EF0BDA-B3DF-4C30-B725-2619B0E62ACD}" type="datetime1">
               <a:rPr lang="fr-FR" smtClean="0"/>
               <a:t>05/06/2026</a:t>
             </a:fld>
@@ -1141,10 +1672,98 @@
       </p:sp>
       <p:sp>
         <p:nvSpPr>
-          <p:cNvPr id="5" name="Espace réservé du pied de page 4">
+          <p:cNvPr id="5" name="Footer Placeholder 4"/>
+          <p:cNvSpPr>
+            <a:spLocks noGrp="1"/>
+          </p:cNvSpPr>
+          <p:nvPr>
+            <p:ph type="ftr" sz="quarter" idx="11"/>
+          </p:nvPr>
+        </p:nvSpPr>
+        <p:spPr>
+          <a:xfrm>
+            <a:off x="2584312" y="6453386"/>
+            <a:ext cx="7023377" cy="404614"/>
+          </a:xfrm>
+        </p:spPr>
+        <p:txBody>
+          <a:bodyPr/>
+          <a:lstStyle>
+            <a:lvl1pPr algn="ctr">
+              <a:defRPr>
+                <a:solidFill>
+                  <a:schemeClr val="tx2"/>
+                </a:solidFill>
+              </a:defRPr>
+            </a:lvl1pPr>
+          </a:lstStyle>
+          <a:p>
+            <a:endParaRPr lang="fr-FR"/>
+          </a:p>
+        </p:txBody>
+      </p:sp>
+      <p:sp>
+        <p:nvSpPr>
+          <p:cNvPr id="7" name="Freeform 6" title="Crop Mark"/>
+          <p:cNvSpPr/>
+          <p:nvPr/>
+        </p:nvSpPr>
+        <p:spPr bwMode="auto">
+          <a:xfrm>
+            <a:off x="8151962" y="1685652"/>
+            <a:ext cx="3275013" cy="4408488"/>
+          </a:xfrm>
+          <a:custGeom>
+            <a:avLst/>
+            <a:gdLst/>
+            <a:ahLst/>
+            <a:cxnLst/>
+            <a:rect l="0" t="0" r="r" b="b"/>
+            <a:pathLst>
+              <a:path w="4125" h="5554">
+                <a:moveTo>
+                  <a:pt x="3614" y="0"/>
+                </a:moveTo>
+                <a:lnTo>
+                  <a:pt x="4125" y="0"/>
+                </a:lnTo>
+                <a:lnTo>
+                  <a:pt x="4125" y="5554"/>
+                </a:lnTo>
+                <a:lnTo>
+                  <a:pt x="0" y="5554"/>
+                </a:lnTo>
+                <a:lnTo>
+                  <a:pt x="0" y="5074"/>
+                </a:lnTo>
+                <a:lnTo>
+                  <a:pt x="3614" y="5074"/>
+                </a:lnTo>
+                <a:lnTo>
+                  <a:pt x="3614" y="0"/>
+                </a:lnTo>
+                <a:close/>
+              </a:path>
+            </a:pathLst>
+          </a:custGeom>
+          <a:solidFill>
+            <a:schemeClr val="tx2"/>
+          </a:solidFill>
+          <a:ln w="0">
+            <a:noFill/>
+            <a:prstDash val="solid"/>
+            <a:round/>
+            <a:headEnd/>
+            <a:tailEnd/>
+          </a:ln>
+        </p:spPr>
+      </p:sp>
+      <p:sp>
+        <p:nvSpPr>
+          <p:cNvPr id="8" name="Slide Number Placeholder 5">
             <a:extLst>
               <a:ext uri="{FF2B5EF4-FFF2-40B4-BE49-F238E27FC236}">
-                <a16:creationId xmlns:a16="http://schemas.microsoft.com/office/drawing/2014/main" id="{5737DF8E-1FAB-2686-E107-D3AD22C81633}"/>
+                <a16:creationId xmlns:a16="http://schemas.microsoft.com/office/drawing/2014/main" id="{D9183F09-4D74-DF4B-058F-6F3E22E45256}"/>
               </a:ext>
             </a:extLst>
           </p:cNvPr>
@@ -1152,56 +1771,48 @@
             <a:spLocks noGrp="1"/>
           </p:cNvSpPr>
           <p:nvPr>
-            <p:ph type="ftr" sz="quarter" idx="11"/>
-          </p:nvPr>
-        </p:nvSpPr>
-        <p:spPr/>
-        <p:txBody>
-          <a:bodyPr/>
-          <a:lstStyle/>
-          <a:p>
-            <a:endParaRPr lang="fr-FR"/>
-          </a:p>
-        </p:txBody>
-      </p:sp>
-      <p:sp>
-        <p:nvSpPr>
-          <p:cNvPr id="6" name="Espace réservé du numéro de diapositive 5">
-            <a:extLst>
-              <a:ext uri="{FF2B5EF4-FFF2-40B4-BE49-F238E27FC236}">
-                <a16:creationId xmlns:a16="http://schemas.microsoft.com/office/drawing/2014/main" id="{1C9096B3-08AB-942A-10B8-24547B2C3CFB}"/>
-              </a:ext>
-            </a:extLst>
-          </p:cNvPr>
-          <p:cNvSpPr>
-            <a:spLocks noGrp="1"/>
-          </p:cNvSpPr>
-          <p:nvPr>
-            <p:ph type="sldNum" sz="quarter" idx="12"/>
-          </p:nvPr>
-        </p:nvSpPr>
-        <p:spPr/>
-        <p:txBody>
-          <a:bodyPr/>
-          <a:lstStyle/>
-          <a:p>
-            <a:fld id="{4CB94DCF-0D6D-46D6-8AE7-040528F48D4F}" type="slidenum">
+            <p:ph type="sldNum" sz="quarter" idx="4"/>
+          </p:nvPr>
+        </p:nvSpPr>
+        <p:spPr>
+          <a:xfrm>
+            <a:off x="10457474" y="6342017"/>
+            <a:ext cx="1596292" cy="404614"/>
+          </a:xfrm>
+          <a:prstGeom prst="rect">
+            <a:avLst/>
+          </a:prstGeom>
+        </p:spPr>
+        <p:txBody>
+          <a:bodyPr vert="horz" lIns="91440" tIns="45720" rIns="91440" bIns="45720" rtlCol="0" anchor="ctr"/>
+          <a:lstStyle>
+            <a:lvl1pPr algn="r">
+              <a:defRPr sz="2000" baseline="0">
+                <a:solidFill>
+                  <a:schemeClr val="tx2"/>
+                </a:solidFill>
+              </a:defRPr>
+            </a:lvl1pPr>
+          </a:lstStyle>
+          <a:p>
+            <a:fld id="{40743BAD-0FD4-4AFD-913F-F1B3782AF393}" type="slidenum">
               <a:rPr lang="fr-FR" smtClean="0"/>
+              <a:pPr/>
               <a:t>‹N°›</a:t>
             </a:fld>
-            <a:endParaRPr lang="fr-FR"/>
+            <a:endParaRPr lang="fr-FR" dirty="0"/>
           </a:p>
         </p:txBody>
       </p:sp>
     </p:spTree>
     <p:extLst>
       <p:ext uri="{BB962C8B-B14F-4D97-AF65-F5344CB8AC3E}">
-        <p14:creationId xmlns:p14="http://schemas.microsoft.com/office/powerpoint/2010/main" val="130893709"/>
+        <p14:creationId xmlns:p14="http://schemas.microsoft.com/office/powerpoint/2010/main" val="2243063847"/>
       </p:ext>
     </p:extLst>
   </p:cSld>
   <p:clrMapOvr>
-    <a:masterClrMapping/>
+    <a:overrideClrMapping bg1="dk1" tx1="lt1" bg2="dk2" tx2="lt2" accent1="accent1" accent2="accent2" accent3="accent3" accent4="accent4" accent5="accent5" accent6="accent6" hlink="hlink" folHlink="folHlink"/>
   </p:clrMapOvr>
 </p:sldLayout>
 </file>
@@ -1225,13 +1836,7 @@
       </p:grpSpPr>
       <p:sp>
         <p:nvSpPr>
-          <p:cNvPr id="2" name="Titre 1">
-            <a:extLst>
-              <a:ext uri="{FF2B5EF4-FFF2-40B4-BE49-F238E27FC236}">
-                <a16:creationId xmlns:a16="http://schemas.microsoft.com/office/drawing/2014/main" id="{49D29F12-3EF6-28E9-4B8B-8CC76777C78C}"/>
-              </a:ext>
-            </a:extLst>
-          </p:cNvPr>
+          <p:cNvPr id="2" name="Title 1"/>
           <p:cNvSpPr>
             <a:spLocks noGrp="1"/>
           </p:cNvSpPr>
@@ -1242,24 +1847,27 @@
         <p:spPr/>
         <p:txBody>
           <a:bodyPr/>
-          <a:lstStyle/>
+          <a:lstStyle>
+            <a:lvl1pPr>
+              <a:defRPr>
+                <a:solidFill>
+                  <a:schemeClr val="tx2"/>
+                </a:solidFill>
+              </a:defRPr>
+            </a:lvl1pPr>
+          </a:lstStyle>
           <a:p>
             <a:r>
               <a:rPr lang="fr-FR"/>
               <a:t>Modifiez le style du titre</a:t>
             </a:r>
-          </a:p>
-        </p:txBody>
-      </p:sp>
-      <p:sp>
-        <p:nvSpPr>
-          <p:cNvPr id="3" name="Espace réservé du contenu 2">
-            <a:extLst>
-              <a:ext uri="{FF2B5EF4-FFF2-40B4-BE49-F238E27FC236}">
-                <a16:creationId xmlns:a16="http://schemas.microsoft.com/office/drawing/2014/main" id="{9A242A2D-4D9B-4544-2DA2-746CF1185C3D}"/>
-              </a:ext>
-            </a:extLst>
-          </p:cNvPr>
+            <a:endParaRPr lang="en-US" dirty="0"/>
+          </a:p>
+        </p:txBody>
+      </p:sp>
+      <p:sp>
+        <p:nvSpPr>
+          <p:cNvPr id="3" name="Content Placeholder 2"/>
           <p:cNvSpPr>
             <a:spLocks noGrp="1"/>
           </p:cNvSpPr>
@@ -1269,13 +1877,49 @@
         </p:nvSpPr>
         <p:spPr>
           <a:xfrm>
-            <a:off x="838200" y="1825625"/>
-            <a:ext cx="5181600" cy="4351338"/>
+            <a:off x="1371600" y="2285999"/>
+            <a:ext cx="4447786" cy="3581401"/>
           </a:xfrm>
         </p:spPr>
         <p:txBody>
           <a:bodyPr/>
-          <a:lstStyle/>
+          <a:lstStyle>
+            <a:lvl1pPr>
+              <a:defRPr baseline="0">
+                <a:solidFill>
+                  <a:schemeClr val="tx2"/>
+                </a:solidFill>
+              </a:defRPr>
+            </a:lvl1pPr>
+            <a:lvl2pPr>
+              <a:defRPr baseline="0">
+                <a:solidFill>
+                  <a:schemeClr val="tx2"/>
+                </a:solidFill>
+              </a:defRPr>
+            </a:lvl2pPr>
+            <a:lvl3pPr>
+              <a:defRPr baseline="0">
+                <a:solidFill>
+                  <a:schemeClr val="tx2"/>
+                </a:solidFill>
+              </a:defRPr>
+            </a:lvl3pPr>
+            <a:lvl4pPr>
+              <a:defRPr baseline="0">
+                <a:solidFill>
+                  <a:schemeClr val="tx2"/>
+                </a:solidFill>
+              </a:defRPr>
+            </a:lvl4pPr>
+            <a:lvl5pPr>
+              <a:defRPr baseline="0">
+                <a:solidFill>
+                  <a:schemeClr val="tx2"/>
+                </a:solidFill>
+              </a:defRPr>
+            </a:lvl5pPr>
+          </a:lstStyle>
           <a:p>
             <a:pPr lvl="0"/>
             <a:r>
@@ -1310,18 +1954,13 @@
               <a:rPr lang="fr-FR"/>
               <a:t>Cinquième niveau</a:t>
             </a:r>
-          </a:p>
-        </p:txBody>
-      </p:sp>
-      <p:sp>
-        <p:nvSpPr>
-          <p:cNvPr id="4" name="Espace réservé du contenu 3">
-            <a:extLst>
-              <a:ext uri="{FF2B5EF4-FFF2-40B4-BE49-F238E27FC236}">
-                <a16:creationId xmlns:a16="http://schemas.microsoft.com/office/drawing/2014/main" id="{8DF3A3F2-49BF-AD09-EE6E-474F37F19943}"/>
-              </a:ext>
-            </a:extLst>
-          </p:cNvPr>
+            <a:endParaRPr lang="en-US" dirty="0"/>
+          </a:p>
+        </p:txBody>
+      </p:sp>
+      <p:sp>
+        <p:nvSpPr>
+          <p:cNvPr id="4" name="Content Placeholder 3"/>
           <p:cNvSpPr>
             <a:spLocks noGrp="1"/>
           </p:cNvSpPr>
@@ -1331,13 +1970,49 @@
         </p:nvSpPr>
         <p:spPr>
           <a:xfrm>
-            <a:off x="6172200" y="1825625"/>
-            <a:ext cx="5181600" cy="4351338"/>
+            <a:off x="6525403" y="2285999"/>
+            <a:ext cx="4447786" cy="3581401"/>
           </a:xfrm>
         </p:spPr>
         <p:txBody>
           <a:bodyPr/>
-          <a:lstStyle/>
+          <a:lstStyle>
+            <a:lvl1pPr>
+              <a:defRPr>
+                <a:solidFill>
+                  <a:schemeClr val="tx2"/>
+                </a:solidFill>
+              </a:defRPr>
+            </a:lvl1pPr>
+            <a:lvl2pPr>
+              <a:defRPr>
+                <a:solidFill>
+                  <a:schemeClr val="tx2"/>
+                </a:solidFill>
+              </a:defRPr>
+            </a:lvl2pPr>
+            <a:lvl3pPr>
+              <a:defRPr>
+                <a:solidFill>
+                  <a:schemeClr val="tx2"/>
+                </a:solidFill>
+              </a:defRPr>
+            </a:lvl3pPr>
+            <a:lvl4pPr>
+              <a:defRPr>
+                <a:solidFill>
+                  <a:schemeClr val="tx2"/>
+                </a:solidFill>
+              </a:defRPr>
+            </a:lvl4pPr>
+            <a:lvl5pPr>
+              <a:defRPr>
+                <a:solidFill>
+                  <a:schemeClr val="tx2"/>
+                </a:solidFill>
+              </a:defRPr>
+            </a:lvl5pPr>
+          </a:lstStyle>
           <a:p>
             <a:pPr lvl="0"/>
             <a:r>
@@ -1372,18 +2047,13 @@
               <a:rPr lang="fr-FR"/>
               <a:t>Cinquième niveau</a:t>
             </a:r>
-          </a:p>
-        </p:txBody>
-      </p:sp>
-      <p:sp>
-        <p:nvSpPr>
-          <p:cNvPr id="5" name="Espace réservé de la date 4">
-            <a:extLst>
-              <a:ext uri="{FF2B5EF4-FFF2-40B4-BE49-F238E27FC236}">
-                <a16:creationId xmlns:a16="http://schemas.microsoft.com/office/drawing/2014/main" id="{DCB4EA86-A19D-F22E-8DBD-6D67F84DAF79}"/>
-              </a:ext>
-            </a:extLst>
-          </p:cNvPr>
+            <a:endParaRPr lang="en-US" dirty="0"/>
+          </a:p>
+        </p:txBody>
+      </p:sp>
+      <p:sp>
+        <p:nvSpPr>
+          <p:cNvPr id="5" name="Date Placeholder 4"/>
           <p:cNvSpPr>
             <a:spLocks noGrp="1"/>
           </p:cNvSpPr>
@@ -1396,7 +2066,7 @@
           <a:bodyPr/>
           <a:lstStyle/>
           <a:p>
-            <a:fld id="{8FDA8C4C-A59A-44C9-A053-D8C84F7CDD73}" type="datetimeFigureOut">
+            <a:fld id="{2BB7BCF4-2F57-44BE-86E1-4D2E12B5FC6A}" type="datetime1">
               <a:rPr lang="fr-FR" smtClean="0"/>
               <a:t>05/06/2026</a:t>
             </a:fld>
@@ -1406,13 +2076,7 @@
       </p:sp>
       <p:sp>
         <p:nvSpPr>
-          <p:cNvPr id="6" name="Espace réservé du pied de page 5">
-            <a:extLst>
-              <a:ext uri="{FF2B5EF4-FFF2-40B4-BE49-F238E27FC236}">
-                <a16:creationId xmlns:a16="http://schemas.microsoft.com/office/drawing/2014/main" id="{B934C08E-8CA9-BEBC-F237-9BC62846A0CB}"/>
-              </a:ext>
-            </a:extLst>
-          </p:cNvPr>
+          <p:cNvPr id="6" name="Footer Placeholder 5"/>
           <p:cNvSpPr>
             <a:spLocks noGrp="1"/>
           </p:cNvSpPr>
@@ -1431,13 +2095,7 @@
       </p:sp>
       <p:sp>
         <p:nvSpPr>
-          <p:cNvPr id="7" name="Espace réservé du numéro de diapositive 6">
-            <a:extLst>
-              <a:ext uri="{FF2B5EF4-FFF2-40B4-BE49-F238E27FC236}">
-                <a16:creationId xmlns:a16="http://schemas.microsoft.com/office/drawing/2014/main" id="{3A19D6AE-C607-A70B-E7EC-15C1E8B4E822}"/>
-              </a:ext>
-            </a:extLst>
-          </p:cNvPr>
+          <p:cNvPr id="7" name="Slide Number Placeholder 6"/>
           <p:cNvSpPr>
             <a:spLocks noGrp="1"/>
           </p:cNvSpPr>
@@ -1450,7 +2108,7 @@
           <a:bodyPr/>
           <a:lstStyle/>
           <a:p>
-            <a:fld id="{4CB94DCF-0D6D-46D6-8AE7-040528F48D4F}" type="slidenum">
+            <a:fld id="{40743BAD-0FD4-4AFD-913F-F1B3782AF393}" type="slidenum">
               <a:rPr lang="fr-FR" smtClean="0"/>
               <a:t>‹N°›</a:t>
             </a:fld>
@@ -1461,7 +2119,7 @@
     </p:spTree>
     <p:extLst>
       <p:ext uri="{BB962C8B-B14F-4D97-AF65-F5344CB8AC3E}">
-        <p14:creationId xmlns:p14="http://schemas.microsoft.com/office/powerpoint/2010/main" val="1279801253"/>
+        <p14:creationId xmlns:p14="http://schemas.microsoft.com/office/powerpoint/2010/main" val="3236332113"/>
       </p:ext>
     </p:extLst>
   </p:cSld>
@@ -1490,13 +2148,7 @@
       </p:grpSpPr>
       <p:sp>
         <p:nvSpPr>
-          <p:cNvPr id="2" name="Titre 1">
-            <a:extLst>
-              <a:ext uri="{FF2B5EF4-FFF2-40B4-BE49-F238E27FC236}">
-                <a16:creationId xmlns:a16="http://schemas.microsoft.com/office/drawing/2014/main" id="{533683A9-4067-CE7F-2A20-F4D9FFA410AE}"/>
-              </a:ext>
-            </a:extLst>
-          </p:cNvPr>
+          <p:cNvPr id="2" name="Title 1"/>
           <p:cNvSpPr>
             <a:spLocks noGrp="1"/>
           </p:cNvSpPr>
@@ -1506,30 +2158,33 @@
         </p:nvSpPr>
         <p:spPr>
           <a:xfrm>
-            <a:off x="839788" y="365125"/>
-            <a:ext cx="10515600" cy="1325563"/>
+            <a:off x="1371600" y="685800"/>
+            <a:ext cx="9601200" cy="1485900"/>
           </a:xfrm>
         </p:spPr>
         <p:txBody>
           <a:bodyPr/>
-          <a:lstStyle/>
+          <a:lstStyle>
+            <a:lvl1pPr>
+              <a:defRPr>
+                <a:solidFill>
+                  <a:schemeClr val="tx2"/>
+                </a:solidFill>
+              </a:defRPr>
+            </a:lvl1pPr>
+          </a:lstStyle>
           <a:p>
             <a:r>
               <a:rPr lang="fr-FR"/>
               <a:t>Modifiez le style du titre</a:t>
             </a:r>
-          </a:p>
-        </p:txBody>
-      </p:sp>
-      <p:sp>
-        <p:nvSpPr>
-          <p:cNvPr id="3" name="Espace réservé du texte 2">
-            <a:extLst>
-              <a:ext uri="{FF2B5EF4-FFF2-40B4-BE49-F238E27FC236}">
-                <a16:creationId xmlns:a16="http://schemas.microsoft.com/office/drawing/2014/main" id="{9E4E93E6-753F-ABF8-2FF6-B6EE4B077454}"/>
-              </a:ext>
-            </a:extLst>
-          </p:cNvPr>
+            <a:endParaRPr lang="en-US" dirty="0"/>
+          </a:p>
+        </p:txBody>
+      </p:sp>
+      <p:sp>
+        <p:nvSpPr>
+          <p:cNvPr id="3" name="Text Placeholder 2"/>
           <p:cNvSpPr>
             <a:spLocks noGrp="1"/>
           </p:cNvSpPr>
@@ -1539,16 +2194,31 @@
         </p:nvSpPr>
         <p:spPr>
           <a:xfrm>
-            <a:off x="839788" y="1681163"/>
-            <a:ext cx="5157787" cy="823912"/>
+            <a:off x="1371600" y="2340864"/>
+            <a:ext cx="4443984" cy="823912"/>
           </a:xfrm>
         </p:spPr>
         <p:txBody>
-          <a:bodyPr anchor="b"/>
+          <a:bodyPr anchor="b">
+            <a:noAutofit/>
+          </a:bodyPr>
           <a:lstStyle>
             <a:lvl1pPr marL="0" indent="0">
-              <a:buNone/>
-              <a:defRPr sz="2400" b="1"/>
+              <a:lnSpc>
+                <a:spcPct val="84000"/>
+              </a:lnSpc>
+              <a:spcBef>
+                <a:spcPts val="0"/>
+              </a:spcBef>
+              <a:spcAft>
+                <a:spcPts val="0"/>
+              </a:spcAft>
+              <a:buNone/>
+              <a:defRPr sz="3000" b="0" baseline="0">
+                <a:solidFill>
+                  <a:schemeClr val="tx2"/>
+                </a:solidFill>
+              </a:defRPr>
             </a:lvl1pPr>
             <a:lvl2pPr marL="457200" indent="0">
               <a:buNone/>
@@ -1594,13 +2264,7 @@
       </p:sp>
       <p:sp>
         <p:nvSpPr>
-          <p:cNvPr id="4" name="Espace réservé du contenu 3">
-            <a:extLst>
-              <a:ext uri="{FF2B5EF4-FFF2-40B4-BE49-F238E27FC236}">
-                <a16:creationId xmlns:a16="http://schemas.microsoft.com/office/drawing/2014/main" id="{21A692ED-25BD-8846-F006-828B5CE916EA}"/>
-              </a:ext>
-            </a:extLst>
-          </p:cNvPr>
+          <p:cNvPr id="4" name="Content Placeholder 3"/>
           <p:cNvSpPr>
             <a:spLocks noGrp="1"/>
           </p:cNvSpPr>
@@ -1610,13 +2274,49 @@
         </p:nvSpPr>
         <p:spPr>
           <a:xfrm>
-            <a:off x="839788" y="2505075"/>
-            <a:ext cx="5157787" cy="3684588"/>
+            <a:off x="1371600" y="3305207"/>
+            <a:ext cx="4443984" cy="2562193"/>
           </a:xfrm>
         </p:spPr>
         <p:txBody>
           <a:bodyPr/>
-          <a:lstStyle/>
+          <a:lstStyle>
+            <a:lvl1pPr>
+              <a:defRPr baseline="0">
+                <a:solidFill>
+                  <a:schemeClr val="tx2"/>
+                </a:solidFill>
+              </a:defRPr>
+            </a:lvl1pPr>
+            <a:lvl2pPr>
+              <a:defRPr baseline="0">
+                <a:solidFill>
+                  <a:schemeClr val="tx2"/>
+                </a:solidFill>
+              </a:defRPr>
+            </a:lvl2pPr>
+            <a:lvl3pPr>
+              <a:defRPr baseline="0">
+                <a:solidFill>
+                  <a:schemeClr val="tx2"/>
+                </a:solidFill>
+              </a:defRPr>
+            </a:lvl3pPr>
+            <a:lvl4pPr>
+              <a:defRPr baseline="0">
+                <a:solidFill>
+                  <a:schemeClr val="tx2"/>
+                </a:solidFill>
+              </a:defRPr>
+            </a:lvl4pPr>
+            <a:lvl5pPr>
+              <a:defRPr baseline="0">
+                <a:solidFill>
+                  <a:schemeClr val="tx2"/>
+                </a:solidFill>
+              </a:defRPr>
+            </a:lvl5pPr>
+          </a:lstStyle>
           <a:p>
             <a:pPr lvl="0"/>
             <a:r>
@@ -1651,18 +2351,13 @@
               <a:rPr lang="fr-FR"/>
               <a:t>Cinquième niveau</a:t>
             </a:r>
-          </a:p>
-        </p:txBody>
-      </p:sp>
-      <p:sp>
-        <p:nvSpPr>
-          <p:cNvPr id="5" name="Espace réservé du texte 4">
-            <a:extLst>
-              <a:ext uri="{FF2B5EF4-FFF2-40B4-BE49-F238E27FC236}">
-                <a16:creationId xmlns:a16="http://schemas.microsoft.com/office/drawing/2014/main" id="{1DC86597-3F94-2674-FBB1-8E9C766E5122}"/>
-              </a:ext>
-            </a:extLst>
-          </p:cNvPr>
+            <a:endParaRPr lang="en-US" dirty="0"/>
+          </a:p>
+        </p:txBody>
+      </p:sp>
+      <p:sp>
+        <p:nvSpPr>
+          <p:cNvPr id="5" name="Text Placeholder 4"/>
           <p:cNvSpPr>
             <a:spLocks noGrp="1"/>
           </p:cNvSpPr>
@@ -1672,16 +2367,31 @@
         </p:nvSpPr>
         <p:spPr>
           <a:xfrm>
-            <a:off x="6172200" y="1681163"/>
-            <a:ext cx="5183188" cy="823912"/>
+            <a:off x="6525014" y="2340864"/>
+            <a:ext cx="4443984" cy="823912"/>
           </a:xfrm>
         </p:spPr>
         <p:txBody>
-          <a:bodyPr anchor="b"/>
+          <a:bodyPr anchor="b">
+            <a:noAutofit/>
+          </a:bodyPr>
           <a:lstStyle>
             <a:lvl1pPr marL="0" indent="0">
-              <a:buNone/>
-              <a:defRPr sz="2400" b="1"/>
+              <a:lnSpc>
+                <a:spcPct val="84000"/>
+              </a:lnSpc>
+              <a:spcBef>
+                <a:spcPts val="0"/>
+              </a:spcBef>
+              <a:spcAft>
+                <a:spcPts val="0"/>
+              </a:spcAft>
+              <a:buNone/>
+              <a:defRPr sz="3000" b="0" baseline="0">
+                <a:solidFill>
+                  <a:schemeClr val="tx2"/>
+                </a:solidFill>
+              </a:defRPr>
             </a:lvl1pPr>
             <a:lvl2pPr marL="457200" indent="0">
               <a:buNone/>
@@ -1727,13 +2437,7 @@
       </p:sp>
       <p:sp>
         <p:nvSpPr>
-          <p:cNvPr id="6" name="Espace réservé du contenu 5">
-            <a:extLst>
-              <a:ext uri="{FF2B5EF4-FFF2-40B4-BE49-F238E27FC236}">
-                <a16:creationId xmlns:a16="http://schemas.microsoft.com/office/drawing/2014/main" id="{DA40C252-8ED1-A34A-74D0-D4234E9DF82B}"/>
-              </a:ext>
-            </a:extLst>
-          </p:cNvPr>
+          <p:cNvPr id="6" name="Content Placeholder 5"/>
           <p:cNvSpPr>
             <a:spLocks noGrp="1"/>
           </p:cNvSpPr>
@@ -1743,13 +2447,49 @@
         </p:nvSpPr>
         <p:spPr>
           <a:xfrm>
-            <a:off x="6172200" y="2505075"/>
-            <a:ext cx="5183188" cy="3684588"/>
+            <a:off x="6525014" y="3305207"/>
+            <a:ext cx="4443984" cy="2562193"/>
           </a:xfrm>
         </p:spPr>
         <p:txBody>
           <a:bodyPr/>
-          <a:lstStyle/>
+          <a:lstStyle>
+            <a:lvl1pPr>
+              <a:defRPr baseline="0">
+                <a:solidFill>
+                  <a:schemeClr val="tx2"/>
+                </a:solidFill>
+              </a:defRPr>
+            </a:lvl1pPr>
+            <a:lvl2pPr>
+              <a:defRPr baseline="0">
+                <a:solidFill>
+                  <a:schemeClr val="tx2"/>
+                </a:solidFill>
+              </a:defRPr>
+            </a:lvl2pPr>
+            <a:lvl3pPr>
+              <a:defRPr baseline="0">
+                <a:solidFill>
+                  <a:schemeClr val="tx2"/>
+                </a:solidFill>
+              </a:defRPr>
+            </a:lvl3pPr>
+            <a:lvl4pPr>
+              <a:defRPr baseline="0">
+                <a:solidFill>
+                  <a:schemeClr val="tx2"/>
+                </a:solidFill>
+              </a:defRPr>
+            </a:lvl4pPr>
+            <a:lvl5pPr>
+              <a:defRPr baseline="0">
+                <a:solidFill>
+                  <a:schemeClr val="tx2"/>
+                </a:solidFill>
+              </a:defRPr>
+            </a:lvl5pPr>
+          </a:lstStyle>
           <a:p>
             <a:pPr lvl="0"/>
             <a:r>
@@ -1784,18 +2524,13 @@
               <a:rPr lang="fr-FR"/>
               <a:t>Cinquième niveau</a:t>
             </a:r>
-          </a:p>
-        </p:txBody>
-      </p:sp>
-      <p:sp>
-        <p:nvSpPr>
-          <p:cNvPr id="7" name="Espace réservé de la date 6">
-            <a:extLst>
-              <a:ext uri="{FF2B5EF4-FFF2-40B4-BE49-F238E27FC236}">
-                <a16:creationId xmlns:a16="http://schemas.microsoft.com/office/drawing/2014/main" id="{83927EE8-FF1F-6922-00A0-FD7A289662A6}"/>
-              </a:ext>
-            </a:extLst>
-          </p:cNvPr>
+            <a:endParaRPr lang="en-US" dirty="0"/>
+          </a:p>
+        </p:txBody>
+      </p:sp>
+      <p:sp>
+        <p:nvSpPr>
+          <p:cNvPr id="7" name="Date Placeholder 6"/>
           <p:cNvSpPr>
             <a:spLocks noGrp="1"/>
           </p:cNvSpPr>
@@ -1808,7 +2543,7 @@
           <a:bodyPr/>
           <a:lstStyle/>
           <a:p>
-            <a:fld id="{8FDA8C4C-A59A-44C9-A053-D8C84F7CDD73}" type="datetimeFigureOut">
+            <a:fld id="{6321D020-EA2F-4E08-9F19-25238FB1646F}" type="datetime1">
               <a:rPr lang="fr-FR" smtClean="0"/>
               <a:t>05/06/2026</a:t>
             </a:fld>
@@ -1818,13 +2553,7 @@
       </p:sp>
       <p:sp>
         <p:nvSpPr>
-          <p:cNvPr id="8" name="Espace réservé du pied de page 7">
-            <a:extLst>
-              <a:ext uri="{FF2B5EF4-FFF2-40B4-BE49-F238E27FC236}">
-                <a16:creationId xmlns:a16="http://schemas.microsoft.com/office/drawing/2014/main" id="{9C64F108-15AC-718A-8DA4-AF300A6E65AA}"/>
-              </a:ext>
-            </a:extLst>
-          </p:cNvPr>
+          <p:cNvPr id="8" name="Footer Placeholder 7"/>
           <p:cNvSpPr>
             <a:spLocks noGrp="1"/>
           </p:cNvSpPr>
@@ -1843,13 +2572,7 @@
       </p:sp>
       <p:sp>
         <p:nvSpPr>
-          <p:cNvPr id="9" name="Espace réservé du numéro de diapositive 8">
-            <a:extLst>
-              <a:ext uri="{FF2B5EF4-FFF2-40B4-BE49-F238E27FC236}">
-                <a16:creationId xmlns:a16="http://schemas.microsoft.com/office/drawing/2014/main" id="{1FAB7B93-E327-5064-8409-8D7794CE769A}"/>
-              </a:ext>
-            </a:extLst>
-          </p:cNvPr>
+          <p:cNvPr id="9" name="Slide Number Placeholder 8"/>
           <p:cNvSpPr>
             <a:spLocks noGrp="1"/>
           </p:cNvSpPr>
@@ -1862,7 +2585,7 @@
           <a:bodyPr/>
           <a:lstStyle/>
           <a:p>
-            <a:fld id="{4CB94DCF-0D6D-46D6-8AE7-040528F48D4F}" type="slidenum">
+            <a:fld id="{40743BAD-0FD4-4AFD-913F-F1B3782AF393}" type="slidenum">
               <a:rPr lang="fr-FR" smtClean="0"/>
               <a:t>‹N°›</a:t>
             </a:fld>
@@ -1873,7 +2596,7 @@
     </p:spTree>
     <p:extLst>
       <p:ext uri="{BB962C8B-B14F-4D97-AF65-F5344CB8AC3E}">
-        <p14:creationId xmlns:p14="http://schemas.microsoft.com/office/powerpoint/2010/main" val="1514801562"/>
+        <p14:creationId xmlns:p14="http://schemas.microsoft.com/office/powerpoint/2010/main" val="1460107973"/>
       </p:ext>
     </p:extLst>
   </p:cSld>
@@ -1902,13 +2625,7 @@
       </p:grpSpPr>
       <p:sp>
         <p:nvSpPr>
-          <p:cNvPr id="2" name="Titre 1">
-            <a:extLst>
-              <a:ext uri="{FF2B5EF4-FFF2-40B4-BE49-F238E27FC236}">
-                <a16:creationId xmlns:a16="http://schemas.microsoft.com/office/drawing/2014/main" id="{26ADE52F-47F4-BD24-D5D8-6B40F80C84CD}"/>
-              </a:ext>
-            </a:extLst>
-          </p:cNvPr>
+          <p:cNvPr id="2" name="Title 1"/>
           <p:cNvSpPr>
             <a:spLocks noGrp="1"/>
           </p:cNvSpPr>
@@ -1925,18 +2642,13 @@
               <a:rPr lang="fr-FR"/>
               <a:t>Modifiez le style du titre</a:t>
             </a:r>
-          </a:p>
-        </p:txBody>
-      </p:sp>
-      <p:sp>
-        <p:nvSpPr>
-          <p:cNvPr id="3" name="Espace réservé de la date 2">
-            <a:extLst>
-              <a:ext uri="{FF2B5EF4-FFF2-40B4-BE49-F238E27FC236}">
-                <a16:creationId xmlns:a16="http://schemas.microsoft.com/office/drawing/2014/main" id="{871323F8-9399-2CAE-8FAE-8D550ADA066D}"/>
-              </a:ext>
-            </a:extLst>
-          </p:cNvPr>
+            <a:endParaRPr lang="en-US" dirty="0"/>
+          </a:p>
+        </p:txBody>
+      </p:sp>
+      <p:sp>
+        <p:nvSpPr>
+          <p:cNvPr id="3" name="Date Placeholder 2"/>
           <p:cNvSpPr>
             <a:spLocks noGrp="1"/>
           </p:cNvSpPr>
@@ -1949,7 +2661,7 @@
           <a:bodyPr/>
           <a:lstStyle/>
           <a:p>
-            <a:fld id="{8FDA8C4C-A59A-44C9-A053-D8C84F7CDD73}" type="datetimeFigureOut">
+            <a:fld id="{13019C80-4ECC-4A86-ACB8-43004AF15481}" type="datetime1">
               <a:rPr lang="fr-FR" smtClean="0"/>
               <a:t>05/06/2026</a:t>
             </a:fld>
@@ -1959,13 +2671,7 @@
       </p:sp>
       <p:sp>
         <p:nvSpPr>
-          <p:cNvPr id="4" name="Espace réservé du pied de page 3">
-            <a:extLst>
-              <a:ext uri="{FF2B5EF4-FFF2-40B4-BE49-F238E27FC236}">
-                <a16:creationId xmlns:a16="http://schemas.microsoft.com/office/drawing/2014/main" id="{D129F7DB-C878-DD34-484D-0FC9BC0F6B60}"/>
-              </a:ext>
-            </a:extLst>
-          </p:cNvPr>
+          <p:cNvPr id="4" name="Footer Placeholder 3"/>
           <p:cNvSpPr>
             <a:spLocks noGrp="1"/>
           </p:cNvSpPr>
@@ -1984,13 +2690,7 @@
       </p:sp>
       <p:sp>
         <p:nvSpPr>
-          <p:cNvPr id="5" name="Espace réservé du numéro de diapositive 4">
-            <a:extLst>
-              <a:ext uri="{FF2B5EF4-FFF2-40B4-BE49-F238E27FC236}">
-                <a16:creationId xmlns:a16="http://schemas.microsoft.com/office/drawing/2014/main" id="{237D8979-3915-9705-C619-3CD3D4D245B3}"/>
-              </a:ext>
-            </a:extLst>
-          </p:cNvPr>
+          <p:cNvPr id="5" name="Slide Number Placeholder 4"/>
           <p:cNvSpPr>
             <a:spLocks noGrp="1"/>
           </p:cNvSpPr>
@@ -2003,7 +2703,7 @@
           <a:bodyPr/>
           <a:lstStyle/>
           <a:p>
-            <a:fld id="{4CB94DCF-0D6D-46D6-8AE7-040528F48D4F}" type="slidenum">
+            <a:fld id="{40743BAD-0FD4-4AFD-913F-F1B3782AF393}" type="slidenum">
               <a:rPr lang="fr-FR" smtClean="0"/>
               <a:t>‹N°›</a:t>
             </a:fld>
@@ -2014,7 +2714,7 @@
     </p:spTree>
     <p:extLst>
       <p:ext uri="{BB962C8B-B14F-4D97-AF65-F5344CB8AC3E}">
-        <p14:creationId xmlns:p14="http://schemas.microsoft.com/office/powerpoint/2010/main" val="668327247"/>
+        <p14:creationId xmlns:p14="http://schemas.microsoft.com/office/powerpoint/2010/main" val="3359497633"/>
       </p:ext>
     </p:extLst>
   </p:cSld>
@@ -2043,13 +2743,7 @@
       </p:grpSpPr>
       <p:sp>
         <p:nvSpPr>
-          <p:cNvPr id="2" name="Espace réservé de la date 1">
-            <a:extLst>
-              <a:ext uri="{FF2B5EF4-FFF2-40B4-BE49-F238E27FC236}">
-                <a16:creationId xmlns:a16="http://schemas.microsoft.com/office/drawing/2014/main" id="{BCD1B117-8F0E-5801-0440-8C5921A609ED}"/>
-              </a:ext>
-            </a:extLst>
-          </p:cNvPr>
+          <p:cNvPr id="2" name="Date Placeholder 1"/>
           <p:cNvSpPr>
             <a:spLocks noGrp="1"/>
           </p:cNvSpPr>
@@ -2062,7 +2756,7 @@
           <a:bodyPr/>
           <a:lstStyle/>
           <a:p>
-            <a:fld id="{8FDA8C4C-A59A-44C9-A053-D8C84F7CDD73}" type="datetimeFigureOut">
+            <a:fld id="{D5B1220C-94C3-4D23-98DD-B536DE4A6F2C}" type="datetime1">
               <a:rPr lang="fr-FR" smtClean="0"/>
               <a:t>05/06/2026</a:t>
             </a:fld>
@@ -2072,13 +2766,7 @@
       </p:sp>
       <p:sp>
         <p:nvSpPr>
-          <p:cNvPr id="3" name="Espace réservé du pied de page 2">
-            <a:extLst>
-              <a:ext uri="{FF2B5EF4-FFF2-40B4-BE49-F238E27FC236}">
-                <a16:creationId xmlns:a16="http://schemas.microsoft.com/office/drawing/2014/main" id="{98DF7E26-FFB0-DE28-AAE7-BA2894E4EB37}"/>
-              </a:ext>
-            </a:extLst>
-          </p:cNvPr>
+          <p:cNvPr id="3" name="Footer Placeholder 2"/>
           <p:cNvSpPr>
             <a:spLocks noGrp="1"/>
           </p:cNvSpPr>
@@ -2097,13 +2785,7 @@
       </p:sp>
       <p:sp>
         <p:nvSpPr>
-          <p:cNvPr id="4" name="Espace réservé du numéro de diapositive 3">
-            <a:extLst>
-              <a:ext uri="{FF2B5EF4-FFF2-40B4-BE49-F238E27FC236}">
-                <a16:creationId xmlns:a16="http://schemas.microsoft.com/office/drawing/2014/main" id="{A14C97C1-20AE-2BFE-70D5-E07366DB6941}"/>
-              </a:ext>
-            </a:extLst>
-          </p:cNvPr>
+          <p:cNvPr id="4" name="Slide Number Placeholder 3"/>
           <p:cNvSpPr>
             <a:spLocks noGrp="1"/>
           </p:cNvSpPr>
@@ -2116,7 +2798,7 @@
           <a:bodyPr/>
           <a:lstStyle/>
           <a:p>
-            <a:fld id="{4CB94DCF-0D6D-46D6-8AE7-040528F48D4F}" type="slidenum">
+            <a:fld id="{40743BAD-0FD4-4AFD-913F-F1B3782AF393}" type="slidenum">
               <a:rPr lang="fr-FR" smtClean="0"/>
               <a:t>‹N°›</a:t>
             </a:fld>
@@ -2127,7 +2809,7 @@
     </p:spTree>
     <p:extLst>
       <p:ext uri="{BB962C8B-B14F-4D97-AF65-F5344CB8AC3E}">
-        <p14:creationId xmlns:p14="http://schemas.microsoft.com/office/powerpoint/2010/main" val="1187977348"/>
+        <p14:creationId xmlns:p14="http://schemas.microsoft.com/office/powerpoint/2010/main" val="1444364290"/>
       </p:ext>
     </p:extLst>
   </p:cSld>
@@ -2138,7 +2820,7 @@
 </file>
 
 <file path=ppt/slideLayouts/slideLayout8.xml><?xml version="1.0" encoding="utf-8"?>
-<p:sldLayout xmlns:a="http://schemas.openxmlformats.org/drawingml/2006/main" xmlns:r="http://schemas.openxmlformats.org/officeDocument/2006/relationships" xmlns:p="http://schemas.openxmlformats.org/presentationml/2006/main" type="objTx" preserve="1">
+<p:sldLayout xmlns:a="http://schemas.openxmlformats.org/drawingml/2006/main" xmlns:r="http://schemas.openxmlformats.org/officeDocument/2006/relationships" xmlns:p="http://schemas.openxmlformats.org/presentationml/2006/main" showMasterSp="0" type="objTx" preserve="1">
   <p:cSld name="Contenu avec légende">
     <p:spTree>
       <p:nvGrpSpPr>
@@ -2156,31 +2838,72 @@
       </p:grpSpPr>
       <p:sp>
         <p:nvSpPr>
-          <p:cNvPr id="2" name="Titre 1">
-            <a:extLst>
-              <a:ext uri="{FF2B5EF4-FFF2-40B4-BE49-F238E27FC236}">
-                <a16:creationId xmlns:a16="http://schemas.microsoft.com/office/drawing/2014/main" id="{774E3779-3BDA-9BB8-280D-E81BEE4F100E}"/>
-              </a:ext>
-            </a:extLst>
-          </p:cNvPr>
-          <p:cNvSpPr>
-            <a:spLocks noGrp="1"/>
-          </p:cNvSpPr>
-          <p:nvPr>
-            <p:ph type="title"/>
-          </p:nvPr>
+          <p:cNvPr id="8" name="Rectangle 7" title="Background Shape"/>
+          <p:cNvSpPr/>
+          <p:nvPr/>
         </p:nvSpPr>
         <p:spPr>
           <a:xfrm>
-            <a:off x="839788" y="457200"/>
-            <a:ext cx="3932237" cy="1600200"/>
+            <a:off x="0" y="376"/>
+            <a:ext cx="5303520" cy="6857624"/>
+          </a:xfrm>
+          <a:prstGeom prst="rect">
+            <a:avLst/>
+          </a:prstGeom>
+          <a:solidFill>
+            <a:schemeClr val="accent1"/>
+          </a:solidFill>
+          <a:ln>
+            <a:noFill/>
+          </a:ln>
+        </p:spPr>
+        <p:style>
+          <a:lnRef idx="2">
+            <a:schemeClr val="accent1">
+              <a:shade val="50000"/>
+            </a:schemeClr>
+          </a:lnRef>
+          <a:fillRef idx="1">
+            <a:schemeClr val="accent1"/>
+          </a:fillRef>
+          <a:effectRef idx="0">
+            <a:schemeClr val="accent1"/>
+          </a:effectRef>
+          <a:fontRef idx="minor">
+            <a:schemeClr val="lt1"/>
+          </a:fontRef>
+        </p:style>
+      </p:sp>
+      <p:sp>
+        <p:nvSpPr>
+          <p:cNvPr id="2" name="Title 1"/>
+          <p:cNvSpPr>
+            <a:spLocks noGrp="1"/>
+          </p:cNvSpPr>
+          <p:nvPr>
+            <p:ph type="title"/>
+          </p:nvPr>
+        </p:nvSpPr>
+        <p:spPr>
+          <a:xfrm>
+            <a:off x="723900" y="685800"/>
+            <a:ext cx="3855720" cy="2157884"/>
           </a:xfrm>
         </p:spPr>
         <p:txBody>
-          <a:bodyPr anchor="b"/>
+          <a:bodyPr anchor="t">
+            <a:noAutofit/>
+          </a:bodyPr>
           <a:lstStyle>
             <a:lvl1pPr>
-              <a:defRPr sz="3200"/>
+              <a:lnSpc>
+                <a:spcPct val="84000"/>
+              </a:lnSpc>
+              <a:defRPr sz="4800" baseline="0">
+                <a:solidFill>
+                  <a:schemeClr val="tx2"/>
+                </a:solidFill>
+              </a:defRPr>
             </a:lvl1pPr>
           </a:lstStyle>
           <a:p>
@@ -2188,18 +2911,13 @@
               <a:rPr lang="fr-FR"/>
               <a:t>Modifiez le style du titre</a:t>
             </a:r>
-          </a:p>
-        </p:txBody>
-      </p:sp>
-      <p:sp>
-        <p:nvSpPr>
-          <p:cNvPr id="3" name="Espace réservé du contenu 2">
-            <a:extLst>
-              <a:ext uri="{FF2B5EF4-FFF2-40B4-BE49-F238E27FC236}">
-                <a16:creationId xmlns:a16="http://schemas.microsoft.com/office/drawing/2014/main" id="{FC2A6A11-E7A6-685E-6FE3-225869DA210F}"/>
-              </a:ext>
-            </a:extLst>
-          </p:cNvPr>
+            <a:endParaRPr lang="en-US" dirty="0"/>
+          </a:p>
+        </p:txBody>
+      </p:sp>
+      <p:sp>
+        <p:nvSpPr>
+          <p:cNvPr id="3" name="Content Placeholder 2"/>
           <p:cNvSpPr>
             <a:spLocks noGrp="1"/>
           </p:cNvSpPr>
@@ -2209,39 +2927,39 @@
         </p:nvSpPr>
         <p:spPr>
           <a:xfrm>
-            <a:off x="5183188" y="987425"/>
-            <a:ext cx="6172200" cy="4873625"/>
+            <a:off x="6256020" y="685801"/>
+            <a:ext cx="5212080" cy="5175250"/>
           </a:xfrm>
         </p:spPr>
         <p:txBody>
           <a:bodyPr/>
           <a:lstStyle>
             <a:lvl1pPr>
-              <a:defRPr sz="3200"/>
+              <a:defRPr sz="2000"/>
             </a:lvl1pPr>
             <a:lvl2pPr>
-              <a:defRPr sz="2800"/>
+              <a:defRPr sz="2000"/>
             </a:lvl2pPr>
             <a:lvl3pPr>
-              <a:defRPr sz="2400"/>
+              <a:defRPr sz="1800"/>
             </a:lvl3pPr>
             <a:lvl4pPr>
-              <a:defRPr sz="2000"/>
+              <a:defRPr sz="1800"/>
             </a:lvl4pPr>
             <a:lvl5pPr>
-              <a:defRPr sz="2000"/>
+              <a:defRPr sz="1600"/>
             </a:lvl5pPr>
             <a:lvl6pPr>
-              <a:defRPr sz="2000"/>
+              <a:defRPr sz="1600"/>
             </a:lvl6pPr>
             <a:lvl7pPr>
-              <a:defRPr sz="2000"/>
+              <a:defRPr sz="1600"/>
             </a:lvl7pPr>
             <a:lvl8pPr>
-              <a:defRPr sz="2000"/>
+              <a:defRPr sz="1600"/>
             </a:lvl8pPr>
             <a:lvl9pPr>
-              <a:defRPr sz="2000"/>
+              <a:defRPr sz="1600"/>
             </a:lvl9pPr>
           </a:lstStyle>
           <a:p>
@@ -2278,18 +2996,13 @@
               <a:rPr lang="fr-FR"/>
               <a:t>Cinquième niveau</a:t>
             </a:r>
-          </a:p>
-        </p:txBody>
-      </p:sp>
-      <p:sp>
-        <p:nvSpPr>
-          <p:cNvPr id="4" name="Espace réservé du texte 3">
-            <a:extLst>
-              <a:ext uri="{FF2B5EF4-FFF2-40B4-BE49-F238E27FC236}">
-                <a16:creationId xmlns:a16="http://schemas.microsoft.com/office/drawing/2014/main" id="{65383D25-E17E-1CB6-745E-53257A54106B}"/>
-              </a:ext>
-            </a:extLst>
-          </p:cNvPr>
+            <a:endParaRPr lang="en-US" dirty="0"/>
+          </a:p>
+        </p:txBody>
+      </p:sp>
+      <p:sp>
+        <p:nvSpPr>
+          <p:cNvPr id="4" name="Text Placeholder 3"/>
           <p:cNvSpPr>
             <a:spLocks noGrp="1"/>
           </p:cNvSpPr>
@@ -2299,14 +3012,23 @@
         </p:nvSpPr>
         <p:spPr>
           <a:xfrm>
-            <a:off x="839788" y="2057400"/>
-            <a:ext cx="3932237" cy="3811588"/>
+            <a:off x="723900" y="2856344"/>
+            <a:ext cx="3855720" cy="3011056"/>
           </a:xfrm>
         </p:spPr>
         <p:txBody>
           <a:bodyPr/>
           <a:lstStyle>
             <a:lvl1pPr marL="0" indent="0">
+              <a:lnSpc>
+                <a:spcPct val="113000"/>
+              </a:lnSpc>
+              <a:spcBef>
+                <a:spcPts val="0"/>
+              </a:spcBef>
+              <a:spcAft>
+                <a:spcPts val="1500"/>
+              </a:spcAft>
               <a:buNone/>
               <a:defRPr sz="1600"/>
             </a:lvl1pPr>
@@ -2354,13 +3076,7 @@
       </p:sp>
       <p:sp>
         <p:nvSpPr>
-          <p:cNvPr id="5" name="Espace réservé de la date 4">
-            <a:extLst>
-              <a:ext uri="{FF2B5EF4-FFF2-40B4-BE49-F238E27FC236}">
-                <a16:creationId xmlns:a16="http://schemas.microsoft.com/office/drawing/2014/main" id="{A73E45AA-BF08-B0C4-FDD7-D375ADB2BFAA}"/>
-              </a:ext>
-            </a:extLst>
-          </p:cNvPr>
+          <p:cNvPr id="5" name="Date Placeholder 4"/>
           <p:cNvSpPr>
             <a:spLocks noGrp="1"/>
           </p:cNvSpPr>
@@ -2368,12 +3084,25 @@
             <p:ph type="dt" sz="half" idx="10"/>
           </p:nvPr>
         </p:nvSpPr>
-        <p:spPr/>
-        <p:txBody>
-          <a:bodyPr/>
-          <a:lstStyle/>
-          <a:p>
-            <a:fld id="{8FDA8C4C-A59A-44C9-A053-D8C84F7CDD73}" type="datetimeFigureOut">
+        <p:spPr>
+          <a:xfrm>
+            <a:off x="723900" y="6453386"/>
+            <a:ext cx="1204572" cy="404614"/>
+          </a:xfrm>
+        </p:spPr>
+        <p:txBody>
+          <a:bodyPr/>
+          <a:lstStyle>
+            <a:lvl1pPr>
+              <a:defRPr>
+                <a:solidFill>
+                  <a:schemeClr val="tx2"/>
+                </a:solidFill>
+              </a:defRPr>
+            </a:lvl1pPr>
+          </a:lstStyle>
+          <a:p>
+            <a:fld id="{D77193F2-5089-4D6D-B951-141B92746967}" type="datetime1">
               <a:rPr lang="fr-FR" smtClean="0"/>
               <a:t>05/06/2026</a:t>
             </a:fld>
@@ -2383,10 +3112,80 @@
       </p:sp>
       <p:sp>
         <p:nvSpPr>
-          <p:cNvPr id="6" name="Espace réservé du pied de page 5">
+          <p:cNvPr id="6" name="Footer Placeholder 5"/>
+          <p:cNvSpPr>
+            <a:spLocks noGrp="1"/>
+          </p:cNvSpPr>
+          <p:nvPr>
+            <p:ph type="ftr" sz="quarter" idx="11"/>
+          </p:nvPr>
+        </p:nvSpPr>
+        <p:spPr>
+          <a:xfrm>
+            <a:off x="2205945" y="6453386"/>
+            <a:ext cx="2373675" cy="404614"/>
+          </a:xfrm>
+        </p:spPr>
+        <p:txBody>
+          <a:bodyPr/>
+          <a:lstStyle>
+            <a:lvl1pPr>
+              <a:defRPr>
+                <a:solidFill>
+                  <a:schemeClr val="tx2"/>
+                </a:solidFill>
+              </a:defRPr>
+            </a:lvl1pPr>
+          </a:lstStyle>
+          <a:p>
+            <a:endParaRPr lang="fr-FR"/>
+          </a:p>
+        </p:txBody>
+      </p:sp>
+      <p:sp>
+        <p:nvSpPr>
+          <p:cNvPr id="9" name="Rectangle 8" title="Divider Bar"/>
+          <p:cNvSpPr/>
+          <p:nvPr/>
+        </p:nvSpPr>
+        <p:spPr>
+          <a:xfrm>
+            <a:off x="5303520" y="376"/>
+            <a:ext cx="228600" cy="6858000"/>
+          </a:xfrm>
+          <a:prstGeom prst="rect">
+            <a:avLst/>
+          </a:prstGeom>
+          <a:solidFill>
+            <a:schemeClr val="tx2"/>
+          </a:solidFill>
+          <a:ln>
+            <a:noFill/>
+          </a:ln>
+        </p:spPr>
+        <p:style>
+          <a:lnRef idx="2">
+            <a:schemeClr val="accent1">
+              <a:shade val="50000"/>
+            </a:schemeClr>
+          </a:lnRef>
+          <a:fillRef idx="1">
+            <a:schemeClr val="accent1"/>
+          </a:fillRef>
+          <a:effectRef idx="0">
+            <a:schemeClr val="accent1"/>
+          </a:effectRef>
+          <a:fontRef idx="minor">
+            <a:schemeClr val="lt1"/>
+          </a:fontRef>
+        </p:style>
+      </p:sp>
+      <p:sp>
+        <p:nvSpPr>
+          <p:cNvPr id="10" name="Slide Number Placeholder 5">
             <a:extLst>
               <a:ext uri="{FF2B5EF4-FFF2-40B4-BE49-F238E27FC236}">
-                <a16:creationId xmlns:a16="http://schemas.microsoft.com/office/drawing/2014/main" id="{34942CAF-167D-B065-6737-52C64A4220F3}"/>
+                <a16:creationId xmlns:a16="http://schemas.microsoft.com/office/drawing/2014/main" id="{1E75D6BE-C78D-BB10-E801-DB8CE7287370}"/>
               </a:ext>
             </a:extLst>
           </p:cNvPr>
@@ -2394,51 +3193,43 @@
             <a:spLocks noGrp="1"/>
           </p:cNvSpPr>
           <p:nvPr>
-            <p:ph type="ftr" sz="quarter" idx="11"/>
-          </p:nvPr>
-        </p:nvSpPr>
-        <p:spPr/>
-        <p:txBody>
-          <a:bodyPr/>
-          <a:lstStyle/>
-          <a:p>
-            <a:endParaRPr lang="fr-FR"/>
-          </a:p>
-        </p:txBody>
-      </p:sp>
-      <p:sp>
-        <p:nvSpPr>
-          <p:cNvPr id="7" name="Espace réservé du numéro de diapositive 6">
-            <a:extLst>
-              <a:ext uri="{FF2B5EF4-FFF2-40B4-BE49-F238E27FC236}">
-                <a16:creationId xmlns:a16="http://schemas.microsoft.com/office/drawing/2014/main" id="{3647917E-4C79-24C9-9ACF-AAB1E31416DC}"/>
-              </a:ext>
-            </a:extLst>
-          </p:cNvPr>
-          <p:cNvSpPr>
-            <a:spLocks noGrp="1"/>
-          </p:cNvSpPr>
-          <p:nvPr>
-            <p:ph type="sldNum" sz="quarter" idx="12"/>
-          </p:nvPr>
-        </p:nvSpPr>
-        <p:spPr/>
-        <p:txBody>
-          <a:bodyPr/>
-          <a:lstStyle/>
-          <a:p>
-            <a:fld id="{4CB94DCF-0D6D-46D6-8AE7-040528F48D4F}" type="slidenum">
+            <p:ph type="sldNum" sz="quarter" idx="4"/>
+          </p:nvPr>
+        </p:nvSpPr>
+        <p:spPr>
+          <a:xfrm>
+            <a:off x="10457474" y="6342017"/>
+            <a:ext cx="1596292" cy="404614"/>
+          </a:xfrm>
+          <a:prstGeom prst="rect">
+            <a:avLst/>
+          </a:prstGeom>
+        </p:spPr>
+        <p:txBody>
+          <a:bodyPr vert="horz" lIns="91440" tIns="45720" rIns="91440" bIns="45720" rtlCol="0" anchor="ctr"/>
+          <a:lstStyle>
+            <a:lvl1pPr algn="r">
+              <a:defRPr sz="2000" baseline="0">
+                <a:solidFill>
+                  <a:schemeClr val="tx2"/>
+                </a:solidFill>
+              </a:defRPr>
+            </a:lvl1pPr>
+          </a:lstStyle>
+          <a:p>
+            <a:fld id="{40743BAD-0FD4-4AFD-913F-F1B3782AF393}" type="slidenum">
               <a:rPr lang="fr-FR" smtClean="0"/>
+              <a:pPr/>
               <a:t>‹N°›</a:t>
             </a:fld>
-            <a:endParaRPr lang="fr-FR"/>
+            <a:endParaRPr lang="fr-FR" dirty="0"/>
           </a:p>
         </p:txBody>
       </p:sp>
     </p:spTree>
     <p:extLst>
       <p:ext uri="{BB962C8B-B14F-4D97-AF65-F5344CB8AC3E}">
-        <p14:creationId xmlns:p14="http://schemas.microsoft.com/office/powerpoint/2010/main" val="1972742922"/>
+        <p14:creationId xmlns:p14="http://schemas.microsoft.com/office/powerpoint/2010/main" val="4261060845"/>
       </p:ext>
     </p:extLst>
   </p:cSld>
@@ -2449,7 +3240,7 @@
 </file>
 
 <file path=ppt/slideLayouts/slideLayout9.xml><?xml version="1.0" encoding="utf-8"?>
-<p:sldLayout xmlns:a="http://schemas.openxmlformats.org/drawingml/2006/main" xmlns:r="http://schemas.openxmlformats.org/officeDocument/2006/relationships" xmlns:p="http://schemas.openxmlformats.org/presentationml/2006/main" type="picTx" preserve="1">
+<p:sldLayout xmlns:a="http://schemas.openxmlformats.org/drawingml/2006/main" xmlns:r="http://schemas.openxmlformats.org/officeDocument/2006/relationships" xmlns:p="http://schemas.openxmlformats.org/presentationml/2006/main" showMasterSp="0" type="picTx" preserve="1">
   <p:cSld name="Image avec légende">
     <p:spTree>
       <p:nvGrpSpPr>
@@ -2467,31 +3258,68 @@
       </p:grpSpPr>
       <p:sp>
         <p:nvSpPr>
-          <p:cNvPr id="2" name="Titre 1">
-            <a:extLst>
-              <a:ext uri="{FF2B5EF4-FFF2-40B4-BE49-F238E27FC236}">
-                <a16:creationId xmlns:a16="http://schemas.microsoft.com/office/drawing/2014/main" id="{3EF87322-996A-7EAF-D8E9-5F59EBB03898}"/>
-              </a:ext>
-            </a:extLst>
-          </p:cNvPr>
-          <p:cNvSpPr>
-            <a:spLocks noGrp="1"/>
-          </p:cNvSpPr>
-          <p:nvPr>
-            <p:ph type="title"/>
-          </p:nvPr>
+          <p:cNvPr id="8" name="Rectangle 7" title="Background Shape"/>
+          <p:cNvSpPr/>
+          <p:nvPr/>
         </p:nvSpPr>
         <p:spPr>
           <a:xfrm>
-            <a:off x="839788" y="457200"/>
-            <a:ext cx="3932237" cy="1600200"/>
+            <a:off x="0" y="376"/>
+            <a:ext cx="5303520" cy="6857624"/>
+          </a:xfrm>
+          <a:prstGeom prst="rect">
+            <a:avLst/>
+          </a:prstGeom>
+          <a:solidFill>
+            <a:schemeClr val="accent1"/>
+          </a:solidFill>
+          <a:ln>
+            <a:noFill/>
+          </a:ln>
+        </p:spPr>
+        <p:style>
+          <a:lnRef idx="2">
+            <a:schemeClr val="accent1">
+              <a:shade val="50000"/>
+            </a:schemeClr>
+          </a:lnRef>
+          <a:fillRef idx="1">
+            <a:schemeClr val="accent1"/>
+          </a:fillRef>
+          <a:effectRef idx="0">
+            <a:schemeClr val="accent1"/>
+          </a:effectRef>
+          <a:fontRef idx="minor">
+            <a:schemeClr val="lt1"/>
+          </a:fontRef>
+        </p:style>
+      </p:sp>
+      <p:sp>
+        <p:nvSpPr>
+          <p:cNvPr id="2" name="Title 1"/>
+          <p:cNvSpPr>
+            <a:spLocks noGrp="1"/>
+          </p:cNvSpPr>
+          <p:nvPr>
+            <p:ph type="title"/>
+          </p:nvPr>
+        </p:nvSpPr>
+        <p:spPr>
+          <a:xfrm>
+            <a:off x="723900" y="685800"/>
+            <a:ext cx="3855720" cy="2157884"/>
           </a:xfrm>
         </p:spPr>
         <p:txBody>
-          <a:bodyPr anchor="b"/>
+          <a:bodyPr anchor="t">
+            <a:normAutofit/>
+          </a:bodyPr>
           <a:lstStyle>
             <a:lvl1pPr>
-              <a:defRPr sz="3200"/>
+              <a:lnSpc>
+                <a:spcPct val="84000"/>
+              </a:lnSpc>
+              <a:defRPr sz="4800" baseline="0"/>
             </a:lvl1pPr>
           </a:lstStyle>
           <a:p>
@@ -2499,20 +3327,15 @@
               <a:rPr lang="fr-FR"/>
               <a:t>Modifiez le style du titre</a:t>
             </a:r>
-          </a:p>
-        </p:txBody>
-      </p:sp>
-      <p:sp>
-        <p:nvSpPr>
-          <p:cNvPr id="3" name="Espace réservé pour une image  2">
-            <a:extLst>
-              <a:ext uri="{FF2B5EF4-FFF2-40B4-BE49-F238E27FC236}">
-                <a16:creationId xmlns:a16="http://schemas.microsoft.com/office/drawing/2014/main" id="{C85A7BC0-F45B-AF3A-8EF8-7FD9BF3CDF5C}"/>
-              </a:ext>
-            </a:extLst>
-          </p:cNvPr>
-          <p:cNvSpPr>
-            <a:spLocks noGrp="1"/>
+            <a:endParaRPr lang="en-US" dirty="0"/>
+          </a:p>
+        </p:txBody>
+      </p:sp>
+      <p:sp>
+        <p:nvSpPr>
+          <p:cNvPr id="3" name="Picture Placeholder 2"/>
+          <p:cNvSpPr>
+            <a:spLocks noGrp="1" noChangeAspect="1"/>
           </p:cNvSpPr>
           <p:nvPr>
             <p:ph type="pic" idx="1"/>
@@ -2520,24 +3343,26 @@
         </p:nvSpPr>
         <p:spPr>
           <a:xfrm>
-            <a:off x="5183188" y="987425"/>
-            <a:ext cx="6172200" cy="4873625"/>
+            <a:off x="5532120" y="0"/>
+            <a:ext cx="6659880" cy="6857999"/>
           </a:xfrm>
         </p:spPr>
         <p:txBody>
-          <a:bodyPr/>
+          <a:bodyPr anchor="t">
+            <a:normAutofit/>
+          </a:bodyPr>
           <a:lstStyle>
             <a:lvl1pPr marL="0" indent="0">
               <a:buNone/>
-              <a:defRPr sz="3200"/>
+              <a:defRPr sz="2000"/>
             </a:lvl1pPr>
             <a:lvl2pPr marL="457200" indent="0">
               <a:buNone/>
-              <a:defRPr sz="2800"/>
+              <a:defRPr sz="2000"/>
             </a:lvl2pPr>
             <a:lvl3pPr marL="914400" indent="0">
               <a:buNone/>
-              <a:defRPr sz="2400"/>
+              <a:defRPr sz="2000"/>
             </a:lvl3pPr>
             <a:lvl4pPr marL="1371600" indent="0">
               <a:buNone/>
@@ -2565,19 +3390,17 @@
             </a:lvl9pPr>
           </a:lstStyle>
           <a:p>
-            <a:endParaRPr lang="fr-FR"/>
-          </a:p>
-        </p:txBody>
-      </p:sp>
-      <p:sp>
-        <p:nvSpPr>
-          <p:cNvPr id="4" name="Espace réservé du texte 3">
-            <a:extLst>
-              <a:ext uri="{FF2B5EF4-FFF2-40B4-BE49-F238E27FC236}">
-                <a16:creationId xmlns:a16="http://schemas.microsoft.com/office/drawing/2014/main" id="{10CEF897-1FB0-4C2C-56C3-706DF593B778}"/>
-              </a:ext>
-            </a:extLst>
-          </p:cNvPr>
+            <a:r>
+              <a:rPr lang="fr-FR"/>
+              <a:t>Cliquez sur l'icône pour ajouter une image</a:t>
+            </a:r>
+            <a:endParaRPr lang="en-US" dirty="0"/>
+          </a:p>
+        </p:txBody>
+      </p:sp>
+      <p:sp>
+        <p:nvSpPr>
+          <p:cNvPr id="4" name="Text Placeholder 3"/>
           <p:cNvSpPr>
             <a:spLocks noGrp="1"/>
           </p:cNvSpPr>
@@ -2587,14 +3410,23 @@
         </p:nvSpPr>
         <p:spPr>
           <a:xfrm>
-            <a:off x="839788" y="2057400"/>
-            <a:ext cx="3932237" cy="3811588"/>
+            <a:off x="723900" y="2855968"/>
+            <a:ext cx="3855720" cy="3011432"/>
           </a:xfrm>
         </p:spPr>
         <p:txBody>
           <a:bodyPr/>
           <a:lstStyle>
             <a:lvl1pPr marL="0" indent="0">
+              <a:lnSpc>
+                <a:spcPct val="113000"/>
+              </a:lnSpc>
+              <a:spcBef>
+                <a:spcPts val="0"/>
+              </a:spcBef>
+              <a:spcAft>
+                <a:spcPts val="1500"/>
+              </a:spcAft>
               <a:buNone/>
               <a:defRPr sz="1600"/>
             </a:lvl1pPr>
@@ -2642,13 +3474,7 @@
       </p:sp>
       <p:sp>
         <p:nvSpPr>
-          <p:cNvPr id="5" name="Espace réservé de la date 4">
-            <a:extLst>
-              <a:ext uri="{FF2B5EF4-FFF2-40B4-BE49-F238E27FC236}">
-                <a16:creationId xmlns:a16="http://schemas.microsoft.com/office/drawing/2014/main" id="{850AC2EC-BF0D-D079-8546-4B0EAEEDEAE5}"/>
-              </a:ext>
-            </a:extLst>
-          </p:cNvPr>
+          <p:cNvPr id="5" name="Date Placeholder 4"/>
           <p:cNvSpPr>
             <a:spLocks noGrp="1"/>
           </p:cNvSpPr>
@@ -2656,12 +3482,25 @@
             <p:ph type="dt" sz="half" idx="10"/>
           </p:nvPr>
         </p:nvSpPr>
-        <p:spPr/>
-        <p:txBody>
-          <a:bodyPr/>
-          <a:lstStyle/>
-          <a:p>
-            <a:fld id="{8FDA8C4C-A59A-44C9-A053-D8C84F7CDD73}" type="datetimeFigureOut">
+        <p:spPr>
+          <a:xfrm>
+            <a:off x="723900" y="6453386"/>
+            <a:ext cx="1204572" cy="404614"/>
+          </a:xfrm>
+        </p:spPr>
+        <p:txBody>
+          <a:bodyPr/>
+          <a:lstStyle>
+            <a:lvl1pPr>
+              <a:defRPr>
+                <a:solidFill>
+                  <a:schemeClr val="tx2"/>
+                </a:solidFill>
+              </a:defRPr>
+            </a:lvl1pPr>
+          </a:lstStyle>
+          <a:p>
+            <a:fld id="{2155EEFE-CE4B-45B5-811F-7C771B7BD159}" type="datetime1">
               <a:rPr lang="fr-FR" smtClean="0"/>
               <a:t>05/06/2026</a:t>
             </a:fld>
@@ -2671,10 +3510,80 @@
       </p:sp>
       <p:sp>
         <p:nvSpPr>
-          <p:cNvPr id="6" name="Espace réservé du pied de page 5">
+          <p:cNvPr id="6" name="Footer Placeholder 5"/>
+          <p:cNvSpPr>
+            <a:spLocks noGrp="1"/>
+          </p:cNvSpPr>
+          <p:nvPr>
+            <p:ph type="ftr" sz="quarter" idx="11"/>
+          </p:nvPr>
+        </p:nvSpPr>
+        <p:spPr>
+          <a:xfrm>
+            <a:off x="2205945" y="6453386"/>
+            <a:ext cx="2373675" cy="404614"/>
+          </a:xfrm>
+        </p:spPr>
+        <p:txBody>
+          <a:bodyPr/>
+          <a:lstStyle>
+            <a:lvl1pPr>
+              <a:defRPr>
+                <a:solidFill>
+                  <a:schemeClr val="tx2"/>
+                </a:solidFill>
+              </a:defRPr>
+            </a:lvl1pPr>
+          </a:lstStyle>
+          <a:p>
+            <a:endParaRPr lang="en-US" dirty="0"/>
+          </a:p>
+        </p:txBody>
+      </p:sp>
+      <p:sp>
+        <p:nvSpPr>
+          <p:cNvPr id="9" name="Rectangle 8" title="Divider Bar"/>
+          <p:cNvSpPr/>
+          <p:nvPr/>
+        </p:nvSpPr>
+        <p:spPr>
+          <a:xfrm>
+            <a:off x="5303520" y="376"/>
+            <a:ext cx="228600" cy="6858000"/>
+          </a:xfrm>
+          <a:prstGeom prst="rect">
+            <a:avLst/>
+          </a:prstGeom>
+          <a:solidFill>
+            <a:schemeClr val="tx2"/>
+          </a:solidFill>
+          <a:ln>
+            <a:noFill/>
+          </a:ln>
+        </p:spPr>
+        <p:style>
+          <a:lnRef idx="2">
+            <a:schemeClr val="accent1">
+              <a:shade val="50000"/>
+            </a:schemeClr>
+          </a:lnRef>
+          <a:fillRef idx="1">
+            <a:schemeClr val="accent1"/>
+          </a:fillRef>
+          <a:effectRef idx="0">
+            <a:schemeClr val="accent1"/>
+          </a:effectRef>
+          <a:fontRef idx="minor">
+            <a:schemeClr val="lt1"/>
+          </a:fontRef>
+        </p:style>
+      </p:sp>
+      <p:sp>
+        <p:nvSpPr>
+          <p:cNvPr id="10" name="Slide Number Placeholder 5">
             <a:extLst>
               <a:ext uri="{FF2B5EF4-FFF2-40B4-BE49-F238E27FC236}">
-                <a16:creationId xmlns:a16="http://schemas.microsoft.com/office/drawing/2014/main" id="{7525727E-24B3-AAD3-62CB-EC4B90DD4798}"/>
+                <a16:creationId xmlns:a16="http://schemas.microsoft.com/office/drawing/2014/main" id="{CDA637D9-D62A-A3FC-AA8B-076DEAAF57B6}"/>
               </a:ext>
             </a:extLst>
           </p:cNvPr>
@@ -2682,51 +3591,43 @@
             <a:spLocks noGrp="1"/>
           </p:cNvSpPr>
           <p:nvPr>
-            <p:ph type="ftr" sz="quarter" idx="11"/>
-          </p:nvPr>
-        </p:nvSpPr>
-        <p:spPr/>
-        <p:txBody>
-          <a:bodyPr/>
-          <a:lstStyle/>
-          <a:p>
-            <a:endParaRPr lang="fr-FR"/>
-          </a:p>
-        </p:txBody>
-      </p:sp>
-      <p:sp>
-        <p:nvSpPr>
-          <p:cNvPr id="7" name="Espace réservé du numéro de diapositive 6">
-            <a:extLst>
-              <a:ext uri="{FF2B5EF4-FFF2-40B4-BE49-F238E27FC236}">
-                <a16:creationId xmlns:a16="http://schemas.microsoft.com/office/drawing/2014/main" id="{A369C7B2-74B9-3920-83B9-84216D67C851}"/>
-              </a:ext>
-            </a:extLst>
-          </p:cNvPr>
-          <p:cNvSpPr>
-            <a:spLocks noGrp="1"/>
-          </p:cNvSpPr>
-          <p:nvPr>
-            <p:ph type="sldNum" sz="quarter" idx="12"/>
-          </p:nvPr>
-        </p:nvSpPr>
-        <p:spPr/>
-        <p:txBody>
-          <a:bodyPr/>
-          <a:lstStyle/>
-          <a:p>
-            <a:fld id="{4CB94DCF-0D6D-46D6-8AE7-040528F48D4F}" type="slidenum">
+            <p:ph type="sldNum" sz="quarter" idx="4"/>
+          </p:nvPr>
+        </p:nvSpPr>
+        <p:spPr>
+          <a:xfrm>
+            <a:off x="10457474" y="6342017"/>
+            <a:ext cx="1596292" cy="404614"/>
+          </a:xfrm>
+          <a:prstGeom prst="rect">
+            <a:avLst/>
+          </a:prstGeom>
+        </p:spPr>
+        <p:txBody>
+          <a:bodyPr vert="horz" lIns="91440" tIns="45720" rIns="91440" bIns="45720" rtlCol="0" anchor="ctr"/>
+          <a:lstStyle>
+            <a:lvl1pPr algn="r">
+              <a:defRPr sz="2000" baseline="0">
+                <a:solidFill>
+                  <a:schemeClr val="tx2"/>
+                </a:solidFill>
+              </a:defRPr>
+            </a:lvl1pPr>
+          </a:lstStyle>
+          <a:p>
+            <a:fld id="{40743BAD-0FD4-4AFD-913F-F1B3782AF393}" type="slidenum">
               <a:rPr lang="fr-FR" smtClean="0"/>
+              <a:pPr/>
               <a:t>‹N°›</a:t>
             </a:fld>
-            <a:endParaRPr lang="fr-FR"/>
+            <a:endParaRPr lang="fr-FR" dirty="0"/>
           </a:p>
         </p:txBody>
       </p:sp>
     </p:spTree>
     <p:extLst>
       <p:ext uri="{BB962C8B-B14F-4D97-AF65-F5344CB8AC3E}">
-        <p14:creationId xmlns:p14="http://schemas.microsoft.com/office/powerpoint/2010/main" val="1362442494"/>
+        <p14:creationId xmlns:p14="http://schemas.microsoft.com/office/powerpoint/2010/main" val="2918002683"/>
       </p:ext>
     </p:extLst>
   </p:cSld>
@@ -2740,9 +3641,12 @@
 <p:sldMaster xmlns:a="http://schemas.openxmlformats.org/drawingml/2006/main" xmlns:r="http://schemas.openxmlformats.org/officeDocument/2006/relationships" xmlns:p="http://schemas.openxmlformats.org/presentationml/2006/main">
   <p:cSld>
     <p:bg>
-      <p:bgRef idx="1001">
-        <a:schemeClr val="bg1"/>
-      </p:bgRef>
+      <p:bgPr>
+        <a:solidFill>
+          <a:schemeClr val="bg2"/>
+        </a:solidFill>
+        <a:effectLst/>
+      </p:bgPr>
     </p:bg>
     <p:spTree>
       <p:nvGrpSpPr>
@@ -2760,13 +3664,7 @@
       </p:grpSpPr>
       <p:sp>
         <p:nvSpPr>
-          <p:cNvPr id="2" name="Espace réservé du titre 1">
-            <a:extLst>
-              <a:ext uri="{FF2B5EF4-FFF2-40B4-BE49-F238E27FC236}">
-                <a16:creationId xmlns:a16="http://schemas.microsoft.com/office/drawing/2014/main" id="{608E1B5A-3DDB-7330-621D-580E4C103B5C}"/>
-              </a:ext>
-            </a:extLst>
-          </p:cNvPr>
+          <p:cNvPr id="2" name="Title Placeholder 1"/>
           <p:cNvSpPr>
             <a:spLocks noGrp="1"/>
           </p:cNvSpPr>
@@ -2776,15 +3674,15 @@
         </p:nvSpPr>
         <p:spPr>
           <a:xfrm>
-            <a:off x="838200" y="365125"/>
-            <a:ext cx="10515600" cy="1325563"/>
+            <a:off x="1371600" y="685800"/>
+            <a:ext cx="9601200" cy="1485900"/>
           </a:xfrm>
           <a:prstGeom prst="rect">
             <a:avLst/>
           </a:prstGeom>
         </p:spPr>
         <p:txBody>
-          <a:bodyPr vert="horz" lIns="91440" tIns="45720" rIns="91440" bIns="45720" rtlCol="0" anchor="ctr">
+          <a:bodyPr vert="horz" lIns="91440" tIns="45720" rIns="91440" bIns="45720" rtlCol="0" anchor="t">
             <a:normAutofit/>
           </a:bodyPr>
           <a:lstStyle/>
@@ -2793,18 +3691,13 @@
               <a:rPr lang="fr-FR"/>
               <a:t>Modifiez le style du titre</a:t>
             </a:r>
-          </a:p>
-        </p:txBody>
-      </p:sp>
-      <p:sp>
-        <p:nvSpPr>
-          <p:cNvPr id="3" name="Espace réservé du texte 2">
-            <a:extLst>
-              <a:ext uri="{FF2B5EF4-FFF2-40B4-BE49-F238E27FC236}">
-                <a16:creationId xmlns:a16="http://schemas.microsoft.com/office/drawing/2014/main" id="{E61A8E8D-558A-02A8-C35F-9EA2A132C21A}"/>
-              </a:ext>
-            </a:extLst>
-          </p:cNvPr>
+            <a:endParaRPr lang="en-US" dirty="0"/>
+          </a:p>
+        </p:txBody>
+      </p:sp>
+      <p:sp>
+        <p:nvSpPr>
+          <p:cNvPr id="3" name="Text Placeholder 2"/>
           <p:cNvSpPr>
             <a:spLocks noGrp="1"/>
           </p:cNvSpPr>
@@ -2814,8 +3707,8 @@
         </p:nvSpPr>
         <p:spPr>
           <a:xfrm>
-            <a:off x="838200" y="1825625"/>
-            <a:ext cx="10515600" cy="4351338"/>
+            <a:off x="1371600" y="2286000"/>
+            <a:ext cx="9601200" cy="3581400"/>
           </a:xfrm>
           <a:prstGeom prst="rect">
             <a:avLst/>
@@ -2860,18 +3753,13 @@
               <a:rPr lang="fr-FR"/>
               <a:t>Cinquième niveau</a:t>
             </a:r>
-          </a:p>
-        </p:txBody>
-      </p:sp>
-      <p:sp>
-        <p:nvSpPr>
-          <p:cNvPr id="4" name="Espace réservé de la date 3">
-            <a:extLst>
-              <a:ext uri="{FF2B5EF4-FFF2-40B4-BE49-F238E27FC236}">
-                <a16:creationId xmlns:a16="http://schemas.microsoft.com/office/drawing/2014/main" id="{6D148B1B-2EC4-03A6-7073-17C2F27FE931}"/>
-              </a:ext>
-            </a:extLst>
-          </p:cNvPr>
+            <a:endParaRPr lang="en-US" dirty="0"/>
+          </a:p>
+        </p:txBody>
+      </p:sp>
+      <p:sp>
+        <p:nvSpPr>
+          <p:cNvPr id="4" name="Date Placeholder 3"/>
           <p:cNvSpPr>
             <a:spLocks noGrp="1"/>
           </p:cNvSpPr>
@@ -2881,8 +3769,8 @@
         </p:nvSpPr>
         <p:spPr>
           <a:xfrm>
-            <a:off x="838200" y="6356350"/>
-            <a:ext cx="2743200" cy="365125"/>
+            <a:off x="1390650" y="6453386"/>
+            <a:ext cx="1204572" cy="404614"/>
           </a:xfrm>
           <a:prstGeom prst="rect">
             <a:avLst/>
@@ -2892,17 +3780,15 @@
           <a:bodyPr vert="horz" lIns="91440" tIns="45720" rIns="91440" bIns="45720" rtlCol="0" anchor="ctr"/>
           <a:lstStyle>
             <a:lvl1pPr algn="l">
-              <a:defRPr sz="1200">
+              <a:defRPr sz="1200" baseline="0">
                 <a:solidFill>
-                  <a:schemeClr val="tx1">
-                    <a:tint val="82000"/>
-                  </a:schemeClr>
+                  <a:schemeClr val="tx2"/>
                 </a:solidFill>
               </a:defRPr>
             </a:lvl1pPr>
           </a:lstStyle>
           <a:p>
-            <a:fld id="{8FDA8C4C-A59A-44C9-A053-D8C84F7CDD73}" type="datetimeFigureOut">
+            <a:fld id="{8865F967-DFD5-47C5-B34E-026F86C5401C}" type="datetime1">
               <a:rPr lang="fr-FR" smtClean="0"/>
               <a:t>05/06/2026</a:t>
             </a:fld>
@@ -2912,13 +3798,7 @@
       </p:sp>
       <p:sp>
         <p:nvSpPr>
-          <p:cNvPr id="5" name="Espace réservé du pied de page 4">
-            <a:extLst>
-              <a:ext uri="{FF2B5EF4-FFF2-40B4-BE49-F238E27FC236}">
-                <a16:creationId xmlns:a16="http://schemas.microsoft.com/office/drawing/2014/main" id="{AB55FEA3-CCD3-BDD3-1C2E-721A065EC07A}"/>
-              </a:ext>
-            </a:extLst>
-          </p:cNvPr>
+          <p:cNvPr id="5" name="Footer Placeholder 4"/>
           <p:cNvSpPr>
             <a:spLocks noGrp="1"/>
           </p:cNvSpPr>
@@ -2928,8 +3808,8 @@
         </p:nvSpPr>
         <p:spPr>
           <a:xfrm>
-            <a:off x="4038600" y="6356350"/>
-            <a:ext cx="4114800" cy="365125"/>
+            <a:off x="2893564" y="6453386"/>
+            <a:ext cx="6280830" cy="404614"/>
           </a:xfrm>
           <a:prstGeom prst="rect">
             <a:avLst/>
@@ -2938,12 +3818,10 @@
         <p:txBody>
           <a:bodyPr vert="horz" lIns="91440" tIns="45720" rIns="91440" bIns="45720" rtlCol="0" anchor="ctr"/>
           <a:lstStyle>
-            <a:lvl1pPr algn="ctr">
-              <a:defRPr sz="1200">
+            <a:lvl1pPr algn="l">
+              <a:defRPr sz="1200" baseline="0">
                 <a:solidFill>
-                  <a:schemeClr val="tx1">
-                    <a:tint val="82000"/>
-                  </a:schemeClr>
+                  <a:schemeClr val="tx2"/>
                 </a:solidFill>
               </a:defRPr>
             </a:lvl1pPr>
@@ -2955,13 +3833,7 @@
       </p:sp>
       <p:sp>
         <p:nvSpPr>
-          <p:cNvPr id="6" name="Espace réservé du numéro de diapositive 5">
-            <a:extLst>
-              <a:ext uri="{FF2B5EF4-FFF2-40B4-BE49-F238E27FC236}">
-                <a16:creationId xmlns:a16="http://schemas.microsoft.com/office/drawing/2014/main" id="{CA33A901-6B26-0EED-056B-63ED1DFB9AEC}"/>
-              </a:ext>
-            </a:extLst>
-          </p:cNvPr>
+          <p:cNvPr id="6" name="Slide Number Placeholder 5"/>
           <p:cNvSpPr>
             <a:spLocks noGrp="1"/>
           </p:cNvSpPr>
@@ -2971,8 +3843,8 @@
         </p:nvSpPr>
         <p:spPr>
           <a:xfrm>
-            <a:off x="8610600" y="6356350"/>
-            <a:ext cx="2743200" cy="365125"/>
+            <a:off x="10457474" y="6342017"/>
+            <a:ext cx="1596292" cy="404614"/>
           </a:xfrm>
           <a:prstGeom prst="rect">
             <a:avLst/>
@@ -2982,20 +3854,64 @@
           <a:bodyPr vert="horz" lIns="91440" tIns="45720" rIns="91440" bIns="45720" rtlCol="0" anchor="ctr"/>
           <a:lstStyle>
             <a:lvl1pPr algn="r">
-              <a:defRPr sz="1200">
+              <a:defRPr sz="2000" baseline="0">
                 <a:solidFill>
-                  <a:schemeClr val="tx1">
-                    <a:tint val="82000"/>
-                  </a:schemeClr>
+                  <a:schemeClr val="tx2"/>
                 </a:solidFill>
               </a:defRPr>
             </a:lvl1pPr>
           </a:lstStyle>
           <a:p>
-            <a:fld id="{4CB94DCF-0D6D-46D6-8AE7-040528F48D4F}" type="slidenum">
+            <a:fld id="{40743BAD-0FD4-4AFD-913F-F1B3782AF393}" type="slidenum">
               <a:rPr lang="fr-FR" smtClean="0"/>
+              <a:pPr/>
               <a:t>‹N°›</a:t>
             </a:fld>
+            <a:endParaRPr lang="fr-FR" dirty="0"/>
+          </a:p>
+        </p:txBody>
+      </p:sp>
+      <p:sp>
+        <p:nvSpPr>
+          <p:cNvPr id="9" name="Rectangle 8" title="Side bar"/>
+          <p:cNvSpPr/>
+          <p:nvPr/>
+        </p:nvSpPr>
+        <p:spPr>
+          <a:xfrm>
+            <a:off x="478095" y="376"/>
+            <a:ext cx="228600" cy="6858000"/>
+          </a:xfrm>
+          <a:prstGeom prst="rect">
+            <a:avLst/>
+          </a:prstGeom>
+          <a:solidFill>
+            <a:schemeClr val="tx2"/>
+          </a:solidFill>
+          <a:ln>
+            <a:noFill/>
+          </a:ln>
+        </p:spPr>
+        <p:style>
+          <a:lnRef idx="2">
+            <a:schemeClr val="accent1">
+              <a:shade val="50000"/>
+            </a:schemeClr>
+          </a:lnRef>
+          <a:fillRef idx="1">
+            <a:schemeClr val="accent1"/>
+          </a:fillRef>
+          <a:effectRef idx="0">
+            <a:schemeClr val="accent1"/>
+          </a:effectRef>
+          <a:fontRef idx="minor">
+            <a:schemeClr val="lt1"/>
+          </a:fontRef>
+        </p:style>
+        <p:txBody>
+          <a:bodyPr/>
+          <a:lstStyle/>
+          <a:p>
             <a:endParaRPr lang="fr-FR"/>
           </a:p>
         </p:txBody>
@@ -3003,37 +3919,38 @@
     </p:spTree>
     <p:extLst>
       <p:ext uri="{BB962C8B-B14F-4D97-AF65-F5344CB8AC3E}">
-        <p14:creationId xmlns:p14="http://schemas.microsoft.com/office/powerpoint/2010/main" val="117682864"/>
+        <p14:creationId xmlns:p14="http://schemas.microsoft.com/office/powerpoint/2010/main" val="2970871601"/>
       </p:ext>
     </p:extLst>
   </p:cSld>
   <p:clrMap bg1="lt1" tx1="dk1" bg2="lt2" tx2="dk2" accent1="accent1" accent2="accent2" accent3="accent3" accent4="accent4" accent5="accent5" accent6="accent6" hlink="hlink" folHlink="folHlink"/>
   <p:sldLayoutIdLst>
-    <p:sldLayoutId id="2147483649" r:id="rId1"/>
-    <p:sldLayoutId id="2147483650" r:id="rId2"/>
-    <p:sldLayoutId id="2147483651" r:id="rId3"/>
-    <p:sldLayoutId id="2147483652" r:id="rId4"/>
-    <p:sldLayoutId id="2147483653" r:id="rId5"/>
-    <p:sldLayoutId id="2147483654" r:id="rId6"/>
-    <p:sldLayoutId id="2147483655" r:id="rId7"/>
-    <p:sldLayoutId id="2147483656" r:id="rId8"/>
-    <p:sldLayoutId id="2147483657" r:id="rId9"/>
-    <p:sldLayoutId id="2147483658" r:id="rId10"/>
-    <p:sldLayoutId id="2147483659" r:id="rId11"/>
+    <p:sldLayoutId id="2147483798" r:id="rId1"/>
+    <p:sldLayoutId id="2147483799" r:id="rId2"/>
+    <p:sldLayoutId id="2147483800" r:id="rId3"/>
+    <p:sldLayoutId id="2147483801" r:id="rId4"/>
+    <p:sldLayoutId id="2147483802" r:id="rId5"/>
+    <p:sldLayoutId id="2147483803" r:id="rId6"/>
+    <p:sldLayoutId id="2147483804" r:id="rId7"/>
+    <p:sldLayoutId id="2147483805" r:id="rId8"/>
+    <p:sldLayoutId id="2147483806" r:id="rId9"/>
+    <p:sldLayoutId id="2147483807" r:id="rId10"/>
+    <p:sldLayoutId id="2147483808" r:id="rId11"/>
   </p:sldLayoutIdLst>
+  <p:hf hdr="0" ftr="0" dt="0"/>
   <p:txStyles>
     <p:titleStyle>
       <a:lvl1pPr algn="l" defTabSz="914400" rtl="0" eaLnBrk="1" latinLnBrk="0" hangingPunct="1">
         <a:lnSpc>
-          <a:spcPct val="90000"/>
+          <a:spcPct val="89000"/>
         </a:lnSpc>
         <a:spcBef>
           <a:spcPct val="0"/>
         </a:spcBef>
         <a:buNone/>
-        <a:defRPr sz="4400" kern="1200">
+        <a:defRPr sz="4400" kern="1200" baseline="0">
           <a:solidFill>
-            <a:schemeClr val="tx1"/>
+            <a:schemeClr val="tx2"/>
           </a:solidFill>
           <a:latin typeface="+mj-lt"/>
           <a:ea typeface="+mj-ea"/>
@@ -3042,162 +3959,189 @@
       </a:lvl1pPr>
     </p:titleStyle>
     <p:bodyStyle>
-      <a:lvl1pPr marL="228600" indent="-228600" algn="l" defTabSz="914400" rtl="0" eaLnBrk="1" latinLnBrk="0" hangingPunct="1">
+      <a:lvl1pPr marL="384048" indent="-384048" algn="l" defTabSz="914400" rtl="0" eaLnBrk="1" latinLnBrk="0" hangingPunct="1">
         <a:lnSpc>
-          <a:spcPct val="90000"/>
+          <a:spcPct val="94000"/>
         </a:lnSpc>
         <a:spcBef>
           <a:spcPts val="1000"/>
         </a:spcBef>
-        <a:buFont typeface="Arial" panose="020B0604020202020204" pitchFamily="34" charset="0"/>
-        <a:buChar char="•"/>
-        <a:defRPr sz="2800" kern="1200">
+        <a:spcAft>
+          <a:spcPts val="200"/>
+        </a:spcAft>
+        <a:buFont typeface="Franklin Gothic Book" panose="020B0503020102020204" pitchFamily="34" charset="0"/>
+        <a:buChar char="■"/>
+        <a:defRPr sz="2000" kern="1200" baseline="0">
           <a:solidFill>
-            <a:schemeClr val="tx1"/>
+            <a:schemeClr val="tx2"/>
           </a:solidFill>
           <a:latin typeface="+mn-lt"/>
           <a:ea typeface="+mn-ea"/>
           <a:cs typeface="+mn-cs"/>
         </a:defRPr>
       </a:lvl1pPr>
-      <a:lvl2pPr marL="685800" indent="-228600" algn="l" defTabSz="914400" rtl="0" eaLnBrk="1" latinLnBrk="0" hangingPunct="1">
+      <a:lvl2pPr marL="914400" indent="-384048" algn="l" defTabSz="914400" rtl="0" eaLnBrk="1" latinLnBrk="0" hangingPunct="1">
         <a:lnSpc>
-          <a:spcPct val="90000"/>
+          <a:spcPct val="94000"/>
         </a:lnSpc>
         <a:spcBef>
           <a:spcPts val="500"/>
         </a:spcBef>
-        <a:buFont typeface="Arial" panose="020B0604020202020204" pitchFamily="34" charset="0"/>
-        <a:buChar char="•"/>
-        <a:defRPr sz="2400" kern="1200">
+        <a:spcAft>
+          <a:spcPts val="200"/>
+        </a:spcAft>
+        <a:buFont typeface="Franklin Gothic Book" panose="020B0503020102020204" pitchFamily="34" charset="0"/>
+        <a:buChar char="–"/>
+        <a:defRPr sz="2000" i="1" kern="1200" baseline="0">
           <a:solidFill>
-            <a:schemeClr val="tx1"/>
+            <a:schemeClr val="tx2"/>
           </a:solidFill>
           <a:latin typeface="+mn-lt"/>
           <a:ea typeface="+mn-ea"/>
           <a:cs typeface="+mn-cs"/>
         </a:defRPr>
       </a:lvl2pPr>
-      <a:lvl3pPr marL="1143000" indent="-228600" algn="l" defTabSz="914400" rtl="0" eaLnBrk="1" latinLnBrk="0" hangingPunct="1">
+      <a:lvl3pPr marL="1371600" indent="-384048" algn="l" defTabSz="914400" rtl="0" eaLnBrk="1" latinLnBrk="0" hangingPunct="1">
         <a:lnSpc>
-          <a:spcPct val="90000"/>
+          <a:spcPct val="94000"/>
         </a:lnSpc>
         <a:spcBef>
           <a:spcPts val="500"/>
         </a:spcBef>
-        <a:buFont typeface="Arial" panose="020B0604020202020204" pitchFamily="34" charset="0"/>
-        <a:buChar char="•"/>
-        <a:defRPr sz="2000" kern="1200">
+        <a:spcAft>
+          <a:spcPts val="200"/>
+        </a:spcAft>
+        <a:buFont typeface="Franklin Gothic Book" panose="020B0503020102020204" pitchFamily="34" charset="0"/>
+        <a:buChar char="■"/>
+        <a:defRPr sz="1800" kern="1200" baseline="0">
           <a:solidFill>
-            <a:schemeClr val="tx1"/>
+            <a:schemeClr val="tx2"/>
           </a:solidFill>
           <a:latin typeface="+mn-lt"/>
           <a:ea typeface="+mn-ea"/>
           <a:cs typeface="+mn-cs"/>
         </a:defRPr>
       </a:lvl3pPr>
-      <a:lvl4pPr marL="1600200" indent="-228600" algn="l" defTabSz="914400" rtl="0" eaLnBrk="1" latinLnBrk="0" hangingPunct="1">
+      <a:lvl4pPr marL="1828800" indent="-384048" algn="l" defTabSz="914400" rtl="0" eaLnBrk="1" latinLnBrk="0" hangingPunct="1">
         <a:lnSpc>
-          <a:spcPct val="90000"/>
+          <a:spcPct val="94000"/>
         </a:lnSpc>
         <a:spcBef>
           <a:spcPts val="500"/>
         </a:spcBef>
-        <a:buFont typeface="Arial" panose="020B0604020202020204" pitchFamily="34" charset="0"/>
-        <a:buChar char="•"/>
-        <a:defRPr sz="1800" kern="1200">
+        <a:spcAft>
+          <a:spcPts val="200"/>
+        </a:spcAft>
+        <a:buFont typeface="Franklin Gothic Book" panose="020B0503020102020204" pitchFamily="34" charset="0"/>
+        <a:buChar char="–"/>
+        <a:defRPr sz="1800" i="1" kern="1200" baseline="0">
           <a:solidFill>
-            <a:schemeClr val="tx1"/>
+            <a:schemeClr val="tx2"/>
           </a:solidFill>
           <a:latin typeface="+mn-lt"/>
           <a:ea typeface="+mn-ea"/>
           <a:cs typeface="+mn-cs"/>
         </a:defRPr>
       </a:lvl4pPr>
-      <a:lvl5pPr marL="2057400" indent="-228600" algn="l" defTabSz="914400" rtl="0" eaLnBrk="1" latinLnBrk="0" hangingPunct="1">
+      <a:lvl5pPr marL="2286000" indent="-384048" algn="l" defTabSz="914400" rtl="0" eaLnBrk="1" latinLnBrk="0" hangingPunct="1">
         <a:lnSpc>
-          <a:spcPct val="90000"/>
+          <a:spcPct val="94000"/>
         </a:lnSpc>
         <a:spcBef>
           <a:spcPts val="500"/>
         </a:spcBef>
-        <a:buFont typeface="Arial" panose="020B0604020202020204" pitchFamily="34" charset="0"/>
-        <a:buChar char="•"/>
-        <a:defRPr sz="1800" kern="1200">
+        <a:spcAft>
+          <a:spcPts val="200"/>
+        </a:spcAft>
+        <a:buFont typeface="Franklin Gothic Book" panose="020B0503020102020204" pitchFamily="34" charset="0"/>
+        <a:buChar char="■"/>
+        <a:defRPr sz="1600" kern="1200" baseline="0">
           <a:solidFill>
-            <a:schemeClr val="tx1"/>
+            <a:schemeClr val="tx2"/>
           </a:solidFill>
           <a:latin typeface="+mn-lt"/>
           <a:ea typeface="+mn-ea"/>
           <a:cs typeface="+mn-cs"/>
         </a:defRPr>
       </a:lvl5pPr>
-      <a:lvl6pPr marL="2514600" indent="-228600" algn="l" defTabSz="914400" rtl="0" eaLnBrk="1" latinLnBrk="0" hangingPunct="1">
+      <a:lvl6pPr marL="2743200" indent="-384048" algn="l" defTabSz="914400" rtl="0" eaLnBrk="1" latinLnBrk="0" hangingPunct="1">
         <a:lnSpc>
-          <a:spcPct val="90000"/>
+          <a:spcPct val="94000"/>
         </a:lnSpc>
         <a:spcBef>
           <a:spcPts val="500"/>
         </a:spcBef>
-        <a:buFont typeface="Arial" panose="020B0604020202020204" pitchFamily="34" charset="0"/>
-        <a:buChar char="•"/>
-        <a:defRPr sz="1800" kern="1200">
+        <a:spcAft>
+          <a:spcPts val="200"/>
+        </a:spcAft>
+        <a:buFont typeface="Franklin Gothic Book" panose="020B0503020102020204" pitchFamily="34" charset="0"/>
+        <a:buChar char="–"/>
+        <a:defRPr sz="1600" i="1" kern="1200" baseline="0">
           <a:solidFill>
-            <a:schemeClr val="tx1"/>
+            <a:schemeClr val="tx2"/>
           </a:solidFill>
           <a:latin typeface="+mn-lt"/>
           <a:ea typeface="+mn-ea"/>
           <a:cs typeface="+mn-cs"/>
         </a:defRPr>
       </a:lvl6pPr>
-      <a:lvl7pPr marL="2971800" indent="-228600" algn="l" defTabSz="914400" rtl="0" eaLnBrk="1" latinLnBrk="0" hangingPunct="1">
+      <a:lvl7pPr marL="3200400" indent="-384048" algn="l" defTabSz="914400" rtl="0" eaLnBrk="1" latinLnBrk="0" hangingPunct="1">
         <a:lnSpc>
-          <a:spcPct val="90000"/>
+          <a:spcPct val="94000"/>
         </a:lnSpc>
         <a:spcBef>
           <a:spcPts val="500"/>
         </a:spcBef>
-        <a:buFont typeface="Arial" panose="020B0604020202020204" pitchFamily="34" charset="0"/>
-        <a:buChar char="•"/>
-        <a:defRPr sz="1800" kern="1200">
+        <a:spcAft>
+          <a:spcPts val="200"/>
+        </a:spcAft>
+        <a:buFont typeface="Franklin Gothic Book" panose="020B0503020102020204" pitchFamily="34" charset="0"/>
+        <a:buChar char="■"/>
+        <a:defRPr sz="1400" kern="1200" baseline="0">
           <a:solidFill>
-            <a:schemeClr val="tx1"/>
+            <a:schemeClr val="tx2"/>
           </a:solidFill>
           <a:latin typeface="+mn-lt"/>
           <a:ea typeface="+mn-ea"/>
           <a:cs typeface="+mn-cs"/>
         </a:defRPr>
       </a:lvl7pPr>
-      <a:lvl8pPr marL="3429000" indent="-228600" algn="l" defTabSz="914400" rtl="0" eaLnBrk="1" latinLnBrk="0" hangingPunct="1">
+      <a:lvl8pPr marL="3657600" indent="-384048" algn="l" defTabSz="914400" rtl="0" eaLnBrk="1" latinLnBrk="0" hangingPunct="1">
         <a:lnSpc>
-          <a:spcPct val="90000"/>
+          <a:spcPct val="94000"/>
         </a:lnSpc>
         <a:spcBef>
           <a:spcPts val="500"/>
         </a:spcBef>
-        <a:buFont typeface="Arial" panose="020B0604020202020204" pitchFamily="34" charset="0"/>
-        <a:buChar char="•"/>
-        <a:defRPr sz="1800" kern="1200">
+        <a:spcAft>
+          <a:spcPts val="200"/>
+        </a:spcAft>
+        <a:buFont typeface="Franklin Gothic Book" panose="020B0503020102020204" pitchFamily="34" charset="0"/>
+        <a:buChar char="–"/>
+        <a:defRPr sz="1400" i="1" kern="1200" baseline="0">
           <a:solidFill>
-            <a:schemeClr val="tx1"/>
+            <a:schemeClr val="tx2"/>
           </a:solidFill>
           <a:latin typeface="+mn-lt"/>
           <a:ea typeface="+mn-ea"/>
           <a:cs typeface="+mn-cs"/>
         </a:defRPr>
       </a:lvl8pPr>
-      <a:lvl9pPr marL="3886200" indent="-228600" algn="l" defTabSz="914400" rtl="0" eaLnBrk="1" latinLnBrk="0" hangingPunct="1">
+      <a:lvl9pPr marL="4114800" indent="-384048" algn="l" defTabSz="914400" rtl="0" eaLnBrk="1" latinLnBrk="0" hangingPunct="1">
         <a:lnSpc>
-          <a:spcPct val="90000"/>
+          <a:spcPct val="94000"/>
         </a:lnSpc>
         <a:spcBef>
           <a:spcPts val="500"/>
         </a:spcBef>
-        <a:buFont typeface="Arial" panose="020B0604020202020204" pitchFamily="34" charset="0"/>
-        <a:buChar char="•"/>
-        <a:defRPr sz="1800" kern="1200">
+        <a:spcAft>
+          <a:spcPts val="200"/>
+        </a:spcAft>
+        <a:buFont typeface="Franklin Gothic Book" panose="020B0503020102020204" pitchFamily="34" charset="0"/>
+        <a:buChar char="■"/>
+        <a:defRPr sz="1400" kern="1200" baseline="0">
           <a:solidFill>
-            <a:schemeClr val="tx1"/>
+            <a:schemeClr val="tx2"/>
           </a:solidFill>
           <a:latin typeface="+mn-lt"/>
           <a:ea typeface="+mn-ea"/>
@@ -3207,7 +4151,7 @@
     </p:bodyStyle>
     <p:otherStyle>
       <a:defPPr>
-        <a:defRPr lang="fr-FR"/>
+        <a:defRPr lang="en-US"/>
       </a:defPPr>
       <a:lvl1pPr marL="0" algn="l" defTabSz="914400" rtl="0" eaLnBrk="1" latinLnBrk="0" hangingPunct="1">
         <a:defRPr sz="1800" kern="1200">
@@ -3301,6 +4245,52 @@
       </a:lvl9pPr>
     </p:otherStyle>
   </p:txStyles>
+  <p:extLst>
+    <p:ext uri="{27BBF7A9-308A-43DC-89C8-2F10F3537804}">
+      <p15:sldGuideLst xmlns:p15="http://schemas.microsoft.com/office/powerpoint/2012/main">
+        <p15:guide id="3" orient="horz" pos="1368">
+          <p15:clr>
+            <a:srgbClr val="F26B43"/>
+          </p15:clr>
+        </p15:guide>
+        <p15:guide id="4" orient="horz" pos="1440">
+          <p15:clr>
+            <a:srgbClr val="F26B43"/>
+          </p15:clr>
+        </p15:guide>
+        <p15:guide id="6" orient="horz" pos="3696">
+          <p15:clr>
+            <a:srgbClr val="F26B43"/>
+          </p15:clr>
+        </p15:guide>
+        <p15:guide id="7" orient="horz" pos="432">
+          <p15:clr>
+            <a:srgbClr val="F26B43"/>
+          </p15:clr>
+        </p15:guide>
+        <p15:guide id="8" orient="horz" pos="1512">
+          <p15:clr>
+            <a:srgbClr val="F26B43"/>
+          </p15:clr>
+        </p15:guide>
+        <p15:guide id="9" pos="6912">
+          <p15:clr>
+            <a:srgbClr val="F26B43"/>
+          </p15:clr>
+        </p15:guide>
+        <p15:guide id="10" pos="936">
+          <p15:clr>
+            <a:srgbClr val="F26B43"/>
+          </p15:clr>
+        </p15:guide>
+        <p15:guide id="11" pos="864">
+          <p15:clr>
+            <a:srgbClr val="F26B43"/>
+          </p15:clr>
+        </p15:guide>
+      </p15:sldGuideLst>
+    </p:ext>
+  </p:extLst>
 </p:sldMaster>
 </file>
 
@@ -3326,7 +4316,7 @@
           <p:cNvPr id="2" name="Titre 1">
             <a:extLst>
               <a:ext uri="{FF2B5EF4-FFF2-40B4-BE49-F238E27FC236}">
-                <a16:creationId xmlns:a16="http://schemas.microsoft.com/office/drawing/2014/main" id="{5EFD93CD-D0E1-EA83-2954-FB997CCDF986}"/>
+                <a16:creationId xmlns:a16="http://schemas.microsoft.com/office/drawing/2014/main" id="{72E1344C-802D-F5C3-6668-E884402768E0}"/>
               </a:ext>
             </a:extLst>
           </p:cNvPr>
@@ -3337,12 +4327,27 @@
             <p:ph type="ctrTitle"/>
           </p:nvPr>
         </p:nvSpPr>
-        <p:spPr/>
-        <p:txBody>
-          <a:bodyPr/>
-          <a:lstStyle/>
-          <a:p>
-            <a:endParaRPr lang="fr-FR"/>
+        <p:spPr>
+          <a:xfrm>
+            <a:off x="1524000" y="1122362"/>
+            <a:ext cx="9144000" cy="2855871"/>
+          </a:xfrm>
+        </p:spPr>
+        <p:txBody>
+          <a:bodyPr>
+            <a:noAutofit/>
+          </a:bodyPr>
+          <a:lstStyle/>
+          <a:p>
+            <a:r>
+              <a:rPr lang="fr-FR" sz="4000" dirty="0"/>
+              <a:t>Épreuve d’exploitation pédagogique d’une activité pratique relative à l’approche spécialisée d’un système </a:t>
+            </a:r>
+            <a:r>
+              <a:rPr lang="fr-FR" sz="4000" dirty="0" err="1"/>
+              <a:t>pluritechnologique</a:t>
+            </a:r>
+            <a:endParaRPr lang="fr-FR" sz="4000" dirty="0"/>
           </a:p>
         </p:txBody>
       </p:sp>
@@ -3351,7 +4356,7 @@
           <p:cNvPr id="3" name="Sous-titre 2">
             <a:extLst>
               <a:ext uri="{FF2B5EF4-FFF2-40B4-BE49-F238E27FC236}">
-                <a16:creationId xmlns:a16="http://schemas.microsoft.com/office/drawing/2014/main" id="{8208F7F0-9284-3D0A-476C-8A125C3363CE}"/>
+                <a16:creationId xmlns:a16="http://schemas.microsoft.com/office/drawing/2014/main" id="{EB5A5FBB-EE00-B50C-DB06-9F4832DA652D}"/>
               </a:ext>
             </a:extLst>
           </p:cNvPr>
@@ -3362,19 +4367,1054 @@
             <p:ph type="subTitle" idx="1"/>
           </p:nvPr>
         </p:nvSpPr>
-        <p:spPr/>
-        <p:txBody>
-          <a:bodyPr/>
-          <a:lstStyle/>
-          <a:p>
+        <p:spPr>
+          <a:xfrm>
+            <a:off x="1524000" y="4131913"/>
+            <a:ext cx="9144000" cy="1279567"/>
+          </a:xfrm>
+        </p:spPr>
+        <p:txBody>
+          <a:bodyPr/>
+          <a:lstStyle/>
+          <a:p>
+            <a:r>
+              <a:rPr lang="fr-FR" dirty="0"/>
+              <a:t>Sciences Industrielles de l’Ingénieur</a:t>
+            </a:r>
+          </a:p>
+          <a:p>
+            <a:r>
+              <a:rPr lang="fr-FR" dirty="0"/>
+              <a:t>Spécialité Ingénierie Informatique</a:t>
+            </a:r>
+          </a:p>
+          <a:p>
+            <a:endParaRPr lang="fr-FR" dirty="0"/>
+          </a:p>
+          <a:p>
+            <a:endParaRPr lang="fr-FR" dirty="0"/>
+          </a:p>
+        </p:txBody>
+      </p:sp>
+      <p:sp>
+        <p:nvSpPr>
+          <p:cNvPr id="4" name="Espace réservé du numéro de diapositive 3">
+            <a:extLst>
+              <a:ext uri="{FF2B5EF4-FFF2-40B4-BE49-F238E27FC236}">
+                <a16:creationId xmlns:a16="http://schemas.microsoft.com/office/drawing/2014/main" id="{E8C9DADD-C515-2532-54B3-59090AF77282}"/>
+              </a:ext>
+            </a:extLst>
+          </p:cNvPr>
+          <p:cNvSpPr>
+            <a:spLocks noGrp="1"/>
+          </p:cNvSpPr>
+          <p:nvPr>
+            <p:ph type="sldNum" sz="quarter" idx="4"/>
+          </p:nvPr>
+        </p:nvSpPr>
+        <p:spPr>
+          <a:xfrm>
+            <a:off x="9830683" y="6453386"/>
+            <a:ext cx="1596292" cy="404614"/>
+          </a:xfrm>
+        </p:spPr>
+        <p:txBody>
+          <a:bodyPr/>
+          <a:lstStyle/>
+          <a:p>
+            <a:fld id="{40743BAD-0FD4-4AFD-913F-F1B3782AF393}" type="slidenum">
+              <a:rPr lang="fr-FR" smtClean="0"/>
+              <a:t>1</a:t>
+            </a:fld>
             <a:endParaRPr lang="fr-FR"/>
+          </a:p>
+        </p:txBody>
+      </p:sp>
+      <p:sp>
+        <p:nvSpPr>
+          <p:cNvPr id="5" name="ZoneTexte 4">
+            <a:extLst>
+              <a:ext uri="{FF2B5EF4-FFF2-40B4-BE49-F238E27FC236}">
+                <a16:creationId xmlns:a16="http://schemas.microsoft.com/office/drawing/2014/main" id="{BDFFC0B0-168A-3FED-EC8E-AC3BD66206D0}"/>
+              </a:ext>
+            </a:extLst>
+          </p:cNvPr>
+          <p:cNvSpPr txBox="1"/>
+          <p:nvPr/>
+        </p:nvSpPr>
+        <p:spPr>
+          <a:xfrm>
+            <a:off x="264695" y="5732363"/>
+            <a:ext cx="3681664" cy="923330"/>
+          </a:xfrm>
+          <a:prstGeom prst="rect">
+            <a:avLst/>
+          </a:prstGeom>
+          <a:noFill/>
+        </p:spPr>
+        <p:txBody>
+          <a:bodyPr wrap="square" rtlCol="0">
+            <a:spAutoFit/>
+          </a:bodyPr>
+          <a:lstStyle/>
+          <a:p>
+            <a:r>
+              <a:rPr lang="fr-FR" dirty="0"/>
+              <a:t>N° candidat : </a:t>
+            </a:r>
+            <a:r>
+              <a:rPr lang="fr-FR" b="1" dirty="0"/>
+              <a:t>02539426732</a:t>
+            </a:r>
+          </a:p>
+          <a:p>
+            <a:r>
+              <a:rPr lang="fr-FR" dirty="0"/>
+              <a:t>HUMBERT Tanguy</a:t>
+            </a:r>
+          </a:p>
+          <a:p>
+            <a:endParaRPr lang="fr-FR" dirty="0"/>
           </a:p>
         </p:txBody>
       </p:sp>
     </p:spTree>
     <p:extLst>
       <p:ext uri="{BB962C8B-B14F-4D97-AF65-F5344CB8AC3E}">
-        <p14:creationId xmlns:p14="http://schemas.microsoft.com/office/powerpoint/2010/main" val="2908192281"/>
+        <p14:creationId xmlns:p14="http://schemas.microsoft.com/office/powerpoint/2010/main" val="1058381198"/>
+      </p:ext>
+    </p:extLst>
+  </p:cSld>
+  <p:clrMapOvr>
+    <a:masterClrMapping/>
+  </p:clrMapOvr>
+</p:sld>
+</file>
+
+<file path=ppt/slides/slide2.xml><?xml version="1.0" encoding="utf-8"?>
+<p:sld xmlns:a="http://schemas.openxmlformats.org/drawingml/2006/main" xmlns:r="http://schemas.openxmlformats.org/officeDocument/2006/relationships" xmlns:p="http://schemas.openxmlformats.org/presentationml/2006/main">
+  <p:cSld>
+    <p:spTree>
+      <p:nvGrpSpPr>
+        <p:cNvPr id="1" name=""/>
+        <p:cNvGrpSpPr/>
+        <p:nvPr/>
+      </p:nvGrpSpPr>
+      <p:grpSpPr>
+        <a:xfrm>
+          <a:off x="0" y="0"/>
+          <a:ext cx="0" cy="0"/>
+          <a:chOff x="0" y="0"/>
+          <a:chExt cx="0" cy="0"/>
+        </a:xfrm>
+      </p:grpSpPr>
+      <p:sp>
+        <p:nvSpPr>
+          <p:cNvPr id="5" name="Titre 4">
+            <a:extLst>
+              <a:ext uri="{FF2B5EF4-FFF2-40B4-BE49-F238E27FC236}">
+                <a16:creationId xmlns:a16="http://schemas.microsoft.com/office/drawing/2014/main" id="{FE1ACFA8-29E4-038B-038D-B86C51E4FB6E}"/>
+              </a:ext>
+            </a:extLst>
+          </p:cNvPr>
+          <p:cNvSpPr>
+            <a:spLocks noGrp="1"/>
+          </p:cNvSpPr>
+          <p:nvPr>
+            <p:ph type="title"/>
+          </p:nvPr>
+        </p:nvSpPr>
+        <p:spPr/>
+        <p:txBody>
+          <a:bodyPr/>
+          <a:lstStyle/>
+          <a:p>
+            <a:r>
+              <a:rPr lang="fr-FR" dirty="0"/>
+              <a:t>Sommaire</a:t>
+            </a:r>
+          </a:p>
+        </p:txBody>
+      </p:sp>
+      <p:sp>
+        <p:nvSpPr>
+          <p:cNvPr id="6" name="Espace réservé du contenu 5">
+            <a:extLst>
+              <a:ext uri="{FF2B5EF4-FFF2-40B4-BE49-F238E27FC236}">
+                <a16:creationId xmlns:a16="http://schemas.microsoft.com/office/drawing/2014/main" id="{B1D0B67A-95B3-6BA0-A611-4A539AB44DEA}"/>
+              </a:ext>
+            </a:extLst>
+          </p:cNvPr>
+          <p:cNvSpPr>
+            <a:spLocks noGrp="1"/>
+          </p:cNvSpPr>
+          <p:nvPr>
+            <p:ph idx="1"/>
+          </p:nvPr>
+        </p:nvSpPr>
+        <p:spPr/>
+        <p:txBody>
+          <a:bodyPr/>
+          <a:lstStyle/>
+          <a:p>
+            <a:pPr marL="0" indent="0">
+              <a:buNone/>
+            </a:pPr>
+            <a:endParaRPr lang="fr-FR" dirty="0"/>
+          </a:p>
+          <a:p>
+            <a:r>
+              <a:rPr lang="fr-FR" dirty="0"/>
+              <a:t>Présentation du Système</a:t>
+            </a:r>
+          </a:p>
+          <a:p>
+            <a:endParaRPr lang="fr-FR" dirty="0"/>
+          </a:p>
+          <a:p>
+            <a:r>
+              <a:rPr lang="fr-FR" dirty="0"/>
+              <a:t>Présentation des manipulations réalisées</a:t>
+            </a:r>
+          </a:p>
+          <a:p>
+            <a:endParaRPr lang="fr-FR" dirty="0"/>
+          </a:p>
+          <a:p>
+            <a:r>
+              <a:rPr lang="fr-FR" dirty="0"/>
+              <a:t>Présentation de la séquence pédagogique</a:t>
+            </a:r>
+          </a:p>
+        </p:txBody>
+      </p:sp>
+      <p:sp>
+        <p:nvSpPr>
+          <p:cNvPr id="4" name="Espace réservé du numéro de diapositive 3">
+            <a:extLst>
+              <a:ext uri="{FF2B5EF4-FFF2-40B4-BE49-F238E27FC236}">
+                <a16:creationId xmlns:a16="http://schemas.microsoft.com/office/drawing/2014/main" id="{B38AEE7B-DB50-EEE5-E200-87B127E33CCF}"/>
+              </a:ext>
+            </a:extLst>
+          </p:cNvPr>
+          <p:cNvSpPr>
+            <a:spLocks noGrp="1"/>
+          </p:cNvSpPr>
+          <p:nvPr>
+            <p:ph type="sldNum" sz="quarter" idx="12"/>
+          </p:nvPr>
+        </p:nvSpPr>
+        <p:spPr/>
+        <p:txBody>
+          <a:bodyPr/>
+          <a:lstStyle/>
+          <a:p>
+            <a:fld id="{40743BAD-0FD4-4AFD-913F-F1B3782AF393}" type="slidenum">
+              <a:rPr lang="fr-FR" smtClean="0"/>
+              <a:t>2</a:t>
+            </a:fld>
+            <a:endParaRPr lang="fr-FR"/>
+          </a:p>
+        </p:txBody>
+      </p:sp>
+    </p:spTree>
+    <p:extLst>
+      <p:ext uri="{BB962C8B-B14F-4D97-AF65-F5344CB8AC3E}">
+        <p14:creationId xmlns:p14="http://schemas.microsoft.com/office/powerpoint/2010/main" val="1111395170"/>
+      </p:ext>
+    </p:extLst>
+  </p:cSld>
+  <p:clrMapOvr>
+    <a:masterClrMapping/>
+  </p:clrMapOvr>
+</p:sld>
+</file>
+
+<file path=ppt/slides/slide3.xml><?xml version="1.0" encoding="utf-8"?>
+<p:sld xmlns:a="http://schemas.openxmlformats.org/drawingml/2006/main" xmlns:r="http://schemas.openxmlformats.org/officeDocument/2006/relationships" xmlns:p="http://schemas.openxmlformats.org/presentationml/2006/main">
+  <p:cSld>
+    <p:spTree>
+      <p:nvGrpSpPr>
+        <p:cNvPr id="1" name=""/>
+        <p:cNvGrpSpPr/>
+        <p:nvPr/>
+      </p:nvGrpSpPr>
+      <p:grpSpPr>
+        <a:xfrm>
+          <a:off x="0" y="0"/>
+          <a:ext cx="0" cy="0"/>
+          <a:chOff x="0" y="0"/>
+          <a:chExt cx="0" cy="0"/>
+        </a:xfrm>
+      </p:grpSpPr>
+      <p:sp>
+        <p:nvSpPr>
+          <p:cNvPr id="2" name="Titre 1">
+            <a:extLst>
+              <a:ext uri="{FF2B5EF4-FFF2-40B4-BE49-F238E27FC236}">
+                <a16:creationId xmlns:a16="http://schemas.microsoft.com/office/drawing/2014/main" id="{09A23A54-C0BF-168C-902F-A4032063C6C1}"/>
+              </a:ext>
+            </a:extLst>
+          </p:cNvPr>
+          <p:cNvSpPr>
+            <a:spLocks noGrp="1"/>
+          </p:cNvSpPr>
+          <p:nvPr>
+            <p:ph type="title"/>
+          </p:nvPr>
+        </p:nvSpPr>
+        <p:spPr/>
+        <p:txBody>
+          <a:bodyPr/>
+          <a:lstStyle/>
+          <a:p>
+            <a:r>
+              <a:rPr lang="fr-FR" dirty="0"/>
+              <a:t>Système global</a:t>
+            </a:r>
+          </a:p>
+        </p:txBody>
+      </p:sp>
+      <p:sp>
+        <p:nvSpPr>
+          <p:cNvPr id="3" name="Espace réservé du contenu 2">
+            <a:extLst>
+              <a:ext uri="{FF2B5EF4-FFF2-40B4-BE49-F238E27FC236}">
+                <a16:creationId xmlns:a16="http://schemas.microsoft.com/office/drawing/2014/main" id="{6D7D4A73-6C3F-5E24-329E-5775875616E2}"/>
+              </a:ext>
+            </a:extLst>
+          </p:cNvPr>
+          <p:cNvSpPr>
+            <a:spLocks noGrp="1"/>
+          </p:cNvSpPr>
+          <p:nvPr>
+            <p:ph idx="1"/>
+          </p:nvPr>
+        </p:nvSpPr>
+        <p:spPr/>
+        <p:txBody>
+          <a:bodyPr/>
+          <a:lstStyle/>
+          <a:p>
+            <a:endParaRPr lang="fr-FR"/>
+          </a:p>
+        </p:txBody>
+      </p:sp>
+      <p:sp>
+        <p:nvSpPr>
+          <p:cNvPr id="4" name="Espace réservé du numéro de diapositive 3">
+            <a:extLst>
+              <a:ext uri="{FF2B5EF4-FFF2-40B4-BE49-F238E27FC236}">
+                <a16:creationId xmlns:a16="http://schemas.microsoft.com/office/drawing/2014/main" id="{4F23FC63-172B-2BC0-EF46-EF974F675A60}"/>
+              </a:ext>
+            </a:extLst>
+          </p:cNvPr>
+          <p:cNvSpPr>
+            <a:spLocks noGrp="1"/>
+          </p:cNvSpPr>
+          <p:nvPr>
+            <p:ph type="sldNum" sz="quarter" idx="12"/>
+          </p:nvPr>
+        </p:nvSpPr>
+        <p:spPr/>
+        <p:txBody>
+          <a:bodyPr/>
+          <a:lstStyle/>
+          <a:p>
+            <a:fld id="{40743BAD-0FD4-4AFD-913F-F1B3782AF393}" type="slidenum">
+              <a:rPr lang="fr-FR" smtClean="0"/>
+              <a:t>3</a:t>
+            </a:fld>
+            <a:endParaRPr lang="fr-FR"/>
+          </a:p>
+        </p:txBody>
+      </p:sp>
+    </p:spTree>
+    <p:extLst>
+      <p:ext uri="{BB962C8B-B14F-4D97-AF65-F5344CB8AC3E}">
+        <p14:creationId xmlns:p14="http://schemas.microsoft.com/office/powerpoint/2010/main" val="1743646265"/>
+      </p:ext>
+    </p:extLst>
+  </p:cSld>
+  <p:clrMapOvr>
+    <a:masterClrMapping/>
+  </p:clrMapOvr>
+</p:sld>
+</file>
+
+<file path=ppt/slides/slide4.xml><?xml version="1.0" encoding="utf-8"?>
+<p:sld xmlns:a="http://schemas.openxmlformats.org/drawingml/2006/main" xmlns:r="http://schemas.openxmlformats.org/officeDocument/2006/relationships" xmlns:p="http://schemas.openxmlformats.org/presentationml/2006/main">
+  <p:cSld>
+    <p:spTree>
+      <p:nvGrpSpPr>
+        <p:cNvPr id="1" name=""/>
+        <p:cNvGrpSpPr/>
+        <p:nvPr/>
+      </p:nvGrpSpPr>
+      <p:grpSpPr>
+        <a:xfrm>
+          <a:off x="0" y="0"/>
+          <a:ext cx="0" cy="0"/>
+          <a:chOff x="0" y="0"/>
+          <a:chExt cx="0" cy="0"/>
+        </a:xfrm>
+      </p:grpSpPr>
+      <p:sp>
+        <p:nvSpPr>
+          <p:cNvPr id="2" name="Titre 1">
+            <a:extLst>
+              <a:ext uri="{FF2B5EF4-FFF2-40B4-BE49-F238E27FC236}">
+                <a16:creationId xmlns:a16="http://schemas.microsoft.com/office/drawing/2014/main" id="{1ABC6E94-C296-4FA6-2B52-8B461FE387E3}"/>
+              </a:ext>
+            </a:extLst>
+          </p:cNvPr>
+          <p:cNvSpPr>
+            <a:spLocks noGrp="1"/>
+          </p:cNvSpPr>
+          <p:nvPr>
+            <p:ph type="title"/>
+          </p:nvPr>
+        </p:nvSpPr>
+        <p:spPr/>
+        <p:txBody>
+          <a:bodyPr/>
+          <a:lstStyle/>
+          <a:p>
+            <a:r>
+              <a:rPr lang="fr-FR" dirty="0"/>
+              <a:t>Potentialités didactiques</a:t>
+            </a:r>
+          </a:p>
+        </p:txBody>
+      </p:sp>
+      <p:sp>
+        <p:nvSpPr>
+          <p:cNvPr id="3" name="Espace réservé du contenu 2">
+            <a:extLst>
+              <a:ext uri="{FF2B5EF4-FFF2-40B4-BE49-F238E27FC236}">
+                <a16:creationId xmlns:a16="http://schemas.microsoft.com/office/drawing/2014/main" id="{5C97CB6E-F688-808B-117F-61ED85AE49B2}"/>
+              </a:ext>
+            </a:extLst>
+          </p:cNvPr>
+          <p:cNvSpPr>
+            <a:spLocks noGrp="1"/>
+          </p:cNvSpPr>
+          <p:nvPr>
+            <p:ph idx="1"/>
+          </p:nvPr>
+        </p:nvSpPr>
+        <p:spPr/>
+        <p:txBody>
+          <a:bodyPr/>
+          <a:lstStyle/>
+          <a:p>
+            <a:endParaRPr lang="fr-FR" dirty="0"/>
+          </a:p>
+        </p:txBody>
+      </p:sp>
+      <p:sp>
+        <p:nvSpPr>
+          <p:cNvPr id="4" name="Espace réservé du numéro de diapositive 3">
+            <a:extLst>
+              <a:ext uri="{FF2B5EF4-FFF2-40B4-BE49-F238E27FC236}">
+                <a16:creationId xmlns:a16="http://schemas.microsoft.com/office/drawing/2014/main" id="{B7FFB85E-5A38-63B7-2A8E-FCB94D103CFF}"/>
+              </a:ext>
+            </a:extLst>
+          </p:cNvPr>
+          <p:cNvSpPr>
+            <a:spLocks noGrp="1"/>
+          </p:cNvSpPr>
+          <p:nvPr>
+            <p:ph type="sldNum" sz="quarter" idx="12"/>
+          </p:nvPr>
+        </p:nvSpPr>
+        <p:spPr/>
+        <p:txBody>
+          <a:bodyPr/>
+          <a:lstStyle/>
+          <a:p>
+            <a:fld id="{40743BAD-0FD4-4AFD-913F-F1B3782AF393}" type="slidenum">
+              <a:rPr lang="fr-FR" smtClean="0"/>
+              <a:t>4</a:t>
+            </a:fld>
+            <a:endParaRPr lang="fr-FR"/>
+          </a:p>
+        </p:txBody>
+      </p:sp>
+    </p:spTree>
+    <p:extLst>
+      <p:ext uri="{BB962C8B-B14F-4D97-AF65-F5344CB8AC3E}">
+        <p14:creationId xmlns:p14="http://schemas.microsoft.com/office/powerpoint/2010/main" val="1057165519"/>
+      </p:ext>
+    </p:extLst>
+  </p:cSld>
+  <p:clrMapOvr>
+    <a:masterClrMapping/>
+  </p:clrMapOvr>
+</p:sld>
+</file>
+
+<file path=ppt/slides/slide5.xml><?xml version="1.0" encoding="utf-8"?>
+<p:sld xmlns:a="http://schemas.openxmlformats.org/drawingml/2006/main" xmlns:r="http://schemas.openxmlformats.org/officeDocument/2006/relationships" xmlns:p="http://schemas.openxmlformats.org/presentationml/2006/main">
+  <p:cSld>
+    <p:spTree>
+      <p:nvGrpSpPr>
+        <p:cNvPr id="1" name=""/>
+        <p:cNvGrpSpPr/>
+        <p:nvPr/>
+      </p:nvGrpSpPr>
+      <p:grpSpPr>
+        <a:xfrm>
+          <a:off x="0" y="0"/>
+          <a:ext cx="0" cy="0"/>
+          <a:chOff x="0" y="0"/>
+          <a:chExt cx="0" cy="0"/>
+        </a:xfrm>
+      </p:grpSpPr>
+      <p:sp>
+        <p:nvSpPr>
+          <p:cNvPr id="5" name="Titre 4">
+            <a:extLst>
+              <a:ext uri="{FF2B5EF4-FFF2-40B4-BE49-F238E27FC236}">
+                <a16:creationId xmlns:a16="http://schemas.microsoft.com/office/drawing/2014/main" id="{4BF94A4F-B7ED-DDE5-0174-D5F9E739145C}"/>
+              </a:ext>
+            </a:extLst>
+          </p:cNvPr>
+          <p:cNvSpPr>
+            <a:spLocks noGrp="1"/>
+          </p:cNvSpPr>
+          <p:nvPr>
+            <p:ph type="title"/>
+          </p:nvPr>
+        </p:nvSpPr>
+        <p:spPr/>
+        <p:txBody>
+          <a:bodyPr>
+            <a:normAutofit fontScale="90000"/>
+          </a:bodyPr>
+          <a:lstStyle/>
+          <a:p>
+            <a:r>
+              <a:rPr lang="fr-FR" dirty="0"/>
+              <a:t>Présentation des manipulations réalisées</a:t>
+            </a:r>
+          </a:p>
+        </p:txBody>
+      </p:sp>
+      <p:sp>
+        <p:nvSpPr>
+          <p:cNvPr id="6" name="Espace réservé du texte 5">
+            <a:extLst>
+              <a:ext uri="{FF2B5EF4-FFF2-40B4-BE49-F238E27FC236}">
+                <a16:creationId xmlns:a16="http://schemas.microsoft.com/office/drawing/2014/main" id="{98989753-6C0F-ECFD-5470-E4E96160B4A2}"/>
+              </a:ext>
+            </a:extLst>
+          </p:cNvPr>
+          <p:cNvSpPr>
+            <a:spLocks noGrp="1"/>
+          </p:cNvSpPr>
+          <p:nvPr>
+            <p:ph type="body" idx="1"/>
+          </p:nvPr>
+        </p:nvSpPr>
+        <p:spPr/>
+        <p:txBody>
+          <a:bodyPr/>
+          <a:lstStyle/>
+          <a:p>
+            <a:endParaRPr lang="fr-FR"/>
+          </a:p>
+        </p:txBody>
+      </p:sp>
+      <p:sp>
+        <p:nvSpPr>
+          <p:cNvPr id="4" name="Espace réservé du numéro de diapositive 3">
+            <a:extLst>
+              <a:ext uri="{FF2B5EF4-FFF2-40B4-BE49-F238E27FC236}">
+                <a16:creationId xmlns:a16="http://schemas.microsoft.com/office/drawing/2014/main" id="{FC56BF3B-EC0B-ABCA-0499-3DB2CFDE0403}"/>
+              </a:ext>
+            </a:extLst>
+          </p:cNvPr>
+          <p:cNvSpPr>
+            <a:spLocks noGrp="1"/>
+          </p:cNvSpPr>
+          <p:nvPr>
+            <p:ph type="sldNum" sz="quarter" idx="4"/>
+          </p:nvPr>
+        </p:nvSpPr>
+        <p:spPr/>
+        <p:txBody>
+          <a:bodyPr/>
+          <a:lstStyle/>
+          <a:p>
+            <a:fld id="{40743BAD-0FD4-4AFD-913F-F1B3782AF393}" type="slidenum">
+              <a:rPr lang="fr-FR" smtClean="0"/>
+              <a:t>5</a:t>
+            </a:fld>
+            <a:endParaRPr lang="fr-FR"/>
+          </a:p>
+        </p:txBody>
+      </p:sp>
+    </p:spTree>
+    <p:extLst>
+      <p:ext uri="{BB962C8B-B14F-4D97-AF65-F5344CB8AC3E}">
+        <p14:creationId xmlns:p14="http://schemas.microsoft.com/office/powerpoint/2010/main" val="1179456515"/>
+      </p:ext>
+    </p:extLst>
+  </p:cSld>
+  <p:clrMapOvr>
+    <a:masterClrMapping/>
+  </p:clrMapOvr>
+</p:sld>
+</file>
+
+<file path=ppt/slides/slide6.xml><?xml version="1.0" encoding="utf-8"?>
+<p:sld xmlns:a="http://schemas.openxmlformats.org/drawingml/2006/main" xmlns:r="http://schemas.openxmlformats.org/officeDocument/2006/relationships" xmlns:p="http://schemas.openxmlformats.org/presentationml/2006/main">
+  <p:cSld>
+    <p:spTree>
+      <p:nvGrpSpPr>
+        <p:cNvPr id="1" name=""/>
+        <p:cNvGrpSpPr/>
+        <p:nvPr/>
+      </p:nvGrpSpPr>
+      <p:grpSpPr>
+        <a:xfrm>
+          <a:off x="0" y="0"/>
+          <a:ext cx="0" cy="0"/>
+          <a:chOff x="0" y="0"/>
+          <a:chExt cx="0" cy="0"/>
+        </a:xfrm>
+      </p:grpSpPr>
+      <p:sp>
+        <p:nvSpPr>
+          <p:cNvPr id="5" name="Titre 4">
+            <a:extLst>
+              <a:ext uri="{FF2B5EF4-FFF2-40B4-BE49-F238E27FC236}">
+                <a16:creationId xmlns:a16="http://schemas.microsoft.com/office/drawing/2014/main" id="{64015CF7-56D8-0727-1E0D-3444C9FEC38A}"/>
+              </a:ext>
+            </a:extLst>
+          </p:cNvPr>
+          <p:cNvSpPr>
+            <a:spLocks noGrp="1"/>
+          </p:cNvSpPr>
+          <p:nvPr>
+            <p:ph type="title"/>
+          </p:nvPr>
+        </p:nvSpPr>
+        <p:spPr/>
+        <p:txBody>
+          <a:bodyPr/>
+          <a:lstStyle/>
+          <a:p>
+            <a:endParaRPr lang="fr-FR"/>
+          </a:p>
+        </p:txBody>
+      </p:sp>
+      <p:sp>
+        <p:nvSpPr>
+          <p:cNvPr id="6" name="Espace réservé du contenu 5">
+            <a:extLst>
+              <a:ext uri="{FF2B5EF4-FFF2-40B4-BE49-F238E27FC236}">
+                <a16:creationId xmlns:a16="http://schemas.microsoft.com/office/drawing/2014/main" id="{C8B37360-714F-F41A-CE43-60C98F430CF4}"/>
+              </a:ext>
+            </a:extLst>
+          </p:cNvPr>
+          <p:cNvSpPr>
+            <a:spLocks noGrp="1"/>
+          </p:cNvSpPr>
+          <p:nvPr>
+            <p:ph idx="1"/>
+          </p:nvPr>
+        </p:nvSpPr>
+        <p:spPr/>
+        <p:txBody>
+          <a:bodyPr/>
+          <a:lstStyle/>
+          <a:p>
+            <a:endParaRPr lang="fr-FR"/>
+          </a:p>
+        </p:txBody>
+      </p:sp>
+      <p:sp>
+        <p:nvSpPr>
+          <p:cNvPr id="4" name="Espace réservé du numéro de diapositive 3">
+            <a:extLst>
+              <a:ext uri="{FF2B5EF4-FFF2-40B4-BE49-F238E27FC236}">
+                <a16:creationId xmlns:a16="http://schemas.microsoft.com/office/drawing/2014/main" id="{CFC4B19D-3F27-A52C-6A13-1C732FFE3A8C}"/>
+              </a:ext>
+            </a:extLst>
+          </p:cNvPr>
+          <p:cNvSpPr>
+            <a:spLocks noGrp="1"/>
+          </p:cNvSpPr>
+          <p:nvPr>
+            <p:ph type="sldNum" sz="quarter" idx="12"/>
+          </p:nvPr>
+        </p:nvSpPr>
+        <p:spPr/>
+        <p:txBody>
+          <a:bodyPr/>
+          <a:lstStyle/>
+          <a:p>
+            <a:fld id="{40743BAD-0FD4-4AFD-913F-F1B3782AF393}" type="slidenum">
+              <a:rPr lang="fr-FR" smtClean="0"/>
+              <a:pPr/>
+              <a:t>6</a:t>
+            </a:fld>
+            <a:endParaRPr lang="fr-FR" dirty="0"/>
+          </a:p>
+        </p:txBody>
+      </p:sp>
+    </p:spTree>
+    <p:extLst>
+      <p:ext uri="{BB962C8B-B14F-4D97-AF65-F5344CB8AC3E}">
+        <p14:creationId xmlns:p14="http://schemas.microsoft.com/office/powerpoint/2010/main" val="2653643583"/>
+      </p:ext>
+    </p:extLst>
+  </p:cSld>
+  <p:clrMapOvr>
+    <a:masterClrMapping/>
+  </p:clrMapOvr>
+</p:sld>
+</file>
+
+<file path=ppt/slides/slide7.xml><?xml version="1.0" encoding="utf-8"?>
+<p:sld xmlns:a="http://schemas.openxmlformats.org/drawingml/2006/main" xmlns:r="http://schemas.openxmlformats.org/officeDocument/2006/relationships" xmlns:p="http://schemas.openxmlformats.org/presentationml/2006/main">
+  <p:cSld>
+    <p:spTree>
+      <p:nvGrpSpPr>
+        <p:cNvPr id="1" name=""/>
+        <p:cNvGrpSpPr/>
+        <p:nvPr/>
+      </p:nvGrpSpPr>
+      <p:grpSpPr>
+        <a:xfrm>
+          <a:off x="0" y="0"/>
+          <a:ext cx="0" cy="0"/>
+          <a:chOff x="0" y="0"/>
+          <a:chExt cx="0" cy="0"/>
+        </a:xfrm>
+      </p:grpSpPr>
+      <p:sp>
+        <p:nvSpPr>
+          <p:cNvPr id="5" name="Titre 4">
+            <a:extLst>
+              <a:ext uri="{FF2B5EF4-FFF2-40B4-BE49-F238E27FC236}">
+                <a16:creationId xmlns:a16="http://schemas.microsoft.com/office/drawing/2014/main" id="{1422FC55-0445-5EEB-F3E6-3206A7ACB207}"/>
+              </a:ext>
+            </a:extLst>
+          </p:cNvPr>
+          <p:cNvSpPr>
+            <a:spLocks noGrp="1"/>
+          </p:cNvSpPr>
+          <p:nvPr>
+            <p:ph type="title"/>
+          </p:nvPr>
+        </p:nvSpPr>
+        <p:spPr/>
+        <p:txBody>
+          <a:bodyPr>
+            <a:normAutofit fontScale="90000"/>
+          </a:bodyPr>
+          <a:lstStyle/>
+          <a:p>
+            <a:r>
+              <a:rPr lang="fr-FR" dirty="0"/>
+              <a:t>Présentation de la séquence pédagogique</a:t>
+            </a:r>
+          </a:p>
+        </p:txBody>
+      </p:sp>
+      <p:sp>
+        <p:nvSpPr>
+          <p:cNvPr id="6" name="Espace réservé du texte 5">
+            <a:extLst>
+              <a:ext uri="{FF2B5EF4-FFF2-40B4-BE49-F238E27FC236}">
+                <a16:creationId xmlns:a16="http://schemas.microsoft.com/office/drawing/2014/main" id="{F7F0CCBD-BC96-E09F-AAEA-5835D192F407}"/>
+              </a:ext>
+            </a:extLst>
+          </p:cNvPr>
+          <p:cNvSpPr>
+            <a:spLocks noGrp="1"/>
+          </p:cNvSpPr>
+          <p:nvPr>
+            <p:ph type="body" idx="1"/>
+          </p:nvPr>
+        </p:nvSpPr>
+        <p:spPr/>
+        <p:txBody>
+          <a:bodyPr/>
+          <a:lstStyle/>
+          <a:p>
+            <a:endParaRPr lang="fr-FR"/>
+          </a:p>
+        </p:txBody>
+      </p:sp>
+      <p:sp>
+        <p:nvSpPr>
+          <p:cNvPr id="4" name="Espace réservé du numéro de diapositive 3">
+            <a:extLst>
+              <a:ext uri="{FF2B5EF4-FFF2-40B4-BE49-F238E27FC236}">
+                <a16:creationId xmlns:a16="http://schemas.microsoft.com/office/drawing/2014/main" id="{5193003F-EBAA-FB9D-F1DD-FB8D5FF2C044}"/>
+              </a:ext>
+            </a:extLst>
+          </p:cNvPr>
+          <p:cNvSpPr>
+            <a:spLocks noGrp="1"/>
+          </p:cNvSpPr>
+          <p:nvPr>
+            <p:ph type="sldNum" sz="quarter" idx="4"/>
+          </p:nvPr>
+        </p:nvSpPr>
+        <p:spPr/>
+        <p:txBody>
+          <a:bodyPr/>
+          <a:lstStyle/>
+          <a:p>
+            <a:fld id="{40743BAD-0FD4-4AFD-913F-F1B3782AF393}" type="slidenum">
+              <a:rPr lang="fr-FR" smtClean="0"/>
+              <a:t>7</a:t>
+            </a:fld>
+            <a:endParaRPr lang="fr-FR"/>
+          </a:p>
+        </p:txBody>
+      </p:sp>
+    </p:spTree>
+    <p:extLst>
+      <p:ext uri="{BB962C8B-B14F-4D97-AF65-F5344CB8AC3E}">
+        <p14:creationId xmlns:p14="http://schemas.microsoft.com/office/powerpoint/2010/main" val="1471523159"/>
+      </p:ext>
+    </p:extLst>
+  </p:cSld>
+  <p:clrMapOvr>
+    <a:masterClrMapping/>
+  </p:clrMapOvr>
+</p:sld>
+</file>
+
+<file path=ppt/slides/slide8.xml><?xml version="1.0" encoding="utf-8"?>
+<p:sld xmlns:a="http://schemas.openxmlformats.org/drawingml/2006/main" xmlns:r="http://schemas.openxmlformats.org/officeDocument/2006/relationships" xmlns:p="http://schemas.openxmlformats.org/presentationml/2006/main">
+  <p:cSld>
+    <p:spTree>
+      <p:nvGrpSpPr>
+        <p:cNvPr id="1" name=""/>
+        <p:cNvGrpSpPr/>
+        <p:nvPr/>
+      </p:nvGrpSpPr>
+      <p:grpSpPr>
+        <a:xfrm>
+          <a:off x="0" y="0"/>
+          <a:ext cx="0" cy="0"/>
+          <a:chOff x="0" y="0"/>
+          <a:chExt cx="0" cy="0"/>
+        </a:xfrm>
+      </p:grpSpPr>
+      <p:sp>
+        <p:nvSpPr>
+          <p:cNvPr id="5" name="Titre 4">
+            <a:extLst>
+              <a:ext uri="{FF2B5EF4-FFF2-40B4-BE49-F238E27FC236}">
+                <a16:creationId xmlns:a16="http://schemas.microsoft.com/office/drawing/2014/main" id="{4F5B5EE8-418A-F11D-D63F-BFCEE1F1286D}"/>
+              </a:ext>
+            </a:extLst>
+          </p:cNvPr>
+          <p:cNvSpPr>
+            <a:spLocks noGrp="1"/>
+          </p:cNvSpPr>
+          <p:nvPr>
+            <p:ph type="title"/>
+          </p:nvPr>
+        </p:nvSpPr>
+        <p:spPr/>
+        <p:txBody>
+          <a:bodyPr/>
+          <a:lstStyle/>
+          <a:p>
+            <a:r>
+              <a:rPr lang="fr-FR" dirty="0"/>
+              <a:t>Contexte</a:t>
+            </a:r>
+          </a:p>
+        </p:txBody>
+      </p:sp>
+      <p:sp>
+        <p:nvSpPr>
+          <p:cNvPr id="6" name="Espace réservé du contenu 5">
+            <a:extLst>
+              <a:ext uri="{FF2B5EF4-FFF2-40B4-BE49-F238E27FC236}">
+                <a16:creationId xmlns:a16="http://schemas.microsoft.com/office/drawing/2014/main" id="{F29118A1-C019-6AED-F2EC-687E34070E8B}"/>
+              </a:ext>
+            </a:extLst>
+          </p:cNvPr>
+          <p:cNvSpPr>
+            <a:spLocks noGrp="1"/>
+          </p:cNvSpPr>
+          <p:nvPr>
+            <p:ph idx="1"/>
+          </p:nvPr>
+        </p:nvSpPr>
+        <p:spPr/>
+        <p:txBody>
+          <a:bodyPr/>
+          <a:lstStyle/>
+          <a:p>
+            <a:endParaRPr lang="fr-FR"/>
+          </a:p>
+        </p:txBody>
+      </p:sp>
+      <p:sp>
+        <p:nvSpPr>
+          <p:cNvPr id="4" name="Espace réservé du numéro de diapositive 3">
+            <a:extLst>
+              <a:ext uri="{FF2B5EF4-FFF2-40B4-BE49-F238E27FC236}">
+                <a16:creationId xmlns:a16="http://schemas.microsoft.com/office/drawing/2014/main" id="{FBDDA493-C0B5-0055-5885-4AF89AFB8A78}"/>
+              </a:ext>
+            </a:extLst>
+          </p:cNvPr>
+          <p:cNvSpPr>
+            <a:spLocks noGrp="1"/>
+          </p:cNvSpPr>
+          <p:nvPr>
+            <p:ph type="sldNum" sz="quarter" idx="12"/>
+          </p:nvPr>
+        </p:nvSpPr>
+        <p:spPr/>
+        <p:txBody>
+          <a:bodyPr/>
+          <a:lstStyle/>
+          <a:p>
+            <a:fld id="{40743BAD-0FD4-4AFD-913F-F1B3782AF393}" type="slidenum">
+              <a:rPr lang="fr-FR" smtClean="0"/>
+              <a:pPr/>
+              <a:t>8</a:t>
+            </a:fld>
+            <a:endParaRPr lang="fr-FR" dirty="0"/>
+          </a:p>
+        </p:txBody>
+      </p:sp>
+    </p:spTree>
+    <p:extLst>
+      <p:ext uri="{BB962C8B-B14F-4D97-AF65-F5344CB8AC3E}">
+        <p14:creationId xmlns:p14="http://schemas.microsoft.com/office/powerpoint/2010/main" val="2020172637"/>
+      </p:ext>
+    </p:extLst>
+  </p:cSld>
+  <p:clrMapOvr>
+    <a:masterClrMapping/>
+  </p:clrMapOvr>
+</p:sld>
+</file>
+
+<file path=ppt/slides/slide9.xml><?xml version="1.0" encoding="utf-8"?>
+<p:sld xmlns:a="http://schemas.openxmlformats.org/drawingml/2006/main" xmlns:r="http://schemas.openxmlformats.org/officeDocument/2006/relationships" xmlns:p="http://schemas.openxmlformats.org/presentationml/2006/main">
+  <p:cSld>
+    <p:spTree>
+      <p:nvGrpSpPr>
+        <p:cNvPr id="1" name="">
+          <a:extLst>
+            <a:ext uri="{FF2B5EF4-FFF2-40B4-BE49-F238E27FC236}">
+              <a16:creationId xmlns:a16="http://schemas.microsoft.com/office/drawing/2014/main" id="{32A059D3-1033-C21A-D549-35D825E06049}"/>
+            </a:ext>
+          </a:extLst>
+        </p:cNvPr>
+        <p:cNvGrpSpPr/>
+        <p:nvPr/>
+      </p:nvGrpSpPr>
+      <p:grpSpPr>
+        <a:xfrm>
+          <a:off x="0" y="0"/>
+          <a:ext cx="0" cy="0"/>
+          <a:chOff x="0" y="0"/>
+          <a:chExt cx="0" cy="0"/>
+        </a:xfrm>
+      </p:grpSpPr>
+      <p:sp>
+        <p:nvSpPr>
+          <p:cNvPr id="5" name="Titre 4">
+            <a:extLst>
+              <a:ext uri="{FF2B5EF4-FFF2-40B4-BE49-F238E27FC236}">
+                <a16:creationId xmlns:a16="http://schemas.microsoft.com/office/drawing/2014/main" id="{E220F5FB-4AEA-0E53-3119-A81032826553}"/>
+              </a:ext>
+            </a:extLst>
+          </p:cNvPr>
+          <p:cNvSpPr>
+            <a:spLocks noGrp="1"/>
+          </p:cNvSpPr>
+          <p:nvPr>
+            <p:ph type="title"/>
+          </p:nvPr>
+        </p:nvSpPr>
+        <p:spPr/>
+        <p:txBody>
+          <a:bodyPr/>
+          <a:lstStyle/>
+          <a:p>
+            <a:r>
+              <a:rPr lang="fr-FR" dirty="0"/>
+              <a:t>Démarches pédagogiques</a:t>
+            </a:r>
+          </a:p>
+        </p:txBody>
+      </p:sp>
+      <p:sp>
+        <p:nvSpPr>
+          <p:cNvPr id="6" name="Espace réservé du contenu 5">
+            <a:extLst>
+              <a:ext uri="{FF2B5EF4-FFF2-40B4-BE49-F238E27FC236}">
+                <a16:creationId xmlns:a16="http://schemas.microsoft.com/office/drawing/2014/main" id="{0C5343DC-792C-558F-8832-07AFEDF38666}"/>
+              </a:ext>
+            </a:extLst>
+          </p:cNvPr>
+          <p:cNvSpPr>
+            <a:spLocks noGrp="1"/>
+          </p:cNvSpPr>
+          <p:nvPr>
+            <p:ph idx="1"/>
+          </p:nvPr>
+        </p:nvSpPr>
+        <p:spPr/>
+        <p:txBody>
+          <a:bodyPr/>
+          <a:lstStyle/>
+          <a:p>
+            <a:endParaRPr lang="fr-FR" dirty="0"/>
+          </a:p>
+        </p:txBody>
+      </p:sp>
+      <p:sp>
+        <p:nvSpPr>
+          <p:cNvPr id="4" name="Espace réservé du numéro de diapositive 3">
+            <a:extLst>
+              <a:ext uri="{FF2B5EF4-FFF2-40B4-BE49-F238E27FC236}">
+                <a16:creationId xmlns:a16="http://schemas.microsoft.com/office/drawing/2014/main" id="{46DED23E-DF72-BBC0-6CE6-BE6D2253A243}"/>
+              </a:ext>
+            </a:extLst>
+          </p:cNvPr>
+          <p:cNvSpPr>
+            <a:spLocks noGrp="1"/>
+          </p:cNvSpPr>
+          <p:nvPr>
+            <p:ph type="sldNum" sz="quarter" idx="12"/>
+          </p:nvPr>
+        </p:nvSpPr>
+        <p:spPr/>
+        <p:txBody>
+          <a:bodyPr/>
+          <a:lstStyle/>
+          <a:p>
+            <a:fld id="{40743BAD-0FD4-4AFD-913F-F1B3782AF393}" type="slidenum">
+              <a:rPr lang="fr-FR" smtClean="0"/>
+              <a:pPr/>
+              <a:t>9</a:t>
+            </a:fld>
+            <a:endParaRPr lang="fr-FR" dirty="0"/>
+          </a:p>
+        </p:txBody>
+      </p:sp>
+    </p:spTree>
+    <p:extLst>
+      <p:ext uri="{BB962C8B-B14F-4D97-AF65-F5344CB8AC3E}">
+        <p14:creationId xmlns:p14="http://schemas.microsoft.com/office/powerpoint/2010/main" val="2948027405"/>
       </p:ext>
     </p:extLst>
   </p:cSld>
@@ -3385,6 +5425,264 @@
 </file>
 
 <file path=ppt/theme/theme1.xml><?xml version="1.0" encoding="utf-8"?>
+<a:theme xmlns:a="http://schemas.openxmlformats.org/drawingml/2006/main" name="Cadrage">
+  <a:themeElements>
+    <a:clrScheme name="Cadrage">
+      <a:dk1>
+        <a:sysClr val="windowText" lastClr="000000"/>
+      </a:dk1>
+      <a:lt1>
+        <a:sysClr val="window" lastClr="FFFFFF"/>
+      </a:lt1>
+      <a:dk2>
+        <a:srgbClr val="191B0E"/>
+      </a:dk2>
+      <a:lt2>
+        <a:srgbClr val="EFEDE3"/>
+      </a:lt2>
+      <a:accent1>
+        <a:srgbClr val="8C8D86"/>
+      </a:accent1>
+      <a:accent2>
+        <a:srgbClr val="E6C069"/>
+      </a:accent2>
+      <a:accent3>
+        <a:srgbClr val="897B61"/>
+      </a:accent3>
+      <a:accent4>
+        <a:srgbClr val="8DAB8E"/>
+      </a:accent4>
+      <a:accent5>
+        <a:srgbClr val="77A2BB"/>
+      </a:accent5>
+      <a:accent6>
+        <a:srgbClr val="E28394"/>
+      </a:accent6>
+      <a:hlink>
+        <a:srgbClr val="77A2BB"/>
+      </a:hlink>
+      <a:folHlink>
+        <a:srgbClr val="957A99"/>
+      </a:folHlink>
+    </a:clrScheme>
+    <a:fontScheme name="Cadrage">
+      <a:majorFont>
+        <a:latin typeface="Franklin Gothic Book" panose="020B0503020102020204"/>
+        <a:ea typeface=""/>
+        <a:cs typeface=""/>
+        <a:font script="Jpan" typeface="メイリオ"/>
+        <a:font script="Hang" typeface="돋움"/>
+        <a:font script="Hans" typeface="华文楷体"/>
+        <a:font script="Hant" typeface="微軟正黑體"/>
+        <a:font script="Arab" typeface="Tahoma"/>
+        <a:font script="Hebr" typeface="Aharoni"/>
+        <a:font script="Thai" typeface="LilyUPC"/>
+        <a:font script="Ethi" typeface="Nyala"/>
+        <a:font script="Beng" typeface="Vrinda"/>
+        <a:font script="Gujr" typeface="Shruti"/>
+        <a:font script="Khmr" typeface="DaunPenh"/>
+        <a:font script="Knda" typeface="Tunga"/>
+        <a:font script="Guru" typeface="Raavi"/>
+        <a:font script="Cans" typeface="Euphemia"/>
+        <a:font script="Cher" typeface="Plantagenet Cherokee"/>
+        <a:font script="Yiii" typeface="Microsoft Yi Baiti"/>
+        <a:font script="Tibt" typeface="Microsoft Himalaya"/>
+        <a:font script="Thaa" typeface="MV Boli"/>
+        <a:font script="Deva" typeface="Mangal"/>
+        <a:font script="Telu" typeface="Gautami"/>
+        <a:font script="Taml" typeface="Latha"/>
+        <a:font script="Syrc" typeface="Estrangelo Edessa"/>
+        <a:font script="Orya" typeface="Kalinga"/>
+        <a:font script="Mlym" typeface="Kartika"/>
+        <a:font script="Laoo" typeface="DokChampa"/>
+        <a:font script="Sinh" typeface="Iskoola Pota"/>
+        <a:font script="Mong" typeface="Mongolian Baiti"/>
+        <a:font script="Viet" typeface="Tahoma"/>
+        <a:font script="Uigh" typeface="Microsoft Uighur"/>
+        <a:font script="Geor" typeface="Sylfaen"/>
+      </a:majorFont>
+      <a:minorFont>
+        <a:latin typeface="Franklin Gothic Book" panose="020B0503020102020204"/>
+        <a:ea typeface=""/>
+        <a:cs typeface=""/>
+        <a:font script="Jpan" typeface="メイリオ"/>
+        <a:font script="Hang" typeface="돋움"/>
+        <a:font script="Hans" typeface="华文楷体"/>
+        <a:font script="Hant" typeface="微軟正黑體"/>
+        <a:font script="Arab" typeface="Tahoma"/>
+        <a:font script="Hebr" typeface="Aharoni"/>
+        <a:font script="Thai" typeface="LilyUPC"/>
+        <a:font script="Ethi" typeface="Nyala"/>
+        <a:font script="Beng" typeface="Vrinda"/>
+        <a:font script="Gujr" typeface="Shruti"/>
+        <a:font script="Khmr" typeface="DaunPenh"/>
+        <a:font script="Knda" typeface="Tunga"/>
+        <a:font script="Guru" typeface="Raavi"/>
+        <a:font script="Cans" typeface="Euphemia"/>
+        <a:font script="Cher" typeface="Plantagenet Cherokee"/>
+        <a:font script="Yiii" typeface="Microsoft Yi Baiti"/>
+        <a:font script="Tibt" typeface="Microsoft Himalaya"/>
+        <a:font script="Thaa" typeface="MV Boli"/>
+        <a:font script="Deva" typeface="Mangal"/>
+        <a:font script="Telu" typeface="Gautami"/>
+        <a:font script="Taml" typeface="Latha"/>
+        <a:font script="Syrc" typeface="Estrangelo Edessa"/>
+        <a:font script="Orya" typeface="Kalinga"/>
+        <a:font script="Mlym" typeface="Kartika"/>
+        <a:font script="Laoo" typeface="DokChampa"/>
+        <a:font script="Sinh" typeface="Iskoola Pota"/>
+        <a:font script="Mong" typeface="Mongolian Baiti"/>
+        <a:font script="Viet" typeface="Tahoma"/>
+        <a:font script="Uigh" typeface="Microsoft Uighur"/>
+        <a:font script="Geor" typeface="Sylfaen"/>
+      </a:minorFont>
+    </a:fontScheme>
+    <a:fmtScheme name="Cadrage">
+      <a:fillStyleLst>
+        <a:solidFill>
+          <a:schemeClr val="phClr"/>
+        </a:solidFill>
+        <a:gradFill rotWithShape="1">
+          <a:gsLst>
+            <a:gs pos="0">
+              <a:schemeClr val="phClr">
+                <a:tint val="67000"/>
+                <a:satMod val="105000"/>
+                <a:lumMod val="110000"/>
+              </a:schemeClr>
+            </a:gs>
+            <a:gs pos="50000">
+              <a:schemeClr val="phClr">
+                <a:tint val="73000"/>
+                <a:satMod val="103000"/>
+                <a:lumMod val="105000"/>
+              </a:schemeClr>
+            </a:gs>
+            <a:gs pos="100000">
+              <a:schemeClr val="phClr">
+                <a:tint val="81000"/>
+                <a:satMod val="109000"/>
+                <a:lumMod val="105000"/>
+              </a:schemeClr>
+            </a:gs>
+          </a:gsLst>
+          <a:lin ang="5400000" scaled="0"/>
+        </a:gradFill>
+        <a:gradFill rotWithShape="1">
+          <a:gsLst>
+            <a:gs pos="0">
+              <a:schemeClr val="phClr">
+                <a:tint val="94000"/>
+                <a:satMod val="103000"/>
+                <a:lumMod val="102000"/>
+              </a:schemeClr>
+            </a:gs>
+            <a:gs pos="50000">
+              <a:schemeClr val="phClr">
+                <a:shade val="100000"/>
+                <a:satMod val="110000"/>
+                <a:lumMod val="100000"/>
+              </a:schemeClr>
+            </a:gs>
+            <a:gs pos="100000">
+              <a:schemeClr val="phClr">
+                <a:shade val="78000"/>
+                <a:satMod val="120000"/>
+                <a:lumMod val="99000"/>
+              </a:schemeClr>
+            </a:gs>
+          </a:gsLst>
+          <a:lin ang="5400000" scaled="0"/>
+        </a:gradFill>
+      </a:fillStyleLst>
+      <a:lnStyleLst>
+        <a:ln w="6350" cap="flat" cmpd="sng" algn="in">
+          <a:solidFill>
+            <a:schemeClr val="phClr"/>
+          </a:solidFill>
+          <a:prstDash val="solid"/>
+        </a:ln>
+        <a:ln w="34925" cap="flat" cmpd="sng" algn="in">
+          <a:solidFill>
+            <a:schemeClr val="phClr"/>
+          </a:solidFill>
+          <a:prstDash val="solid"/>
+        </a:ln>
+        <a:ln w="19050" cap="flat" cmpd="sng" algn="in">
+          <a:solidFill>
+            <a:schemeClr val="phClr"/>
+          </a:solidFill>
+          <a:prstDash val="solid"/>
+        </a:ln>
+      </a:lnStyleLst>
+      <a:effectStyleLst>
+        <a:effectStyle>
+          <a:effectLst/>
+        </a:effectStyle>
+        <a:effectStyle>
+          <a:effectLst/>
+        </a:effectStyle>
+        <a:effectStyle>
+          <a:effectLst>
+            <a:outerShdw blurRad="57150" dist="19050" dir="5400000" algn="ctr" rotWithShape="0">
+              <a:srgbClr val="000000">
+                <a:alpha val="35000"/>
+              </a:srgbClr>
+            </a:outerShdw>
+          </a:effectLst>
+        </a:effectStyle>
+      </a:effectStyleLst>
+      <a:bgFillStyleLst>
+        <a:solidFill>
+          <a:schemeClr val="phClr"/>
+        </a:solidFill>
+        <a:solidFill>
+          <a:schemeClr val="phClr">
+            <a:tint val="95000"/>
+            <a:satMod val="170000"/>
+          </a:schemeClr>
+        </a:solidFill>
+        <a:gradFill rotWithShape="1">
+          <a:gsLst>
+            <a:gs pos="0">
+              <a:schemeClr val="phClr">
+                <a:tint val="93000"/>
+                <a:shade val="98000"/>
+                <a:satMod val="150000"/>
+                <a:lumMod val="102000"/>
+              </a:schemeClr>
+            </a:gs>
+            <a:gs pos="50000">
+              <a:schemeClr val="phClr">
+                <a:tint val="98000"/>
+                <a:shade val="90000"/>
+                <a:satMod val="130000"/>
+                <a:lumMod val="103000"/>
+              </a:schemeClr>
+            </a:gs>
+            <a:gs pos="100000">
+              <a:schemeClr val="phClr">
+                <a:shade val="63000"/>
+                <a:satMod val="120000"/>
+              </a:schemeClr>
+            </a:gs>
+          </a:gsLst>
+          <a:lin ang="5400000" scaled="0"/>
+        </a:gradFill>
+      </a:bgFillStyleLst>
+    </a:fmtScheme>
+  </a:themeElements>
+  <a:objectDefaults/>
+  <a:extraClrSchemeLst/>
+  <a:extLst>
+    <a:ext uri="{05A4C25C-085E-4340-85A3-A5531E510DB2}">
+      <thm15:themeFamily xmlns:thm15="http://schemas.microsoft.com/office/thememl/2012/main" name="Crop" id="{EC9488ED-E761-4D60-9AC4-764D1FE2C171}" vid="{CE19780C-D67D-4C13-9DE9-A52BC3BA51B4}"/>
+    </a:ext>
+  </a:extLst>
+</a:theme>
+</file>
+
+<file path=ppt/theme/theme2.xml><?xml version="1.0" encoding="utf-8"?>
 <a:theme xmlns:a="http://schemas.openxmlformats.org/drawingml/2006/main" name="Thème Office">
   <a:themeElements>
     <a:clrScheme name="Office">

--- a/fichiers/presentation/PresSpe.pptx
+++ b/fichiers/presentation/PresSpe.pptx
@@ -5,7 +5,7 @@
     <p:sldMasterId id="2147483797" r:id="rId1"/>
   </p:sldMasterIdLst>
   <p:notesMasterIdLst>
-    <p:notesMasterId r:id="rId11"/>
+    <p:notesMasterId r:id="rId22"/>
   </p:notesMasterIdLst>
   <p:sldIdLst>
     <p:sldId id="256" r:id="rId2"/>
@@ -17,6 +17,17 @@
     <p:sldId id="262" r:id="rId8"/>
     <p:sldId id="263" r:id="rId9"/>
     <p:sldId id="264" r:id="rId10"/>
+    <p:sldId id="265" r:id="rId11"/>
+    <p:sldId id="266" r:id="rId12"/>
+    <p:sldId id="267" r:id="rId13"/>
+    <p:sldId id="268" r:id="rId14"/>
+    <p:sldId id="269" r:id="rId15"/>
+    <p:sldId id="270" r:id="rId16"/>
+    <p:sldId id="271" r:id="rId17"/>
+    <p:sldId id="272" r:id="rId18"/>
+    <p:sldId id="273" r:id="rId19"/>
+    <p:sldId id="274" r:id="rId20"/>
+    <p:sldId id="275" r:id="rId21"/>
   </p:sldIdLst>
   <p:sldSz cx="12192000" cy="6858000"/>
   <p:notesSz cx="6858000" cy="9144000"/>
@@ -143,18 +154,48 @@
         <p14:section name="Présentation de la séquence pédagogique" id="{78D1BA11-83C6-4016-B96D-76C97B425BD7}">
           <p14:sldIdLst>
             <p14:sldId id="262"/>
+          </p14:sldIdLst>
+        </p14:section>
+        <p14:section name="Contexte de la filière" id="{6071A6E2-9DE2-47C4-81F8-C3279089F8EF}">
+          <p14:sldIdLst>
             <p14:sldId id="263"/>
             <p14:sldId id="264"/>
           </p14:sldIdLst>
         </p14:section>
-        <p14:section name="Terminale SI" id="{13ED0719-2399-4B12-B8F8-A3BF216056C7}">
-          <p14:sldIdLst/>
+        <p14:section name="Ressources" id="{D7246498-8261-4DEF-B54B-CD1426AB1115}">
+          <p14:sldIdLst>
+            <p14:sldId id="265"/>
+            <p14:sldId id="266"/>
+            <p14:sldId id="267"/>
+          </p14:sldIdLst>
         </p14:section>
-        <p14:section name="Terminale STI2D" id="{A1FD940E-7CC3-4994-84FF-F5481451CF84}">
-          <p14:sldIdLst/>
+        <p14:section name="Prérequis" id="{C75066A0-F66B-47C7-9F47-3330A2038956}">
+          <p14:sldIdLst>
+            <p14:sldId id="268"/>
+          </p14:sldIdLst>
         </p14:section>
-        <p14:section name="PT/PTSI" id="{523287D0-82AF-4373-81BD-973A9A71F0CE}">
-          <p14:sldIdLst/>
+        <p14:section name="Séquence" id="{B3637AB5-D08D-46B6-8604-6CE1066CE0A6}">
+          <p14:sldIdLst>
+            <p14:sldId id="269"/>
+            <p14:sldId id="270"/>
+          </p14:sldIdLst>
+        </p14:section>
+        <p14:section name="Évaluation" id="{A8EDA3F5-498D-40C0-8AC6-E93A93781C47}">
+          <p14:sldIdLst>
+            <p14:sldId id="271"/>
+          </p14:sldIdLst>
+        </p14:section>
+        <p14:section name="Séance à Caractère Expérimenal" id="{FD44380C-DC21-43B1-8CFB-1A441F1C1420}">
+          <p14:sldIdLst>
+            <p14:sldId id="272"/>
+            <p14:sldId id="273"/>
+          </p14:sldIdLst>
+        </p14:section>
+        <p14:section name="Conclusion" id="{D632A153-8878-4482-B04C-AEC8415B1CD7}">
+          <p14:sldIdLst>
+            <p14:sldId id="274"/>
+            <p14:sldId id="275"/>
+          </p14:sldIdLst>
         </p14:section>
       </p14:sectionLst>
     </p:ext>
@@ -163,6 +204,4637 @@
     </p:ext>
   </p:extLst>
 </p:presentation>
+</file>
+
+<file path=ppt/diagrams/colors1.xml><?xml version="1.0" encoding="utf-8"?>
+<dgm:colorsDef xmlns:dgm="http://schemas.openxmlformats.org/drawingml/2006/diagram" xmlns:a="http://schemas.openxmlformats.org/drawingml/2006/main" uniqueId="urn:microsoft.com/office/officeart/2005/8/colors/accent1_2">
+  <dgm:title val=""/>
+  <dgm:desc val=""/>
+  <dgm:catLst>
+    <dgm:cat type="accent1" pri="11200"/>
+  </dgm:catLst>
+  <dgm:styleLbl name="node0">
+    <dgm:fillClrLst meth="repeat">
+      <a:schemeClr val="accent1"/>
+    </dgm:fillClrLst>
+    <dgm:linClrLst meth="repeat">
+      <a:schemeClr val="lt1"/>
+    </dgm:linClrLst>
+    <dgm:effectClrLst/>
+    <dgm:txLinClrLst/>
+    <dgm:txFillClrLst/>
+    <dgm:txEffectClrLst/>
+  </dgm:styleLbl>
+  <dgm:styleLbl name="alignNode1">
+    <dgm:fillClrLst meth="repeat">
+      <a:schemeClr val="accent1"/>
+    </dgm:fillClrLst>
+    <dgm:linClrLst meth="repeat">
+      <a:schemeClr val="accent1"/>
+    </dgm:linClrLst>
+    <dgm:effectClrLst/>
+    <dgm:txLinClrLst/>
+    <dgm:txFillClrLst/>
+    <dgm:txEffectClrLst/>
+  </dgm:styleLbl>
+  <dgm:styleLbl name="node1">
+    <dgm:fillClrLst meth="repeat">
+      <a:schemeClr val="accent1"/>
+    </dgm:fillClrLst>
+    <dgm:linClrLst meth="repeat">
+      <a:schemeClr val="lt1"/>
+    </dgm:linClrLst>
+    <dgm:effectClrLst/>
+    <dgm:txLinClrLst/>
+    <dgm:txFillClrLst/>
+    <dgm:txEffectClrLst/>
+  </dgm:styleLbl>
+  <dgm:styleLbl name="lnNode1">
+    <dgm:fillClrLst meth="repeat">
+      <a:schemeClr val="accent1"/>
+    </dgm:fillClrLst>
+    <dgm:linClrLst meth="repeat">
+      <a:schemeClr val="lt1"/>
+    </dgm:linClrLst>
+    <dgm:effectClrLst/>
+    <dgm:txLinClrLst/>
+    <dgm:txFillClrLst/>
+    <dgm:txEffectClrLst/>
+  </dgm:styleLbl>
+  <dgm:styleLbl name="vennNode1">
+    <dgm:fillClrLst meth="repeat">
+      <a:schemeClr val="accent1">
+        <a:alpha val="50000"/>
+      </a:schemeClr>
+    </dgm:fillClrLst>
+    <dgm:linClrLst meth="repeat">
+      <a:schemeClr val="lt1"/>
+    </dgm:linClrLst>
+    <dgm:effectClrLst/>
+    <dgm:txLinClrLst/>
+    <dgm:txFillClrLst/>
+    <dgm:txEffectClrLst/>
+  </dgm:styleLbl>
+  <dgm:styleLbl name="node2">
+    <dgm:fillClrLst meth="repeat">
+      <a:schemeClr val="accent1"/>
+    </dgm:fillClrLst>
+    <dgm:linClrLst meth="repeat">
+      <a:schemeClr val="lt1"/>
+    </dgm:linClrLst>
+    <dgm:effectClrLst/>
+    <dgm:txLinClrLst/>
+    <dgm:txFillClrLst/>
+    <dgm:txEffectClrLst/>
+  </dgm:styleLbl>
+  <dgm:styleLbl name="node3">
+    <dgm:fillClrLst meth="repeat">
+      <a:schemeClr val="accent1"/>
+    </dgm:fillClrLst>
+    <dgm:linClrLst meth="repeat">
+      <a:schemeClr val="lt1"/>
+    </dgm:linClrLst>
+    <dgm:effectClrLst/>
+    <dgm:txLinClrLst/>
+    <dgm:txFillClrLst/>
+    <dgm:txEffectClrLst/>
+  </dgm:styleLbl>
+  <dgm:styleLbl name="node4">
+    <dgm:fillClrLst meth="repeat">
+      <a:schemeClr val="accent1"/>
+    </dgm:fillClrLst>
+    <dgm:linClrLst meth="repeat">
+      <a:schemeClr val="lt1"/>
+    </dgm:linClrLst>
+    <dgm:effectClrLst/>
+    <dgm:txLinClrLst/>
+    <dgm:txFillClrLst/>
+    <dgm:txEffectClrLst/>
+  </dgm:styleLbl>
+  <dgm:styleLbl name="fgImgPlace1">
+    <dgm:fillClrLst meth="repeat">
+      <a:schemeClr val="accent1">
+        <a:tint val="50000"/>
+      </a:schemeClr>
+    </dgm:fillClrLst>
+    <dgm:linClrLst meth="repeat">
+      <a:schemeClr val="lt1"/>
+    </dgm:linClrLst>
+    <dgm:effectClrLst/>
+    <dgm:txLinClrLst/>
+    <dgm:txFillClrLst meth="repeat">
+      <a:schemeClr val="lt1"/>
+    </dgm:txFillClrLst>
+    <dgm:txEffectClrLst/>
+  </dgm:styleLbl>
+  <dgm:styleLbl name="alignImgPlace1">
+    <dgm:fillClrLst meth="repeat">
+      <a:schemeClr val="accent1">
+        <a:tint val="50000"/>
+      </a:schemeClr>
+    </dgm:fillClrLst>
+    <dgm:linClrLst meth="repeat">
+      <a:schemeClr val="lt1"/>
+    </dgm:linClrLst>
+    <dgm:effectClrLst/>
+    <dgm:txLinClrLst/>
+    <dgm:txFillClrLst meth="repeat">
+      <a:schemeClr val="lt1"/>
+    </dgm:txFillClrLst>
+    <dgm:txEffectClrLst/>
+  </dgm:styleLbl>
+  <dgm:styleLbl name="bgImgPlace1">
+    <dgm:fillClrLst meth="repeat">
+      <a:schemeClr val="accent1">
+        <a:tint val="50000"/>
+      </a:schemeClr>
+    </dgm:fillClrLst>
+    <dgm:linClrLst meth="repeat">
+      <a:schemeClr val="lt1"/>
+    </dgm:linClrLst>
+    <dgm:effectClrLst/>
+    <dgm:txLinClrLst/>
+    <dgm:txFillClrLst meth="repeat">
+      <a:schemeClr val="lt1"/>
+    </dgm:txFillClrLst>
+    <dgm:txEffectClrLst/>
+  </dgm:styleLbl>
+  <dgm:styleLbl name="sibTrans2D1">
+    <dgm:fillClrLst meth="repeat">
+      <a:schemeClr val="accent1">
+        <a:tint val="60000"/>
+      </a:schemeClr>
+    </dgm:fillClrLst>
+    <dgm:linClrLst meth="repeat">
+      <a:schemeClr val="accent1">
+        <a:tint val="60000"/>
+      </a:schemeClr>
+    </dgm:linClrLst>
+    <dgm:effectClrLst/>
+    <dgm:txLinClrLst/>
+    <dgm:txFillClrLst/>
+    <dgm:txEffectClrLst/>
+  </dgm:styleLbl>
+  <dgm:styleLbl name="fgSibTrans2D1">
+    <dgm:fillClrLst meth="repeat">
+      <a:schemeClr val="accent1">
+        <a:tint val="60000"/>
+      </a:schemeClr>
+    </dgm:fillClrLst>
+    <dgm:linClrLst meth="repeat">
+      <a:schemeClr val="accent1">
+        <a:tint val="60000"/>
+      </a:schemeClr>
+    </dgm:linClrLst>
+    <dgm:effectClrLst/>
+    <dgm:txLinClrLst/>
+    <dgm:txFillClrLst/>
+    <dgm:txEffectClrLst/>
+  </dgm:styleLbl>
+  <dgm:styleLbl name="bgSibTrans2D1">
+    <dgm:fillClrLst meth="repeat">
+      <a:schemeClr val="accent1">
+        <a:tint val="60000"/>
+      </a:schemeClr>
+    </dgm:fillClrLst>
+    <dgm:linClrLst meth="repeat">
+      <a:schemeClr val="accent1">
+        <a:tint val="60000"/>
+      </a:schemeClr>
+    </dgm:linClrLst>
+    <dgm:effectClrLst/>
+    <dgm:txLinClrLst/>
+    <dgm:txFillClrLst/>
+    <dgm:txEffectClrLst/>
+  </dgm:styleLbl>
+  <dgm:styleLbl name="sibTrans1D1">
+    <dgm:fillClrLst meth="repeat">
+      <a:schemeClr val="accent1"/>
+    </dgm:fillClrLst>
+    <dgm:linClrLst meth="repeat">
+      <a:schemeClr val="accent1"/>
+    </dgm:linClrLst>
+    <dgm:effectClrLst/>
+    <dgm:txLinClrLst/>
+    <dgm:txFillClrLst meth="repeat">
+      <a:schemeClr val="tx1"/>
+    </dgm:txFillClrLst>
+    <dgm:txEffectClrLst/>
+  </dgm:styleLbl>
+  <dgm:styleLbl name="callout">
+    <dgm:fillClrLst meth="repeat">
+      <a:schemeClr val="accent1"/>
+    </dgm:fillClrLst>
+    <dgm:linClrLst meth="repeat">
+      <a:schemeClr val="accent1">
+        <a:tint val="50000"/>
+      </a:schemeClr>
+    </dgm:linClrLst>
+    <dgm:effectClrLst/>
+    <dgm:txLinClrLst/>
+    <dgm:txFillClrLst meth="repeat">
+      <a:schemeClr val="tx1"/>
+    </dgm:txFillClrLst>
+    <dgm:txEffectClrLst/>
+  </dgm:styleLbl>
+  <dgm:styleLbl name="asst0">
+    <dgm:fillClrLst meth="repeat">
+      <a:schemeClr val="accent1"/>
+    </dgm:fillClrLst>
+    <dgm:linClrLst meth="repeat">
+      <a:schemeClr val="lt1"/>
+    </dgm:linClrLst>
+    <dgm:effectClrLst/>
+    <dgm:txLinClrLst/>
+    <dgm:txFillClrLst/>
+    <dgm:txEffectClrLst/>
+  </dgm:styleLbl>
+  <dgm:styleLbl name="asst1">
+    <dgm:fillClrLst meth="repeat">
+      <a:schemeClr val="accent1"/>
+    </dgm:fillClrLst>
+    <dgm:linClrLst meth="repeat">
+      <a:schemeClr val="lt1"/>
+    </dgm:linClrLst>
+    <dgm:effectClrLst/>
+    <dgm:txLinClrLst/>
+    <dgm:txFillClrLst/>
+    <dgm:txEffectClrLst/>
+  </dgm:styleLbl>
+  <dgm:styleLbl name="asst2">
+    <dgm:fillClrLst meth="repeat">
+      <a:schemeClr val="accent1"/>
+    </dgm:fillClrLst>
+    <dgm:linClrLst meth="repeat">
+      <a:schemeClr val="lt1"/>
+    </dgm:linClrLst>
+    <dgm:effectClrLst/>
+    <dgm:txLinClrLst/>
+    <dgm:txFillClrLst/>
+    <dgm:txEffectClrLst/>
+  </dgm:styleLbl>
+  <dgm:styleLbl name="asst3">
+    <dgm:fillClrLst meth="repeat">
+      <a:schemeClr val="accent1"/>
+    </dgm:fillClrLst>
+    <dgm:linClrLst meth="repeat">
+      <a:schemeClr val="lt1"/>
+    </dgm:linClrLst>
+    <dgm:effectClrLst/>
+    <dgm:txLinClrLst/>
+    <dgm:txFillClrLst/>
+    <dgm:txEffectClrLst/>
+  </dgm:styleLbl>
+  <dgm:styleLbl name="asst4">
+    <dgm:fillClrLst meth="repeat">
+      <a:schemeClr val="accent1"/>
+    </dgm:fillClrLst>
+    <dgm:linClrLst meth="repeat">
+      <a:schemeClr val="lt1"/>
+    </dgm:linClrLst>
+    <dgm:effectClrLst/>
+    <dgm:txLinClrLst/>
+    <dgm:txFillClrLst/>
+    <dgm:txEffectClrLst/>
+  </dgm:styleLbl>
+  <dgm:styleLbl name="parChTrans2D1">
+    <dgm:fillClrLst meth="repeat">
+      <a:schemeClr val="accent1">
+        <a:tint val="60000"/>
+      </a:schemeClr>
+    </dgm:fillClrLst>
+    <dgm:linClrLst meth="repeat">
+      <a:schemeClr val="accent1">
+        <a:tint val="60000"/>
+      </a:schemeClr>
+    </dgm:linClrLst>
+    <dgm:effectClrLst/>
+    <dgm:txLinClrLst/>
+    <dgm:txFillClrLst meth="repeat">
+      <a:schemeClr val="lt1"/>
+    </dgm:txFillClrLst>
+    <dgm:txEffectClrLst/>
+  </dgm:styleLbl>
+  <dgm:styleLbl name="parChTrans2D2">
+    <dgm:fillClrLst meth="repeat">
+      <a:schemeClr val="accent1"/>
+    </dgm:fillClrLst>
+    <dgm:linClrLst meth="repeat">
+      <a:schemeClr val="accent1"/>
+    </dgm:linClrLst>
+    <dgm:effectClrLst/>
+    <dgm:txLinClrLst/>
+    <dgm:txFillClrLst meth="repeat">
+      <a:schemeClr val="lt1"/>
+    </dgm:txFillClrLst>
+    <dgm:txEffectClrLst/>
+  </dgm:styleLbl>
+  <dgm:styleLbl name="parChTrans2D3">
+    <dgm:fillClrLst meth="repeat">
+      <a:schemeClr val="accent1"/>
+    </dgm:fillClrLst>
+    <dgm:linClrLst meth="repeat">
+      <a:schemeClr val="accent1"/>
+    </dgm:linClrLst>
+    <dgm:effectClrLst/>
+    <dgm:txLinClrLst/>
+    <dgm:txFillClrLst meth="repeat">
+      <a:schemeClr val="lt1"/>
+    </dgm:txFillClrLst>
+    <dgm:txEffectClrLst/>
+  </dgm:styleLbl>
+  <dgm:styleLbl name="parChTrans2D4">
+    <dgm:fillClrLst meth="repeat">
+      <a:schemeClr val="accent1"/>
+    </dgm:fillClrLst>
+    <dgm:linClrLst meth="repeat">
+      <a:schemeClr val="accent1"/>
+    </dgm:linClrLst>
+    <dgm:effectClrLst/>
+    <dgm:txLinClrLst/>
+    <dgm:txFillClrLst meth="repeat">
+      <a:schemeClr val="lt1"/>
+    </dgm:txFillClrLst>
+    <dgm:txEffectClrLst/>
+  </dgm:styleLbl>
+  <dgm:styleLbl name="parChTrans1D1">
+    <dgm:fillClrLst meth="repeat">
+      <a:schemeClr val="accent1"/>
+    </dgm:fillClrLst>
+    <dgm:linClrLst meth="repeat">
+      <a:schemeClr val="accent1">
+        <a:shade val="60000"/>
+      </a:schemeClr>
+    </dgm:linClrLst>
+    <dgm:effectClrLst/>
+    <dgm:txLinClrLst/>
+    <dgm:txFillClrLst meth="repeat">
+      <a:schemeClr val="tx1"/>
+    </dgm:txFillClrLst>
+    <dgm:txEffectClrLst/>
+  </dgm:styleLbl>
+  <dgm:styleLbl name="parChTrans1D2">
+    <dgm:fillClrLst meth="repeat">
+      <a:schemeClr val="accent1"/>
+    </dgm:fillClrLst>
+    <dgm:linClrLst meth="repeat">
+      <a:schemeClr val="accent1">
+        <a:shade val="60000"/>
+      </a:schemeClr>
+    </dgm:linClrLst>
+    <dgm:effectClrLst/>
+    <dgm:txLinClrLst/>
+    <dgm:txFillClrLst meth="repeat">
+      <a:schemeClr val="tx1"/>
+    </dgm:txFillClrLst>
+    <dgm:txEffectClrLst/>
+  </dgm:styleLbl>
+  <dgm:styleLbl name="parChTrans1D3">
+    <dgm:fillClrLst meth="repeat">
+      <a:schemeClr val="accent1"/>
+    </dgm:fillClrLst>
+    <dgm:linClrLst meth="repeat">
+      <a:schemeClr val="accent1">
+        <a:shade val="80000"/>
+      </a:schemeClr>
+    </dgm:linClrLst>
+    <dgm:effectClrLst/>
+    <dgm:txLinClrLst/>
+    <dgm:txFillClrLst meth="repeat">
+      <a:schemeClr val="tx1"/>
+    </dgm:txFillClrLst>
+    <dgm:txEffectClrLst/>
+  </dgm:styleLbl>
+  <dgm:styleLbl name="parChTrans1D4">
+    <dgm:fillClrLst meth="repeat">
+      <a:schemeClr val="accent1"/>
+    </dgm:fillClrLst>
+    <dgm:linClrLst meth="repeat">
+      <a:schemeClr val="accent1">
+        <a:shade val="80000"/>
+      </a:schemeClr>
+    </dgm:linClrLst>
+    <dgm:effectClrLst/>
+    <dgm:txLinClrLst/>
+    <dgm:txFillClrLst meth="repeat">
+      <a:schemeClr val="tx1"/>
+    </dgm:txFillClrLst>
+    <dgm:txEffectClrLst/>
+  </dgm:styleLbl>
+  <dgm:styleLbl name="fgAcc1">
+    <dgm:fillClrLst meth="repeat">
+      <a:schemeClr val="lt1">
+        <a:alpha val="90000"/>
+      </a:schemeClr>
+    </dgm:fillClrLst>
+    <dgm:linClrLst meth="repeat">
+      <a:schemeClr val="accent1"/>
+    </dgm:linClrLst>
+    <dgm:effectClrLst/>
+    <dgm:txLinClrLst/>
+    <dgm:txFillClrLst meth="repeat">
+      <a:schemeClr val="dk1"/>
+    </dgm:txFillClrLst>
+    <dgm:txEffectClrLst/>
+  </dgm:styleLbl>
+  <dgm:styleLbl name="conFgAcc1">
+    <dgm:fillClrLst meth="repeat">
+      <a:schemeClr val="lt1">
+        <a:alpha val="90000"/>
+      </a:schemeClr>
+    </dgm:fillClrLst>
+    <dgm:linClrLst meth="repeat">
+      <a:schemeClr val="accent1"/>
+    </dgm:linClrLst>
+    <dgm:effectClrLst/>
+    <dgm:txLinClrLst/>
+    <dgm:txFillClrLst meth="repeat">
+      <a:schemeClr val="dk1"/>
+    </dgm:txFillClrLst>
+    <dgm:txEffectClrLst/>
+  </dgm:styleLbl>
+  <dgm:styleLbl name="alignAcc1">
+    <dgm:fillClrLst meth="repeat">
+      <a:schemeClr val="lt1">
+        <a:alpha val="90000"/>
+      </a:schemeClr>
+    </dgm:fillClrLst>
+    <dgm:linClrLst meth="repeat">
+      <a:schemeClr val="accent1"/>
+    </dgm:linClrLst>
+    <dgm:effectClrLst/>
+    <dgm:txLinClrLst/>
+    <dgm:txFillClrLst meth="repeat">
+      <a:schemeClr val="dk1"/>
+    </dgm:txFillClrLst>
+    <dgm:txEffectClrLst/>
+  </dgm:styleLbl>
+  <dgm:styleLbl name="trAlignAcc1">
+    <dgm:fillClrLst meth="repeat">
+      <a:schemeClr val="lt1">
+        <a:alpha val="40000"/>
+      </a:schemeClr>
+    </dgm:fillClrLst>
+    <dgm:linClrLst meth="repeat">
+      <a:schemeClr val="accent1"/>
+    </dgm:linClrLst>
+    <dgm:effectClrLst/>
+    <dgm:txLinClrLst/>
+    <dgm:txFillClrLst meth="repeat">
+      <a:schemeClr val="dk1"/>
+    </dgm:txFillClrLst>
+    <dgm:txEffectClrLst/>
+  </dgm:styleLbl>
+  <dgm:styleLbl name="bgAcc1">
+    <dgm:fillClrLst meth="repeat">
+      <a:schemeClr val="lt1">
+        <a:alpha val="90000"/>
+      </a:schemeClr>
+    </dgm:fillClrLst>
+    <dgm:linClrLst meth="repeat">
+      <a:schemeClr val="accent1"/>
+    </dgm:linClrLst>
+    <dgm:effectClrLst/>
+    <dgm:txLinClrLst/>
+    <dgm:txFillClrLst meth="repeat">
+      <a:schemeClr val="dk1"/>
+    </dgm:txFillClrLst>
+    <dgm:txEffectClrLst/>
+  </dgm:styleLbl>
+  <dgm:styleLbl name="solidFgAcc1">
+    <dgm:fillClrLst meth="repeat">
+      <a:schemeClr val="lt1"/>
+    </dgm:fillClrLst>
+    <dgm:linClrLst meth="repeat">
+      <a:schemeClr val="accent1"/>
+    </dgm:linClrLst>
+    <dgm:effectClrLst/>
+    <dgm:txLinClrLst/>
+    <dgm:txFillClrLst meth="repeat">
+      <a:schemeClr val="dk1"/>
+    </dgm:txFillClrLst>
+    <dgm:txEffectClrLst/>
+  </dgm:styleLbl>
+  <dgm:styleLbl name="solidAlignAcc1">
+    <dgm:fillClrLst meth="repeat">
+      <a:schemeClr val="lt1"/>
+    </dgm:fillClrLst>
+    <dgm:linClrLst meth="repeat">
+      <a:schemeClr val="accent1"/>
+    </dgm:linClrLst>
+    <dgm:effectClrLst/>
+    <dgm:txLinClrLst/>
+    <dgm:txFillClrLst meth="repeat">
+      <a:schemeClr val="dk1"/>
+    </dgm:txFillClrLst>
+    <dgm:txEffectClrLst/>
+  </dgm:styleLbl>
+  <dgm:styleLbl name="solidBgAcc1">
+    <dgm:fillClrLst meth="repeat">
+      <a:schemeClr val="lt1"/>
+    </dgm:fillClrLst>
+    <dgm:linClrLst meth="repeat">
+      <a:schemeClr val="accent1"/>
+    </dgm:linClrLst>
+    <dgm:effectClrLst/>
+    <dgm:txLinClrLst/>
+    <dgm:txFillClrLst meth="repeat">
+      <a:schemeClr val="dk1"/>
+    </dgm:txFillClrLst>
+    <dgm:txEffectClrLst/>
+  </dgm:styleLbl>
+  <dgm:styleLbl name="fgAccFollowNode1">
+    <dgm:fillClrLst meth="repeat">
+      <a:schemeClr val="accent1">
+        <a:alpha val="90000"/>
+        <a:tint val="40000"/>
+      </a:schemeClr>
+    </dgm:fillClrLst>
+    <dgm:linClrLst meth="repeat">
+      <a:schemeClr val="accent1">
+        <a:alpha val="90000"/>
+        <a:tint val="40000"/>
+      </a:schemeClr>
+    </dgm:linClrLst>
+    <dgm:effectClrLst/>
+    <dgm:txLinClrLst/>
+    <dgm:txFillClrLst meth="repeat">
+      <a:schemeClr val="dk1"/>
+    </dgm:txFillClrLst>
+    <dgm:txEffectClrLst/>
+  </dgm:styleLbl>
+  <dgm:styleLbl name="alignAccFollowNode1">
+    <dgm:fillClrLst meth="repeat">
+      <a:schemeClr val="accent1">
+        <a:alpha val="90000"/>
+        <a:tint val="40000"/>
+      </a:schemeClr>
+    </dgm:fillClrLst>
+    <dgm:linClrLst meth="repeat">
+      <a:schemeClr val="accent1">
+        <a:alpha val="90000"/>
+        <a:tint val="40000"/>
+      </a:schemeClr>
+    </dgm:linClrLst>
+    <dgm:effectClrLst/>
+    <dgm:txLinClrLst/>
+    <dgm:txFillClrLst meth="repeat">
+      <a:schemeClr val="dk1"/>
+    </dgm:txFillClrLst>
+    <dgm:txEffectClrLst/>
+  </dgm:styleLbl>
+  <dgm:styleLbl name="bgAccFollowNode1">
+    <dgm:fillClrLst meth="repeat">
+      <a:schemeClr val="accent1">
+        <a:alpha val="90000"/>
+        <a:tint val="40000"/>
+      </a:schemeClr>
+    </dgm:fillClrLst>
+    <dgm:linClrLst meth="repeat">
+      <a:schemeClr val="accent1">
+        <a:alpha val="90000"/>
+        <a:tint val="40000"/>
+      </a:schemeClr>
+    </dgm:linClrLst>
+    <dgm:effectClrLst/>
+    <dgm:txLinClrLst/>
+    <dgm:txFillClrLst meth="repeat">
+      <a:schemeClr val="dk1"/>
+    </dgm:txFillClrLst>
+    <dgm:txEffectClrLst/>
+  </dgm:styleLbl>
+  <dgm:styleLbl name="fgAcc0">
+    <dgm:fillClrLst meth="repeat">
+      <a:schemeClr val="lt1">
+        <a:alpha val="90000"/>
+      </a:schemeClr>
+    </dgm:fillClrLst>
+    <dgm:linClrLst meth="repeat">
+      <a:schemeClr val="accent1"/>
+    </dgm:linClrLst>
+    <dgm:effectClrLst/>
+    <dgm:txLinClrLst/>
+    <dgm:txFillClrLst meth="repeat">
+      <a:schemeClr val="dk1"/>
+    </dgm:txFillClrLst>
+    <dgm:txEffectClrLst/>
+  </dgm:styleLbl>
+  <dgm:styleLbl name="fgAcc2">
+    <dgm:fillClrLst meth="repeat">
+      <a:schemeClr val="lt1">
+        <a:alpha val="90000"/>
+      </a:schemeClr>
+    </dgm:fillClrLst>
+    <dgm:linClrLst meth="repeat">
+      <a:schemeClr val="accent1"/>
+    </dgm:linClrLst>
+    <dgm:effectClrLst/>
+    <dgm:txLinClrLst/>
+    <dgm:txFillClrLst meth="repeat">
+      <a:schemeClr val="dk1"/>
+    </dgm:txFillClrLst>
+    <dgm:txEffectClrLst/>
+  </dgm:styleLbl>
+  <dgm:styleLbl name="fgAcc3">
+    <dgm:fillClrLst meth="repeat">
+      <a:schemeClr val="lt1">
+        <a:alpha val="90000"/>
+      </a:schemeClr>
+    </dgm:fillClrLst>
+    <dgm:linClrLst meth="repeat">
+      <a:schemeClr val="accent1"/>
+    </dgm:linClrLst>
+    <dgm:effectClrLst/>
+    <dgm:txLinClrLst/>
+    <dgm:txFillClrLst meth="repeat">
+      <a:schemeClr val="dk1"/>
+    </dgm:txFillClrLst>
+    <dgm:txEffectClrLst/>
+  </dgm:styleLbl>
+  <dgm:styleLbl name="fgAcc4">
+    <dgm:fillClrLst meth="repeat">
+      <a:schemeClr val="lt1">
+        <a:alpha val="90000"/>
+      </a:schemeClr>
+    </dgm:fillClrLst>
+    <dgm:linClrLst meth="repeat">
+      <a:schemeClr val="accent1"/>
+    </dgm:linClrLst>
+    <dgm:effectClrLst/>
+    <dgm:txLinClrLst/>
+    <dgm:txFillClrLst meth="repeat">
+      <a:schemeClr val="dk1"/>
+    </dgm:txFillClrLst>
+    <dgm:txEffectClrLst/>
+  </dgm:styleLbl>
+  <dgm:styleLbl name="bgShp">
+    <dgm:fillClrLst meth="repeat">
+      <a:schemeClr val="accent1">
+        <a:tint val="40000"/>
+      </a:schemeClr>
+    </dgm:fillClrLst>
+    <dgm:linClrLst meth="repeat">
+      <a:schemeClr val="accent1"/>
+    </dgm:linClrLst>
+    <dgm:effectClrLst/>
+    <dgm:txLinClrLst/>
+    <dgm:txFillClrLst meth="repeat">
+      <a:schemeClr val="dk1"/>
+    </dgm:txFillClrLst>
+    <dgm:txEffectClrLst/>
+  </dgm:styleLbl>
+  <dgm:styleLbl name="dkBgShp">
+    <dgm:fillClrLst meth="repeat">
+      <a:schemeClr val="accent1">
+        <a:shade val="80000"/>
+      </a:schemeClr>
+    </dgm:fillClrLst>
+    <dgm:linClrLst meth="repeat">
+      <a:schemeClr val="accent1"/>
+    </dgm:linClrLst>
+    <dgm:effectClrLst/>
+    <dgm:txLinClrLst/>
+    <dgm:txFillClrLst meth="repeat">
+      <a:schemeClr val="lt1"/>
+    </dgm:txFillClrLst>
+    <dgm:txEffectClrLst/>
+  </dgm:styleLbl>
+  <dgm:styleLbl name="trBgShp">
+    <dgm:fillClrLst meth="repeat">
+      <a:schemeClr val="accent1">
+        <a:tint val="50000"/>
+        <a:alpha val="40000"/>
+      </a:schemeClr>
+    </dgm:fillClrLst>
+    <dgm:linClrLst meth="repeat">
+      <a:schemeClr val="accent1"/>
+    </dgm:linClrLst>
+    <dgm:effectClrLst/>
+    <dgm:txLinClrLst/>
+    <dgm:txFillClrLst meth="repeat">
+      <a:schemeClr val="lt1"/>
+    </dgm:txFillClrLst>
+    <dgm:txEffectClrLst/>
+  </dgm:styleLbl>
+  <dgm:styleLbl name="fgShp">
+    <dgm:fillClrLst meth="repeat">
+      <a:schemeClr val="accent1">
+        <a:tint val="60000"/>
+      </a:schemeClr>
+    </dgm:fillClrLst>
+    <dgm:linClrLst meth="repeat">
+      <a:schemeClr val="lt1"/>
+    </dgm:linClrLst>
+    <dgm:effectClrLst/>
+    <dgm:txLinClrLst/>
+    <dgm:txFillClrLst meth="repeat">
+      <a:schemeClr val="dk1"/>
+    </dgm:txFillClrLst>
+    <dgm:txEffectClrLst/>
+  </dgm:styleLbl>
+  <dgm:styleLbl name="revTx">
+    <dgm:fillClrLst meth="repeat">
+      <a:schemeClr val="lt1">
+        <a:alpha val="0"/>
+      </a:schemeClr>
+    </dgm:fillClrLst>
+    <dgm:linClrLst meth="repeat">
+      <a:schemeClr val="dk1">
+        <a:alpha val="0"/>
+      </a:schemeClr>
+    </dgm:linClrLst>
+    <dgm:effectClrLst/>
+    <dgm:txLinClrLst/>
+    <dgm:txFillClrLst meth="repeat">
+      <a:schemeClr val="tx1"/>
+    </dgm:txFillClrLst>
+    <dgm:txEffectClrLst/>
+  </dgm:styleLbl>
+</dgm:colorsDef>
+</file>
+
+<file path=ppt/diagrams/data1.xml><?xml version="1.0" encoding="utf-8"?>
+<dgm:dataModel xmlns:dgm="http://schemas.openxmlformats.org/drawingml/2006/diagram" xmlns:a="http://schemas.openxmlformats.org/drawingml/2006/main">
+  <dgm:ptLst>
+    <dgm:pt modelId="{3B8CFD7C-DCC8-4853-817B-E0D6FD063734}" type="doc">
+      <dgm:prSet loTypeId="urn:microsoft.com/office/officeart/2005/8/layout/lProcess3" loCatId="process" qsTypeId="urn:microsoft.com/office/officeart/2005/8/quickstyle/simple1" qsCatId="simple" csTypeId="urn:microsoft.com/office/officeart/2005/8/colors/accent1_2" csCatId="accent1" phldr="1"/>
+      <dgm:spPr/>
+      <dgm:t>
+        <a:bodyPr/>
+        <a:lstStyle/>
+        <a:p>
+          <a:endParaRPr lang="fr-FR"/>
+        </a:p>
+      </dgm:t>
+    </dgm:pt>
+    <dgm:pt modelId="{1428B444-6C29-4023-B2EB-DC35BD9E88EA}">
+      <dgm:prSet phldrT="[Texte]" phldr="0"/>
+      <dgm:spPr/>
+      <dgm:t>
+        <a:bodyPr/>
+        <a:lstStyle/>
+        <a:p>
+          <a:r>
+            <a:rPr lang="fr-FR" dirty="0"/>
+            <a:t>Semaine 1</a:t>
+          </a:r>
+        </a:p>
+      </dgm:t>
+    </dgm:pt>
+    <dgm:pt modelId="{FA4B1207-58EE-42AA-8CDD-CF6D6FB102D6}" type="parTrans" cxnId="{0E929AAA-EEFA-42F1-908F-DBAA86644762}">
+      <dgm:prSet/>
+      <dgm:spPr/>
+      <dgm:t>
+        <a:bodyPr/>
+        <a:lstStyle/>
+        <a:p>
+          <a:endParaRPr lang="fr-FR"/>
+        </a:p>
+      </dgm:t>
+    </dgm:pt>
+    <dgm:pt modelId="{B530583A-EF6F-424D-BE8A-0451E7585402}" type="sibTrans" cxnId="{0E929AAA-EEFA-42F1-908F-DBAA86644762}">
+      <dgm:prSet/>
+      <dgm:spPr/>
+      <dgm:t>
+        <a:bodyPr/>
+        <a:lstStyle/>
+        <a:p>
+          <a:endParaRPr lang="fr-FR"/>
+        </a:p>
+      </dgm:t>
+    </dgm:pt>
+    <dgm:pt modelId="{0E444272-3C63-477F-9C47-A41036231C83}">
+      <dgm:prSet phldrT="[Texte]" phldr="0" custT="1"/>
+      <dgm:spPr/>
+      <dgm:t>
+        <a:bodyPr/>
+        <a:lstStyle/>
+        <a:p>
+          <a:r>
+            <a:rPr lang="fr-FR" sz="1200" dirty="0"/>
+            <a:t>2h – CM</a:t>
+          </a:r>
+        </a:p>
+        <a:p>
+          <a:r>
+            <a:rPr lang="fr-FR" sz="1200" dirty="0"/>
+            <a:t>Codage des nombres, caractères et images</a:t>
+          </a:r>
+        </a:p>
+      </dgm:t>
+    </dgm:pt>
+    <dgm:pt modelId="{1AF51A4F-28A8-4255-BE3C-19488C130AD8}" type="parTrans" cxnId="{B5146427-0A7F-486B-A78A-D24F0B8F2E32}">
+      <dgm:prSet/>
+      <dgm:spPr/>
+      <dgm:t>
+        <a:bodyPr/>
+        <a:lstStyle/>
+        <a:p>
+          <a:endParaRPr lang="fr-FR"/>
+        </a:p>
+      </dgm:t>
+    </dgm:pt>
+    <dgm:pt modelId="{93548EBF-6F93-4F08-A521-18729271D11F}" type="sibTrans" cxnId="{B5146427-0A7F-486B-A78A-D24F0B8F2E32}">
+      <dgm:prSet/>
+      <dgm:spPr/>
+      <dgm:t>
+        <a:bodyPr/>
+        <a:lstStyle/>
+        <a:p>
+          <a:endParaRPr lang="fr-FR"/>
+        </a:p>
+      </dgm:t>
+    </dgm:pt>
+    <dgm:pt modelId="{0E9AF598-822A-480E-9DB2-60A7AA3EB796}">
+      <dgm:prSet phldrT="[Texte]"/>
+      <dgm:spPr/>
+      <dgm:t>
+        <a:bodyPr/>
+        <a:lstStyle/>
+        <a:p>
+          <a:r>
+            <a:rPr lang="fr-FR" dirty="0"/>
+            <a:t>2h – CM</a:t>
+          </a:r>
+        </a:p>
+        <a:p>
+          <a:r>
+            <a:rPr lang="fr-FR" dirty="0"/>
+            <a:t>Différents types de mémoire</a:t>
+          </a:r>
+        </a:p>
+      </dgm:t>
+    </dgm:pt>
+    <dgm:pt modelId="{A0ED786E-5FFA-4801-9491-E1B5E8C235B2}" type="parTrans" cxnId="{277070DD-D318-4B9C-80D0-BE114F8ADD01}">
+      <dgm:prSet/>
+      <dgm:spPr/>
+      <dgm:t>
+        <a:bodyPr/>
+        <a:lstStyle/>
+        <a:p>
+          <a:endParaRPr lang="fr-FR"/>
+        </a:p>
+      </dgm:t>
+    </dgm:pt>
+    <dgm:pt modelId="{E8F1C333-4209-40F9-AA6C-FE5E1156D851}" type="sibTrans" cxnId="{277070DD-D318-4B9C-80D0-BE114F8ADD01}">
+      <dgm:prSet/>
+      <dgm:spPr/>
+      <dgm:t>
+        <a:bodyPr/>
+        <a:lstStyle/>
+        <a:p>
+          <a:endParaRPr lang="fr-FR"/>
+        </a:p>
+      </dgm:t>
+    </dgm:pt>
+    <dgm:pt modelId="{95E5BF0B-4125-4119-84A6-AA1AEE190608}">
+      <dgm:prSet phldrT="[Texte]" phldr="0"/>
+      <dgm:spPr/>
+      <dgm:t>
+        <a:bodyPr/>
+        <a:lstStyle/>
+        <a:p>
+          <a:r>
+            <a:rPr lang="fr-FR" dirty="0"/>
+            <a:t>Semaine 2</a:t>
+          </a:r>
+        </a:p>
+      </dgm:t>
+    </dgm:pt>
+    <dgm:pt modelId="{26030C2E-1D3D-48B6-8203-D973CE80B638}" type="parTrans" cxnId="{1C5E6ABE-793E-4056-8827-FB3D717F466A}">
+      <dgm:prSet/>
+      <dgm:spPr/>
+      <dgm:t>
+        <a:bodyPr/>
+        <a:lstStyle/>
+        <a:p>
+          <a:endParaRPr lang="fr-FR"/>
+        </a:p>
+      </dgm:t>
+    </dgm:pt>
+    <dgm:pt modelId="{E0146706-571A-4442-9FD6-3733A38D5536}" type="sibTrans" cxnId="{1C5E6ABE-793E-4056-8827-FB3D717F466A}">
+      <dgm:prSet/>
+      <dgm:spPr/>
+      <dgm:t>
+        <a:bodyPr/>
+        <a:lstStyle/>
+        <a:p>
+          <a:endParaRPr lang="fr-FR"/>
+        </a:p>
+      </dgm:t>
+    </dgm:pt>
+    <dgm:pt modelId="{118C8218-47B3-425D-BBDE-F642DACBC0B9}">
+      <dgm:prSet phldrT="[Texte]"/>
+      <dgm:spPr/>
+      <dgm:t>
+        <a:bodyPr/>
+        <a:lstStyle/>
+        <a:p>
+          <a:r>
+            <a:rPr lang="fr-FR" dirty="0"/>
+            <a:t>2h – CM</a:t>
+          </a:r>
+        </a:p>
+        <a:p>
+          <a:r>
+            <a:rPr lang="fr-FR" dirty="0"/>
+            <a:t>Logique combinatoire et séquentielle</a:t>
+          </a:r>
+        </a:p>
+      </dgm:t>
+    </dgm:pt>
+    <dgm:pt modelId="{1687BC27-7F6C-460C-9F6C-FCADA57B45F9}" type="parTrans" cxnId="{087184D1-F1BA-408A-8C93-097A290E6522}">
+      <dgm:prSet/>
+      <dgm:spPr/>
+      <dgm:t>
+        <a:bodyPr/>
+        <a:lstStyle/>
+        <a:p>
+          <a:endParaRPr lang="fr-FR"/>
+        </a:p>
+      </dgm:t>
+    </dgm:pt>
+    <dgm:pt modelId="{8D040E17-2679-42D2-879F-51D385D45CDF}" type="sibTrans" cxnId="{087184D1-F1BA-408A-8C93-097A290E6522}">
+      <dgm:prSet/>
+      <dgm:spPr/>
+      <dgm:t>
+        <a:bodyPr/>
+        <a:lstStyle/>
+        <a:p>
+          <a:endParaRPr lang="fr-FR"/>
+        </a:p>
+      </dgm:t>
+    </dgm:pt>
+    <dgm:pt modelId="{70C35D1A-219A-4584-9912-8F96E7FD6534}">
+      <dgm:prSet phldrT="[Texte]" phldr="0"/>
+      <dgm:spPr/>
+      <dgm:t>
+        <a:bodyPr/>
+        <a:lstStyle/>
+        <a:p>
+          <a:r>
+            <a:rPr lang="fr-FR" dirty="0"/>
+            <a:t>2h – CM</a:t>
+          </a:r>
+        </a:p>
+        <a:p>
+          <a:r>
+            <a:rPr lang="fr-FR" dirty="0"/>
+            <a:t>Structure d’un processeur</a:t>
+          </a:r>
+        </a:p>
+        <a:p>
+          <a:r>
+            <a:rPr lang="fr-FR" dirty="0"/>
+            <a:t>DS</a:t>
+          </a:r>
+        </a:p>
+      </dgm:t>
+    </dgm:pt>
+    <dgm:pt modelId="{D5F31328-9199-4987-A7B1-554EBF50360F}" type="parTrans" cxnId="{64A6F303-0023-4420-843B-0FDBE466E4F1}">
+      <dgm:prSet/>
+      <dgm:spPr/>
+      <dgm:t>
+        <a:bodyPr/>
+        <a:lstStyle/>
+        <a:p>
+          <a:endParaRPr lang="fr-FR"/>
+        </a:p>
+      </dgm:t>
+    </dgm:pt>
+    <dgm:pt modelId="{4F1909A3-5CC5-42C5-A4C7-E9617F6C5DF2}" type="sibTrans" cxnId="{64A6F303-0023-4420-843B-0FDBE466E4F1}">
+      <dgm:prSet/>
+      <dgm:spPr/>
+      <dgm:t>
+        <a:bodyPr/>
+        <a:lstStyle/>
+        <a:p>
+          <a:endParaRPr lang="fr-FR"/>
+        </a:p>
+      </dgm:t>
+    </dgm:pt>
+    <dgm:pt modelId="{3EA7A69B-3480-410C-922C-57E96C03AEDD}">
+      <dgm:prSet phldrT="[Texte]" phldr="0"/>
+      <dgm:spPr/>
+      <dgm:t>
+        <a:bodyPr/>
+        <a:lstStyle/>
+        <a:p>
+          <a:r>
+            <a:rPr lang="fr-FR" dirty="0"/>
+            <a:t>Semaine 3</a:t>
+          </a:r>
+        </a:p>
+      </dgm:t>
+    </dgm:pt>
+    <dgm:pt modelId="{796DBC91-E9A5-4BEB-88C4-0A2DC8ECC5E8}" type="parTrans" cxnId="{5C2B9794-C69A-46D9-8288-4BF1EB8EC4C3}">
+      <dgm:prSet/>
+      <dgm:spPr/>
+      <dgm:t>
+        <a:bodyPr/>
+        <a:lstStyle/>
+        <a:p>
+          <a:endParaRPr lang="fr-FR"/>
+        </a:p>
+      </dgm:t>
+    </dgm:pt>
+    <dgm:pt modelId="{3FF9312B-9ED3-4321-A274-B2C90291AE66}" type="sibTrans" cxnId="{5C2B9794-C69A-46D9-8288-4BF1EB8EC4C3}">
+      <dgm:prSet/>
+      <dgm:spPr/>
+      <dgm:t>
+        <a:bodyPr/>
+        <a:lstStyle/>
+        <a:p>
+          <a:endParaRPr lang="fr-FR"/>
+        </a:p>
+      </dgm:t>
+    </dgm:pt>
+    <dgm:pt modelId="{9F44E5DD-68E0-40D6-A90B-8B4576C55B82}">
+      <dgm:prSet phldrT="[Texte]" phldr="0"/>
+      <dgm:spPr/>
+      <dgm:t>
+        <a:bodyPr/>
+        <a:lstStyle/>
+        <a:p>
+          <a:r>
+            <a:rPr lang="fr-FR" dirty="0"/>
+            <a:t>1h – CM</a:t>
+          </a:r>
+        </a:p>
+        <a:p>
+          <a:r>
+            <a:rPr lang="fr-FR" dirty="0"/>
+            <a:t>Notion d’ALU</a:t>
+          </a:r>
+        </a:p>
+        <a:p>
+          <a:r>
+            <a:rPr lang="fr-FR" dirty="0"/>
+            <a:t>Fonctions logiques</a:t>
+          </a:r>
+        </a:p>
+      </dgm:t>
+    </dgm:pt>
+    <dgm:pt modelId="{BC8AB084-D176-44D7-9C9A-FC3473AA24F0}" type="parTrans" cxnId="{6D9A93FD-7870-408B-BB01-9BAB2C2BA00A}">
+      <dgm:prSet/>
+      <dgm:spPr/>
+      <dgm:t>
+        <a:bodyPr/>
+        <a:lstStyle/>
+        <a:p>
+          <a:endParaRPr lang="fr-FR"/>
+        </a:p>
+      </dgm:t>
+    </dgm:pt>
+    <dgm:pt modelId="{47446131-A7D1-4062-8ED8-B3A73A41A166}" type="sibTrans" cxnId="{6D9A93FD-7870-408B-BB01-9BAB2C2BA00A}">
+      <dgm:prSet/>
+      <dgm:spPr/>
+      <dgm:t>
+        <a:bodyPr/>
+        <a:lstStyle/>
+        <a:p>
+          <a:endParaRPr lang="fr-FR"/>
+        </a:p>
+      </dgm:t>
+    </dgm:pt>
+    <dgm:pt modelId="{7F7776A6-B22C-47B5-9831-D7E8747ED881}">
+      <dgm:prSet phldrT="[Texte]" phldr="0"/>
+      <dgm:spPr/>
+      <dgm:t>
+        <a:bodyPr/>
+        <a:lstStyle/>
+        <a:p>
+          <a:r>
+            <a:rPr lang="fr-FR" dirty="0"/>
+            <a:t>1h30 – TP</a:t>
+          </a:r>
+        </a:p>
+        <a:p>
+          <a:r>
+            <a:rPr lang="fr-FR" dirty="0" err="1"/>
+            <a:t>LEDs</a:t>
+          </a:r>
+          <a:endParaRPr lang="fr-FR" dirty="0"/>
+        </a:p>
+      </dgm:t>
+    </dgm:pt>
+    <dgm:pt modelId="{4166182E-94BC-453E-9719-4F94542682EF}" type="parTrans" cxnId="{FBFBFDF4-CED7-4EF5-B1F2-59033E03351E}">
+      <dgm:prSet/>
+      <dgm:spPr/>
+      <dgm:t>
+        <a:bodyPr/>
+        <a:lstStyle/>
+        <a:p>
+          <a:endParaRPr lang="fr-FR"/>
+        </a:p>
+      </dgm:t>
+    </dgm:pt>
+    <dgm:pt modelId="{868BFBC7-D93E-4C44-A528-BE60E83C4244}" type="sibTrans" cxnId="{FBFBFDF4-CED7-4EF5-B1F2-59033E03351E}">
+      <dgm:prSet/>
+      <dgm:spPr/>
+      <dgm:t>
+        <a:bodyPr/>
+        <a:lstStyle/>
+        <a:p>
+          <a:endParaRPr lang="fr-FR"/>
+        </a:p>
+      </dgm:t>
+    </dgm:pt>
+    <dgm:pt modelId="{478EA27A-3EAD-46FB-B912-3651DD8FB675}">
+      <dgm:prSet/>
+      <dgm:spPr/>
+      <dgm:t>
+        <a:bodyPr/>
+        <a:lstStyle/>
+        <a:p>
+          <a:r>
+            <a:rPr lang="fr-FR" dirty="0"/>
+            <a:t>Semaine 4</a:t>
+          </a:r>
+        </a:p>
+      </dgm:t>
+    </dgm:pt>
+    <dgm:pt modelId="{1D1A0C0E-EC35-432F-9B71-CA4C4AD67895}" type="parTrans" cxnId="{2DD3F229-69EA-49CA-A550-7E43722D6D34}">
+      <dgm:prSet/>
+      <dgm:spPr/>
+      <dgm:t>
+        <a:bodyPr/>
+        <a:lstStyle/>
+        <a:p>
+          <a:endParaRPr lang="fr-FR"/>
+        </a:p>
+      </dgm:t>
+    </dgm:pt>
+    <dgm:pt modelId="{51DE7675-E73E-4C0A-A050-13FC8B0998EB}" type="sibTrans" cxnId="{2DD3F229-69EA-49CA-A550-7E43722D6D34}">
+      <dgm:prSet/>
+      <dgm:spPr/>
+      <dgm:t>
+        <a:bodyPr/>
+        <a:lstStyle/>
+        <a:p>
+          <a:endParaRPr lang="fr-FR"/>
+        </a:p>
+      </dgm:t>
+    </dgm:pt>
+    <dgm:pt modelId="{A76F2C72-1F57-4E50-BEFB-3A09D8528CB2}">
+      <dgm:prSet/>
+      <dgm:spPr/>
+      <dgm:t>
+        <a:bodyPr/>
+        <a:lstStyle/>
+        <a:p>
+          <a:r>
+            <a:rPr lang="fr-FR" dirty="0"/>
+            <a:t>Soutenance</a:t>
+          </a:r>
+        </a:p>
+      </dgm:t>
+    </dgm:pt>
+    <dgm:pt modelId="{5BD2B3F5-6764-4D9A-91C8-FE77A8CEF9EC}" type="parTrans" cxnId="{74E29F2E-629F-477E-8A5B-9341E2631507}">
+      <dgm:prSet/>
+      <dgm:spPr/>
+      <dgm:t>
+        <a:bodyPr/>
+        <a:lstStyle/>
+        <a:p>
+          <a:endParaRPr lang="fr-FR"/>
+        </a:p>
+      </dgm:t>
+    </dgm:pt>
+    <dgm:pt modelId="{51D0B126-BBCC-4835-90D5-884F7C022DB1}" type="sibTrans" cxnId="{74E29F2E-629F-477E-8A5B-9341E2631507}">
+      <dgm:prSet/>
+      <dgm:spPr/>
+      <dgm:t>
+        <a:bodyPr/>
+        <a:lstStyle/>
+        <a:p>
+          <a:endParaRPr lang="fr-FR"/>
+        </a:p>
+      </dgm:t>
+    </dgm:pt>
+    <dgm:pt modelId="{3B78721F-81EF-4F51-9E70-6192360E9C88}">
+      <dgm:prSet/>
+      <dgm:spPr/>
+      <dgm:t>
+        <a:bodyPr/>
+        <a:lstStyle/>
+        <a:p>
+          <a:r>
+            <a:rPr lang="fr-FR" dirty="0"/>
+            <a:t>2h - TP</a:t>
+          </a:r>
+        </a:p>
+      </dgm:t>
+    </dgm:pt>
+    <dgm:pt modelId="{D36F10C3-AC16-440E-9D81-05A476B8E49D}" type="parTrans" cxnId="{E82AEBDA-5FF2-4F64-8CAB-F9615E9E35E8}">
+      <dgm:prSet/>
+      <dgm:spPr/>
+      <dgm:t>
+        <a:bodyPr/>
+        <a:lstStyle/>
+        <a:p>
+          <a:endParaRPr lang="fr-FR"/>
+        </a:p>
+      </dgm:t>
+    </dgm:pt>
+    <dgm:pt modelId="{AF3C0DB7-1A2A-4843-872C-BF76611A5CF5}" type="sibTrans" cxnId="{E82AEBDA-5FF2-4F64-8CAB-F9615E9E35E8}">
+      <dgm:prSet/>
+      <dgm:spPr/>
+      <dgm:t>
+        <a:bodyPr/>
+        <a:lstStyle/>
+        <a:p>
+          <a:endParaRPr lang="fr-FR"/>
+        </a:p>
+      </dgm:t>
+    </dgm:pt>
+    <dgm:pt modelId="{ADCE2F38-45D7-456D-8EDF-A608E50A49A0}">
+      <dgm:prSet/>
+      <dgm:spPr/>
+      <dgm:t>
+        <a:bodyPr/>
+        <a:lstStyle/>
+        <a:p>
+          <a:r>
+            <a:rPr lang="fr-FR" dirty="0"/>
+            <a:t>2h - </a:t>
+          </a:r>
+          <a:r>
+            <a:rPr lang="fr-FR" dirty="0" err="1"/>
+            <a:t>Salopeir</a:t>
+          </a:r>
+          <a:endParaRPr lang="fr-FR" dirty="0"/>
+        </a:p>
+      </dgm:t>
+    </dgm:pt>
+    <dgm:pt modelId="{E3F4E0E3-7387-4AC0-B5FE-0CA296144F69}" type="parTrans" cxnId="{680D152F-266D-481E-BED7-1AC6E129A21C}">
+      <dgm:prSet/>
+      <dgm:spPr/>
+      <dgm:t>
+        <a:bodyPr/>
+        <a:lstStyle/>
+        <a:p>
+          <a:endParaRPr lang="fr-FR"/>
+        </a:p>
+      </dgm:t>
+    </dgm:pt>
+    <dgm:pt modelId="{CA0860E6-3B10-48DA-A183-94852A54B9BD}" type="sibTrans" cxnId="{680D152F-266D-481E-BED7-1AC6E129A21C}">
+      <dgm:prSet/>
+      <dgm:spPr/>
+      <dgm:t>
+        <a:bodyPr/>
+        <a:lstStyle/>
+        <a:p>
+          <a:endParaRPr lang="fr-FR"/>
+        </a:p>
+      </dgm:t>
+    </dgm:pt>
+    <dgm:pt modelId="{DFB07BB9-CB2B-4461-A790-831C83ED352F}">
+      <dgm:prSet/>
+      <dgm:spPr/>
+      <dgm:t>
+        <a:bodyPr/>
+        <a:lstStyle/>
+        <a:p>
+          <a:r>
+            <a:rPr lang="fr-FR" dirty="0"/>
+            <a:t>2h – CM</a:t>
+          </a:r>
+        </a:p>
+        <a:p>
+          <a:r>
+            <a:rPr lang="fr-FR" dirty="0"/>
+            <a:t>Entrée/Sortie</a:t>
+          </a:r>
+        </a:p>
+        <a:p>
+          <a:r>
+            <a:rPr lang="fr-FR" dirty="0"/>
+            <a:t>GPIO</a:t>
+          </a:r>
+        </a:p>
+      </dgm:t>
+    </dgm:pt>
+    <dgm:pt modelId="{34B5C941-C109-4FE4-997B-FF40ED9BE767}" type="parTrans" cxnId="{47E3FC18-1B9F-4480-B8EE-097A4FDEB7D8}">
+      <dgm:prSet/>
+      <dgm:spPr/>
+      <dgm:t>
+        <a:bodyPr/>
+        <a:lstStyle/>
+        <a:p>
+          <a:endParaRPr lang="fr-FR"/>
+        </a:p>
+      </dgm:t>
+    </dgm:pt>
+    <dgm:pt modelId="{26DEB2D8-9704-4700-823D-39E0B18664D4}" type="sibTrans" cxnId="{47E3FC18-1B9F-4480-B8EE-097A4FDEB7D8}">
+      <dgm:prSet/>
+      <dgm:spPr/>
+      <dgm:t>
+        <a:bodyPr/>
+        <a:lstStyle/>
+        <a:p>
+          <a:endParaRPr lang="fr-FR"/>
+        </a:p>
+      </dgm:t>
+    </dgm:pt>
+    <dgm:pt modelId="{BAA66880-6DE5-44C6-BAE5-5BF3499E051E}">
+      <dgm:prSet/>
+      <dgm:spPr/>
+      <dgm:t>
+        <a:bodyPr/>
+        <a:lstStyle/>
+        <a:p>
+          <a:r>
+            <a:rPr lang="fr-FR" dirty="0"/>
+            <a:t>1h30 - TP</a:t>
+          </a:r>
+        </a:p>
+      </dgm:t>
+    </dgm:pt>
+    <dgm:pt modelId="{4FA36AE9-C9E2-4602-A62E-564BD86FB906}" type="parTrans" cxnId="{75EDC96A-46CB-4A65-88AD-57A53C8D1559}">
+      <dgm:prSet/>
+      <dgm:spPr/>
+      <dgm:t>
+        <a:bodyPr/>
+        <a:lstStyle/>
+        <a:p>
+          <a:endParaRPr lang="fr-FR"/>
+        </a:p>
+      </dgm:t>
+    </dgm:pt>
+    <dgm:pt modelId="{2723DBC2-7418-4CC9-B965-96D5CC96CFE2}" type="sibTrans" cxnId="{75EDC96A-46CB-4A65-88AD-57A53C8D1559}">
+      <dgm:prSet/>
+      <dgm:spPr/>
+      <dgm:t>
+        <a:bodyPr/>
+        <a:lstStyle/>
+        <a:p>
+          <a:endParaRPr lang="fr-FR"/>
+        </a:p>
+      </dgm:t>
+    </dgm:pt>
+    <dgm:pt modelId="{81EBEAA7-CB53-4DF3-A25A-EBE70E47E8B5}">
+      <dgm:prSet phldrT="[Texte]" phldr="0"/>
+      <dgm:spPr/>
+      <dgm:t>
+        <a:bodyPr/>
+        <a:lstStyle/>
+        <a:p>
+          <a:r>
+            <a:rPr lang="fr-FR" dirty="0"/>
+            <a:t>1h – TD</a:t>
+          </a:r>
+        </a:p>
+        <a:p>
+          <a:r>
+            <a:rPr lang="fr-FR" dirty="0"/>
+            <a:t>Notion d’ALU</a:t>
+          </a:r>
+        </a:p>
+        <a:p>
+          <a:r>
+            <a:rPr lang="fr-FR" dirty="0"/>
+            <a:t>Fonctions logiques</a:t>
+          </a:r>
+        </a:p>
+      </dgm:t>
+    </dgm:pt>
+    <dgm:pt modelId="{27F150F8-54D4-4A44-8D27-D858CFC1B0F5}" type="parTrans" cxnId="{9FDDEB47-90E8-4421-BEF4-997C0945CCE7}">
+      <dgm:prSet/>
+      <dgm:spPr/>
+      <dgm:t>
+        <a:bodyPr/>
+        <a:lstStyle/>
+        <a:p>
+          <a:endParaRPr lang="fr-FR"/>
+        </a:p>
+      </dgm:t>
+    </dgm:pt>
+    <dgm:pt modelId="{A75D4CDA-642D-43EC-8A04-3C62E8E8D1AE}" type="sibTrans" cxnId="{9FDDEB47-90E8-4421-BEF4-997C0945CCE7}">
+      <dgm:prSet/>
+      <dgm:spPr/>
+      <dgm:t>
+        <a:bodyPr/>
+        <a:lstStyle/>
+        <a:p>
+          <a:endParaRPr lang="fr-FR"/>
+        </a:p>
+      </dgm:t>
+    </dgm:pt>
+    <dgm:pt modelId="{16116A1E-E0AD-44E6-97CD-043972074220}">
+      <dgm:prSet/>
+      <dgm:spPr/>
+      <dgm:t>
+        <a:bodyPr/>
+        <a:lstStyle/>
+        <a:p>
+          <a:r>
+            <a:rPr lang="fr-FR" dirty="0"/>
+            <a:t>4h - TP</a:t>
+          </a:r>
+        </a:p>
+      </dgm:t>
+    </dgm:pt>
+    <dgm:pt modelId="{F5027948-B0D4-40BC-855D-E49A8315ABC3}" type="parTrans" cxnId="{62F32B61-5DC2-4518-8CEA-1B136FEDEB76}">
+      <dgm:prSet/>
+      <dgm:spPr/>
+      <dgm:t>
+        <a:bodyPr/>
+        <a:lstStyle/>
+        <a:p>
+          <a:endParaRPr lang="fr-FR"/>
+        </a:p>
+      </dgm:t>
+    </dgm:pt>
+    <dgm:pt modelId="{C675E6DD-4366-4DBA-96B3-4B0E5F95CEB6}" type="sibTrans" cxnId="{62F32B61-5DC2-4518-8CEA-1B136FEDEB76}">
+      <dgm:prSet/>
+      <dgm:spPr/>
+      <dgm:t>
+        <a:bodyPr/>
+        <a:lstStyle/>
+        <a:p>
+          <a:endParaRPr lang="fr-FR"/>
+        </a:p>
+      </dgm:t>
+    </dgm:pt>
+    <dgm:pt modelId="{5A3D0F38-6884-4D44-9886-12E25B1F10D5}" type="pres">
+      <dgm:prSet presAssocID="{3B8CFD7C-DCC8-4853-817B-E0D6FD063734}" presName="Name0" presStyleCnt="0">
+        <dgm:presLayoutVars>
+          <dgm:chPref val="3"/>
+          <dgm:dir/>
+          <dgm:animLvl val="lvl"/>
+          <dgm:resizeHandles/>
+        </dgm:presLayoutVars>
+      </dgm:prSet>
+      <dgm:spPr/>
+    </dgm:pt>
+    <dgm:pt modelId="{84A39919-B256-41C9-866D-D108A9B5FD5D}" type="pres">
+      <dgm:prSet presAssocID="{1428B444-6C29-4023-B2EB-DC35BD9E88EA}" presName="horFlow" presStyleCnt="0"/>
+      <dgm:spPr/>
+    </dgm:pt>
+    <dgm:pt modelId="{F51C84D9-4759-4F5B-9359-E339922EB5F0}" type="pres">
+      <dgm:prSet presAssocID="{1428B444-6C29-4023-B2EB-DC35BD9E88EA}" presName="bigChev" presStyleLbl="node1" presStyleIdx="0" presStyleCnt="4"/>
+      <dgm:spPr/>
+    </dgm:pt>
+    <dgm:pt modelId="{8B62AE5E-9984-4D2C-9FE3-5DEEEF1E49DD}" type="pres">
+      <dgm:prSet presAssocID="{1AF51A4F-28A8-4255-BE3C-19488C130AD8}" presName="parTrans" presStyleCnt="0"/>
+      <dgm:spPr/>
+    </dgm:pt>
+    <dgm:pt modelId="{B7A582EF-4211-47A2-91A5-9D7A3979D17C}" type="pres">
+      <dgm:prSet presAssocID="{0E444272-3C63-477F-9C47-A41036231C83}" presName="node" presStyleLbl="alignAccFollowNode1" presStyleIdx="0" presStyleCnt="13">
+        <dgm:presLayoutVars>
+          <dgm:bulletEnabled val="1"/>
+        </dgm:presLayoutVars>
+      </dgm:prSet>
+      <dgm:spPr/>
+    </dgm:pt>
+    <dgm:pt modelId="{DA81F569-DAC5-45AB-B673-494CCC7AB961}" type="pres">
+      <dgm:prSet presAssocID="{93548EBF-6F93-4F08-A521-18729271D11F}" presName="sibTrans" presStyleCnt="0"/>
+      <dgm:spPr/>
+    </dgm:pt>
+    <dgm:pt modelId="{9B6A9B7A-2D9D-4105-A31D-6003C2F9A148}" type="pres">
+      <dgm:prSet presAssocID="{0E9AF598-822A-480E-9DB2-60A7AA3EB796}" presName="node" presStyleLbl="alignAccFollowNode1" presStyleIdx="1" presStyleCnt="13">
+        <dgm:presLayoutVars>
+          <dgm:bulletEnabled val="1"/>
+        </dgm:presLayoutVars>
+      </dgm:prSet>
+      <dgm:spPr/>
+    </dgm:pt>
+    <dgm:pt modelId="{83821DC2-A6AB-494E-8098-20B7776946F9}" type="pres">
+      <dgm:prSet presAssocID="{E8F1C333-4209-40F9-AA6C-FE5E1156D851}" presName="sibTrans" presStyleCnt="0"/>
+      <dgm:spPr/>
+    </dgm:pt>
+    <dgm:pt modelId="{0D309C3C-E240-4437-A48E-C896D95A414C}" type="pres">
+      <dgm:prSet presAssocID="{3B78721F-81EF-4F51-9E70-6192360E9C88}" presName="node" presStyleLbl="alignAccFollowNode1" presStyleIdx="2" presStyleCnt="13">
+        <dgm:presLayoutVars>
+          <dgm:bulletEnabled val="1"/>
+        </dgm:presLayoutVars>
+      </dgm:prSet>
+      <dgm:spPr/>
+    </dgm:pt>
+    <dgm:pt modelId="{866402AD-E35A-44E2-B26C-DAE2A8E63132}" type="pres">
+      <dgm:prSet presAssocID="{AF3C0DB7-1A2A-4843-872C-BF76611A5CF5}" presName="sibTrans" presStyleCnt="0"/>
+      <dgm:spPr/>
+    </dgm:pt>
+    <dgm:pt modelId="{63EFE76F-75C6-495A-BEFE-B23412D52762}" type="pres">
+      <dgm:prSet presAssocID="{16116A1E-E0AD-44E6-97CD-043972074220}" presName="node" presStyleLbl="alignAccFollowNode1" presStyleIdx="3" presStyleCnt="13">
+        <dgm:presLayoutVars>
+          <dgm:bulletEnabled val="1"/>
+        </dgm:presLayoutVars>
+      </dgm:prSet>
+      <dgm:spPr/>
+    </dgm:pt>
+    <dgm:pt modelId="{CC6EBC25-521D-4461-8A1B-6C7C207884BC}" type="pres">
+      <dgm:prSet presAssocID="{1428B444-6C29-4023-B2EB-DC35BD9E88EA}" presName="vSp" presStyleCnt="0"/>
+      <dgm:spPr/>
+    </dgm:pt>
+    <dgm:pt modelId="{DF497DA9-9AD0-4EC1-A31B-2C4DFD86C8C9}" type="pres">
+      <dgm:prSet presAssocID="{95E5BF0B-4125-4119-84A6-AA1AEE190608}" presName="horFlow" presStyleCnt="0"/>
+      <dgm:spPr/>
+    </dgm:pt>
+    <dgm:pt modelId="{32301DDB-05B2-479B-8CD8-B035AEB45018}" type="pres">
+      <dgm:prSet presAssocID="{95E5BF0B-4125-4119-84A6-AA1AEE190608}" presName="bigChev" presStyleLbl="node1" presStyleIdx="1" presStyleCnt="4"/>
+      <dgm:spPr/>
+    </dgm:pt>
+    <dgm:pt modelId="{9C33FE0A-4647-4426-A95E-A685209B967A}" type="pres">
+      <dgm:prSet presAssocID="{1687BC27-7F6C-460C-9F6C-FCADA57B45F9}" presName="parTrans" presStyleCnt="0"/>
+      <dgm:spPr/>
+    </dgm:pt>
+    <dgm:pt modelId="{C0725B73-AA68-4997-B24A-58700B1975ED}" type="pres">
+      <dgm:prSet presAssocID="{118C8218-47B3-425D-BBDE-F642DACBC0B9}" presName="node" presStyleLbl="alignAccFollowNode1" presStyleIdx="4" presStyleCnt="13">
+        <dgm:presLayoutVars>
+          <dgm:bulletEnabled val="1"/>
+        </dgm:presLayoutVars>
+      </dgm:prSet>
+      <dgm:spPr/>
+    </dgm:pt>
+    <dgm:pt modelId="{81FB1F54-2071-4DF3-B70F-D4353710E87C}" type="pres">
+      <dgm:prSet presAssocID="{8D040E17-2679-42D2-879F-51D385D45CDF}" presName="sibTrans" presStyleCnt="0"/>
+      <dgm:spPr/>
+    </dgm:pt>
+    <dgm:pt modelId="{6C0AD1B2-BF39-41DB-9FCB-C726F0B0A11C}" type="pres">
+      <dgm:prSet presAssocID="{70C35D1A-219A-4584-9912-8F96E7FD6534}" presName="node" presStyleLbl="alignAccFollowNode1" presStyleIdx="5" presStyleCnt="13">
+        <dgm:presLayoutVars>
+          <dgm:bulletEnabled val="1"/>
+        </dgm:presLayoutVars>
+      </dgm:prSet>
+      <dgm:spPr/>
+    </dgm:pt>
+    <dgm:pt modelId="{C4D80E08-2304-4C15-B6D7-8CD86EF69E38}" type="pres">
+      <dgm:prSet presAssocID="{4F1909A3-5CC5-42C5-A4C7-E9617F6C5DF2}" presName="sibTrans" presStyleCnt="0"/>
+      <dgm:spPr/>
+    </dgm:pt>
+    <dgm:pt modelId="{FDD2D33E-BAA9-4ACA-B13B-C77E16D184C6}" type="pres">
+      <dgm:prSet presAssocID="{ADCE2F38-45D7-456D-8EDF-A608E50A49A0}" presName="node" presStyleLbl="alignAccFollowNode1" presStyleIdx="6" presStyleCnt="13">
+        <dgm:presLayoutVars>
+          <dgm:bulletEnabled val="1"/>
+        </dgm:presLayoutVars>
+      </dgm:prSet>
+      <dgm:spPr/>
+    </dgm:pt>
+    <dgm:pt modelId="{BF6F469A-BDFB-4B96-AEEB-B2A933053A91}" type="pres">
+      <dgm:prSet presAssocID="{95E5BF0B-4125-4119-84A6-AA1AEE190608}" presName="vSp" presStyleCnt="0"/>
+      <dgm:spPr/>
+    </dgm:pt>
+    <dgm:pt modelId="{B3693F91-72D6-44AE-818B-304BBE8BCFD3}" type="pres">
+      <dgm:prSet presAssocID="{3EA7A69B-3480-410C-922C-57E96C03AEDD}" presName="horFlow" presStyleCnt="0"/>
+      <dgm:spPr/>
+    </dgm:pt>
+    <dgm:pt modelId="{6E00654F-BA06-4B66-95A7-CAF0AFBA8E44}" type="pres">
+      <dgm:prSet presAssocID="{3EA7A69B-3480-410C-922C-57E96C03AEDD}" presName="bigChev" presStyleLbl="node1" presStyleIdx="2" presStyleCnt="4"/>
+      <dgm:spPr/>
+    </dgm:pt>
+    <dgm:pt modelId="{4787700D-3A73-4454-9565-8EC7DB523E88}" type="pres">
+      <dgm:prSet presAssocID="{BC8AB084-D176-44D7-9C9A-FC3473AA24F0}" presName="parTrans" presStyleCnt="0"/>
+      <dgm:spPr/>
+    </dgm:pt>
+    <dgm:pt modelId="{5AAC5330-0D65-4E53-B8DA-86378CD4CE76}" type="pres">
+      <dgm:prSet presAssocID="{9F44E5DD-68E0-40D6-A90B-8B4576C55B82}" presName="node" presStyleLbl="alignAccFollowNode1" presStyleIdx="7" presStyleCnt="13">
+        <dgm:presLayoutVars>
+          <dgm:bulletEnabled val="1"/>
+        </dgm:presLayoutVars>
+      </dgm:prSet>
+      <dgm:spPr/>
+    </dgm:pt>
+    <dgm:pt modelId="{D05E77FC-2B00-48A0-9FC8-319EF40B8D74}" type="pres">
+      <dgm:prSet presAssocID="{47446131-A7D1-4062-8ED8-B3A73A41A166}" presName="sibTrans" presStyleCnt="0"/>
+      <dgm:spPr/>
+    </dgm:pt>
+    <dgm:pt modelId="{6C71E289-33D5-4D78-9D9A-659200006B91}" type="pres">
+      <dgm:prSet presAssocID="{81EBEAA7-CB53-4DF3-A25A-EBE70E47E8B5}" presName="node" presStyleLbl="alignAccFollowNode1" presStyleIdx="8" presStyleCnt="13">
+        <dgm:presLayoutVars>
+          <dgm:bulletEnabled val="1"/>
+        </dgm:presLayoutVars>
+      </dgm:prSet>
+      <dgm:spPr/>
+    </dgm:pt>
+    <dgm:pt modelId="{F35843E1-A9FF-4FBF-B786-9F8785C27900}" type="pres">
+      <dgm:prSet presAssocID="{A75D4CDA-642D-43EC-8A04-3C62E8E8D1AE}" presName="sibTrans" presStyleCnt="0"/>
+      <dgm:spPr/>
+    </dgm:pt>
+    <dgm:pt modelId="{EED72392-32DA-41A4-B324-1D658877A145}" type="pres">
+      <dgm:prSet presAssocID="{7F7776A6-B22C-47B5-9831-D7E8747ED881}" presName="node" presStyleLbl="alignAccFollowNode1" presStyleIdx="9" presStyleCnt="13">
+        <dgm:presLayoutVars>
+          <dgm:bulletEnabled val="1"/>
+        </dgm:presLayoutVars>
+      </dgm:prSet>
+      <dgm:spPr/>
+    </dgm:pt>
+    <dgm:pt modelId="{5C0E2E2A-A97B-4C8D-B436-A21D540047C4}" type="pres">
+      <dgm:prSet presAssocID="{868BFBC7-D93E-4C44-A528-BE60E83C4244}" presName="sibTrans" presStyleCnt="0"/>
+      <dgm:spPr/>
+    </dgm:pt>
+    <dgm:pt modelId="{E719EBCB-29E1-4476-93D2-81F844187A1C}" type="pres">
+      <dgm:prSet presAssocID="{DFB07BB9-CB2B-4461-A790-831C83ED352F}" presName="node" presStyleLbl="alignAccFollowNode1" presStyleIdx="10" presStyleCnt="13">
+        <dgm:presLayoutVars>
+          <dgm:bulletEnabled val="1"/>
+        </dgm:presLayoutVars>
+      </dgm:prSet>
+      <dgm:spPr/>
+    </dgm:pt>
+    <dgm:pt modelId="{234EE7D5-A6DB-4993-A629-D2A4587CB75C}" type="pres">
+      <dgm:prSet presAssocID="{26DEB2D8-9704-4700-823D-39E0B18664D4}" presName="sibTrans" presStyleCnt="0"/>
+      <dgm:spPr/>
+    </dgm:pt>
+    <dgm:pt modelId="{C2F86A45-031F-4237-B24B-E5CEF3AF8D2C}" type="pres">
+      <dgm:prSet presAssocID="{BAA66880-6DE5-44C6-BAE5-5BF3499E051E}" presName="node" presStyleLbl="alignAccFollowNode1" presStyleIdx="11" presStyleCnt="13">
+        <dgm:presLayoutVars>
+          <dgm:bulletEnabled val="1"/>
+        </dgm:presLayoutVars>
+      </dgm:prSet>
+      <dgm:spPr/>
+    </dgm:pt>
+    <dgm:pt modelId="{EB3E08B8-5F04-45D4-B35E-3959CC305326}" type="pres">
+      <dgm:prSet presAssocID="{3EA7A69B-3480-410C-922C-57E96C03AEDD}" presName="vSp" presStyleCnt="0"/>
+      <dgm:spPr/>
+    </dgm:pt>
+    <dgm:pt modelId="{962B50F3-9D0B-4847-A5FD-ED94EA60CB53}" type="pres">
+      <dgm:prSet presAssocID="{478EA27A-3EAD-46FB-B912-3651DD8FB675}" presName="horFlow" presStyleCnt="0"/>
+      <dgm:spPr/>
+    </dgm:pt>
+    <dgm:pt modelId="{ADA99D21-85B7-4B4F-845E-B2F3EF016769}" type="pres">
+      <dgm:prSet presAssocID="{478EA27A-3EAD-46FB-B912-3651DD8FB675}" presName="bigChev" presStyleLbl="node1" presStyleIdx="3" presStyleCnt="4"/>
+      <dgm:spPr/>
+    </dgm:pt>
+    <dgm:pt modelId="{728D778B-4AEC-4A5E-AE8C-5869618CD6EC}" type="pres">
+      <dgm:prSet presAssocID="{5BD2B3F5-6764-4D9A-91C8-FE77A8CEF9EC}" presName="parTrans" presStyleCnt="0"/>
+      <dgm:spPr/>
+    </dgm:pt>
+    <dgm:pt modelId="{53C007ED-FF8A-4598-B042-37BF9BE2064A}" type="pres">
+      <dgm:prSet presAssocID="{A76F2C72-1F57-4E50-BEFB-3A09D8528CB2}" presName="node" presStyleLbl="alignAccFollowNode1" presStyleIdx="12" presStyleCnt="13">
+        <dgm:presLayoutVars>
+          <dgm:bulletEnabled val="1"/>
+        </dgm:presLayoutVars>
+      </dgm:prSet>
+      <dgm:spPr/>
+    </dgm:pt>
+  </dgm:ptLst>
+  <dgm:cxnLst>
+    <dgm:cxn modelId="{64A6F303-0023-4420-843B-0FDBE466E4F1}" srcId="{95E5BF0B-4125-4119-84A6-AA1AEE190608}" destId="{70C35D1A-219A-4584-9912-8F96E7FD6534}" srcOrd="1" destOrd="0" parTransId="{D5F31328-9199-4987-A7B1-554EBF50360F}" sibTransId="{4F1909A3-5CC5-42C5-A4C7-E9617F6C5DF2}"/>
+    <dgm:cxn modelId="{778A1E0B-288E-4616-BF85-B4BFF843A3FE}" type="presOf" srcId="{95E5BF0B-4125-4119-84A6-AA1AEE190608}" destId="{32301DDB-05B2-479B-8CD8-B035AEB45018}" srcOrd="0" destOrd="0" presId="urn:microsoft.com/office/officeart/2005/8/layout/lProcess3"/>
+    <dgm:cxn modelId="{47E3FC18-1B9F-4480-B8EE-097A4FDEB7D8}" srcId="{3EA7A69B-3480-410C-922C-57E96C03AEDD}" destId="{DFB07BB9-CB2B-4461-A790-831C83ED352F}" srcOrd="3" destOrd="0" parTransId="{34B5C941-C109-4FE4-997B-FF40ED9BE767}" sibTransId="{26DEB2D8-9704-4700-823D-39E0B18664D4}"/>
+    <dgm:cxn modelId="{2E2A931E-A44A-47F6-85E8-D719437980C4}" type="presOf" srcId="{1428B444-6C29-4023-B2EB-DC35BD9E88EA}" destId="{F51C84D9-4759-4F5B-9359-E339922EB5F0}" srcOrd="0" destOrd="0" presId="urn:microsoft.com/office/officeart/2005/8/layout/lProcess3"/>
+    <dgm:cxn modelId="{AFE32520-DA17-4192-ACA6-2259C6D76FF6}" type="presOf" srcId="{DFB07BB9-CB2B-4461-A790-831C83ED352F}" destId="{E719EBCB-29E1-4476-93D2-81F844187A1C}" srcOrd="0" destOrd="0" presId="urn:microsoft.com/office/officeart/2005/8/layout/lProcess3"/>
+    <dgm:cxn modelId="{B5146427-0A7F-486B-A78A-D24F0B8F2E32}" srcId="{1428B444-6C29-4023-B2EB-DC35BD9E88EA}" destId="{0E444272-3C63-477F-9C47-A41036231C83}" srcOrd="0" destOrd="0" parTransId="{1AF51A4F-28A8-4255-BE3C-19488C130AD8}" sibTransId="{93548EBF-6F93-4F08-A521-18729271D11F}"/>
+    <dgm:cxn modelId="{C23B0D28-BB78-42CC-A998-5CDB3BC842C2}" type="presOf" srcId="{118C8218-47B3-425D-BBDE-F642DACBC0B9}" destId="{C0725B73-AA68-4997-B24A-58700B1975ED}" srcOrd="0" destOrd="0" presId="urn:microsoft.com/office/officeart/2005/8/layout/lProcess3"/>
+    <dgm:cxn modelId="{2DD3F229-69EA-49CA-A550-7E43722D6D34}" srcId="{3B8CFD7C-DCC8-4853-817B-E0D6FD063734}" destId="{478EA27A-3EAD-46FB-B912-3651DD8FB675}" srcOrd="3" destOrd="0" parTransId="{1D1A0C0E-EC35-432F-9B71-CA4C4AD67895}" sibTransId="{51DE7675-E73E-4C0A-A050-13FC8B0998EB}"/>
+    <dgm:cxn modelId="{B5FAD12A-5860-4DFB-87A1-EAD996A5A3FE}" type="presOf" srcId="{3B8CFD7C-DCC8-4853-817B-E0D6FD063734}" destId="{5A3D0F38-6884-4D44-9886-12E25B1F10D5}" srcOrd="0" destOrd="0" presId="urn:microsoft.com/office/officeart/2005/8/layout/lProcess3"/>
+    <dgm:cxn modelId="{74E29F2E-629F-477E-8A5B-9341E2631507}" srcId="{478EA27A-3EAD-46FB-B912-3651DD8FB675}" destId="{A76F2C72-1F57-4E50-BEFB-3A09D8528CB2}" srcOrd="0" destOrd="0" parTransId="{5BD2B3F5-6764-4D9A-91C8-FE77A8CEF9EC}" sibTransId="{51D0B126-BBCC-4835-90D5-884F7C022DB1}"/>
+    <dgm:cxn modelId="{33DCCE2E-1185-4997-840B-57795724D3AF}" type="presOf" srcId="{3B78721F-81EF-4F51-9E70-6192360E9C88}" destId="{0D309C3C-E240-4437-A48E-C896D95A414C}" srcOrd="0" destOrd="0" presId="urn:microsoft.com/office/officeart/2005/8/layout/lProcess3"/>
+    <dgm:cxn modelId="{680D152F-266D-481E-BED7-1AC6E129A21C}" srcId="{95E5BF0B-4125-4119-84A6-AA1AEE190608}" destId="{ADCE2F38-45D7-456D-8EDF-A608E50A49A0}" srcOrd="2" destOrd="0" parTransId="{E3F4E0E3-7387-4AC0-B5FE-0CA296144F69}" sibTransId="{CA0860E6-3B10-48DA-A183-94852A54B9BD}"/>
+    <dgm:cxn modelId="{E2E6583D-1EC9-410F-8AFB-987FBDE7490B}" type="presOf" srcId="{478EA27A-3EAD-46FB-B912-3651DD8FB675}" destId="{ADA99D21-85B7-4B4F-845E-B2F3EF016769}" srcOrd="0" destOrd="0" presId="urn:microsoft.com/office/officeart/2005/8/layout/lProcess3"/>
+    <dgm:cxn modelId="{637EC25E-32A6-4663-9C76-9FC402768B04}" type="presOf" srcId="{ADCE2F38-45D7-456D-8EDF-A608E50A49A0}" destId="{FDD2D33E-BAA9-4ACA-B13B-C77E16D184C6}" srcOrd="0" destOrd="0" presId="urn:microsoft.com/office/officeart/2005/8/layout/lProcess3"/>
+    <dgm:cxn modelId="{62F32B61-5DC2-4518-8CEA-1B136FEDEB76}" srcId="{1428B444-6C29-4023-B2EB-DC35BD9E88EA}" destId="{16116A1E-E0AD-44E6-97CD-043972074220}" srcOrd="3" destOrd="0" parTransId="{F5027948-B0D4-40BC-855D-E49A8315ABC3}" sibTransId="{C675E6DD-4366-4DBA-96B3-4B0E5F95CEB6}"/>
+    <dgm:cxn modelId="{7C09F141-5DAD-4332-A52D-54D7B0EBB4BB}" type="presOf" srcId="{9F44E5DD-68E0-40D6-A90B-8B4576C55B82}" destId="{5AAC5330-0D65-4E53-B8DA-86378CD4CE76}" srcOrd="0" destOrd="0" presId="urn:microsoft.com/office/officeart/2005/8/layout/lProcess3"/>
+    <dgm:cxn modelId="{D5867765-6F2C-4620-8216-E0FF33ED891A}" type="presOf" srcId="{0E9AF598-822A-480E-9DB2-60A7AA3EB796}" destId="{9B6A9B7A-2D9D-4105-A31D-6003C2F9A148}" srcOrd="0" destOrd="0" presId="urn:microsoft.com/office/officeart/2005/8/layout/lProcess3"/>
+    <dgm:cxn modelId="{9FDDEB47-90E8-4421-BEF4-997C0945CCE7}" srcId="{3EA7A69B-3480-410C-922C-57E96C03AEDD}" destId="{81EBEAA7-CB53-4DF3-A25A-EBE70E47E8B5}" srcOrd="1" destOrd="0" parTransId="{27F150F8-54D4-4A44-8D27-D858CFC1B0F5}" sibTransId="{A75D4CDA-642D-43EC-8A04-3C62E8E8D1AE}"/>
+    <dgm:cxn modelId="{75EDC96A-46CB-4A65-88AD-57A53C8D1559}" srcId="{3EA7A69B-3480-410C-922C-57E96C03AEDD}" destId="{BAA66880-6DE5-44C6-BAE5-5BF3499E051E}" srcOrd="4" destOrd="0" parTransId="{4FA36AE9-C9E2-4602-A62E-564BD86FB906}" sibTransId="{2723DBC2-7418-4CC9-B965-96D5CC96CFE2}"/>
+    <dgm:cxn modelId="{C4906E81-9B50-4456-BF54-F0D0D6EB3E06}" type="presOf" srcId="{7F7776A6-B22C-47B5-9831-D7E8747ED881}" destId="{EED72392-32DA-41A4-B324-1D658877A145}" srcOrd="0" destOrd="0" presId="urn:microsoft.com/office/officeart/2005/8/layout/lProcess3"/>
+    <dgm:cxn modelId="{5C2B9794-C69A-46D9-8288-4BF1EB8EC4C3}" srcId="{3B8CFD7C-DCC8-4853-817B-E0D6FD063734}" destId="{3EA7A69B-3480-410C-922C-57E96C03AEDD}" srcOrd="2" destOrd="0" parTransId="{796DBC91-E9A5-4BEB-88C4-0A2DC8ECC5E8}" sibTransId="{3FF9312B-9ED3-4321-A274-B2C90291AE66}"/>
+    <dgm:cxn modelId="{8FE4D6A5-96BB-4C6C-803E-C7152E69C5B3}" type="presOf" srcId="{16116A1E-E0AD-44E6-97CD-043972074220}" destId="{63EFE76F-75C6-495A-BEFE-B23412D52762}" srcOrd="0" destOrd="0" presId="urn:microsoft.com/office/officeart/2005/8/layout/lProcess3"/>
+    <dgm:cxn modelId="{276770A8-5751-443B-B4BE-B76217628854}" type="presOf" srcId="{0E444272-3C63-477F-9C47-A41036231C83}" destId="{B7A582EF-4211-47A2-91A5-9D7A3979D17C}" srcOrd="0" destOrd="0" presId="urn:microsoft.com/office/officeart/2005/8/layout/lProcess3"/>
+    <dgm:cxn modelId="{0E929AAA-EEFA-42F1-908F-DBAA86644762}" srcId="{3B8CFD7C-DCC8-4853-817B-E0D6FD063734}" destId="{1428B444-6C29-4023-B2EB-DC35BD9E88EA}" srcOrd="0" destOrd="0" parTransId="{FA4B1207-58EE-42AA-8CDD-CF6D6FB102D6}" sibTransId="{B530583A-EF6F-424D-BE8A-0451E7585402}"/>
+    <dgm:cxn modelId="{855B2EAE-9567-4896-8412-D355D80E3AFE}" type="presOf" srcId="{81EBEAA7-CB53-4DF3-A25A-EBE70E47E8B5}" destId="{6C71E289-33D5-4D78-9D9A-659200006B91}" srcOrd="0" destOrd="0" presId="urn:microsoft.com/office/officeart/2005/8/layout/lProcess3"/>
+    <dgm:cxn modelId="{765C25B1-87EF-4BD9-9BEF-A29DD1E77200}" type="presOf" srcId="{BAA66880-6DE5-44C6-BAE5-5BF3499E051E}" destId="{C2F86A45-031F-4237-B24B-E5CEF3AF8D2C}" srcOrd="0" destOrd="0" presId="urn:microsoft.com/office/officeart/2005/8/layout/lProcess3"/>
+    <dgm:cxn modelId="{A0DA75B9-5F07-4619-A974-934409E12C10}" type="presOf" srcId="{3EA7A69B-3480-410C-922C-57E96C03AEDD}" destId="{6E00654F-BA06-4B66-95A7-CAF0AFBA8E44}" srcOrd="0" destOrd="0" presId="urn:microsoft.com/office/officeart/2005/8/layout/lProcess3"/>
+    <dgm:cxn modelId="{1C5E6ABE-793E-4056-8827-FB3D717F466A}" srcId="{3B8CFD7C-DCC8-4853-817B-E0D6FD063734}" destId="{95E5BF0B-4125-4119-84A6-AA1AEE190608}" srcOrd="1" destOrd="0" parTransId="{26030C2E-1D3D-48B6-8203-D973CE80B638}" sibTransId="{E0146706-571A-4442-9FD6-3733A38D5536}"/>
+    <dgm:cxn modelId="{087184D1-F1BA-408A-8C93-097A290E6522}" srcId="{95E5BF0B-4125-4119-84A6-AA1AEE190608}" destId="{118C8218-47B3-425D-BBDE-F642DACBC0B9}" srcOrd="0" destOrd="0" parTransId="{1687BC27-7F6C-460C-9F6C-FCADA57B45F9}" sibTransId="{8D040E17-2679-42D2-879F-51D385D45CDF}"/>
+    <dgm:cxn modelId="{E82AEBDA-5FF2-4F64-8CAB-F9615E9E35E8}" srcId="{1428B444-6C29-4023-B2EB-DC35BD9E88EA}" destId="{3B78721F-81EF-4F51-9E70-6192360E9C88}" srcOrd="2" destOrd="0" parTransId="{D36F10C3-AC16-440E-9D81-05A476B8E49D}" sibTransId="{AF3C0DB7-1A2A-4843-872C-BF76611A5CF5}"/>
+    <dgm:cxn modelId="{277070DD-D318-4B9C-80D0-BE114F8ADD01}" srcId="{1428B444-6C29-4023-B2EB-DC35BD9E88EA}" destId="{0E9AF598-822A-480E-9DB2-60A7AA3EB796}" srcOrd="1" destOrd="0" parTransId="{A0ED786E-5FFA-4801-9491-E1B5E8C235B2}" sibTransId="{E8F1C333-4209-40F9-AA6C-FE5E1156D851}"/>
+    <dgm:cxn modelId="{AD2EE0E0-A2A9-4D50-94DB-4A45915E47D4}" type="presOf" srcId="{A76F2C72-1F57-4E50-BEFB-3A09D8528CB2}" destId="{53C007ED-FF8A-4598-B042-37BF9BE2064A}" srcOrd="0" destOrd="0" presId="urn:microsoft.com/office/officeart/2005/8/layout/lProcess3"/>
+    <dgm:cxn modelId="{54B1D2E5-25BD-4CD2-8EB8-BAABC15C1DDB}" type="presOf" srcId="{70C35D1A-219A-4584-9912-8F96E7FD6534}" destId="{6C0AD1B2-BF39-41DB-9FCB-C726F0B0A11C}" srcOrd="0" destOrd="0" presId="urn:microsoft.com/office/officeart/2005/8/layout/lProcess3"/>
+    <dgm:cxn modelId="{FBFBFDF4-CED7-4EF5-B1F2-59033E03351E}" srcId="{3EA7A69B-3480-410C-922C-57E96C03AEDD}" destId="{7F7776A6-B22C-47B5-9831-D7E8747ED881}" srcOrd="2" destOrd="0" parTransId="{4166182E-94BC-453E-9719-4F94542682EF}" sibTransId="{868BFBC7-D93E-4C44-A528-BE60E83C4244}"/>
+    <dgm:cxn modelId="{6D9A93FD-7870-408B-BB01-9BAB2C2BA00A}" srcId="{3EA7A69B-3480-410C-922C-57E96C03AEDD}" destId="{9F44E5DD-68E0-40D6-A90B-8B4576C55B82}" srcOrd="0" destOrd="0" parTransId="{BC8AB084-D176-44D7-9C9A-FC3473AA24F0}" sibTransId="{47446131-A7D1-4062-8ED8-B3A73A41A166}"/>
+    <dgm:cxn modelId="{DEE240CC-862F-4BE1-9521-1E2BF01C3C24}" type="presParOf" srcId="{5A3D0F38-6884-4D44-9886-12E25B1F10D5}" destId="{84A39919-B256-41C9-866D-D108A9B5FD5D}" srcOrd="0" destOrd="0" presId="urn:microsoft.com/office/officeart/2005/8/layout/lProcess3"/>
+    <dgm:cxn modelId="{A1874F1A-B4E9-46AE-AF6E-E27772C8271B}" type="presParOf" srcId="{84A39919-B256-41C9-866D-D108A9B5FD5D}" destId="{F51C84D9-4759-4F5B-9359-E339922EB5F0}" srcOrd="0" destOrd="0" presId="urn:microsoft.com/office/officeart/2005/8/layout/lProcess3"/>
+    <dgm:cxn modelId="{3A7BB17D-52D9-46C0-93D6-54D01E0A8C26}" type="presParOf" srcId="{84A39919-B256-41C9-866D-D108A9B5FD5D}" destId="{8B62AE5E-9984-4D2C-9FE3-5DEEEF1E49DD}" srcOrd="1" destOrd="0" presId="urn:microsoft.com/office/officeart/2005/8/layout/lProcess3"/>
+    <dgm:cxn modelId="{284AE8FC-B472-460B-9D59-F4A5F1A8534D}" type="presParOf" srcId="{84A39919-B256-41C9-866D-D108A9B5FD5D}" destId="{B7A582EF-4211-47A2-91A5-9D7A3979D17C}" srcOrd="2" destOrd="0" presId="urn:microsoft.com/office/officeart/2005/8/layout/lProcess3"/>
+    <dgm:cxn modelId="{9CA91F59-DBC0-4E37-8E07-F479DDED17FE}" type="presParOf" srcId="{84A39919-B256-41C9-866D-D108A9B5FD5D}" destId="{DA81F569-DAC5-45AB-B673-494CCC7AB961}" srcOrd="3" destOrd="0" presId="urn:microsoft.com/office/officeart/2005/8/layout/lProcess3"/>
+    <dgm:cxn modelId="{2577E370-B067-4906-8B8D-916B0BAD02DD}" type="presParOf" srcId="{84A39919-B256-41C9-866D-D108A9B5FD5D}" destId="{9B6A9B7A-2D9D-4105-A31D-6003C2F9A148}" srcOrd="4" destOrd="0" presId="urn:microsoft.com/office/officeart/2005/8/layout/lProcess3"/>
+    <dgm:cxn modelId="{D8E92EED-06B7-4B54-8AF9-491653D72711}" type="presParOf" srcId="{84A39919-B256-41C9-866D-D108A9B5FD5D}" destId="{83821DC2-A6AB-494E-8098-20B7776946F9}" srcOrd="5" destOrd="0" presId="urn:microsoft.com/office/officeart/2005/8/layout/lProcess3"/>
+    <dgm:cxn modelId="{F7E71F09-08B4-4C79-ABD6-0AFC352FB6A8}" type="presParOf" srcId="{84A39919-B256-41C9-866D-D108A9B5FD5D}" destId="{0D309C3C-E240-4437-A48E-C896D95A414C}" srcOrd="6" destOrd="0" presId="urn:microsoft.com/office/officeart/2005/8/layout/lProcess3"/>
+    <dgm:cxn modelId="{FF3AEAED-67A3-4537-AB22-2EC5DA16D51E}" type="presParOf" srcId="{84A39919-B256-41C9-866D-D108A9B5FD5D}" destId="{866402AD-E35A-44E2-B26C-DAE2A8E63132}" srcOrd="7" destOrd="0" presId="urn:microsoft.com/office/officeart/2005/8/layout/lProcess3"/>
+    <dgm:cxn modelId="{788D7ACB-A245-4D79-BFAB-1C1AD7279C80}" type="presParOf" srcId="{84A39919-B256-41C9-866D-D108A9B5FD5D}" destId="{63EFE76F-75C6-495A-BEFE-B23412D52762}" srcOrd="8" destOrd="0" presId="urn:microsoft.com/office/officeart/2005/8/layout/lProcess3"/>
+    <dgm:cxn modelId="{6ABD246B-9F75-4B89-86D4-4300BD50D1DE}" type="presParOf" srcId="{5A3D0F38-6884-4D44-9886-12E25B1F10D5}" destId="{CC6EBC25-521D-4461-8A1B-6C7C207884BC}" srcOrd="1" destOrd="0" presId="urn:microsoft.com/office/officeart/2005/8/layout/lProcess3"/>
+    <dgm:cxn modelId="{69882859-9524-4C25-8963-E2C8DC7E4C99}" type="presParOf" srcId="{5A3D0F38-6884-4D44-9886-12E25B1F10D5}" destId="{DF497DA9-9AD0-4EC1-A31B-2C4DFD86C8C9}" srcOrd="2" destOrd="0" presId="urn:microsoft.com/office/officeart/2005/8/layout/lProcess3"/>
+    <dgm:cxn modelId="{198BF5D3-4ABD-41BF-99E4-3F3BE5336178}" type="presParOf" srcId="{DF497DA9-9AD0-4EC1-A31B-2C4DFD86C8C9}" destId="{32301DDB-05B2-479B-8CD8-B035AEB45018}" srcOrd="0" destOrd="0" presId="urn:microsoft.com/office/officeart/2005/8/layout/lProcess3"/>
+    <dgm:cxn modelId="{E8C48F64-A1F2-4704-90A7-1AC70CBCF54B}" type="presParOf" srcId="{DF497DA9-9AD0-4EC1-A31B-2C4DFD86C8C9}" destId="{9C33FE0A-4647-4426-A95E-A685209B967A}" srcOrd="1" destOrd="0" presId="urn:microsoft.com/office/officeart/2005/8/layout/lProcess3"/>
+    <dgm:cxn modelId="{0EC58E88-EBDA-49E9-BE43-449087BF6451}" type="presParOf" srcId="{DF497DA9-9AD0-4EC1-A31B-2C4DFD86C8C9}" destId="{C0725B73-AA68-4997-B24A-58700B1975ED}" srcOrd="2" destOrd="0" presId="urn:microsoft.com/office/officeart/2005/8/layout/lProcess3"/>
+    <dgm:cxn modelId="{2BCECE6E-FABE-4AAE-8A40-2CC552B88CD1}" type="presParOf" srcId="{DF497DA9-9AD0-4EC1-A31B-2C4DFD86C8C9}" destId="{81FB1F54-2071-4DF3-B70F-D4353710E87C}" srcOrd="3" destOrd="0" presId="urn:microsoft.com/office/officeart/2005/8/layout/lProcess3"/>
+    <dgm:cxn modelId="{FA873AE4-707F-4FB8-A872-3C6D98942AC4}" type="presParOf" srcId="{DF497DA9-9AD0-4EC1-A31B-2C4DFD86C8C9}" destId="{6C0AD1B2-BF39-41DB-9FCB-C726F0B0A11C}" srcOrd="4" destOrd="0" presId="urn:microsoft.com/office/officeart/2005/8/layout/lProcess3"/>
+    <dgm:cxn modelId="{5B3D65EC-599A-4383-9099-A5F46FD6C1A1}" type="presParOf" srcId="{DF497DA9-9AD0-4EC1-A31B-2C4DFD86C8C9}" destId="{C4D80E08-2304-4C15-B6D7-8CD86EF69E38}" srcOrd="5" destOrd="0" presId="urn:microsoft.com/office/officeart/2005/8/layout/lProcess3"/>
+    <dgm:cxn modelId="{87A6C1ED-9731-485D-8C57-29616877C565}" type="presParOf" srcId="{DF497DA9-9AD0-4EC1-A31B-2C4DFD86C8C9}" destId="{FDD2D33E-BAA9-4ACA-B13B-C77E16D184C6}" srcOrd="6" destOrd="0" presId="urn:microsoft.com/office/officeart/2005/8/layout/lProcess3"/>
+    <dgm:cxn modelId="{C9D70FE0-E3FB-414A-A162-EDF3FD84468D}" type="presParOf" srcId="{5A3D0F38-6884-4D44-9886-12E25B1F10D5}" destId="{BF6F469A-BDFB-4B96-AEEB-B2A933053A91}" srcOrd="3" destOrd="0" presId="urn:microsoft.com/office/officeart/2005/8/layout/lProcess3"/>
+    <dgm:cxn modelId="{2FF994DD-040F-4EF5-9CB9-0E4838A910FA}" type="presParOf" srcId="{5A3D0F38-6884-4D44-9886-12E25B1F10D5}" destId="{B3693F91-72D6-44AE-818B-304BBE8BCFD3}" srcOrd="4" destOrd="0" presId="urn:microsoft.com/office/officeart/2005/8/layout/lProcess3"/>
+    <dgm:cxn modelId="{2A79FD7A-49A8-488E-A686-D7CC0ADA35D7}" type="presParOf" srcId="{B3693F91-72D6-44AE-818B-304BBE8BCFD3}" destId="{6E00654F-BA06-4B66-95A7-CAF0AFBA8E44}" srcOrd="0" destOrd="0" presId="urn:microsoft.com/office/officeart/2005/8/layout/lProcess3"/>
+    <dgm:cxn modelId="{F43BF555-C39E-4FEC-81AC-F3CABDE788DC}" type="presParOf" srcId="{B3693F91-72D6-44AE-818B-304BBE8BCFD3}" destId="{4787700D-3A73-4454-9565-8EC7DB523E88}" srcOrd="1" destOrd="0" presId="urn:microsoft.com/office/officeart/2005/8/layout/lProcess3"/>
+    <dgm:cxn modelId="{B1E0D9EB-59FA-4EA5-BE33-31B89A53785E}" type="presParOf" srcId="{B3693F91-72D6-44AE-818B-304BBE8BCFD3}" destId="{5AAC5330-0D65-4E53-B8DA-86378CD4CE76}" srcOrd="2" destOrd="0" presId="urn:microsoft.com/office/officeart/2005/8/layout/lProcess3"/>
+    <dgm:cxn modelId="{0DDCFA51-9B90-441F-81B4-EFE2D5C6236A}" type="presParOf" srcId="{B3693F91-72D6-44AE-818B-304BBE8BCFD3}" destId="{D05E77FC-2B00-48A0-9FC8-319EF40B8D74}" srcOrd="3" destOrd="0" presId="urn:microsoft.com/office/officeart/2005/8/layout/lProcess3"/>
+    <dgm:cxn modelId="{D4BD6BC4-D66F-4FED-B37F-F1312FBF182D}" type="presParOf" srcId="{B3693F91-72D6-44AE-818B-304BBE8BCFD3}" destId="{6C71E289-33D5-4D78-9D9A-659200006B91}" srcOrd="4" destOrd="0" presId="urn:microsoft.com/office/officeart/2005/8/layout/lProcess3"/>
+    <dgm:cxn modelId="{211C5358-52FA-42D0-B063-D394C53742D5}" type="presParOf" srcId="{B3693F91-72D6-44AE-818B-304BBE8BCFD3}" destId="{F35843E1-A9FF-4FBF-B786-9F8785C27900}" srcOrd="5" destOrd="0" presId="urn:microsoft.com/office/officeart/2005/8/layout/lProcess3"/>
+    <dgm:cxn modelId="{7B79A839-D170-426E-82BE-61D76207CC82}" type="presParOf" srcId="{B3693F91-72D6-44AE-818B-304BBE8BCFD3}" destId="{EED72392-32DA-41A4-B324-1D658877A145}" srcOrd="6" destOrd="0" presId="urn:microsoft.com/office/officeart/2005/8/layout/lProcess3"/>
+    <dgm:cxn modelId="{3BEA49E0-F4EA-4ACB-9AC1-4F98D6D9EF30}" type="presParOf" srcId="{B3693F91-72D6-44AE-818B-304BBE8BCFD3}" destId="{5C0E2E2A-A97B-4C8D-B436-A21D540047C4}" srcOrd="7" destOrd="0" presId="urn:microsoft.com/office/officeart/2005/8/layout/lProcess3"/>
+    <dgm:cxn modelId="{5C2F978C-476C-4339-9125-1C2A656E926F}" type="presParOf" srcId="{B3693F91-72D6-44AE-818B-304BBE8BCFD3}" destId="{E719EBCB-29E1-4476-93D2-81F844187A1C}" srcOrd="8" destOrd="0" presId="urn:microsoft.com/office/officeart/2005/8/layout/lProcess3"/>
+    <dgm:cxn modelId="{D8A9CC70-0B45-4345-B4CE-58CBDC2907FE}" type="presParOf" srcId="{B3693F91-72D6-44AE-818B-304BBE8BCFD3}" destId="{234EE7D5-A6DB-4993-A629-D2A4587CB75C}" srcOrd="9" destOrd="0" presId="urn:microsoft.com/office/officeart/2005/8/layout/lProcess3"/>
+    <dgm:cxn modelId="{D9E672D0-0C1F-4AAB-B594-26411DBFEEB5}" type="presParOf" srcId="{B3693F91-72D6-44AE-818B-304BBE8BCFD3}" destId="{C2F86A45-031F-4237-B24B-E5CEF3AF8D2C}" srcOrd="10" destOrd="0" presId="urn:microsoft.com/office/officeart/2005/8/layout/lProcess3"/>
+    <dgm:cxn modelId="{7DE9F8B7-3A8B-47B2-A6F0-959264AC66B8}" type="presParOf" srcId="{5A3D0F38-6884-4D44-9886-12E25B1F10D5}" destId="{EB3E08B8-5F04-45D4-B35E-3959CC305326}" srcOrd="5" destOrd="0" presId="urn:microsoft.com/office/officeart/2005/8/layout/lProcess3"/>
+    <dgm:cxn modelId="{A86C6DDA-F452-4FFD-8D45-04C5F1EB02B6}" type="presParOf" srcId="{5A3D0F38-6884-4D44-9886-12E25B1F10D5}" destId="{962B50F3-9D0B-4847-A5FD-ED94EA60CB53}" srcOrd="6" destOrd="0" presId="urn:microsoft.com/office/officeart/2005/8/layout/lProcess3"/>
+    <dgm:cxn modelId="{91B9F212-B6F0-438D-BF0C-5988E7D04D19}" type="presParOf" srcId="{962B50F3-9D0B-4847-A5FD-ED94EA60CB53}" destId="{ADA99D21-85B7-4B4F-845E-B2F3EF016769}" srcOrd="0" destOrd="0" presId="urn:microsoft.com/office/officeart/2005/8/layout/lProcess3"/>
+    <dgm:cxn modelId="{BABC9B92-2276-4D76-BF8C-256F6596612C}" type="presParOf" srcId="{962B50F3-9D0B-4847-A5FD-ED94EA60CB53}" destId="{728D778B-4AEC-4A5E-AE8C-5869618CD6EC}" srcOrd="1" destOrd="0" presId="urn:microsoft.com/office/officeart/2005/8/layout/lProcess3"/>
+    <dgm:cxn modelId="{68EE05DC-4FB3-4971-B839-CE34FDE2F831}" type="presParOf" srcId="{962B50F3-9D0B-4847-A5FD-ED94EA60CB53}" destId="{53C007ED-FF8A-4598-B042-37BF9BE2064A}" srcOrd="2" destOrd="0" presId="urn:microsoft.com/office/officeart/2005/8/layout/lProcess3"/>
+  </dgm:cxnLst>
+  <dgm:bg/>
+  <dgm:whole/>
+  <dgm:extLst>
+    <a:ext uri="http://schemas.microsoft.com/office/drawing/2008/diagram">
+      <dsp:dataModelExt xmlns:dsp="http://schemas.microsoft.com/office/drawing/2008/diagram" relId="rId6" minVer="http://schemas.openxmlformats.org/drawingml/2006/diagram"/>
+    </a:ext>
+  </dgm:extLst>
+</dgm:dataModel>
+</file>
+
+<file path=ppt/diagrams/drawing1.xml><?xml version="1.0" encoding="utf-8"?>
+<dsp:drawing xmlns:dgm="http://schemas.openxmlformats.org/drawingml/2006/diagram" xmlns:dsp="http://schemas.microsoft.com/office/drawing/2008/diagram" xmlns:a="http://schemas.openxmlformats.org/drawingml/2006/main">
+  <dsp:spTree>
+    <dsp:nvGrpSpPr>
+      <dsp:cNvPr id="0" name=""/>
+      <dsp:cNvGrpSpPr/>
+    </dsp:nvGrpSpPr>
+    <dsp:grpSpPr/>
+    <dsp:sp modelId="{F51C84D9-4759-4F5B-9359-E339922EB5F0}">
+      <dsp:nvSpPr>
+        <dsp:cNvPr id="0" name=""/>
+        <dsp:cNvSpPr/>
+      </dsp:nvSpPr>
+      <dsp:spPr>
+        <a:xfrm>
+          <a:off x="922332" y="2397"/>
+          <a:ext cx="2249239" cy="899695"/>
+        </a:xfrm>
+        <a:prstGeom prst="chevron">
+          <a:avLst/>
+        </a:prstGeom>
+        <a:solidFill>
+          <a:schemeClr val="accent1">
+            <a:hueOff val="0"/>
+            <a:satOff val="0"/>
+            <a:lumOff val="0"/>
+            <a:alphaOff val="0"/>
+          </a:schemeClr>
+        </a:solidFill>
+        <a:ln w="34925" cap="flat" cmpd="sng" algn="in">
+          <a:solidFill>
+            <a:schemeClr val="lt1">
+              <a:hueOff val="0"/>
+              <a:satOff val="0"/>
+              <a:lumOff val="0"/>
+              <a:alphaOff val="0"/>
+            </a:schemeClr>
+          </a:solidFill>
+          <a:prstDash val="solid"/>
+        </a:ln>
+        <a:effectLst/>
+      </dsp:spPr>
+      <dsp:style>
+        <a:lnRef idx="2">
+          <a:scrgbClr r="0" g="0" b="0"/>
+        </a:lnRef>
+        <a:fillRef idx="1">
+          <a:scrgbClr r="0" g="0" b="0"/>
+        </a:fillRef>
+        <a:effectRef idx="0">
+          <a:scrgbClr r="0" g="0" b="0"/>
+        </a:effectRef>
+        <a:fontRef idx="minor">
+          <a:schemeClr val="lt1"/>
+        </a:fontRef>
+      </dsp:style>
+      <dsp:txBody>
+        <a:bodyPr spcFirstLastPara="0" vert="horz" wrap="square" lIns="34290" tIns="17145" rIns="0" bIns="17145" numCol="1" spcCol="1270" anchor="ctr" anchorCtr="0">
+          <a:noAutofit/>
+        </a:bodyPr>
+        <a:lstStyle/>
+        <a:p>
+          <a:pPr marL="0" lvl="0" indent="0" algn="ctr" defTabSz="1200150">
+            <a:lnSpc>
+              <a:spcPct val="90000"/>
+            </a:lnSpc>
+            <a:spcBef>
+              <a:spcPct val="0"/>
+            </a:spcBef>
+            <a:spcAft>
+              <a:spcPct val="35000"/>
+            </a:spcAft>
+            <a:buNone/>
+          </a:pPr>
+          <a:r>
+            <a:rPr lang="fr-FR" sz="2700" kern="1200" dirty="0"/>
+            <a:t>Semaine 1</a:t>
+          </a:r>
+        </a:p>
+      </dsp:txBody>
+      <dsp:txXfrm>
+        <a:off x="1372180" y="2397"/>
+        <a:ext cx="1349544" cy="899695"/>
+      </dsp:txXfrm>
+    </dsp:sp>
+    <dsp:sp modelId="{B7A582EF-4211-47A2-91A5-9D7A3979D17C}">
+      <dsp:nvSpPr>
+        <dsp:cNvPr id="0" name=""/>
+        <dsp:cNvSpPr/>
+      </dsp:nvSpPr>
+      <dsp:spPr>
+        <a:xfrm>
+          <a:off x="2879170" y="78871"/>
+          <a:ext cx="1866868" cy="746747"/>
+        </a:xfrm>
+        <a:prstGeom prst="chevron">
+          <a:avLst/>
+        </a:prstGeom>
+        <a:solidFill>
+          <a:schemeClr val="accent1">
+            <a:alpha val="90000"/>
+            <a:tint val="40000"/>
+            <a:hueOff val="0"/>
+            <a:satOff val="0"/>
+            <a:lumOff val="0"/>
+            <a:alphaOff val="0"/>
+          </a:schemeClr>
+        </a:solidFill>
+        <a:ln w="34925" cap="flat" cmpd="sng" algn="in">
+          <a:solidFill>
+            <a:schemeClr val="accent1">
+              <a:alpha val="90000"/>
+              <a:tint val="40000"/>
+              <a:hueOff val="0"/>
+              <a:satOff val="0"/>
+              <a:lumOff val="0"/>
+              <a:alphaOff val="0"/>
+            </a:schemeClr>
+          </a:solidFill>
+          <a:prstDash val="solid"/>
+        </a:ln>
+        <a:effectLst/>
+      </dsp:spPr>
+      <dsp:style>
+        <a:lnRef idx="2">
+          <a:scrgbClr r="0" g="0" b="0"/>
+        </a:lnRef>
+        <a:fillRef idx="1">
+          <a:scrgbClr r="0" g="0" b="0"/>
+        </a:fillRef>
+        <a:effectRef idx="0">
+          <a:scrgbClr r="0" g="0" b="0"/>
+        </a:effectRef>
+        <a:fontRef idx="minor"/>
+      </dsp:style>
+      <dsp:txBody>
+        <a:bodyPr spcFirstLastPara="0" vert="horz" wrap="square" lIns="15240" tIns="7620" rIns="0" bIns="7620" numCol="1" spcCol="1270" anchor="ctr" anchorCtr="0">
+          <a:noAutofit/>
+        </a:bodyPr>
+        <a:lstStyle/>
+        <a:p>
+          <a:pPr marL="0" lvl="0" indent="0" algn="ctr" defTabSz="533400">
+            <a:lnSpc>
+              <a:spcPct val="90000"/>
+            </a:lnSpc>
+            <a:spcBef>
+              <a:spcPct val="0"/>
+            </a:spcBef>
+            <a:spcAft>
+              <a:spcPct val="35000"/>
+            </a:spcAft>
+            <a:buNone/>
+          </a:pPr>
+          <a:r>
+            <a:rPr lang="fr-FR" sz="1200" kern="1200" dirty="0"/>
+            <a:t>2h – CM</a:t>
+          </a:r>
+        </a:p>
+        <a:p>
+          <a:pPr marL="0" lvl="0" indent="0" algn="ctr" defTabSz="533400">
+            <a:lnSpc>
+              <a:spcPct val="90000"/>
+            </a:lnSpc>
+            <a:spcBef>
+              <a:spcPct val="0"/>
+            </a:spcBef>
+            <a:spcAft>
+              <a:spcPct val="35000"/>
+            </a:spcAft>
+            <a:buNone/>
+          </a:pPr>
+          <a:r>
+            <a:rPr lang="fr-FR" sz="1200" kern="1200" dirty="0"/>
+            <a:t>Codage des nombres, caractères et images</a:t>
+          </a:r>
+        </a:p>
+      </dsp:txBody>
+      <dsp:txXfrm>
+        <a:off x="3252544" y="78871"/>
+        <a:ext cx="1120121" cy="746747"/>
+      </dsp:txXfrm>
+    </dsp:sp>
+    <dsp:sp modelId="{9B6A9B7A-2D9D-4105-A31D-6003C2F9A148}">
+      <dsp:nvSpPr>
+        <dsp:cNvPr id="0" name=""/>
+        <dsp:cNvSpPr/>
+      </dsp:nvSpPr>
+      <dsp:spPr>
+        <a:xfrm>
+          <a:off x="4484677" y="78871"/>
+          <a:ext cx="1866868" cy="746747"/>
+        </a:xfrm>
+        <a:prstGeom prst="chevron">
+          <a:avLst/>
+        </a:prstGeom>
+        <a:solidFill>
+          <a:schemeClr val="accent1">
+            <a:alpha val="90000"/>
+            <a:tint val="40000"/>
+            <a:hueOff val="0"/>
+            <a:satOff val="0"/>
+            <a:lumOff val="0"/>
+            <a:alphaOff val="0"/>
+          </a:schemeClr>
+        </a:solidFill>
+        <a:ln w="34925" cap="flat" cmpd="sng" algn="in">
+          <a:solidFill>
+            <a:schemeClr val="accent1">
+              <a:alpha val="90000"/>
+              <a:tint val="40000"/>
+              <a:hueOff val="0"/>
+              <a:satOff val="0"/>
+              <a:lumOff val="0"/>
+              <a:alphaOff val="0"/>
+            </a:schemeClr>
+          </a:solidFill>
+          <a:prstDash val="solid"/>
+        </a:ln>
+        <a:effectLst/>
+      </dsp:spPr>
+      <dsp:style>
+        <a:lnRef idx="2">
+          <a:scrgbClr r="0" g="0" b="0"/>
+        </a:lnRef>
+        <a:fillRef idx="1">
+          <a:scrgbClr r="0" g="0" b="0"/>
+        </a:fillRef>
+        <a:effectRef idx="0">
+          <a:scrgbClr r="0" g="0" b="0"/>
+        </a:effectRef>
+        <a:fontRef idx="minor"/>
+      </dsp:style>
+      <dsp:txBody>
+        <a:bodyPr spcFirstLastPara="0" vert="horz" wrap="square" lIns="13970" tIns="6985" rIns="0" bIns="6985" numCol="1" spcCol="1270" anchor="ctr" anchorCtr="0">
+          <a:noAutofit/>
+        </a:bodyPr>
+        <a:lstStyle/>
+        <a:p>
+          <a:pPr marL="0" lvl="0" indent="0" algn="ctr" defTabSz="488950">
+            <a:lnSpc>
+              <a:spcPct val="90000"/>
+            </a:lnSpc>
+            <a:spcBef>
+              <a:spcPct val="0"/>
+            </a:spcBef>
+            <a:spcAft>
+              <a:spcPct val="35000"/>
+            </a:spcAft>
+            <a:buNone/>
+          </a:pPr>
+          <a:r>
+            <a:rPr lang="fr-FR" sz="1100" kern="1200" dirty="0"/>
+            <a:t>2h – CM</a:t>
+          </a:r>
+        </a:p>
+        <a:p>
+          <a:pPr marL="0" lvl="0" indent="0" algn="ctr" defTabSz="488950">
+            <a:lnSpc>
+              <a:spcPct val="90000"/>
+            </a:lnSpc>
+            <a:spcBef>
+              <a:spcPct val="0"/>
+            </a:spcBef>
+            <a:spcAft>
+              <a:spcPct val="35000"/>
+            </a:spcAft>
+            <a:buNone/>
+          </a:pPr>
+          <a:r>
+            <a:rPr lang="fr-FR" sz="1100" kern="1200" dirty="0"/>
+            <a:t>Différents types de mémoire</a:t>
+          </a:r>
+        </a:p>
+      </dsp:txBody>
+      <dsp:txXfrm>
+        <a:off x="4858051" y="78871"/>
+        <a:ext cx="1120121" cy="746747"/>
+      </dsp:txXfrm>
+    </dsp:sp>
+    <dsp:sp modelId="{0D309C3C-E240-4437-A48E-C896D95A414C}">
+      <dsp:nvSpPr>
+        <dsp:cNvPr id="0" name=""/>
+        <dsp:cNvSpPr/>
+      </dsp:nvSpPr>
+      <dsp:spPr>
+        <a:xfrm>
+          <a:off x="6090184" y="78871"/>
+          <a:ext cx="1866868" cy="746747"/>
+        </a:xfrm>
+        <a:prstGeom prst="chevron">
+          <a:avLst/>
+        </a:prstGeom>
+        <a:solidFill>
+          <a:schemeClr val="accent1">
+            <a:alpha val="90000"/>
+            <a:tint val="40000"/>
+            <a:hueOff val="0"/>
+            <a:satOff val="0"/>
+            <a:lumOff val="0"/>
+            <a:alphaOff val="0"/>
+          </a:schemeClr>
+        </a:solidFill>
+        <a:ln w="34925" cap="flat" cmpd="sng" algn="in">
+          <a:solidFill>
+            <a:schemeClr val="accent1">
+              <a:alpha val="90000"/>
+              <a:tint val="40000"/>
+              <a:hueOff val="0"/>
+              <a:satOff val="0"/>
+              <a:lumOff val="0"/>
+              <a:alphaOff val="0"/>
+            </a:schemeClr>
+          </a:solidFill>
+          <a:prstDash val="solid"/>
+        </a:ln>
+        <a:effectLst/>
+      </dsp:spPr>
+      <dsp:style>
+        <a:lnRef idx="2">
+          <a:scrgbClr r="0" g="0" b="0"/>
+        </a:lnRef>
+        <a:fillRef idx="1">
+          <a:scrgbClr r="0" g="0" b="0"/>
+        </a:fillRef>
+        <a:effectRef idx="0">
+          <a:scrgbClr r="0" g="0" b="0"/>
+        </a:effectRef>
+        <a:fontRef idx="minor"/>
+      </dsp:style>
+      <dsp:txBody>
+        <a:bodyPr spcFirstLastPara="0" vert="horz" wrap="square" lIns="13970" tIns="6985" rIns="0" bIns="6985" numCol="1" spcCol="1270" anchor="ctr" anchorCtr="0">
+          <a:noAutofit/>
+        </a:bodyPr>
+        <a:lstStyle/>
+        <a:p>
+          <a:pPr marL="0" lvl="0" indent="0" algn="ctr" defTabSz="488950">
+            <a:lnSpc>
+              <a:spcPct val="90000"/>
+            </a:lnSpc>
+            <a:spcBef>
+              <a:spcPct val="0"/>
+            </a:spcBef>
+            <a:spcAft>
+              <a:spcPct val="35000"/>
+            </a:spcAft>
+            <a:buNone/>
+          </a:pPr>
+          <a:r>
+            <a:rPr lang="fr-FR" sz="1100" kern="1200" dirty="0"/>
+            <a:t>2h - TP</a:t>
+          </a:r>
+        </a:p>
+      </dsp:txBody>
+      <dsp:txXfrm>
+        <a:off x="6463558" y="78871"/>
+        <a:ext cx="1120121" cy="746747"/>
+      </dsp:txXfrm>
+    </dsp:sp>
+    <dsp:sp modelId="{63EFE76F-75C6-495A-BEFE-B23412D52762}">
+      <dsp:nvSpPr>
+        <dsp:cNvPr id="0" name=""/>
+        <dsp:cNvSpPr/>
+      </dsp:nvSpPr>
+      <dsp:spPr>
+        <a:xfrm>
+          <a:off x="7695691" y="78871"/>
+          <a:ext cx="1866868" cy="746747"/>
+        </a:xfrm>
+        <a:prstGeom prst="chevron">
+          <a:avLst/>
+        </a:prstGeom>
+        <a:solidFill>
+          <a:schemeClr val="accent1">
+            <a:alpha val="90000"/>
+            <a:tint val="40000"/>
+            <a:hueOff val="0"/>
+            <a:satOff val="0"/>
+            <a:lumOff val="0"/>
+            <a:alphaOff val="0"/>
+          </a:schemeClr>
+        </a:solidFill>
+        <a:ln w="34925" cap="flat" cmpd="sng" algn="in">
+          <a:solidFill>
+            <a:schemeClr val="accent1">
+              <a:alpha val="90000"/>
+              <a:tint val="40000"/>
+              <a:hueOff val="0"/>
+              <a:satOff val="0"/>
+              <a:lumOff val="0"/>
+              <a:alphaOff val="0"/>
+            </a:schemeClr>
+          </a:solidFill>
+          <a:prstDash val="solid"/>
+        </a:ln>
+        <a:effectLst/>
+      </dsp:spPr>
+      <dsp:style>
+        <a:lnRef idx="2">
+          <a:scrgbClr r="0" g="0" b="0"/>
+        </a:lnRef>
+        <a:fillRef idx="1">
+          <a:scrgbClr r="0" g="0" b="0"/>
+        </a:fillRef>
+        <a:effectRef idx="0">
+          <a:scrgbClr r="0" g="0" b="0"/>
+        </a:effectRef>
+        <a:fontRef idx="minor"/>
+      </dsp:style>
+      <dsp:txBody>
+        <a:bodyPr spcFirstLastPara="0" vert="horz" wrap="square" lIns="13970" tIns="6985" rIns="0" bIns="6985" numCol="1" spcCol="1270" anchor="ctr" anchorCtr="0">
+          <a:noAutofit/>
+        </a:bodyPr>
+        <a:lstStyle/>
+        <a:p>
+          <a:pPr marL="0" lvl="0" indent="0" algn="ctr" defTabSz="488950">
+            <a:lnSpc>
+              <a:spcPct val="90000"/>
+            </a:lnSpc>
+            <a:spcBef>
+              <a:spcPct val="0"/>
+            </a:spcBef>
+            <a:spcAft>
+              <a:spcPct val="35000"/>
+            </a:spcAft>
+            <a:buNone/>
+          </a:pPr>
+          <a:r>
+            <a:rPr lang="fr-FR" sz="1100" kern="1200" dirty="0"/>
+            <a:t>4h - TP</a:t>
+          </a:r>
+        </a:p>
+      </dsp:txBody>
+      <dsp:txXfrm>
+        <a:off x="8069065" y="78871"/>
+        <a:ext cx="1120121" cy="746747"/>
+      </dsp:txXfrm>
+    </dsp:sp>
+    <dsp:sp modelId="{32301DDB-05B2-479B-8CD8-B035AEB45018}">
+      <dsp:nvSpPr>
+        <dsp:cNvPr id="0" name=""/>
+        <dsp:cNvSpPr/>
+      </dsp:nvSpPr>
+      <dsp:spPr>
+        <a:xfrm>
+          <a:off x="922332" y="1028050"/>
+          <a:ext cx="2249239" cy="899695"/>
+        </a:xfrm>
+        <a:prstGeom prst="chevron">
+          <a:avLst/>
+        </a:prstGeom>
+        <a:solidFill>
+          <a:schemeClr val="accent1">
+            <a:hueOff val="0"/>
+            <a:satOff val="0"/>
+            <a:lumOff val="0"/>
+            <a:alphaOff val="0"/>
+          </a:schemeClr>
+        </a:solidFill>
+        <a:ln w="34925" cap="flat" cmpd="sng" algn="in">
+          <a:solidFill>
+            <a:schemeClr val="lt1">
+              <a:hueOff val="0"/>
+              <a:satOff val="0"/>
+              <a:lumOff val="0"/>
+              <a:alphaOff val="0"/>
+            </a:schemeClr>
+          </a:solidFill>
+          <a:prstDash val="solid"/>
+        </a:ln>
+        <a:effectLst/>
+      </dsp:spPr>
+      <dsp:style>
+        <a:lnRef idx="2">
+          <a:scrgbClr r="0" g="0" b="0"/>
+        </a:lnRef>
+        <a:fillRef idx="1">
+          <a:scrgbClr r="0" g="0" b="0"/>
+        </a:fillRef>
+        <a:effectRef idx="0">
+          <a:scrgbClr r="0" g="0" b="0"/>
+        </a:effectRef>
+        <a:fontRef idx="minor">
+          <a:schemeClr val="lt1"/>
+        </a:fontRef>
+      </dsp:style>
+      <dsp:txBody>
+        <a:bodyPr spcFirstLastPara="0" vert="horz" wrap="square" lIns="34290" tIns="17145" rIns="0" bIns="17145" numCol="1" spcCol="1270" anchor="ctr" anchorCtr="0">
+          <a:noAutofit/>
+        </a:bodyPr>
+        <a:lstStyle/>
+        <a:p>
+          <a:pPr marL="0" lvl="0" indent="0" algn="ctr" defTabSz="1200150">
+            <a:lnSpc>
+              <a:spcPct val="90000"/>
+            </a:lnSpc>
+            <a:spcBef>
+              <a:spcPct val="0"/>
+            </a:spcBef>
+            <a:spcAft>
+              <a:spcPct val="35000"/>
+            </a:spcAft>
+            <a:buNone/>
+          </a:pPr>
+          <a:r>
+            <a:rPr lang="fr-FR" sz="2700" kern="1200" dirty="0"/>
+            <a:t>Semaine 2</a:t>
+          </a:r>
+        </a:p>
+      </dsp:txBody>
+      <dsp:txXfrm>
+        <a:off x="1372180" y="1028050"/>
+        <a:ext cx="1349544" cy="899695"/>
+      </dsp:txXfrm>
+    </dsp:sp>
+    <dsp:sp modelId="{C0725B73-AA68-4997-B24A-58700B1975ED}">
+      <dsp:nvSpPr>
+        <dsp:cNvPr id="0" name=""/>
+        <dsp:cNvSpPr/>
+      </dsp:nvSpPr>
+      <dsp:spPr>
+        <a:xfrm>
+          <a:off x="2879170" y="1104524"/>
+          <a:ext cx="1866868" cy="746747"/>
+        </a:xfrm>
+        <a:prstGeom prst="chevron">
+          <a:avLst/>
+        </a:prstGeom>
+        <a:solidFill>
+          <a:schemeClr val="accent1">
+            <a:alpha val="90000"/>
+            <a:tint val="40000"/>
+            <a:hueOff val="0"/>
+            <a:satOff val="0"/>
+            <a:lumOff val="0"/>
+            <a:alphaOff val="0"/>
+          </a:schemeClr>
+        </a:solidFill>
+        <a:ln w="34925" cap="flat" cmpd="sng" algn="in">
+          <a:solidFill>
+            <a:schemeClr val="accent1">
+              <a:alpha val="90000"/>
+              <a:tint val="40000"/>
+              <a:hueOff val="0"/>
+              <a:satOff val="0"/>
+              <a:lumOff val="0"/>
+              <a:alphaOff val="0"/>
+            </a:schemeClr>
+          </a:solidFill>
+          <a:prstDash val="solid"/>
+        </a:ln>
+        <a:effectLst/>
+      </dsp:spPr>
+      <dsp:style>
+        <a:lnRef idx="2">
+          <a:scrgbClr r="0" g="0" b="0"/>
+        </a:lnRef>
+        <a:fillRef idx="1">
+          <a:scrgbClr r="0" g="0" b="0"/>
+        </a:fillRef>
+        <a:effectRef idx="0">
+          <a:scrgbClr r="0" g="0" b="0"/>
+        </a:effectRef>
+        <a:fontRef idx="minor"/>
+      </dsp:style>
+      <dsp:txBody>
+        <a:bodyPr spcFirstLastPara="0" vert="horz" wrap="square" lIns="13970" tIns="6985" rIns="0" bIns="6985" numCol="1" spcCol="1270" anchor="ctr" anchorCtr="0">
+          <a:noAutofit/>
+        </a:bodyPr>
+        <a:lstStyle/>
+        <a:p>
+          <a:pPr marL="0" lvl="0" indent="0" algn="ctr" defTabSz="488950">
+            <a:lnSpc>
+              <a:spcPct val="90000"/>
+            </a:lnSpc>
+            <a:spcBef>
+              <a:spcPct val="0"/>
+            </a:spcBef>
+            <a:spcAft>
+              <a:spcPct val="35000"/>
+            </a:spcAft>
+            <a:buNone/>
+          </a:pPr>
+          <a:r>
+            <a:rPr lang="fr-FR" sz="1100" kern="1200" dirty="0"/>
+            <a:t>2h – CM</a:t>
+          </a:r>
+        </a:p>
+        <a:p>
+          <a:pPr marL="0" lvl="0" indent="0" algn="ctr" defTabSz="488950">
+            <a:lnSpc>
+              <a:spcPct val="90000"/>
+            </a:lnSpc>
+            <a:spcBef>
+              <a:spcPct val="0"/>
+            </a:spcBef>
+            <a:spcAft>
+              <a:spcPct val="35000"/>
+            </a:spcAft>
+            <a:buNone/>
+          </a:pPr>
+          <a:r>
+            <a:rPr lang="fr-FR" sz="1100" kern="1200" dirty="0"/>
+            <a:t>Logique combinatoire et séquentielle</a:t>
+          </a:r>
+        </a:p>
+      </dsp:txBody>
+      <dsp:txXfrm>
+        <a:off x="3252544" y="1104524"/>
+        <a:ext cx="1120121" cy="746747"/>
+      </dsp:txXfrm>
+    </dsp:sp>
+    <dsp:sp modelId="{6C0AD1B2-BF39-41DB-9FCB-C726F0B0A11C}">
+      <dsp:nvSpPr>
+        <dsp:cNvPr id="0" name=""/>
+        <dsp:cNvSpPr/>
+      </dsp:nvSpPr>
+      <dsp:spPr>
+        <a:xfrm>
+          <a:off x="4484677" y="1104524"/>
+          <a:ext cx="1866868" cy="746747"/>
+        </a:xfrm>
+        <a:prstGeom prst="chevron">
+          <a:avLst/>
+        </a:prstGeom>
+        <a:solidFill>
+          <a:schemeClr val="accent1">
+            <a:alpha val="90000"/>
+            <a:tint val="40000"/>
+            <a:hueOff val="0"/>
+            <a:satOff val="0"/>
+            <a:lumOff val="0"/>
+            <a:alphaOff val="0"/>
+          </a:schemeClr>
+        </a:solidFill>
+        <a:ln w="34925" cap="flat" cmpd="sng" algn="in">
+          <a:solidFill>
+            <a:schemeClr val="accent1">
+              <a:alpha val="90000"/>
+              <a:tint val="40000"/>
+              <a:hueOff val="0"/>
+              <a:satOff val="0"/>
+              <a:lumOff val="0"/>
+              <a:alphaOff val="0"/>
+            </a:schemeClr>
+          </a:solidFill>
+          <a:prstDash val="solid"/>
+        </a:ln>
+        <a:effectLst/>
+      </dsp:spPr>
+      <dsp:style>
+        <a:lnRef idx="2">
+          <a:scrgbClr r="0" g="0" b="0"/>
+        </a:lnRef>
+        <a:fillRef idx="1">
+          <a:scrgbClr r="0" g="0" b="0"/>
+        </a:fillRef>
+        <a:effectRef idx="0">
+          <a:scrgbClr r="0" g="0" b="0"/>
+        </a:effectRef>
+        <a:fontRef idx="minor"/>
+      </dsp:style>
+      <dsp:txBody>
+        <a:bodyPr spcFirstLastPara="0" vert="horz" wrap="square" lIns="13970" tIns="6985" rIns="0" bIns="6985" numCol="1" spcCol="1270" anchor="ctr" anchorCtr="0">
+          <a:noAutofit/>
+        </a:bodyPr>
+        <a:lstStyle/>
+        <a:p>
+          <a:pPr marL="0" lvl="0" indent="0" algn="ctr" defTabSz="488950">
+            <a:lnSpc>
+              <a:spcPct val="90000"/>
+            </a:lnSpc>
+            <a:spcBef>
+              <a:spcPct val="0"/>
+            </a:spcBef>
+            <a:spcAft>
+              <a:spcPct val="35000"/>
+            </a:spcAft>
+            <a:buNone/>
+          </a:pPr>
+          <a:r>
+            <a:rPr lang="fr-FR" sz="1100" kern="1200" dirty="0"/>
+            <a:t>2h – CM</a:t>
+          </a:r>
+        </a:p>
+        <a:p>
+          <a:pPr marL="0" lvl="0" indent="0" algn="ctr" defTabSz="488950">
+            <a:lnSpc>
+              <a:spcPct val="90000"/>
+            </a:lnSpc>
+            <a:spcBef>
+              <a:spcPct val="0"/>
+            </a:spcBef>
+            <a:spcAft>
+              <a:spcPct val="35000"/>
+            </a:spcAft>
+            <a:buNone/>
+          </a:pPr>
+          <a:r>
+            <a:rPr lang="fr-FR" sz="1100" kern="1200" dirty="0"/>
+            <a:t>Structure d’un processeur</a:t>
+          </a:r>
+        </a:p>
+        <a:p>
+          <a:pPr marL="0" lvl="0" indent="0" algn="ctr" defTabSz="488950">
+            <a:lnSpc>
+              <a:spcPct val="90000"/>
+            </a:lnSpc>
+            <a:spcBef>
+              <a:spcPct val="0"/>
+            </a:spcBef>
+            <a:spcAft>
+              <a:spcPct val="35000"/>
+            </a:spcAft>
+            <a:buNone/>
+          </a:pPr>
+          <a:r>
+            <a:rPr lang="fr-FR" sz="1100" kern="1200" dirty="0"/>
+            <a:t>DS</a:t>
+          </a:r>
+        </a:p>
+      </dsp:txBody>
+      <dsp:txXfrm>
+        <a:off x="4858051" y="1104524"/>
+        <a:ext cx="1120121" cy="746747"/>
+      </dsp:txXfrm>
+    </dsp:sp>
+    <dsp:sp modelId="{FDD2D33E-BAA9-4ACA-B13B-C77E16D184C6}">
+      <dsp:nvSpPr>
+        <dsp:cNvPr id="0" name=""/>
+        <dsp:cNvSpPr/>
+      </dsp:nvSpPr>
+      <dsp:spPr>
+        <a:xfrm>
+          <a:off x="6090184" y="1104524"/>
+          <a:ext cx="1866868" cy="746747"/>
+        </a:xfrm>
+        <a:prstGeom prst="chevron">
+          <a:avLst/>
+        </a:prstGeom>
+        <a:solidFill>
+          <a:schemeClr val="accent1">
+            <a:alpha val="90000"/>
+            <a:tint val="40000"/>
+            <a:hueOff val="0"/>
+            <a:satOff val="0"/>
+            <a:lumOff val="0"/>
+            <a:alphaOff val="0"/>
+          </a:schemeClr>
+        </a:solidFill>
+        <a:ln w="34925" cap="flat" cmpd="sng" algn="in">
+          <a:solidFill>
+            <a:schemeClr val="accent1">
+              <a:alpha val="90000"/>
+              <a:tint val="40000"/>
+              <a:hueOff val="0"/>
+              <a:satOff val="0"/>
+              <a:lumOff val="0"/>
+              <a:alphaOff val="0"/>
+            </a:schemeClr>
+          </a:solidFill>
+          <a:prstDash val="solid"/>
+        </a:ln>
+        <a:effectLst/>
+      </dsp:spPr>
+      <dsp:style>
+        <a:lnRef idx="2">
+          <a:scrgbClr r="0" g="0" b="0"/>
+        </a:lnRef>
+        <a:fillRef idx="1">
+          <a:scrgbClr r="0" g="0" b="0"/>
+        </a:fillRef>
+        <a:effectRef idx="0">
+          <a:scrgbClr r="0" g="0" b="0"/>
+        </a:effectRef>
+        <a:fontRef idx="minor"/>
+      </dsp:style>
+      <dsp:txBody>
+        <a:bodyPr spcFirstLastPara="0" vert="horz" wrap="square" lIns="13970" tIns="6985" rIns="0" bIns="6985" numCol="1" spcCol="1270" anchor="ctr" anchorCtr="0">
+          <a:noAutofit/>
+        </a:bodyPr>
+        <a:lstStyle/>
+        <a:p>
+          <a:pPr marL="0" lvl="0" indent="0" algn="ctr" defTabSz="488950">
+            <a:lnSpc>
+              <a:spcPct val="90000"/>
+            </a:lnSpc>
+            <a:spcBef>
+              <a:spcPct val="0"/>
+            </a:spcBef>
+            <a:spcAft>
+              <a:spcPct val="35000"/>
+            </a:spcAft>
+            <a:buNone/>
+          </a:pPr>
+          <a:r>
+            <a:rPr lang="fr-FR" sz="1100" kern="1200" dirty="0"/>
+            <a:t>2h - </a:t>
+          </a:r>
+          <a:r>
+            <a:rPr lang="fr-FR" sz="1100" kern="1200" dirty="0" err="1"/>
+            <a:t>Salopeir</a:t>
+          </a:r>
+          <a:endParaRPr lang="fr-FR" sz="1100" kern="1200" dirty="0"/>
+        </a:p>
+      </dsp:txBody>
+      <dsp:txXfrm>
+        <a:off x="6463558" y="1104524"/>
+        <a:ext cx="1120121" cy="746747"/>
+      </dsp:txXfrm>
+    </dsp:sp>
+    <dsp:sp modelId="{6E00654F-BA06-4B66-95A7-CAF0AFBA8E44}">
+      <dsp:nvSpPr>
+        <dsp:cNvPr id="0" name=""/>
+        <dsp:cNvSpPr/>
+      </dsp:nvSpPr>
+      <dsp:spPr>
+        <a:xfrm>
+          <a:off x="922332" y="2053703"/>
+          <a:ext cx="2249239" cy="899695"/>
+        </a:xfrm>
+        <a:prstGeom prst="chevron">
+          <a:avLst/>
+        </a:prstGeom>
+        <a:solidFill>
+          <a:schemeClr val="accent1">
+            <a:hueOff val="0"/>
+            <a:satOff val="0"/>
+            <a:lumOff val="0"/>
+            <a:alphaOff val="0"/>
+          </a:schemeClr>
+        </a:solidFill>
+        <a:ln w="34925" cap="flat" cmpd="sng" algn="in">
+          <a:solidFill>
+            <a:schemeClr val="lt1">
+              <a:hueOff val="0"/>
+              <a:satOff val="0"/>
+              <a:lumOff val="0"/>
+              <a:alphaOff val="0"/>
+            </a:schemeClr>
+          </a:solidFill>
+          <a:prstDash val="solid"/>
+        </a:ln>
+        <a:effectLst/>
+      </dsp:spPr>
+      <dsp:style>
+        <a:lnRef idx="2">
+          <a:scrgbClr r="0" g="0" b="0"/>
+        </a:lnRef>
+        <a:fillRef idx="1">
+          <a:scrgbClr r="0" g="0" b="0"/>
+        </a:fillRef>
+        <a:effectRef idx="0">
+          <a:scrgbClr r="0" g="0" b="0"/>
+        </a:effectRef>
+        <a:fontRef idx="minor">
+          <a:schemeClr val="lt1"/>
+        </a:fontRef>
+      </dsp:style>
+      <dsp:txBody>
+        <a:bodyPr spcFirstLastPara="0" vert="horz" wrap="square" lIns="34290" tIns="17145" rIns="0" bIns="17145" numCol="1" spcCol="1270" anchor="ctr" anchorCtr="0">
+          <a:noAutofit/>
+        </a:bodyPr>
+        <a:lstStyle/>
+        <a:p>
+          <a:pPr marL="0" lvl="0" indent="0" algn="ctr" defTabSz="1200150">
+            <a:lnSpc>
+              <a:spcPct val="90000"/>
+            </a:lnSpc>
+            <a:spcBef>
+              <a:spcPct val="0"/>
+            </a:spcBef>
+            <a:spcAft>
+              <a:spcPct val="35000"/>
+            </a:spcAft>
+            <a:buNone/>
+          </a:pPr>
+          <a:r>
+            <a:rPr lang="fr-FR" sz="2700" kern="1200" dirty="0"/>
+            <a:t>Semaine 3</a:t>
+          </a:r>
+        </a:p>
+      </dsp:txBody>
+      <dsp:txXfrm>
+        <a:off x="1372180" y="2053703"/>
+        <a:ext cx="1349544" cy="899695"/>
+      </dsp:txXfrm>
+    </dsp:sp>
+    <dsp:sp modelId="{5AAC5330-0D65-4E53-B8DA-86378CD4CE76}">
+      <dsp:nvSpPr>
+        <dsp:cNvPr id="0" name=""/>
+        <dsp:cNvSpPr/>
+      </dsp:nvSpPr>
+      <dsp:spPr>
+        <a:xfrm>
+          <a:off x="2879170" y="2130177"/>
+          <a:ext cx="1866868" cy="746747"/>
+        </a:xfrm>
+        <a:prstGeom prst="chevron">
+          <a:avLst/>
+        </a:prstGeom>
+        <a:solidFill>
+          <a:schemeClr val="accent1">
+            <a:alpha val="90000"/>
+            <a:tint val="40000"/>
+            <a:hueOff val="0"/>
+            <a:satOff val="0"/>
+            <a:lumOff val="0"/>
+            <a:alphaOff val="0"/>
+          </a:schemeClr>
+        </a:solidFill>
+        <a:ln w="34925" cap="flat" cmpd="sng" algn="in">
+          <a:solidFill>
+            <a:schemeClr val="accent1">
+              <a:alpha val="90000"/>
+              <a:tint val="40000"/>
+              <a:hueOff val="0"/>
+              <a:satOff val="0"/>
+              <a:lumOff val="0"/>
+              <a:alphaOff val="0"/>
+            </a:schemeClr>
+          </a:solidFill>
+          <a:prstDash val="solid"/>
+        </a:ln>
+        <a:effectLst/>
+      </dsp:spPr>
+      <dsp:style>
+        <a:lnRef idx="2">
+          <a:scrgbClr r="0" g="0" b="0"/>
+        </a:lnRef>
+        <a:fillRef idx="1">
+          <a:scrgbClr r="0" g="0" b="0"/>
+        </a:fillRef>
+        <a:effectRef idx="0">
+          <a:scrgbClr r="0" g="0" b="0"/>
+        </a:effectRef>
+        <a:fontRef idx="minor"/>
+      </dsp:style>
+      <dsp:txBody>
+        <a:bodyPr spcFirstLastPara="0" vert="horz" wrap="square" lIns="13970" tIns="6985" rIns="0" bIns="6985" numCol="1" spcCol="1270" anchor="ctr" anchorCtr="0">
+          <a:noAutofit/>
+        </a:bodyPr>
+        <a:lstStyle/>
+        <a:p>
+          <a:pPr marL="0" lvl="0" indent="0" algn="ctr" defTabSz="488950">
+            <a:lnSpc>
+              <a:spcPct val="90000"/>
+            </a:lnSpc>
+            <a:spcBef>
+              <a:spcPct val="0"/>
+            </a:spcBef>
+            <a:spcAft>
+              <a:spcPct val="35000"/>
+            </a:spcAft>
+            <a:buNone/>
+          </a:pPr>
+          <a:r>
+            <a:rPr lang="fr-FR" sz="1100" kern="1200" dirty="0"/>
+            <a:t>1h – CM</a:t>
+          </a:r>
+        </a:p>
+        <a:p>
+          <a:pPr marL="0" lvl="0" indent="0" algn="ctr" defTabSz="488950">
+            <a:lnSpc>
+              <a:spcPct val="90000"/>
+            </a:lnSpc>
+            <a:spcBef>
+              <a:spcPct val="0"/>
+            </a:spcBef>
+            <a:spcAft>
+              <a:spcPct val="35000"/>
+            </a:spcAft>
+            <a:buNone/>
+          </a:pPr>
+          <a:r>
+            <a:rPr lang="fr-FR" sz="1100" kern="1200" dirty="0"/>
+            <a:t>Notion d’ALU</a:t>
+          </a:r>
+        </a:p>
+        <a:p>
+          <a:pPr marL="0" lvl="0" indent="0" algn="ctr" defTabSz="488950">
+            <a:lnSpc>
+              <a:spcPct val="90000"/>
+            </a:lnSpc>
+            <a:spcBef>
+              <a:spcPct val="0"/>
+            </a:spcBef>
+            <a:spcAft>
+              <a:spcPct val="35000"/>
+            </a:spcAft>
+            <a:buNone/>
+          </a:pPr>
+          <a:r>
+            <a:rPr lang="fr-FR" sz="1100" kern="1200" dirty="0"/>
+            <a:t>Fonctions logiques</a:t>
+          </a:r>
+        </a:p>
+      </dsp:txBody>
+      <dsp:txXfrm>
+        <a:off x="3252544" y="2130177"/>
+        <a:ext cx="1120121" cy="746747"/>
+      </dsp:txXfrm>
+    </dsp:sp>
+    <dsp:sp modelId="{6C71E289-33D5-4D78-9D9A-659200006B91}">
+      <dsp:nvSpPr>
+        <dsp:cNvPr id="0" name=""/>
+        <dsp:cNvSpPr/>
+      </dsp:nvSpPr>
+      <dsp:spPr>
+        <a:xfrm>
+          <a:off x="4484677" y="2130177"/>
+          <a:ext cx="1866868" cy="746747"/>
+        </a:xfrm>
+        <a:prstGeom prst="chevron">
+          <a:avLst/>
+        </a:prstGeom>
+        <a:solidFill>
+          <a:schemeClr val="accent1">
+            <a:alpha val="90000"/>
+            <a:tint val="40000"/>
+            <a:hueOff val="0"/>
+            <a:satOff val="0"/>
+            <a:lumOff val="0"/>
+            <a:alphaOff val="0"/>
+          </a:schemeClr>
+        </a:solidFill>
+        <a:ln w="34925" cap="flat" cmpd="sng" algn="in">
+          <a:solidFill>
+            <a:schemeClr val="accent1">
+              <a:alpha val="90000"/>
+              <a:tint val="40000"/>
+              <a:hueOff val="0"/>
+              <a:satOff val="0"/>
+              <a:lumOff val="0"/>
+              <a:alphaOff val="0"/>
+            </a:schemeClr>
+          </a:solidFill>
+          <a:prstDash val="solid"/>
+        </a:ln>
+        <a:effectLst/>
+      </dsp:spPr>
+      <dsp:style>
+        <a:lnRef idx="2">
+          <a:scrgbClr r="0" g="0" b="0"/>
+        </a:lnRef>
+        <a:fillRef idx="1">
+          <a:scrgbClr r="0" g="0" b="0"/>
+        </a:fillRef>
+        <a:effectRef idx="0">
+          <a:scrgbClr r="0" g="0" b="0"/>
+        </a:effectRef>
+        <a:fontRef idx="minor"/>
+      </dsp:style>
+      <dsp:txBody>
+        <a:bodyPr spcFirstLastPara="0" vert="horz" wrap="square" lIns="13970" tIns="6985" rIns="0" bIns="6985" numCol="1" spcCol="1270" anchor="ctr" anchorCtr="0">
+          <a:noAutofit/>
+        </a:bodyPr>
+        <a:lstStyle/>
+        <a:p>
+          <a:pPr marL="0" lvl="0" indent="0" algn="ctr" defTabSz="488950">
+            <a:lnSpc>
+              <a:spcPct val="90000"/>
+            </a:lnSpc>
+            <a:spcBef>
+              <a:spcPct val="0"/>
+            </a:spcBef>
+            <a:spcAft>
+              <a:spcPct val="35000"/>
+            </a:spcAft>
+            <a:buNone/>
+          </a:pPr>
+          <a:r>
+            <a:rPr lang="fr-FR" sz="1100" kern="1200" dirty="0"/>
+            <a:t>1h – TD</a:t>
+          </a:r>
+        </a:p>
+        <a:p>
+          <a:pPr marL="0" lvl="0" indent="0" algn="ctr" defTabSz="488950">
+            <a:lnSpc>
+              <a:spcPct val="90000"/>
+            </a:lnSpc>
+            <a:spcBef>
+              <a:spcPct val="0"/>
+            </a:spcBef>
+            <a:spcAft>
+              <a:spcPct val="35000"/>
+            </a:spcAft>
+            <a:buNone/>
+          </a:pPr>
+          <a:r>
+            <a:rPr lang="fr-FR" sz="1100" kern="1200" dirty="0"/>
+            <a:t>Notion d’ALU</a:t>
+          </a:r>
+        </a:p>
+        <a:p>
+          <a:pPr marL="0" lvl="0" indent="0" algn="ctr" defTabSz="488950">
+            <a:lnSpc>
+              <a:spcPct val="90000"/>
+            </a:lnSpc>
+            <a:spcBef>
+              <a:spcPct val="0"/>
+            </a:spcBef>
+            <a:spcAft>
+              <a:spcPct val="35000"/>
+            </a:spcAft>
+            <a:buNone/>
+          </a:pPr>
+          <a:r>
+            <a:rPr lang="fr-FR" sz="1100" kern="1200" dirty="0"/>
+            <a:t>Fonctions logiques</a:t>
+          </a:r>
+        </a:p>
+      </dsp:txBody>
+      <dsp:txXfrm>
+        <a:off x="4858051" y="2130177"/>
+        <a:ext cx="1120121" cy="746747"/>
+      </dsp:txXfrm>
+    </dsp:sp>
+    <dsp:sp modelId="{EED72392-32DA-41A4-B324-1D658877A145}">
+      <dsp:nvSpPr>
+        <dsp:cNvPr id="0" name=""/>
+        <dsp:cNvSpPr/>
+      </dsp:nvSpPr>
+      <dsp:spPr>
+        <a:xfrm>
+          <a:off x="6090184" y="2130177"/>
+          <a:ext cx="1866868" cy="746747"/>
+        </a:xfrm>
+        <a:prstGeom prst="chevron">
+          <a:avLst/>
+        </a:prstGeom>
+        <a:solidFill>
+          <a:schemeClr val="accent1">
+            <a:alpha val="90000"/>
+            <a:tint val="40000"/>
+            <a:hueOff val="0"/>
+            <a:satOff val="0"/>
+            <a:lumOff val="0"/>
+            <a:alphaOff val="0"/>
+          </a:schemeClr>
+        </a:solidFill>
+        <a:ln w="34925" cap="flat" cmpd="sng" algn="in">
+          <a:solidFill>
+            <a:schemeClr val="accent1">
+              <a:alpha val="90000"/>
+              <a:tint val="40000"/>
+              <a:hueOff val="0"/>
+              <a:satOff val="0"/>
+              <a:lumOff val="0"/>
+              <a:alphaOff val="0"/>
+            </a:schemeClr>
+          </a:solidFill>
+          <a:prstDash val="solid"/>
+        </a:ln>
+        <a:effectLst/>
+      </dsp:spPr>
+      <dsp:style>
+        <a:lnRef idx="2">
+          <a:scrgbClr r="0" g="0" b="0"/>
+        </a:lnRef>
+        <a:fillRef idx="1">
+          <a:scrgbClr r="0" g="0" b="0"/>
+        </a:fillRef>
+        <a:effectRef idx="0">
+          <a:scrgbClr r="0" g="0" b="0"/>
+        </a:effectRef>
+        <a:fontRef idx="minor"/>
+      </dsp:style>
+      <dsp:txBody>
+        <a:bodyPr spcFirstLastPara="0" vert="horz" wrap="square" lIns="13970" tIns="6985" rIns="0" bIns="6985" numCol="1" spcCol="1270" anchor="ctr" anchorCtr="0">
+          <a:noAutofit/>
+        </a:bodyPr>
+        <a:lstStyle/>
+        <a:p>
+          <a:pPr marL="0" lvl="0" indent="0" algn="ctr" defTabSz="488950">
+            <a:lnSpc>
+              <a:spcPct val="90000"/>
+            </a:lnSpc>
+            <a:spcBef>
+              <a:spcPct val="0"/>
+            </a:spcBef>
+            <a:spcAft>
+              <a:spcPct val="35000"/>
+            </a:spcAft>
+            <a:buNone/>
+          </a:pPr>
+          <a:r>
+            <a:rPr lang="fr-FR" sz="1100" kern="1200" dirty="0"/>
+            <a:t>1h30 – TP</a:t>
+          </a:r>
+        </a:p>
+        <a:p>
+          <a:pPr marL="0" lvl="0" indent="0" algn="ctr" defTabSz="488950">
+            <a:lnSpc>
+              <a:spcPct val="90000"/>
+            </a:lnSpc>
+            <a:spcBef>
+              <a:spcPct val="0"/>
+            </a:spcBef>
+            <a:spcAft>
+              <a:spcPct val="35000"/>
+            </a:spcAft>
+            <a:buNone/>
+          </a:pPr>
+          <a:r>
+            <a:rPr lang="fr-FR" sz="1100" kern="1200" dirty="0" err="1"/>
+            <a:t>LEDs</a:t>
+          </a:r>
+          <a:endParaRPr lang="fr-FR" sz="1100" kern="1200" dirty="0"/>
+        </a:p>
+      </dsp:txBody>
+      <dsp:txXfrm>
+        <a:off x="6463558" y="2130177"/>
+        <a:ext cx="1120121" cy="746747"/>
+      </dsp:txXfrm>
+    </dsp:sp>
+    <dsp:sp modelId="{E719EBCB-29E1-4476-93D2-81F844187A1C}">
+      <dsp:nvSpPr>
+        <dsp:cNvPr id="0" name=""/>
+        <dsp:cNvSpPr/>
+      </dsp:nvSpPr>
+      <dsp:spPr>
+        <a:xfrm>
+          <a:off x="7695691" y="2130177"/>
+          <a:ext cx="1866868" cy="746747"/>
+        </a:xfrm>
+        <a:prstGeom prst="chevron">
+          <a:avLst/>
+        </a:prstGeom>
+        <a:solidFill>
+          <a:schemeClr val="accent1">
+            <a:alpha val="90000"/>
+            <a:tint val="40000"/>
+            <a:hueOff val="0"/>
+            <a:satOff val="0"/>
+            <a:lumOff val="0"/>
+            <a:alphaOff val="0"/>
+          </a:schemeClr>
+        </a:solidFill>
+        <a:ln w="34925" cap="flat" cmpd="sng" algn="in">
+          <a:solidFill>
+            <a:schemeClr val="accent1">
+              <a:alpha val="90000"/>
+              <a:tint val="40000"/>
+              <a:hueOff val="0"/>
+              <a:satOff val="0"/>
+              <a:lumOff val="0"/>
+              <a:alphaOff val="0"/>
+            </a:schemeClr>
+          </a:solidFill>
+          <a:prstDash val="solid"/>
+        </a:ln>
+        <a:effectLst/>
+      </dsp:spPr>
+      <dsp:style>
+        <a:lnRef idx="2">
+          <a:scrgbClr r="0" g="0" b="0"/>
+        </a:lnRef>
+        <a:fillRef idx="1">
+          <a:scrgbClr r="0" g="0" b="0"/>
+        </a:fillRef>
+        <a:effectRef idx="0">
+          <a:scrgbClr r="0" g="0" b="0"/>
+        </a:effectRef>
+        <a:fontRef idx="minor"/>
+      </dsp:style>
+      <dsp:txBody>
+        <a:bodyPr spcFirstLastPara="0" vert="horz" wrap="square" lIns="13970" tIns="6985" rIns="0" bIns="6985" numCol="1" spcCol="1270" anchor="ctr" anchorCtr="0">
+          <a:noAutofit/>
+        </a:bodyPr>
+        <a:lstStyle/>
+        <a:p>
+          <a:pPr marL="0" lvl="0" indent="0" algn="ctr" defTabSz="488950">
+            <a:lnSpc>
+              <a:spcPct val="90000"/>
+            </a:lnSpc>
+            <a:spcBef>
+              <a:spcPct val="0"/>
+            </a:spcBef>
+            <a:spcAft>
+              <a:spcPct val="35000"/>
+            </a:spcAft>
+            <a:buNone/>
+          </a:pPr>
+          <a:r>
+            <a:rPr lang="fr-FR" sz="1100" kern="1200" dirty="0"/>
+            <a:t>2h – CM</a:t>
+          </a:r>
+        </a:p>
+        <a:p>
+          <a:pPr marL="0" lvl="0" indent="0" algn="ctr" defTabSz="488950">
+            <a:lnSpc>
+              <a:spcPct val="90000"/>
+            </a:lnSpc>
+            <a:spcBef>
+              <a:spcPct val="0"/>
+            </a:spcBef>
+            <a:spcAft>
+              <a:spcPct val="35000"/>
+            </a:spcAft>
+            <a:buNone/>
+          </a:pPr>
+          <a:r>
+            <a:rPr lang="fr-FR" sz="1100" kern="1200" dirty="0"/>
+            <a:t>Entrée/Sortie</a:t>
+          </a:r>
+        </a:p>
+        <a:p>
+          <a:pPr marL="0" lvl="0" indent="0" algn="ctr" defTabSz="488950">
+            <a:lnSpc>
+              <a:spcPct val="90000"/>
+            </a:lnSpc>
+            <a:spcBef>
+              <a:spcPct val="0"/>
+            </a:spcBef>
+            <a:spcAft>
+              <a:spcPct val="35000"/>
+            </a:spcAft>
+            <a:buNone/>
+          </a:pPr>
+          <a:r>
+            <a:rPr lang="fr-FR" sz="1100" kern="1200" dirty="0"/>
+            <a:t>GPIO</a:t>
+          </a:r>
+        </a:p>
+      </dsp:txBody>
+      <dsp:txXfrm>
+        <a:off x="8069065" y="2130177"/>
+        <a:ext cx="1120121" cy="746747"/>
+      </dsp:txXfrm>
+    </dsp:sp>
+    <dsp:sp modelId="{C2F86A45-031F-4237-B24B-E5CEF3AF8D2C}">
+      <dsp:nvSpPr>
+        <dsp:cNvPr id="0" name=""/>
+        <dsp:cNvSpPr/>
+      </dsp:nvSpPr>
+      <dsp:spPr>
+        <a:xfrm>
+          <a:off x="9301199" y="2130177"/>
+          <a:ext cx="1866868" cy="746747"/>
+        </a:xfrm>
+        <a:prstGeom prst="chevron">
+          <a:avLst/>
+        </a:prstGeom>
+        <a:solidFill>
+          <a:schemeClr val="accent1">
+            <a:alpha val="90000"/>
+            <a:tint val="40000"/>
+            <a:hueOff val="0"/>
+            <a:satOff val="0"/>
+            <a:lumOff val="0"/>
+            <a:alphaOff val="0"/>
+          </a:schemeClr>
+        </a:solidFill>
+        <a:ln w="34925" cap="flat" cmpd="sng" algn="in">
+          <a:solidFill>
+            <a:schemeClr val="accent1">
+              <a:alpha val="90000"/>
+              <a:tint val="40000"/>
+              <a:hueOff val="0"/>
+              <a:satOff val="0"/>
+              <a:lumOff val="0"/>
+              <a:alphaOff val="0"/>
+            </a:schemeClr>
+          </a:solidFill>
+          <a:prstDash val="solid"/>
+        </a:ln>
+        <a:effectLst/>
+      </dsp:spPr>
+      <dsp:style>
+        <a:lnRef idx="2">
+          <a:scrgbClr r="0" g="0" b="0"/>
+        </a:lnRef>
+        <a:fillRef idx="1">
+          <a:scrgbClr r="0" g="0" b="0"/>
+        </a:fillRef>
+        <a:effectRef idx="0">
+          <a:scrgbClr r="0" g="0" b="0"/>
+        </a:effectRef>
+        <a:fontRef idx="minor"/>
+      </dsp:style>
+      <dsp:txBody>
+        <a:bodyPr spcFirstLastPara="0" vert="horz" wrap="square" lIns="13970" tIns="6985" rIns="0" bIns="6985" numCol="1" spcCol="1270" anchor="ctr" anchorCtr="0">
+          <a:noAutofit/>
+        </a:bodyPr>
+        <a:lstStyle/>
+        <a:p>
+          <a:pPr marL="0" lvl="0" indent="0" algn="ctr" defTabSz="488950">
+            <a:lnSpc>
+              <a:spcPct val="90000"/>
+            </a:lnSpc>
+            <a:spcBef>
+              <a:spcPct val="0"/>
+            </a:spcBef>
+            <a:spcAft>
+              <a:spcPct val="35000"/>
+            </a:spcAft>
+            <a:buNone/>
+          </a:pPr>
+          <a:r>
+            <a:rPr lang="fr-FR" sz="1100" kern="1200" dirty="0"/>
+            <a:t>1h30 - TP</a:t>
+          </a:r>
+        </a:p>
+      </dsp:txBody>
+      <dsp:txXfrm>
+        <a:off x="9674573" y="2130177"/>
+        <a:ext cx="1120121" cy="746747"/>
+      </dsp:txXfrm>
+    </dsp:sp>
+    <dsp:sp modelId="{ADA99D21-85B7-4B4F-845E-B2F3EF016769}">
+      <dsp:nvSpPr>
+        <dsp:cNvPr id="0" name=""/>
+        <dsp:cNvSpPr/>
+      </dsp:nvSpPr>
+      <dsp:spPr>
+        <a:xfrm>
+          <a:off x="922332" y="3079356"/>
+          <a:ext cx="2249239" cy="899695"/>
+        </a:xfrm>
+        <a:prstGeom prst="chevron">
+          <a:avLst/>
+        </a:prstGeom>
+        <a:solidFill>
+          <a:schemeClr val="accent1">
+            <a:hueOff val="0"/>
+            <a:satOff val="0"/>
+            <a:lumOff val="0"/>
+            <a:alphaOff val="0"/>
+          </a:schemeClr>
+        </a:solidFill>
+        <a:ln w="34925" cap="flat" cmpd="sng" algn="in">
+          <a:solidFill>
+            <a:schemeClr val="lt1">
+              <a:hueOff val="0"/>
+              <a:satOff val="0"/>
+              <a:lumOff val="0"/>
+              <a:alphaOff val="0"/>
+            </a:schemeClr>
+          </a:solidFill>
+          <a:prstDash val="solid"/>
+        </a:ln>
+        <a:effectLst/>
+      </dsp:spPr>
+      <dsp:style>
+        <a:lnRef idx="2">
+          <a:scrgbClr r="0" g="0" b="0"/>
+        </a:lnRef>
+        <a:fillRef idx="1">
+          <a:scrgbClr r="0" g="0" b="0"/>
+        </a:fillRef>
+        <a:effectRef idx="0">
+          <a:scrgbClr r="0" g="0" b="0"/>
+        </a:effectRef>
+        <a:fontRef idx="minor">
+          <a:schemeClr val="lt1"/>
+        </a:fontRef>
+      </dsp:style>
+      <dsp:txBody>
+        <a:bodyPr spcFirstLastPara="0" vert="horz" wrap="square" lIns="34290" tIns="17145" rIns="0" bIns="17145" numCol="1" spcCol="1270" anchor="ctr" anchorCtr="0">
+          <a:noAutofit/>
+        </a:bodyPr>
+        <a:lstStyle/>
+        <a:p>
+          <a:pPr marL="0" lvl="0" indent="0" algn="ctr" defTabSz="1200150">
+            <a:lnSpc>
+              <a:spcPct val="90000"/>
+            </a:lnSpc>
+            <a:spcBef>
+              <a:spcPct val="0"/>
+            </a:spcBef>
+            <a:spcAft>
+              <a:spcPct val="35000"/>
+            </a:spcAft>
+            <a:buNone/>
+          </a:pPr>
+          <a:r>
+            <a:rPr lang="fr-FR" sz="2700" kern="1200" dirty="0"/>
+            <a:t>Semaine 4</a:t>
+          </a:r>
+        </a:p>
+      </dsp:txBody>
+      <dsp:txXfrm>
+        <a:off x="1372180" y="3079356"/>
+        <a:ext cx="1349544" cy="899695"/>
+      </dsp:txXfrm>
+    </dsp:sp>
+    <dsp:sp modelId="{53C007ED-FF8A-4598-B042-37BF9BE2064A}">
+      <dsp:nvSpPr>
+        <dsp:cNvPr id="0" name=""/>
+        <dsp:cNvSpPr/>
+      </dsp:nvSpPr>
+      <dsp:spPr>
+        <a:xfrm>
+          <a:off x="2879170" y="3155831"/>
+          <a:ext cx="1866868" cy="746747"/>
+        </a:xfrm>
+        <a:prstGeom prst="chevron">
+          <a:avLst/>
+        </a:prstGeom>
+        <a:solidFill>
+          <a:schemeClr val="accent1">
+            <a:alpha val="90000"/>
+            <a:tint val="40000"/>
+            <a:hueOff val="0"/>
+            <a:satOff val="0"/>
+            <a:lumOff val="0"/>
+            <a:alphaOff val="0"/>
+          </a:schemeClr>
+        </a:solidFill>
+        <a:ln w="34925" cap="flat" cmpd="sng" algn="in">
+          <a:solidFill>
+            <a:schemeClr val="accent1">
+              <a:alpha val="90000"/>
+              <a:tint val="40000"/>
+              <a:hueOff val="0"/>
+              <a:satOff val="0"/>
+              <a:lumOff val="0"/>
+              <a:alphaOff val="0"/>
+            </a:schemeClr>
+          </a:solidFill>
+          <a:prstDash val="solid"/>
+        </a:ln>
+        <a:effectLst/>
+      </dsp:spPr>
+      <dsp:style>
+        <a:lnRef idx="2">
+          <a:scrgbClr r="0" g="0" b="0"/>
+        </a:lnRef>
+        <a:fillRef idx="1">
+          <a:scrgbClr r="0" g="0" b="0"/>
+        </a:fillRef>
+        <a:effectRef idx="0">
+          <a:scrgbClr r="0" g="0" b="0"/>
+        </a:effectRef>
+        <a:fontRef idx="minor"/>
+      </dsp:style>
+      <dsp:txBody>
+        <a:bodyPr spcFirstLastPara="0" vert="horz" wrap="square" lIns="13970" tIns="6985" rIns="0" bIns="6985" numCol="1" spcCol="1270" anchor="ctr" anchorCtr="0">
+          <a:noAutofit/>
+        </a:bodyPr>
+        <a:lstStyle/>
+        <a:p>
+          <a:pPr marL="0" lvl="0" indent="0" algn="ctr" defTabSz="488950">
+            <a:lnSpc>
+              <a:spcPct val="90000"/>
+            </a:lnSpc>
+            <a:spcBef>
+              <a:spcPct val="0"/>
+            </a:spcBef>
+            <a:spcAft>
+              <a:spcPct val="35000"/>
+            </a:spcAft>
+            <a:buNone/>
+          </a:pPr>
+          <a:r>
+            <a:rPr lang="fr-FR" sz="1100" kern="1200" dirty="0"/>
+            <a:t>Soutenance</a:t>
+          </a:r>
+        </a:p>
+      </dsp:txBody>
+      <dsp:txXfrm>
+        <a:off x="3252544" y="3155831"/>
+        <a:ext cx="1120121" cy="746747"/>
+      </dsp:txXfrm>
+    </dsp:sp>
+  </dsp:spTree>
+</dsp:drawing>
+</file>
+
+<file path=ppt/diagrams/layout1.xml><?xml version="1.0" encoding="utf-8"?>
+<dgm:layoutDef xmlns:dgm="http://schemas.openxmlformats.org/drawingml/2006/diagram" xmlns:a="http://schemas.openxmlformats.org/drawingml/2006/main" uniqueId="urn:microsoft.com/office/officeart/2005/8/layout/lProcess3">
+  <dgm:title val=""/>
+  <dgm:desc val=""/>
+  <dgm:catLst>
+    <dgm:cat type="process" pri="11000"/>
+    <dgm:cat type="convert" pri="12000"/>
+  </dgm:catLst>
+  <dgm:sampData>
+    <dgm:dataModel>
+      <dgm:ptLst>
+        <dgm:pt modelId="0" type="doc"/>
+        <dgm:pt modelId="1">
+          <dgm:prSet phldr="1"/>
+        </dgm:pt>
+        <dgm:pt modelId="11">
+          <dgm:prSet phldr="1"/>
+        </dgm:pt>
+        <dgm:pt modelId="12">
+          <dgm:prSet phldr="1"/>
+        </dgm:pt>
+        <dgm:pt modelId="2">
+          <dgm:prSet phldr="1"/>
+        </dgm:pt>
+        <dgm:pt modelId="21">
+          <dgm:prSet phldr="1"/>
+        </dgm:pt>
+        <dgm:pt modelId="22">
+          <dgm:prSet phldr="1"/>
+        </dgm:pt>
+        <dgm:pt modelId="3">
+          <dgm:prSet phldr="1"/>
+        </dgm:pt>
+        <dgm:pt modelId="31">
+          <dgm:prSet phldr="1"/>
+        </dgm:pt>
+        <dgm:pt modelId="32">
+          <dgm:prSet phldr="1"/>
+        </dgm:pt>
+      </dgm:ptLst>
+      <dgm:cxnLst>
+        <dgm:cxn modelId="4" srcId="0" destId="1" srcOrd="0" destOrd="0"/>
+        <dgm:cxn modelId="5" srcId="0" destId="2" srcOrd="1" destOrd="0"/>
+        <dgm:cxn modelId="6" srcId="0" destId="3" srcOrd="2" destOrd="0"/>
+        <dgm:cxn modelId="41" srcId="1" destId="11" srcOrd="0" destOrd="0"/>
+        <dgm:cxn modelId="42" srcId="1" destId="12" srcOrd="1" destOrd="0"/>
+        <dgm:cxn modelId="51" srcId="2" destId="21" srcOrd="0" destOrd="0"/>
+        <dgm:cxn modelId="52" srcId="2" destId="22" srcOrd="1" destOrd="0"/>
+        <dgm:cxn modelId="61" srcId="3" destId="31" srcOrd="0" destOrd="0"/>
+        <dgm:cxn modelId="62" srcId="3" destId="32" srcOrd="1" destOrd="0"/>
+      </dgm:cxnLst>
+      <dgm:bg/>
+      <dgm:whole/>
+    </dgm:dataModel>
+  </dgm:sampData>
+  <dgm:styleData>
+    <dgm:dataModel>
+      <dgm:ptLst>
+        <dgm:pt modelId="0" type="doc"/>
+        <dgm:pt modelId="1"/>
+        <dgm:pt modelId="2"/>
+      </dgm:ptLst>
+      <dgm:cxnLst>
+        <dgm:cxn modelId="4" srcId="0" destId="1" srcOrd="0" destOrd="0"/>
+        <dgm:cxn modelId="5" srcId="1" destId="2" srcOrd="0" destOrd="0"/>
+      </dgm:cxnLst>
+      <dgm:bg/>
+      <dgm:whole/>
+    </dgm:dataModel>
+  </dgm:styleData>
+  <dgm:clrData>
+    <dgm:dataModel>
+      <dgm:ptLst>
+        <dgm:pt modelId="0" type="doc"/>
+        <dgm:pt modelId="1"/>
+        <dgm:pt modelId="11"/>
+        <dgm:pt modelId="2"/>
+        <dgm:pt modelId="21"/>
+        <dgm:pt modelId="3"/>
+        <dgm:pt modelId="31"/>
+        <dgm:pt modelId="4"/>
+        <dgm:pt modelId="41"/>
+      </dgm:ptLst>
+      <dgm:cxnLst>
+        <dgm:cxn modelId="5" srcId="0" destId="1" srcOrd="0" destOrd="0"/>
+        <dgm:cxn modelId="6" srcId="0" destId="2" srcOrd="1" destOrd="0"/>
+        <dgm:cxn modelId="7" srcId="0" destId="3" srcOrd="2" destOrd="0"/>
+        <dgm:cxn modelId="8" srcId="0" destId="4" srcOrd="3" destOrd="0"/>
+        <dgm:cxn modelId="51" srcId="1" destId="11" srcOrd="0" destOrd="0"/>
+        <dgm:cxn modelId="61" srcId="2" destId="21" srcOrd="0" destOrd="0"/>
+        <dgm:cxn modelId="71" srcId="3" destId="31" srcOrd="0" destOrd="0"/>
+        <dgm:cxn modelId="81" srcId="4" destId="41" srcOrd="0" destOrd="0"/>
+      </dgm:cxnLst>
+      <dgm:bg/>
+      <dgm:whole/>
+    </dgm:dataModel>
+  </dgm:clrData>
+  <dgm:layoutNode name="Name0">
+    <dgm:varLst>
+      <dgm:chPref val="3"/>
+      <dgm:dir/>
+      <dgm:animLvl val="lvl"/>
+      <dgm:resizeHandles/>
+    </dgm:varLst>
+    <dgm:choose name="Name1">
+      <dgm:if name="Name2" func="var" arg="dir" op="equ" val="norm">
+        <dgm:alg type="lin">
+          <dgm:param type="linDir" val="fromT"/>
+          <dgm:param type="vertAlign" val="mid"/>
+          <dgm:param type="nodeHorzAlign" val="l"/>
+          <dgm:param type="nodeVertAlign" val="t"/>
+          <dgm:param type="fallback" val="2D"/>
+        </dgm:alg>
+      </dgm:if>
+      <dgm:else name="Name3">
+        <dgm:alg type="lin">
+          <dgm:param type="linDir" val="fromT"/>
+          <dgm:param type="vertAlign" val="mid"/>
+          <dgm:param type="nodeHorzAlign" val="r"/>
+          <dgm:param type="nodeVertAlign" val="t"/>
+          <dgm:param type="fallback" val="2D"/>
+        </dgm:alg>
+      </dgm:else>
+    </dgm:choose>
+    <dgm:shape xmlns:r="http://schemas.openxmlformats.org/officeDocument/2006/relationships" r:blip="">
+      <dgm:adjLst/>
+    </dgm:shape>
+    <dgm:presOf/>
+    <dgm:constrLst>
+      <dgm:constr type="w" for="des" forName="bigChev" refType="w"/>
+      <dgm:constr type="h" for="des" forName="bigChev" refType="w" refFor="des" refForName="bigChev" op="equ" fact="0.4"/>
+      <dgm:constr type="w" for="des" forName="node" refType="w" refFor="des" refForName="bigChev" fact="0.83"/>
+      <dgm:constr type="h" for="des" forName="node" refType="w" refFor="des" refForName="node" op="equ" fact="0.4"/>
+      <dgm:constr type="w" for="des" forName="parTrans" refType="w" refFor="des" refForName="bigChev" op="equ" fact="-0.13"/>
+      <dgm:constr type="w" for="des" forName="sibTrans" refType="w" refFor="des" refForName="node" op="equ" fact="-0.14"/>
+      <dgm:constr type="h" for="ch" forName="vSp" refType="h" refFor="des" refForName="bigChev" op="equ" fact="0.14"/>
+      <dgm:constr type="primFontSz" for="des" forName="node" op="equ"/>
+      <dgm:constr type="primFontSz" for="des" forName="bigChev" op="equ"/>
+    </dgm:constrLst>
+    <dgm:ruleLst/>
+    <dgm:forEach name="Name4" axis="ch" ptType="node">
+      <dgm:layoutNode name="horFlow">
+        <dgm:choose name="Name5">
+          <dgm:if name="Name6" func="var" arg="dir" op="equ" val="norm">
+            <dgm:alg type="lin">
+              <dgm:param type="linDir" val="fromL"/>
+              <dgm:param type="nodeHorzAlign" val="l"/>
+              <dgm:param type="nodeVertAlign" val="mid"/>
+              <dgm:param type="fallback" val="2D"/>
+            </dgm:alg>
+          </dgm:if>
+          <dgm:else name="Name7">
+            <dgm:alg type="lin">
+              <dgm:param type="linDir" val="fromR"/>
+              <dgm:param type="nodeHorzAlign" val="r"/>
+              <dgm:param type="nodeVertAlign" val="mid"/>
+              <dgm:param type="fallback" val="2D"/>
+            </dgm:alg>
+          </dgm:else>
+        </dgm:choose>
+        <dgm:shape xmlns:r="http://schemas.openxmlformats.org/officeDocument/2006/relationships" r:blip="">
+          <dgm:adjLst/>
+        </dgm:shape>
+        <dgm:presOf/>
+        <dgm:constrLst/>
+        <dgm:ruleLst/>
+        <dgm:layoutNode name="bigChev" styleLbl="node1">
+          <dgm:alg type="tx"/>
+          <dgm:choose name="Name8">
+            <dgm:if name="Name9" func="var" arg="dir" op="equ" val="norm">
+              <dgm:shape xmlns:r="http://schemas.openxmlformats.org/officeDocument/2006/relationships" type="chevron" r:blip="">
+                <dgm:adjLst/>
+              </dgm:shape>
+              <dgm:presOf axis="self"/>
+              <dgm:constrLst>
+                <dgm:constr type="primFontSz" val="65"/>
+                <dgm:constr type="rMarg"/>
+                <dgm:constr type="lMarg" refType="primFontSz" fact="0.1"/>
+                <dgm:constr type="tMarg" refType="primFontSz" fact="0.05"/>
+                <dgm:constr type="bMarg" refType="primFontSz" fact="0.05"/>
+              </dgm:constrLst>
+            </dgm:if>
+            <dgm:else name="Name10">
+              <dgm:shape xmlns:r="http://schemas.openxmlformats.org/officeDocument/2006/relationships" rot="180" type="chevron" r:blip="">
+                <dgm:adjLst/>
+              </dgm:shape>
+              <dgm:presOf axis="self"/>
+              <dgm:constrLst>
+                <dgm:constr type="primFontSz" val="65"/>
+                <dgm:constr type="lMarg"/>
+                <dgm:constr type="rMarg" refType="primFontSz" fact="0.1"/>
+                <dgm:constr type="tMarg" refType="primFontSz" fact="0.05"/>
+                <dgm:constr type="bMarg" refType="primFontSz" fact="0.05"/>
+              </dgm:constrLst>
+            </dgm:else>
+          </dgm:choose>
+          <dgm:ruleLst>
+            <dgm:rule type="primFontSz" val="5" fact="NaN" max="NaN"/>
+          </dgm:ruleLst>
+        </dgm:layoutNode>
+        <dgm:forEach name="parTransForEach" axis="ch" ptType="parTrans" cnt="1">
+          <dgm:layoutNode name="parTrans">
+            <dgm:alg type="sp"/>
+            <dgm:shape xmlns:r="http://schemas.openxmlformats.org/officeDocument/2006/relationships" r:blip="">
+              <dgm:adjLst/>
+            </dgm:shape>
+            <dgm:presOf/>
+            <dgm:constrLst/>
+            <dgm:ruleLst/>
+          </dgm:layoutNode>
+        </dgm:forEach>
+        <dgm:forEach name="Name11" axis="ch" ptType="node">
+          <dgm:layoutNode name="node" styleLbl="alignAccFollowNode1">
+            <dgm:varLst>
+              <dgm:bulletEnabled val="1"/>
+            </dgm:varLst>
+            <dgm:alg type="tx"/>
+            <dgm:choose name="Name12">
+              <dgm:if name="Name13" func="var" arg="dir" op="equ" val="norm">
+                <dgm:shape xmlns:r="http://schemas.openxmlformats.org/officeDocument/2006/relationships" type="chevron" r:blip="">
+                  <dgm:adjLst/>
+                </dgm:shape>
+                <dgm:presOf axis="desOrSelf" ptType="node"/>
+                <dgm:constrLst>
+                  <dgm:constr type="primFontSz" val="65"/>
+                  <dgm:constr type="rMarg"/>
+                  <dgm:constr type="lMarg" refType="primFontSz" fact="0.1"/>
+                  <dgm:constr type="tMarg" refType="primFontSz" fact="0.05"/>
+                  <dgm:constr type="bMarg" refType="primFontSz" fact="0.05"/>
+                </dgm:constrLst>
+              </dgm:if>
+              <dgm:else name="Name14">
+                <dgm:shape xmlns:r="http://schemas.openxmlformats.org/officeDocument/2006/relationships" rot="180" type="chevron" r:blip="">
+                  <dgm:adjLst/>
+                </dgm:shape>
+                <dgm:presOf axis="desOrSelf" ptType="node"/>
+                <dgm:constrLst>
+                  <dgm:constr type="primFontSz" val="65"/>
+                  <dgm:constr type="lMarg"/>
+                  <dgm:constr type="rMarg" refType="primFontSz" fact="0.1"/>
+                  <dgm:constr type="tMarg" refType="primFontSz" fact="0.05"/>
+                  <dgm:constr type="bMarg" refType="primFontSz" fact="0.05"/>
+                </dgm:constrLst>
+              </dgm:else>
+            </dgm:choose>
+            <dgm:ruleLst>
+              <dgm:rule type="primFontSz" val="5" fact="NaN" max="NaN"/>
+            </dgm:ruleLst>
+          </dgm:layoutNode>
+          <dgm:forEach name="sibTransForEach" axis="followSib" ptType="sibTrans" cnt="1">
+            <dgm:layoutNode name="sibTrans">
+              <dgm:alg type="sp"/>
+              <dgm:shape xmlns:r="http://schemas.openxmlformats.org/officeDocument/2006/relationships" r:blip="">
+                <dgm:adjLst/>
+              </dgm:shape>
+              <dgm:presOf/>
+              <dgm:constrLst/>
+              <dgm:ruleLst/>
+            </dgm:layoutNode>
+          </dgm:forEach>
+        </dgm:forEach>
+      </dgm:layoutNode>
+      <dgm:choose name="Name15">
+        <dgm:if name="Name16" axis="self" ptType="node" func="revPos" op="gte" val="2">
+          <dgm:layoutNode name="vSp">
+            <dgm:alg type="sp"/>
+            <dgm:shape xmlns:r="http://schemas.openxmlformats.org/officeDocument/2006/relationships" r:blip="">
+              <dgm:adjLst/>
+            </dgm:shape>
+            <dgm:presOf/>
+            <dgm:constrLst/>
+            <dgm:ruleLst/>
+          </dgm:layoutNode>
+        </dgm:if>
+        <dgm:else name="Name17"/>
+      </dgm:choose>
+    </dgm:forEach>
+  </dgm:layoutNode>
+</dgm:layoutDef>
+</file>
+
+<file path=ppt/diagrams/quickStyle1.xml><?xml version="1.0" encoding="utf-8"?>
+<dgm:styleDef xmlns:dgm="http://schemas.openxmlformats.org/drawingml/2006/diagram" xmlns:a="http://schemas.openxmlformats.org/drawingml/2006/main" uniqueId="urn:microsoft.com/office/officeart/2005/8/quickstyle/simple1">
+  <dgm:title val=""/>
+  <dgm:desc val=""/>
+  <dgm:catLst>
+    <dgm:cat type="simple" pri="10100"/>
+  </dgm:catLst>
+  <dgm:scene3d>
+    <a:camera prst="orthographicFront"/>
+    <a:lightRig rig="threePt" dir="t"/>
+  </dgm:scene3d>
+  <dgm:styleLbl name="node0">
+    <dgm:scene3d>
+      <a:camera prst="orthographicFront"/>
+      <a:lightRig rig="threePt" dir="t"/>
+    </dgm:scene3d>
+    <dgm:sp3d/>
+    <dgm:txPr/>
+    <dgm:style>
+      <a:lnRef idx="2">
+        <a:scrgbClr r="0" g="0" b="0"/>
+      </a:lnRef>
+      <a:fillRef idx="1">
+        <a:scrgbClr r="0" g="0" b="0"/>
+      </a:fillRef>
+      <a:effectRef idx="0">
+        <a:scrgbClr r="0" g="0" b="0"/>
+      </a:effectRef>
+      <a:fontRef idx="minor">
+        <a:schemeClr val="lt1"/>
+      </a:fontRef>
+    </dgm:style>
+  </dgm:styleLbl>
+  <dgm:styleLbl name="lnNode1">
+    <dgm:scene3d>
+      <a:camera prst="orthographicFront"/>
+      <a:lightRig rig="threePt" dir="t"/>
+    </dgm:scene3d>
+    <dgm:sp3d/>
+    <dgm:txPr/>
+    <dgm:style>
+      <a:lnRef idx="2">
+        <a:scrgbClr r="0" g="0" b="0"/>
+      </a:lnRef>
+      <a:fillRef idx="1">
+        <a:scrgbClr r="0" g="0" b="0"/>
+      </a:fillRef>
+      <a:effectRef idx="0">
+        <a:scrgbClr r="0" g="0" b="0"/>
+      </a:effectRef>
+      <a:fontRef idx="minor">
+        <a:schemeClr val="lt1"/>
+      </a:fontRef>
+    </dgm:style>
+  </dgm:styleLbl>
+  <dgm:styleLbl name="vennNode1">
+    <dgm:scene3d>
+      <a:camera prst="orthographicFront"/>
+      <a:lightRig rig="threePt" dir="t"/>
+    </dgm:scene3d>
+    <dgm:sp3d/>
+    <dgm:txPr/>
+    <dgm:style>
+      <a:lnRef idx="2">
+        <a:scrgbClr r="0" g="0" b="0"/>
+      </a:lnRef>
+      <a:fillRef idx="1">
+        <a:scrgbClr r="0" g="0" b="0"/>
+      </a:fillRef>
+      <a:effectRef idx="0">
+        <a:scrgbClr r="0" g="0" b="0"/>
+      </a:effectRef>
+      <a:fontRef idx="minor">
+        <a:schemeClr val="tx1"/>
+      </a:fontRef>
+    </dgm:style>
+  </dgm:styleLbl>
+  <dgm:styleLbl name="alignNode1">
+    <dgm:scene3d>
+      <a:camera prst="orthographicFront"/>
+      <a:lightRig rig="threePt" dir="t"/>
+    </dgm:scene3d>
+    <dgm:sp3d/>
+    <dgm:txPr/>
+    <dgm:style>
+      <a:lnRef idx="2">
+        <a:scrgbClr r="0" g="0" b="0"/>
+      </a:lnRef>
+      <a:fillRef idx="1">
+        <a:scrgbClr r="0" g="0" b="0"/>
+      </a:fillRef>
+      <a:effectRef idx="0">
+        <a:scrgbClr r="0" g="0" b="0"/>
+      </a:effectRef>
+      <a:fontRef idx="minor">
+        <a:schemeClr val="lt1"/>
+      </a:fontRef>
+    </dgm:style>
+  </dgm:styleLbl>
+  <dgm:styleLbl name="node1">
+    <dgm:scene3d>
+      <a:camera prst="orthographicFront"/>
+      <a:lightRig rig="threePt" dir="t"/>
+    </dgm:scene3d>
+    <dgm:sp3d/>
+    <dgm:txPr/>
+    <dgm:style>
+      <a:lnRef idx="2">
+        <a:scrgbClr r="0" g="0" b="0"/>
+      </a:lnRef>
+      <a:fillRef idx="1">
+        <a:scrgbClr r="0" g="0" b="0"/>
+      </a:fillRef>
+      <a:effectRef idx="0">
+        <a:scrgbClr r="0" g="0" b="0"/>
+      </a:effectRef>
+      <a:fontRef idx="minor">
+        <a:schemeClr val="lt1"/>
+      </a:fontRef>
+    </dgm:style>
+  </dgm:styleLbl>
+  <dgm:styleLbl name="node2">
+    <dgm:scene3d>
+      <a:camera prst="orthographicFront"/>
+      <a:lightRig rig="threePt" dir="t"/>
+    </dgm:scene3d>
+    <dgm:sp3d/>
+    <dgm:txPr/>
+    <dgm:style>
+      <a:lnRef idx="2">
+        <a:scrgbClr r="0" g="0" b="0"/>
+      </a:lnRef>
+      <a:fillRef idx="1">
+        <a:scrgbClr r="0" g="0" b="0"/>
+      </a:fillRef>
+      <a:effectRef idx="0">
+        <a:scrgbClr r="0" g="0" b="0"/>
+      </a:effectRef>
+      <a:fontRef idx="minor">
+        <a:schemeClr val="lt1"/>
+      </a:fontRef>
+    </dgm:style>
+  </dgm:styleLbl>
+  <dgm:styleLbl name="node3">
+    <dgm:scene3d>
+      <a:camera prst="orthographicFront"/>
+      <a:lightRig rig="threePt" dir="t"/>
+    </dgm:scene3d>
+    <dgm:sp3d/>
+    <dgm:txPr/>
+    <dgm:style>
+      <a:lnRef idx="2">
+        <a:scrgbClr r="0" g="0" b="0"/>
+      </a:lnRef>
+      <a:fillRef idx="1">
+        <a:scrgbClr r="0" g="0" b="0"/>
+      </a:fillRef>
+      <a:effectRef idx="0">
+        <a:scrgbClr r="0" g="0" b="0"/>
+      </a:effectRef>
+      <a:fontRef idx="minor">
+        <a:schemeClr val="lt1"/>
+      </a:fontRef>
+    </dgm:style>
+  </dgm:styleLbl>
+  <dgm:styleLbl name="node4">
+    <dgm:scene3d>
+      <a:camera prst="orthographicFront"/>
+      <a:lightRig rig="threePt" dir="t"/>
+    </dgm:scene3d>
+    <dgm:sp3d/>
+    <dgm:txPr/>
+    <dgm:style>
+      <a:lnRef idx="2">
+        <a:scrgbClr r="0" g="0" b="0"/>
+      </a:lnRef>
+      <a:fillRef idx="1">
+        <a:scrgbClr r="0" g="0" b="0"/>
+      </a:fillRef>
+      <a:effectRef idx="0">
+        <a:scrgbClr r="0" g="0" b="0"/>
+      </a:effectRef>
+      <a:fontRef idx="minor">
+        <a:schemeClr val="lt1"/>
+      </a:fontRef>
+    </dgm:style>
+  </dgm:styleLbl>
+  <dgm:styleLbl name="fgImgPlace1">
+    <dgm:scene3d>
+      <a:camera prst="orthographicFront"/>
+      <a:lightRig rig="threePt" dir="t"/>
+    </dgm:scene3d>
+    <dgm:sp3d/>
+    <dgm:txPr/>
+    <dgm:style>
+      <a:lnRef idx="2">
+        <a:scrgbClr r="0" g="0" b="0"/>
+      </a:lnRef>
+      <a:fillRef idx="1">
+        <a:scrgbClr r="0" g="0" b="0"/>
+      </a:fillRef>
+      <a:effectRef idx="0">
+        <a:scrgbClr r="0" g="0" b="0"/>
+      </a:effectRef>
+      <a:fontRef idx="minor"/>
+    </dgm:style>
+  </dgm:styleLbl>
+  <dgm:styleLbl name="alignImgPlace1">
+    <dgm:scene3d>
+      <a:camera prst="orthographicFront"/>
+      <a:lightRig rig="threePt" dir="t"/>
+    </dgm:scene3d>
+    <dgm:sp3d/>
+    <dgm:txPr/>
+    <dgm:style>
+      <a:lnRef idx="2">
+        <a:scrgbClr r="0" g="0" b="0"/>
+      </a:lnRef>
+      <a:fillRef idx="1">
+        <a:scrgbClr r="0" g="0" b="0"/>
+      </a:fillRef>
+      <a:effectRef idx="0">
+        <a:scrgbClr r="0" g="0" b="0"/>
+      </a:effectRef>
+      <a:fontRef idx="minor"/>
+    </dgm:style>
+  </dgm:styleLbl>
+  <dgm:styleLbl name="bgImgPlace1">
+    <dgm:scene3d>
+      <a:camera prst="orthographicFront"/>
+      <a:lightRig rig="threePt" dir="t"/>
+    </dgm:scene3d>
+    <dgm:sp3d/>
+    <dgm:txPr/>
+    <dgm:style>
+      <a:lnRef idx="2">
+        <a:scrgbClr r="0" g="0" b="0"/>
+      </a:lnRef>
+      <a:fillRef idx="1">
+        <a:scrgbClr r="0" g="0" b="0"/>
+      </a:fillRef>
+      <a:effectRef idx="0">
+        <a:scrgbClr r="0" g="0" b="0"/>
+      </a:effectRef>
+      <a:fontRef idx="minor"/>
+    </dgm:style>
+  </dgm:styleLbl>
+  <dgm:styleLbl name="sibTrans2D1">
+    <dgm:scene3d>
+      <a:camera prst="orthographicFront"/>
+      <a:lightRig rig="threePt" dir="t"/>
+    </dgm:scene3d>
+    <dgm:sp3d/>
+    <dgm:txPr/>
+    <dgm:style>
+      <a:lnRef idx="0">
+        <a:scrgbClr r="0" g="0" b="0"/>
+      </a:lnRef>
+      <a:fillRef idx="1">
+        <a:scrgbClr r="0" g="0" b="0"/>
+      </a:fillRef>
+      <a:effectRef idx="0">
+        <a:scrgbClr r="0" g="0" b="0"/>
+      </a:effectRef>
+      <a:fontRef idx="minor">
+        <a:schemeClr val="lt1"/>
+      </a:fontRef>
+    </dgm:style>
+  </dgm:styleLbl>
+  <dgm:styleLbl name="fgSibTrans2D1">
+    <dgm:scene3d>
+      <a:camera prst="orthographicFront"/>
+      <a:lightRig rig="threePt" dir="t"/>
+    </dgm:scene3d>
+    <dgm:sp3d/>
+    <dgm:txPr/>
+    <dgm:style>
+      <a:lnRef idx="0">
+        <a:scrgbClr r="0" g="0" b="0"/>
+      </a:lnRef>
+      <a:fillRef idx="1">
+        <a:scrgbClr r="0" g="0" b="0"/>
+      </a:fillRef>
+      <a:effectRef idx="0">
+        <a:scrgbClr r="0" g="0" b="0"/>
+      </a:effectRef>
+      <a:fontRef idx="minor">
+        <a:schemeClr val="lt1"/>
+      </a:fontRef>
+    </dgm:style>
+  </dgm:styleLbl>
+  <dgm:styleLbl name="bgSibTrans2D1">
+    <dgm:scene3d>
+      <a:camera prst="orthographicFront"/>
+      <a:lightRig rig="threePt" dir="t"/>
+    </dgm:scene3d>
+    <dgm:sp3d/>
+    <dgm:txPr/>
+    <dgm:style>
+      <a:lnRef idx="0">
+        <a:scrgbClr r="0" g="0" b="0"/>
+      </a:lnRef>
+      <a:fillRef idx="1">
+        <a:scrgbClr r="0" g="0" b="0"/>
+      </a:fillRef>
+      <a:effectRef idx="0">
+        <a:scrgbClr r="0" g="0" b="0"/>
+      </a:effectRef>
+      <a:fontRef idx="minor">
+        <a:schemeClr val="lt1"/>
+      </a:fontRef>
+    </dgm:style>
+  </dgm:styleLbl>
+  <dgm:styleLbl name="sibTrans1D1">
+    <dgm:scene3d>
+      <a:camera prst="orthographicFront"/>
+      <a:lightRig rig="threePt" dir="t"/>
+    </dgm:scene3d>
+    <dgm:sp3d/>
+    <dgm:txPr/>
+    <dgm:style>
+      <a:lnRef idx="1">
+        <a:scrgbClr r="0" g="0" b="0"/>
+      </a:lnRef>
+      <a:fillRef idx="0">
+        <a:scrgbClr r="0" g="0" b="0"/>
+      </a:fillRef>
+      <a:effectRef idx="0">
+        <a:scrgbClr r="0" g="0" b="0"/>
+      </a:effectRef>
+      <a:fontRef idx="minor"/>
+    </dgm:style>
+  </dgm:styleLbl>
+  <dgm:styleLbl name="callout">
+    <dgm:scene3d>
+      <a:camera prst="orthographicFront"/>
+      <a:lightRig rig="threePt" dir="t"/>
+    </dgm:scene3d>
+    <dgm:sp3d/>
+    <dgm:txPr/>
+    <dgm:style>
+      <a:lnRef idx="2">
+        <a:scrgbClr r="0" g="0" b="0"/>
+      </a:lnRef>
+      <a:fillRef idx="1">
+        <a:scrgbClr r="0" g="0" b="0"/>
+      </a:fillRef>
+      <a:effectRef idx="0">
+        <a:scrgbClr r="0" g="0" b="0"/>
+      </a:effectRef>
+      <a:fontRef idx="minor"/>
+    </dgm:style>
+  </dgm:styleLbl>
+  <dgm:styleLbl name="asst0">
+    <dgm:scene3d>
+      <a:camera prst="orthographicFront"/>
+      <a:lightRig rig="threePt" dir="t"/>
+    </dgm:scene3d>
+    <dgm:sp3d/>
+    <dgm:txPr/>
+    <dgm:style>
+      <a:lnRef idx="2">
+        <a:scrgbClr r="0" g="0" b="0"/>
+      </a:lnRef>
+      <a:fillRef idx="1">
+        <a:scrgbClr r="0" g="0" b="0"/>
+      </a:fillRef>
+      <a:effectRef idx="0">
+        <a:scrgbClr r="0" g="0" b="0"/>
+      </a:effectRef>
+      <a:fontRef idx="minor">
+        <a:schemeClr val="lt1"/>
+      </a:fontRef>
+    </dgm:style>
+  </dgm:styleLbl>
+  <dgm:styleLbl name="asst1">
+    <dgm:scene3d>
+      <a:camera prst="orthographicFront"/>
+      <a:lightRig rig="threePt" dir="t"/>
+    </dgm:scene3d>
+    <dgm:sp3d/>
+    <dgm:txPr/>
+    <dgm:style>
+      <a:lnRef idx="2">
+        <a:scrgbClr r="0" g="0" b="0"/>
+      </a:lnRef>
+      <a:fillRef idx="1">
+        <a:scrgbClr r="0" g="0" b="0"/>
+      </a:fillRef>
+      <a:effectRef idx="0">
+        <a:scrgbClr r="0" g="0" b="0"/>
+      </a:effectRef>
+      <a:fontRef idx="minor">
+        <a:schemeClr val="lt1"/>
+      </a:fontRef>
+    </dgm:style>
+  </dgm:styleLbl>
+  <dgm:styleLbl name="asst2">
+    <dgm:scene3d>
+      <a:camera prst="orthographicFront"/>
+      <a:lightRig rig="threePt" dir="t"/>
+    </dgm:scene3d>
+    <dgm:sp3d/>
+    <dgm:txPr/>
+    <dgm:style>
+      <a:lnRef idx="2">
+        <a:scrgbClr r="0" g="0" b="0"/>
+      </a:lnRef>
+      <a:fillRef idx="1">
+        <a:scrgbClr r="0" g="0" b="0"/>
+      </a:fillRef>
+      <a:effectRef idx="0">
+        <a:scrgbClr r="0" g="0" b="0"/>
+      </a:effectRef>
+      <a:fontRef idx="minor">
+        <a:schemeClr val="lt1"/>
+      </a:fontRef>
+    </dgm:style>
+  </dgm:styleLbl>
+  <dgm:styleLbl name="asst3">
+    <dgm:scene3d>
+      <a:camera prst="orthographicFront"/>
+      <a:lightRig rig="threePt" dir="t"/>
+    </dgm:scene3d>
+    <dgm:sp3d/>
+    <dgm:txPr/>
+    <dgm:style>
+      <a:lnRef idx="2">
+        <a:scrgbClr r="0" g="0" b="0"/>
+      </a:lnRef>
+      <a:fillRef idx="1">
+        <a:scrgbClr r="0" g="0" b="0"/>
+      </a:fillRef>
+      <a:effectRef idx="0">
+        <a:scrgbClr r="0" g="0" b="0"/>
+      </a:effectRef>
+      <a:fontRef idx="minor">
+        <a:schemeClr val="lt1"/>
+      </a:fontRef>
+    </dgm:style>
+  </dgm:styleLbl>
+  <dgm:styleLbl name="asst4">
+    <dgm:scene3d>
+      <a:camera prst="orthographicFront"/>
+      <a:lightRig rig="threePt" dir="t"/>
+    </dgm:scene3d>
+    <dgm:sp3d/>
+    <dgm:txPr/>
+    <dgm:style>
+      <a:lnRef idx="2">
+        <a:scrgbClr r="0" g="0" b="0"/>
+      </a:lnRef>
+      <a:fillRef idx="1">
+        <a:scrgbClr r="0" g="0" b="0"/>
+      </a:fillRef>
+      <a:effectRef idx="0">
+        <a:scrgbClr r="0" g="0" b="0"/>
+      </a:effectRef>
+      <a:fontRef idx="minor">
+        <a:schemeClr val="lt1"/>
+      </a:fontRef>
+    </dgm:style>
+  </dgm:styleLbl>
+  <dgm:styleLbl name="parChTrans2D1">
+    <dgm:scene3d>
+      <a:camera prst="orthographicFront"/>
+      <a:lightRig rig="threePt" dir="t"/>
+    </dgm:scene3d>
+    <dgm:sp3d/>
+    <dgm:txPr/>
+    <dgm:style>
+      <a:lnRef idx="2">
+        <a:scrgbClr r="0" g="0" b="0"/>
+      </a:lnRef>
+      <a:fillRef idx="1">
+        <a:scrgbClr r="0" g="0" b="0"/>
+      </a:fillRef>
+      <a:effectRef idx="0">
+        <a:scrgbClr r="0" g="0" b="0"/>
+      </a:effectRef>
+      <a:fontRef idx="minor">
+        <a:schemeClr val="lt1"/>
+      </a:fontRef>
+    </dgm:style>
+  </dgm:styleLbl>
+  <dgm:styleLbl name="parChTrans2D2">
+    <dgm:scene3d>
+      <a:camera prst="orthographicFront"/>
+      <a:lightRig rig="threePt" dir="t"/>
+    </dgm:scene3d>
+    <dgm:sp3d/>
+    <dgm:txPr/>
+    <dgm:style>
+      <a:lnRef idx="2">
+        <a:scrgbClr r="0" g="0" b="0"/>
+      </a:lnRef>
+      <a:fillRef idx="1">
+        <a:scrgbClr r="0" g="0" b="0"/>
+      </a:fillRef>
+      <a:effectRef idx="0">
+        <a:scrgbClr r="0" g="0" b="0"/>
+      </a:effectRef>
+      <a:fontRef idx="minor">
+        <a:schemeClr val="lt1"/>
+      </a:fontRef>
+    </dgm:style>
+  </dgm:styleLbl>
+  <dgm:styleLbl name="parChTrans2D3">
+    <dgm:scene3d>
+      <a:camera prst="orthographicFront"/>
+      <a:lightRig rig="threePt" dir="t"/>
+    </dgm:scene3d>
+    <dgm:sp3d/>
+    <dgm:txPr/>
+    <dgm:style>
+      <a:lnRef idx="2">
+        <a:scrgbClr r="0" g="0" b="0"/>
+      </a:lnRef>
+      <a:fillRef idx="1">
+        <a:scrgbClr r="0" g="0" b="0"/>
+      </a:fillRef>
+      <a:effectRef idx="0">
+        <a:scrgbClr r="0" g="0" b="0"/>
+      </a:effectRef>
+      <a:fontRef idx="minor">
+        <a:schemeClr val="lt1"/>
+      </a:fontRef>
+    </dgm:style>
+  </dgm:styleLbl>
+  <dgm:styleLbl name="parChTrans2D4">
+    <dgm:scene3d>
+      <a:camera prst="orthographicFront"/>
+      <a:lightRig rig="threePt" dir="t"/>
+    </dgm:scene3d>
+    <dgm:sp3d/>
+    <dgm:txPr/>
+    <dgm:style>
+      <a:lnRef idx="2">
+        <a:scrgbClr r="0" g="0" b="0"/>
+      </a:lnRef>
+      <a:fillRef idx="1">
+        <a:scrgbClr r="0" g="0" b="0"/>
+      </a:fillRef>
+      <a:effectRef idx="0">
+        <a:scrgbClr r="0" g="0" b="0"/>
+      </a:effectRef>
+      <a:fontRef idx="minor">
+        <a:schemeClr val="lt1"/>
+      </a:fontRef>
+    </dgm:style>
+  </dgm:styleLbl>
+  <dgm:styleLbl name="parChTrans1D1">
+    <dgm:scene3d>
+      <a:camera prst="orthographicFront"/>
+      <a:lightRig rig="threePt" dir="t"/>
+    </dgm:scene3d>
+    <dgm:sp3d/>
+    <dgm:txPr/>
+    <dgm:style>
+      <a:lnRef idx="2">
+        <a:scrgbClr r="0" g="0" b="0"/>
+      </a:lnRef>
+      <a:fillRef idx="0">
+        <a:scrgbClr r="0" g="0" b="0"/>
+      </a:fillRef>
+      <a:effectRef idx="0">
+        <a:scrgbClr r="0" g="0" b="0"/>
+      </a:effectRef>
+      <a:fontRef idx="minor"/>
+    </dgm:style>
+  </dgm:styleLbl>
+  <dgm:styleLbl name="parChTrans1D2">
+    <dgm:scene3d>
+      <a:camera prst="orthographicFront"/>
+      <a:lightRig rig="threePt" dir="t"/>
+    </dgm:scene3d>
+    <dgm:sp3d/>
+    <dgm:txPr/>
+    <dgm:style>
+      <a:lnRef idx="2">
+        <a:scrgbClr r="0" g="0" b="0"/>
+      </a:lnRef>
+      <a:fillRef idx="0">
+        <a:scrgbClr r="0" g="0" b="0"/>
+      </a:fillRef>
+      <a:effectRef idx="0">
+        <a:scrgbClr r="0" g="0" b="0"/>
+      </a:effectRef>
+      <a:fontRef idx="minor"/>
+    </dgm:style>
+  </dgm:styleLbl>
+  <dgm:styleLbl name="parChTrans1D3">
+    <dgm:scene3d>
+      <a:camera prst="orthographicFront"/>
+      <a:lightRig rig="threePt" dir="t"/>
+    </dgm:scene3d>
+    <dgm:sp3d/>
+    <dgm:txPr/>
+    <dgm:style>
+      <a:lnRef idx="2">
+        <a:scrgbClr r="0" g="0" b="0"/>
+      </a:lnRef>
+      <a:fillRef idx="0">
+        <a:scrgbClr r="0" g="0" b="0"/>
+      </a:fillRef>
+      <a:effectRef idx="0">
+        <a:scrgbClr r="0" g="0" b="0"/>
+      </a:effectRef>
+      <a:fontRef idx="minor"/>
+    </dgm:style>
+  </dgm:styleLbl>
+  <dgm:styleLbl name="parChTrans1D4">
+    <dgm:scene3d>
+      <a:camera prst="orthographicFront"/>
+      <a:lightRig rig="threePt" dir="t"/>
+    </dgm:scene3d>
+    <dgm:sp3d/>
+    <dgm:txPr/>
+    <dgm:style>
+      <a:lnRef idx="2">
+        <a:scrgbClr r="0" g="0" b="0"/>
+      </a:lnRef>
+      <a:fillRef idx="0">
+        <a:scrgbClr r="0" g="0" b="0"/>
+      </a:fillRef>
+      <a:effectRef idx="0">
+        <a:scrgbClr r="0" g="0" b="0"/>
+      </a:effectRef>
+      <a:fontRef idx="minor"/>
+    </dgm:style>
+  </dgm:styleLbl>
+  <dgm:styleLbl name="fgAcc1">
+    <dgm:scene3d>
+      <a:camera prst="orthographicFront"/>
+      <a:lightRig rig="threePt" dir="t"/>
+    </dgm:scene3d>
+    <dgm:sp3d/>
+    <dgm:txPr/>
+    <dgm:style>
+      <a:lnRef idx="2">
+        <a:scrgbClr r="0" g="0" b="0"/>
+      </a:lnRef>
+      <a:fillRef idx="1">
+        <a:scrgbClr r="0" g="0" b="0"/>
+      </a:fillRef>
+      <a:effectRef idx="0">
+        <a:scrgbClr r="0" g="0" b="0"/>
+      </a:effectRef>
+      <a:fontRef idx="minor"/>
+    </dgm:style>
+  </dgm:styleLbl>
+  <dgm:styleLbl name="conFgAcc1">
+    <dgm:scene3d>
+      <a:camera prst="orthographicFront"/>
+      <a:lightRig rig="threePt" dir="t"/>
+    </dgm:scene3d>
+    <dgm:sp3d/>
+    <dgm:txPr/>
+    <dgm:style>
+      <a:lnRef idx="2">
+        <a:scrgbClr r="0" g="0" b="0"/>
+      </a:lnRef>
+      <a:fillRef idx="1">
+        <a:scrgbClr r="0" g="0" b="0"/>
+      </a:fillRef>
+      <a:effectRef idx="0">
+        <a:scrgbClr r="0" g="0" b="0"/>
+      </a:effectRef>
+      <a:fontRef idx="minor"/>
+    </dgm:style>
+  </dgm:styleLbl>
+  <dgm:styleLbl name="alignAcc1">
+    <dgm:scene3d>
+      <a:camera prst="orthographicFront"/>
+      <a:lightRig rig="threePt" dir="t"/>
+    </dgm:scene3d>
+    <dgm:sp3d/>
+    <dgm:txPr/>
+    <dgm:style>
+      <a:lnRef idx="2">
+        <a:scrgbClr r="0" g="0" b="0"/>
+      </a:lnRef>
+      <a:fillRef idx="1">
+        <a:scrgbClr r="0" g="0" b="0"/>
+      </a:fillRef>
+      <a:effectRef idx="0">
+        <a:scrgbClr r="0" g="0" b="0"/>
+      </a:effectRef>
+      <a:fontRef idx="minor"/>
+    </dgm:style>
+  </dgm:styleLbl>
+  <dgm:styleLbl name="trAlignAcc1">
+    <dgm:scene3d>
+      <a:camera prst="orthographicFront"/>
+      <a:lightRig rig="threePt" dir="t"/>
+    </dgm:scene3d>
+    <dgm:sp3d/>
+    <dgm:txPr/>
+    <dgm:style>
+      <a:lnRef idx="1">
+        <a:scrgbClr r="0" g="0" b="0"/>
+      </a:lnRef>
+      <a:fillRef idx="1">
+        <a:scrgbClr r="0" g="0" b="0"/>
+      </a:fillRef>
+      <a:effectRef idx="0">
+        <a:scrgbClr r="0" g="0" b="0"/>
+      </a:effectRef>
+      <a:fontRef idx="minor"/>
+    </dgm:style>
+  </dgm:styleLbl>
+  <dgm:styleLbl name="bgAcc1">
+    <dgm:scene3d>
+      <a:camera prst="orthographicFront"/>
+      <a:lightRig rig="threePt" dir="t"/>
+    </dgm:scene3d>
+    <dgm:sp3d/>
+    <dgm:txPr/>
+    <dgm:style>
+      <a:lnRef idx="2">
+        <a:scrgbClr r="0" g="0" b="0"/>
+      </a:lnRef>
+      <a:fillRef idx="1">
+        <a:scrgbClr r="0" g="0" b="0"/>
+      </a:fillRef>
+      <a:effectRef idx="0">
+        <a:scrgbClr r="0" g="0" b="0"/>
+      </a:effectRef>
+      <a:fontRef idx="minor"/>
+    </dgm:style>
+  </dgm:styleLbl>
+  <dgm:styleLbl name="solidFgAcc1">
+    <dgm:scene3d>
+      <a:camera prst="orthographicFront"/>
+      <a:lightRig rig="threePt" dir="t"/>
+    </dgm:scene3d>
+    <dgm:sp3d/>
+    <dgm:txPr/>
+    <dgm:style>
+      <a:lnRef idx="2">
+        <a:scrgbClr r="0" g="0" b="0"/>
+      </a:lnRef>
+      <a:fillRef idx="1">
+        <a:scrgbClr r="0" g="0" b="0"/>
+      </a:fillRef>
+      <a:effectRef idx="0">
+        <a:scrgbClr r="0" g="0" b="0"/>
+      </a:effectRef>
+      <a:fontRef idx="minor"/>
+    </dgm:style>
+  </dgm:styleLbl>
+  <dgm:styleLbl name="solidAlignAcc1">
+    <dgm:scene3d>
+      <a:camera prst="orthographicFront"/>
+      <a:lightRig rig="threePt" dir="t"/>
+    </dgm:scene3d>
+    <dgm:sp3d/>
+    <dgm:txPr/>
+    <dgm:style>
+      <a:lnRef idx="2">
+        <a:scrgbClr r="0" g="0" b="0"/>
+      </a:lnRef>
+      <a:fillRef idx="1">
+        <a:scrgbClr r="0" g="0" b="0"/>
+      </a:fillRef>
+      <a:effectRef idx="0">
+        <a:scrgbClr r="0" g="0" b="0"/>
+      </a:effectRef>
+      <a:fontRef idx="minor"/>
+    </dgm:style>
+  </dgm:styleLbl>
+  <dgm:styleLbl name="solidBgAcc1">
+    <dgm:scene3d>
+      <a:camera prst="orthographicFront"/>
+      <a:lightRig rig="threePt" dir="t"/>
+    </dgm:scene3d>
+    <dgm:sp3d/>
+    <dgm:txPr/>
+    <dgm:style>
+      <a:lnRef idx="2">
+        <a:scrgbClr r="0" g="0" b="0"/>
+      </a:lnRef>
+      <a:fillRef idx="1">
+        <a:scrgbClr r="0" g="0" b="0"/>
+      </a:fillRef>
+      <a:effectRef idx="0">
+        <a:scrgbClr r="0" g="0" b="0"/>
+      </a:effectRef>
+      <a:fontRef idx="minor"/>
+    </dgm:style>
+  </dgm:styleLbl>
+  <dgm:styleLbl name="fgAccFollowNode1">
+    <dgm:scene3d>
+      <a:camera prst="orthographicFront"/>
+      <a:lightRig rig="threePt" dir="t"/>
+    </dgm:scene3d>
+    <dgm:sp3d/>
+    <dgm:txPr/>
+    <dgm:style>
+      <a:lnRef idx="2">
+        <a:scrgbClr r="0" g="0" b="0"/>
+      </a:lnRef>
+      <a:fillRef idx="1">
+        <a:scrgbClr r="0" g="0" b="0"/>
+      </a:fillRef>
+      <a:effectRef idx="0">
+        <a:scrgbClr r="0" g="0" b="0"/>
+      </a:effectRef>
+      <a:fontRef idx="minor"/>
+    </dgm:style>
+  </dgm:styleLbl>
+  <dgm:styleLbl name="alignAccFollowNode1">
+    <dgm:scene3d>
+      <a:camera prst="orthographicFront"/>
+      <a:lightRig rig="threePt" dir="t"/>
+    </dgm:scene3d>
+    <dgm:sp3d/>
+    <dgm:txPr/>
+    <dgm:style>
+      <a:lnRef idx="2">
+        <a:scrgbClr r="0" g="0" b="0"/>
+      </a:lnRef>
+      <a:fillRef idx="1">
+        <a:scrgbClr r="0" g="0" b="0"/>
+      </a:fillRef>
+      <a:effectRef idx="0">
+        <a:scrgbClr r="0" g="0" b="0"/>
+      </a:effectRef>
+      <a:fontRef idx="minor"/>
+    </dgm:style>
+  </dgm:styleLbl>
+  <dgm:styleLbl name="bgAccFollowNode1">
+    <dgm:scene3d>
+      <a:camera prst="orthographicFront"/>
+      <a:lightRig rig="threePt" dir="t"/>
+    </dgm:scene3d>
+    <dgm:sp3d/>
+    <dgm:txPr/>
+    <dgm:style>
+      <a:lnRef idx="2">
+        <a:scrgbClr r="0" g="0" b="0"/>
+      </a:lnRef>
+      <a:fillRef idx="1">
+        <a:scrgbClr r="0" g="0" b="0"/>
+      </a:fillRef>
+      <a:effectRef idx="0">
+        <a:scrgbClr r="0" g="0" b="0"/>
+      </a:effectRef>
+      <a:fontRef idx="minor"/>
+    </dgm:style>
+  </dgm:styleLbl>
+  <dgm:styleLbl name="fgAcc0">
+    <dgm:scene3d>
+      <a:camera prst="orthographicFront"/>
+      <a:lightRig rig="threePt" dir="t"/>
+    </dgm:scene3d>
+    <dgm:sp3d/>
+    <dgm:txPr/>
+    <dgm:style>
+      <a:lnRef idx="2">
+        <a:scrgbClr r="0" g="0" b="0"/>
+      </a:lnRef>
+      <a:fillRef idx="1">
+        <a:scrgbClr r="0" g="0" b="0"/>
+      </a:fillRef>
+      <a:effectRef idx="0">
+        <a:scrgbClr r="0" g="0" b="0"/>
+      </a:effectRef>
+      <a:fontRef idx="minor"/>
+    </dgm:style>
+  </dgm:styleLbl>
+  <dgm:styleLbl name="fgAcc2">
+    <dgm:scene3d>
+      <a:camera prst="orthographicFront"/>
+      <a:lightRig rig="threePt" dir="t"/>
+    </dgm:scene3d>
+    <dgm:sp3d/>
+    <dgm:txPr/>
+    <dgm:style>
+      <a:lnRef idx="2">
+        <a:scrgbClr r="0" g="0" b="0"/>
+      </a:lnRef>
+      <a:fillRef idx="1">
+        <a:scrgbClr r="0" g="0" b="0"/>
+      </a:fillRef>
+      <a:effectRef idx="0">
+        <a:scrgbClr r="0" g="0" b="0"/>
+      </a:effectRef>
+      <a:fontRef idx="minor"/>
+    </dgm:style>
+  </dgm:styleLbl>
+  <dgm:styleLbl name="fgAcc3">
+    <dgm:scene3d>
+      <a:camera prst="orthographicFront"/>
+      <a:lightRig rig="threePt" dir="t"/>
+    </dgm:scene3d>
+    <dgm:sp3d/>
+    <dgm:txPr/>
+    <dgm:style>
+      <a:lnRef idx="2">
+        <a:scrgbClr r="0" g="0" b="0"/>
+      </a:lnRef>
+      <a:fillRef idx="1">
+        <a:scrgbClr r="0" g="0" b="0"/>
+      </a:fillRef>
+      <a:effectRef idx="0">
+        <a:scrgbClr r="0" g="0" b="0"/>
+      </a:effectRef>
+      <a:fontRef idx="minor"/>
+    </dgm:style>
+  </dgm:styleLbl>
+  <dgm:styleLbl name="fgAcc4">
+    <dgm:scene3d>
+      <a:camera prst="orthographicFront"/>
+      <a:lightRig rig="threePt" dir="t"/>
+    </dgm:scene3d>
+    <dgm:sp3d/>
+    <dgm:txPr/>
+    <dgm:style>
+      <a:lnRef idx="2">
+        <a:scrgbClr r="0" g="0" b="0"/>
+      </a:lnRef>
+      <a:fillRef idx="1">
+        <a:scrgbClr r="0" g="0" b="0"/>
+      </a:fillRef>
+      <a:effectRef idx="0">
+        <a:scrgbClr r="0" g="0" b="0"/>
+      </a:effectRef>
+      <a:fontRef idx="minor"/>
+    </dgm:style>
+  </dgm:styleLbl>
+  <dgm:styleLbl name="bgShp">
+    <dgm:scene3d>
+      <a:camera prst="orthographicFront"/>
+      <a:lightRig rig="threePt" dir="t"/>
+    </dgm:scene3d>
+    <dgm:sp3d/>
+    <dgm:txPr/>
+    <dgm:style>
+      <a:lnRef idx="0">
+        <a:scrgbClr r="0" g="0" b="0"/>
+      </a:lnRef>
+      <a:fillRef idx="1">
+        <a:scrgbClr r="0" g="0" b="0"/>
+      </a:fillRef>
+      <a:effectRef idx="0">
+        <a:scrgbClr r="0" g="0" b="0"/>
+      </a:effectRef>
+      <a:fontRef idx="minor"/>
+    </dgm:style>
+  </dgm:styleLbl>
+  <dgm:styleLbl name="dkBgShp">
+    <dgm:scene3d>
+      <a:camera prst="orthographicFront"/>
+      <a:lightRig rig="threePt" dir="t"/>
+    </dgm:scene3d>
+    <dgm:sp3d/>
+    <dgm:txPr/>
+    <dgm:style>
+      <a:lnRef idx="0">
+        <a:scrgbClr r="0" g="0" b="0"/>
+      </a:lnRef>
+      <a:fillRef idx="1">
+        <a:scrgbClr r="0" g="0" b="0"/>
+      </a:fillRef>
+      <a:effectRef idx="0">
+        <a:scrgbClr r="0" g="0" b="0"/>
+      </a:effectRef>
+      <a:fontRef idx="minor"/>
+    </dgm:style>
+  </dgm:styleLbl>
+  <dgm:styleLbl name="trBgShp">
+    <dgm:scene3d>
+      <a:camera prst="orthographicFront"/>
+      <a:lightRig rig="threePt" dir="t"/>
+    </dgm:scene3d>
+    <dgm:sp3d/>
+    <dgm:txPr/>
+    <dgm:style>
+      <a:lnRef idx="0">
+        <a:scrgbClr r="0" g="0" b="0"/>
+      </a:lnRef>
+      <a:fillRef idx="1">
+        <a:scrgbClr r="0" g="0" b="0"/>
+      </a:fillRef>
+      <a:effectRef idx="0">
+        <a:scrgbClr r="0" g="0" b="0"/>
+      </a:effectRef>
+      <a:fontRef idx="minor"/>
+    </dgm:style>
+  </dgm:styleLbl>
+  <dgm:styleLbl name="fgShp">
+    <dgm:scene3d>
+      <a:camera prst="orthographicFront"/>
+      <a:lightRig rig="threePt" dir="t"/>
+    </dgm:scene3d>
+    <dgm:sp3d/>
+    <dgm:txPr/>
+    <dgm:style>
+      <a:lnRef idx="2">
+        <a:scrgbClr r="0" g="0" b="0"/>
+      </a:lnRef>
+      <a:fillRef idx="1">
+        <a:scrgbClr r="0" g="0" b="0"/>
+      </a:fillRef>
+      <a:effectRef idx="0">
+        <a:scrgbClr r="0" g="0" b="0"/>
+      </a:effectRef>
+      <a:fontRef idx="minor"/>
+    </dgm:style>
+  </dgm:styleLbl>
+  <dgm:styleLbl name="revTx">
+    <dgm:scene3d>
+      <a:camera prst="orthographicFront"/>
+      <a:lightRig rig="threePt" dir="t"/>
+    </dgm:scene3d>
+    <dgm:sp3d/>
+    <dgm:txPr/>
+    <dgm:style>
+      <a:lnRef idx="0">
+        <a:scrgbClr r="0" g="0" b="0"/>
+      </a:lnRef>
+      <a:fillRef idx="0">
+        <a:scrgbClr r="0" g="0" b="0"/>
+      </a:fillRef>
+      <a:effectRef idx="0">
+        <a:scrgbClr r="0" g="0" b="0"/>
+      </a:effectRef>
+      <a:fontRef idx="minor"/>
+    </dgm:style>
+  </dgm:styleLbl>
+</dgm:styleDef>
 </file>
 
 <file path=ppt/notesMasters/notesMaster1.xml><?xml version="1.0" encoding="utf-8"?>
@@ -247,7 +4919,7 @@
           <a:p>
             <a:fld id="{1438A7C7-51D5-4CE9-848C-73CCDCB5AD2A}" type="datetimeFigureOut">
               <a:rPr lang="fr-FR" smtClean="0"/>
-              <a:t>05/06/2026</a:t>
+              <a:t>06/06/2026</a:t>
             </a:fld>
             <a:endParaRPr lang="fr-FR"/>
           </a:p>
@@ -683,7 +5355,7 @@
           <a:p>
             <a:fld id="{25BF4BE5-493C-4950-8611-4B73EBA124A3}" type="datetime1">
               <a:rPr lang="fr-FR" smtClean="0"/>
-              <a:t>05/06/2026</a:t>
+              <a:t>06/06/2026</a:t>
             </a:fld>
             <a:endParaRPr lang="fr-FR"/>
           </a:p>
@@ -1037,7 +5709,7 @@
           <a:p>
             <a:fld id="{7440509C-B4B3-4DBB-BCC9-40D57FCA4C66}" type="datetime1">
               <a:rPr lang="fr-FR" smtClean="0"/>
-              <a:t>05/06/2026</a:t>
+              <a:t>06/06/2026</a:t>
             </a:fld>
             <a:endParaRPr lang="fr-FR"/>
           </a:p>
@@ -1217,7 +5889,7 @@
           <a:p>
             <a:fld id="{F751CFBF-E380-4D91-9539-BDFDF7AF5C45}" type="datetime1">
               <a:rPr lang="fr-FR" smtClean="0"/>
-              <a:t>05/06/2026</a:t>
+              <a:t>06/06/2026</a:t>
             </a:fld>
             <a:endParaRPr lang="fr-FR"/>
           </a:p>
@@ -1387,7 +6059,7 @@
           <a:p>
             <a:fld id="{D2B74F8F-65AC-4766-A2F7-69AD9EC8EDDE}" type="datetime1">
               <a:rPr lang="fr-FR" smtClean="0"/>
-              <a:t>05/06/2026</a:t>
+              <a:t>06/06/2026</a:t>
             </a:fld>
             <a:endParaRPr lang="fr-FR"/>
           </a:p>
@@ -1664,7 +6336,7 @@
           <a:p>
             <a:fld id="{B4EF0BDA-B3DF-4C30-B725-2619B0E62ACD}" type="datetime1">
               <a:rPr lang="fr-FR" smtClean="0"/>
-              <a:t>05/06/2026</a:t>
+              <a:t>06/06/2026</a:t>
             </a:fld>
             <a:endParaRPr lang="fr-FR"/>
           </a:p>
@@ -1757,6 +6429,13 @@
             <a:tailEnd/>
           </a:ln>
         </p:spPr>
+        <p:txBody>
+          <a:bodyPr/>
+          <a:lstStyle/>
+          <a:p>
+            <a:endParaRPr lang="fr-FR"/>
+          </a:p>
+        </p:txBody>
       </p:sp>
       <p:sp>
         <p:nvSpPr>
@@ -2068,7 +6747,7 @@
           <a:p>
             <a:fld id="{2BB7BCF4-2F57-44BE-86E1-4D2E12B5FC6A}" type="datetime1">
               <a:rPr lang="fr-FR" smtClean="0"/>
-              <a:t>05/06/2026</a:t>
+              <a:t>06/06/2026</a:t>
             </a:fld>
             <a:endParaRPr lang="fr-FR"/>
           </a:p>
@@ -2545,7 +7224,7 @@
           <a:p>
             <a:fld id="{6321D020-EA2F-4E08-9F19-25238FB1646F}" type="datetime1">
               <a:rPr lang="fr-FR" smtClean="0"/>
-              <a:t>05/06/2026</a:t>
+              <a:t>06/06/2026</a:t>
             </a:fld>
             <a:endParaRPr lang="fr-FR"/>
           </a:p>
@@ -2663,7 +7342,7 @@
           <a:p>
             <a:fld id="{13019C80-4ECC-4A86-ACB8-43004AF15481}" type="datetime1">
               <a:rPr lang="fr-FR" smtClean="0"/>
-              <a:t>05/06/2026</a:t>
+              <a:t>06/06/2026</a:t>
             </a:fld>
             <a:endParaRPr lang="fr-FR"/>
           </a:p>
@@ -2758,7 +7437,7 @@
           <a:p>
             <a:fld id="{D5B1220C-94C3-4D23-98DD-B536DE4A6F2C}" type="datetime1">
               <a:rPr lang="fr-FR" smtClean="0"/>
-              <a:t>05/06/2026</a:t>
+              <a:t>06/06/2026</a:t>
             </a:fld>
             <a:endParaRPr lang="fr-FR"/>
           </a:p>
@@ -3104,7 +7783,7 @@
           <a:p>
             <a:fld id="{D77193F2-5089-4D6D-B951-141B92746967}" type="datetime1">
               <a:rPr lang="fr-FR" smtClean="0"/>
-              <a:t>05/06/2026</a:t>
+              <a:t>06/06/2026</a:t>
             </a:fld>
             <a:endParaRPr lang="fr-FR"/>
           </a:p>
@@ -3502,7 +8181,7 @@
           <a:p>
             <a:fld id="{2155EEFE-CE4B-45B5-811F-7C771B7BD159}" type="datetime1">
               <a:rPr lang="fr-FR" smtClean="0"/>
-              <a:t>05/06/2026</a:t>
+              <a:t>06/06/2026</a:t>
             </a:fld>
             <a:endParaRPr lang="fr-FR"/>
           </a:p>
@@ -3790,7 +8469,7 @@
           <a:p>
             <a:fld id="{8865F967-DFD5-47C5-B34E-026F86C5401C}" type="datetime1">
               <a:rPr lang="fr-FR" smtClean="0"/>
-              <a:t>05/06/2026</a:t>
+              <a:t>06/06/2026</a:t>
             </a:fld>
             <a:endParaRPr lang="fr-FR"/>
           </a:p>
@@ -4414,7 +9093,7 @@
         </p:nvSpPr>
         <p:spPr>
           <a:xfrm>
-            <a:off x="9830683" y="6453386"/>
+            <a:off x="10331013" y="6447022"/>
             <a:ext cx="1596292" cy="404614"/>
           </a:xfrm>
         </p:spPr>
@@ -4426,7 +9105,7 @@
               <a:rPr lang="fr-FR" smtClean="0"/>
               <a:t>1</a:t>
             </a:fld>
-            <a:endParaRPr lang="fr-FR"/>
+            <a:endParaRPr lang="fr-FR" dirty="0"/>
           </a:p>
         </p:txBody>
       </p:sp>
@@ -4464,7 +9143,7 @@
             </a:r>
             <a:r>
               <a:rPr lang="fr-FR" b="1" dirty="0"/>
-              <a:t>02539426732</a:t>
+              <a:t>1234567</a:t>
             </a:r>
           </a:p>
           <a:p>
@@ -4482,6 +9161,2067 @@
     <p:extLst>
       <p:ext uri="{BB962C8B-B14F-4D97-AF65-F5344CB8AC3E}">
         <p14:creationId xmlns:p14="http://schemas.microsoft.com/office/powerpoint/2010/main" val="1058381198"/>
+      </p:ext>
+    </p:extLst>
+  </p:cSld>
+  <p:clrMapOvr>
+    <a:masterClrMapping/>
+  </p:clrMapOvr>
+</p:sld>
+</file>
+
+<file path=ppt/slides/slide10.xml><?xml version="1.0" encoding="utf-8"?>
+<p:sld xmlns:a="http://schemas.openxmlformats.org/drawingml/2006/main" xmlns:r="http://schemas.openxmlformats.org/officeDocument/2006/relationships" xmlns:p="http://schemas.openxmlformats.org/presentationml/2006/main">
+  <p:cSld>
+    <p:spTree>
+      <p:nvGrpSpPr>
+        <p:cNvPr id="1" name=""/>
+        <p:cNvGrpSpPr/>
+        <p:nvPr/>
+      </p:nvGrpSpPr>
+      <p:grpSpPr>
+        <a:xfrm>
+          <a:off x="0" y="0"/>
+          <a:ext cx="0" cy="0"/>
+          <a:chOff x="0" y="0"/>
+          <a:chExt cx="0" cy="0"/>
+        </a:xfrm>
+      </p:grpSpPr>
+      <p:sp>
+        <p:nvSpPr>
+          <p:cNvPr id="2" name="Titre 1">
+            <a:extLst>
+              <a:ext uri="{FF2B5EF4-FFF2-40B4-BE49-F238E27FC236}">
+                <a16:creationId xmlns:a16="http://schemas.microsoft.com/office/drawing/2014/main" id="{564A8A71-F321-9094-6BD5-8F1F9D4C6C50}"/>
+              </a:ext>
+            </a:extLst>
+          </p:cNvPr>
+          <p:cNvSpPr>
+            <a:spLocks noGrp="1"/>
+          </p:cNvSpPr>
+          <p:nvPr>
+            <p:ph type="title"/>
+          </p:nvPr>
+        </p:nvSpPr>
+        <p:spPr/>
+        <p:txBody>
+          <a:bodyPr/>
+          <a:lstStyle/>
+          <a:p>
+            <a:r>
+              <a:rPr lang="fr-FR" dirty="0"/>
+              <a:t>Ressource/Point BO</a:t>
+            </a:r>
+          </a:p>
+        </p:txBody>
+      </p:sp>
+      <p:sp>
+        <p:nvSpPr>
+          <p:cNvPr id="3" name="Espace réservé du contenu 2">
+            <a:extLst>
+              <a:ext uri="{FF2B5EF4-FFF2-40B4-BE49-F238E27FC236}">
+                <a16:creationId xmlns:a16="http://schemas.microsoft.com/office/drawing/2014/main" id="{4EBEDC38-2AAF-7F99-4424-D3E0CE4A2F41}"/>
+              </a:ext>
+            </a:extLst>
+          </p:cNvPr>
+          <p:cNvSpPr>
+            <a:spLocks noGrp="1"/>
+          </p:cNvSpPr>
+          <p:nvPr>
+            <p:ph idx="1"/>
+          </p:nvPr>
+        </p:nvSpPr>
+        <p:spPr/>
+        <p:txBody>
+          <a:bodyPr/>
+          <a:lstStyle/>
+          <a:p>
+            <a:r>
+              <a:rPr lang="en-GB" dirty="0"/>
+              <a:t>Placement dans </a:t>
+            </a:r>
+            <a:r>
+              <a:rPr lang="en-GB" dirty="0" err="1"/>
+              <a:t>l’année</a:t>
+            </a:r>
+            <a:endParaRPr lang="en-GB" dirty="0"/>
+          </a:p>
+          <a:p>
+            <a:r>
+              <a:rPr lang="en-GB" dirty="0"/>
+              <a:t>Volume </a:t>
+            </a:r>
+            <a:r>
+              <a:rPr lang="en-GB" dirty="0" err="1"/>
+              <a:t>horaire</a:t>
+            </a:r>
+            <a:endParaRPr lang="en-GB" dirty="0"/>
+          </a:p>
+          <a:p>
+            <a:r>
+              <a:rPr lang="en-GB" dirty="0" err="1"/>
+              <a:t>Problématique</a:t>
+            </a:r>
+            <a:endParaRPr lang="en-GB" dirty="0"/>
+          </a:p>
+          <a:p>
+            <a:r>
+              <a:rPr lang="fr-FR" dirty="0"/>
+              <a:t>Compétences ciblées</a:t>
+            </a:r>
+          </a:p>
+          <a:p>
+            <a:r>
+              <a:rPr lang="fr-FR" dirty="0"/>
+              <a:t>Apprentissages critiques ciblés</a:t>
+            </a:r>
+          </a:p>
+        </p:txBody>
+      </p:sp>
+      <p:sp>
+        <p:nvSpPr>
+          <p:cNvPr id="4" name="Espace réservé du numéro de diapositive 3">
+            <a:extLst>
+              <a:ext uri="{FF2B5EF4-FFF2-40B4-BE49-F238E27FC236}">
+                <a16:creationId xmlns:a16="http://schemas.microsoft.com/office/drawing/2014/main" id="{4C132B0E-BBD0-46CE-879D-99A3D33BAA43}"/>
+              </a:ext>
+            </a:extLst>
+          </p:cNvPr>
+          <p:cNvSpPr>
+            <a:spLocks noGrp="1"/>
+          </p:cNvSpPr>
+          <p:nvPr>
+            <p:ph type="sldNum" sz="quarter" idx="12"/>
+          </p:nvPr>
+        </p:nvSpPr>
+        <p:spPr/>
+        <p:txBody>
+          <a:bodyPr/>
+          <a:lstStyle/>
+          <a:p>
+            <a:fld id="{40743BAD-0FD4-4AFD-913F-F1B3782AF393}" type="slidenum">
+              <a:rPr lang="fr-FR" smtClean="0"/>
+              <a:t>10</a:t>
+            </a:fld>
+            <a:endParaRPr lang="fr-FR"/>
+          </a:p>
+        </p:txBody>
+      </p:sp>
+    </p:spTree>
+    <p:extLst>
+      <p:ext uri="{BB962C8B-B14F-4D97-AF65-F5344CB8AC3E}">
+        <p14:creationId xmlns:p14="http://schemas.microsoft.com/office/powerpoint/2010/main" val="2089394562"/>
+      </p:ext>
+    </p:extLst>
+  </p:cSld>
+  <p:clrMapOvr>
+    <a:masterClrMapping/>
+  </p:clrMapOvr>
+</p:sld>
+</file>
+
+<file path=ppt/slides/slide11.xml><?xml version="1.0" encoding="utf-8"?>
+<p:sld xmlns:a="http://schemas.openxmlformats.org/drawingml/2006/main" xmlns:r="http://schemas.openxmlformats.org/officeDocument/2006/relationships" xmlns:p="http://schemas.openxmlformats.org/presentationml/2006/main">
+  <p:cSld>
+    <p:spTree>
+      <p:nvGrpSpPr>
+        <p:cNvPr id="1" name="">
+          <a:extLst>
+            <a:ext uri="{FF2B5EF4-FFF2-40B4-BE49-F238E27FC236}">
+              <a16:creationId xmlns:a16="http://schemas.microsoft.com/office/drawing/2014/main" id="{02B63C26-FE78-1ADD-7E3E-F2C16715BDF4}"/>
+            </a:ext>
+          </a:extLst>
+        </p:cNvPr>
+        <p:cNvGrpSpPr/>
+        <p:nvPr/>
+      </p:nvGrpSpPr>
+      <p:grpSpPr>
+        <a:xfrm>
+          <a:off x="0" y="0"/>
+          <a:ext cx="0" cy="0"/>
+          <a:chOff x="0" y="0"/>
+          <a:chExt cx="0" cy="0"/>
+        </a:xfrm>
+      </p:grpSpPr>
+      <p:sp>
+        <p:nvSpPr>
+          <p:cNvPr id="2" name="Titre 1">
+            <a:extLst>
+              <a:ext uri="{FF2B5EF4-FFF2-40B4-BE49-F238E27FC236}">
+                <a16:creationId xmlns:a16="http://schemas.microsoft.com/office/drawing/2014/main" id="{459E145C-1A37-E04A-B28C-4A52D65B3251}"/>
+              </a:ext>
+            </a:extLst>
+          </p:cNvPr>
+          <p:cNvSpPr>
+            <a:spLocks noGrp="1"/>
+          </p:cNvSpPr>
+          <p:nvPr>
+            <p:ph type="title"/>
+          </p:nvPr>
+        </p:nvSpPr>
+        <p:spPr/>
+        <p:txBody>
+          <a:bodyPr/>
+          <a:lstStyle/>
+          <a:p>
+            <a:r>
+              <a:rPr lang="fr-FR" dirty="0"/>
+              <a:t>Ressource/Point BO</a:t>
+            </a:r>
+          </a:p>
+        </p:txBody>
+      </p:sp>
+      <p:sp>
+        <p:nvSpPr>
+          <p:cNvPr id="3" name="Espace réservé du contenu 2">
+            <a:extLst>
+              <a:ext uri="{FF2B5EF4-FFF2-40B4-BE49-F238E27FC236}">
+                <a16:creationId xmlns:a16="http://schemas.microsoft.com/office/drawing/2014/main" id="{DA93BDE9-6217-8CF8-BC41-07BAF8778640}"/>
+              </a:ext>
+            </a:extLst>
+          </p:cNvPr>
+          <p:cNvSpPr>
+            <a:spLocks noGrp="1"/>
+          </p:cNvSpPr>
+          <p:nvPr>
+            <p:ph idx="1"/>
+          </p:nvPr>
+        </p:nvSpPr>
+        <p:spPr/>
+        <p:txBody>
+          <a:bodyPr/>
+          <a:lstStyle/>
+          <a:p>
+            <a:r>
+              <a:rPr lang="en-GB" dirty="0" err="1"/>
+              <a:t>Contenu</a:t>
+            </a:r>
+            <a:r>
+              <a:rPr lang="en-GB" dirty="0"/>
+              <a:t> </a:t>
+            </a:r>
+            <a:r>
+              <a:rPr lang="en-GB" dirty="0" err="1"/>
+              <a:t>abordé</a:t>
+            </a:r>
+            <a:endParaRPr lang="en-GB" dirty="0"/>
+          </a:p>
+        </p:txBody>
+      </p:sp>
+      <p:sp>
+        <p:nvSpPr>
+          <p:cNvPr id="4" name="Espace réservé du numéro de diapositive 3">
+            <a:extLst>
+              <a:ext uri="{FF2B5EF4-FFF2-40B4-BE49-F238E27FC236}">
+                <a16:creationId xmlns:a16="http://schemas.microsoft.com/office/drawing/2014/main" id="{83B79617-4CD9-1EE2-A8D2-CDF729064D64}"/>
+              </a:ext>
+            </a:extLst>
+          </p:cNvPr>
+          <p:cNvSpPr>
+            <a:spLocks noGrp="1"/>
+          </p:cNvSpPr>
+          <p:nvPr>
+            <p:ph type="sldNum" sz="quarter" idx="12"/>
+          </p:nvPr>
+        </p:nvSpPr>
+        <p:spPr/>
+        <p:txBody>
+          <a:bodyPr/>
+          <a:lstStyle/>
+          <a:p>
+            <a:fld id="{40743BAD-0FD4-4AFD-913F-F1B3782AF393}" type="slidenum">
+              <a:rPr lang="fr-FR" smtClean="0"/>
+              <a:t>11</a:t>
+            </a:fld>
+            <a:endParaRPr lang="fr-FR"/>
+          </a:p>
+        </p:txBody>
+      </p:sp>
+    </p:spTree>
+    <p:extLst>
+      <p:ext uri="{BB962C8B-B14F-4D97-AF65-F5344CB8AC3E}">
+        <p14:creationId xmlns:p14="http://schemas.microsoft.com/office/powerpoint/2010/main" val="1101789138"/>
+      </p:ext>
+    </p:extLst>
+  </p:cSld>
+  <p:clrMapOvr>
+    <a:masterClrMapping/>
+  </p:clrMapOvr>
+</p:sld>
+</file>
+
+<file path=ppt/slides/slide12.xml><?xml version="1.0" encoding="utf-8"?>
+<p:sld xmlns:a="http://schemas.openxmlformats.org/drawingml/2006/main" xmlns:r="http://schemas.openxmlformats.org/officeDocument/2006/relationships" xmlns:p="http://schemas.openxmlformats.org/presentationml/2006/main" show="0">
+  <p:cSld>
+    <p:spTree>
+      <p:nvGrpSpPr>
+        <p:cNvPr id="1" name="">
+          <a:extLst>
+            <a:ext uri="{FF2B5EF4-FFF2-40B4-BE49-F238E27FC236}">
+              <a16:creationId xmlns:a16="http://schemas.microsoft.com/office/drawing/2014/main" id="{0290259F-DC45-DB2F-072E-958098439BDD}"/>
+            </a:ext>
+          </a:extLst>
+        </p:cNvPr>
+        <p:cNvGrpSpPr/>
+        <p:nvPr/>
+      </p:nvGrpSpPr>
+      <p:grpSpPr>
+        <a:xfrm>
+          <a:off x="0" y="0"/>
+          <a:ext cx="0" cy="0"/>
+          <a:chOff x="0" y="0"/>
+          <a:chExt cx="0" cy="0"/>
+        </a:xfrm>
+      </p:grpSpPr>
+      <p:sp>
+        <p:nvSpPr>
+          <p:cNvPr id="2" name="Titre 1">
+            <a:extLst>
+              <a:ext uri="{FF2B5EF4-FFF2-40B4-BE49-F238E27FC236}">
+                <a16:creationId xmlns:a16="http://schemas.microsoft.com/office/drawing/2014/main" id="{29E68D49-8931-1973-2824-8B8960759586}"/>
+              </a:ext>
+            </a:extLst>
+          </p:cNvPr>
+          <p:cNvSpPr>
+            <a:spLocks noGrp="1"/>
+          </p:cNvSpPr>
+          <p:nvPr>
+            <p:ph type="title"/>
+          </p:nvPr>
+        </p:nvSpPr>
+        <p:spPr/>
+        <p:txBody>
+          <a:bodyPr/>
+          <a:lstStyle/>
+          <a:p>
+            <a:r>
+              <a:rPr lang="fr-FR" dirty="0"/>
+              <a:t>Lien avec les SAÉ</a:t>
+            </a:r>
+          </a:p>
+        </p:txBody>
+      </p:sp>
+      <p:sp>
+        <p:nvSpPr>
+          <p:cNvPr id="3" name="Espace réservé du contenu 2">
+            <a:extLst>
+              <a:ext uri="{FF2B5EF4-FFF2-40B4-BE49-F238E27FC236}">
+                <a16:creationId xmlns:a16="http://schemas.microsoft.com/office/drawing/2014/main" id="{75C651D7-8FA0-50F7-6C80-65FB4D3287E8}"/>
+              </a:ext>
+            </a:extLst>
+          </p:cNvPr>
+          <p:cNvSpPr>
+            <a:spLocks noGrp="1"/>
+          </p:cNvSpPr>
+          <p:nvPr>
+            <p:ph idx="1"/>
+          </p:nvPr>
+        </p:nvSpPr>
+        <p:spPr/>
+        <p:txBody>
+          <a:bodyPr/>
+          <a:lstStyle/>
+          <a:p>
+            <a:r>
+              <a:rPr lang="fr-FR" dirty="0"/>
+              <a:t>SAÉ 1.02 : S’initier aux réseaux informatiques</a:t>
+            </a:r>
+          </a:p>
+          <a:p>
+            <a:pPr lvl="1"/>
+            <a:r>
+              <a:rPr lang="fr-FR" dirty="0"/>
+              <a:t>Installation de postes clients, configuration d’un plan d’adressage et segmentation réseau</a:t>
+            </a:r>
+          </a:p>
+          <a:p>
+            <a:endParaRPr lang="fr-FR" dirty="0"/>
+          </a:p>
+        </p:txBody>
+      </p:sp>
+      <p:sp>
+        <p:nvSpPr>
+          <p:cNvPr id="4" name="Espace réservé du numéro de diapositive 3">
+            <a:extLst>
+              <a:ext uri="{FF2B5EF4-FFF2-40B4-BE49-F238E27FC236}">
+                <a16:creationId xmlns:a16="http://schemas.microsoft.com/office/drawing/2014/main" id="{09A53633-60A2-740D-CB55-C810AF49DD90}"/>
+              </a:ext>
+            </a:extLst>
+          </p:cNvPr>
+          <p:cNvSpPr>
+            <a:spLocks noGrp="1"/>
+          </p:cNvSpPr>
+          <p:nvPr>
+            <p:ph type="sldNum" sz="quarter" idx="12"/>
+          </p:nvPr>
+        </p:nvSpPr>
+        <p:spPr/>
+        <p:txBody>
+          <a:bodyPr/>
+          <a:lstStyle/>
+          <a:p>
+            <a:fld id="{40743BAD-0FD4-4AFD-913F-F1B3782AF393}" type="slidenum">
+              <a:rPr lang="fr-FR" smtClean="0"/>
+              <a:t>12</a:t>
+            </a:fld>
+            <a:endParaRPr lang="fr-FR"/>
+          </a:p>
+        </p:txBody>
+      </p:sp>
+    </p:spTree>
+    <p:extLst>
+      <p:ext uri="{BB962C8B-B14F-4D97-AF65-F5344CB8AC3E}">
+        <p14:creationId xmlns:p14="http://schemas.microsoft.com/office/powerpoint/2010/main" val="145118700"/>
+      </p:ext>
+    </p:extLst>
+  </p:cSld>
+  <p:clrMapOvr>
+    <a:masterClrMapping/>
+  </p:clrMapOvr>
+</p:sld>
+</file>
+
+<file path=ppt/slides/slide13.xml><?xml version="1.0" encoding="utf-8"?>
+<p:sld xmlns:a="http://schemas.openxmlformats.org/drawingml/2006/main" xmlns:r="http://schemas.openxmlformats.org/officeDocument/2006/relationships" xmlns:p="http://schemas.openxmlformats.org/presentationml/2006/main">
+  <p:cSld>
+    <p:spTree>
+      <p:nvGrpSpPr>
+        <p:cNvPr id="1" name=""/>
+        <p:cNvGrpSpPr/>
+        <p:nvPr/>
+      </p:nvGrpSpPr>
+      <p:grpSpPr>
+        <a:xfrm>
+          <a:off x="0" y="0"/>
+          <a:ext cx="0" cy="0"/>
+          <a:chOff x="0" y="0"/>
+          <a:chExt cx="0" cy="0"/>
+        </a:xfrm>
+      </p:grpSpPr>
+      <p:sp>
+        <p:nvSpPr>
+          <p:cNvPr id="2" name="Titre 1">
+            <a:extLst>
+              <a:ext uri="{FF2B5EF4-FFF2-40B4-BE49-F238E27FC236}">
+                <a16:creationId xmlns:a16="http://schemas.microsoft.com/office/drawing/2014/main" id="{A4657B54-AA24-7066-80DA-0CDBC518717F}"/>
+              </a:ext>
+            </a:extLst>
+          </p:cNvPr>
+          <p:cNvSpPr>
+            <a:spLocks noGrp="1"/>
+          </p:cNvSpPr>
+          <p:nvPr>
+            <p:ph type="title"/>
+          </p:nvPr>
+        </p:nvSpPr>
+        <p:spPr/>
+        <p:txBody>
+          <a:bodyPr/>
+          <a:lstStyle/>
+          <a:p>
+            <a:r>
+              <a:rPr lang="fr-FR" dirty="0"/>
+              <a:t>Prérequis</a:t>
+            </a:r>
+          </a:p>
+        </p:txBody>
+      </p:sp>
+      <p:sp>
+        <p:nvSpPr>
+          <p:cNvPr id="3" name="Espace réservé du contenu 2">
+            <a:extLst>
+              <a:ext uri="{FF2B5EF4-FFF2-40B4-BE49-F238E27FC236}">
+                <a16:creationId xmlns:a16="http://schemas.microsoft.com/office/drawing/2014/main" id="{E013E3C4-B673-022E-905C-ACF95E0E2451}"/>
+              </a:ext>
+            </a:extLst>
+          </p:cNvPr>
+          <p:cNvSpPr>
+            <a:spLocks noGrp="1"/>
+          </p:cNvSpPr>
+          <p:nvPr>
+            <p:ph idx="1"/>
+          </p:nvPr>
+        </p:nvSpPr>
+        <p:spPr/>
+        <p:txBody>
+          <a:bodyPr/>
+          <a:lstStyle/>
+          <a:p>
+            <a:endParaRPr lang="fr-FR" dirty="0"/>
+          </a:p>
+        </p:txBody>
+      </p:sp>
+      <p:sp>
+        <p:nvSpPr>
+          <p:cNvPr id="4" name="Espace réservé du numéro de diapositive 3">
+            <a:extLst>
+              <a:ext uri="{FF2B5EF4-FFF2-40B4-BE49-F238E27FC236}">
+                <a16:creationId xmlns:a16="http://schemas.microsoft.com/office/drawing/2014/main" id="{ABAE06D8-4854-B1BC-D251-6AFBE808D67D}"/>
+              </a:ext>
+            </a:extLst>
+          </p:cNvPr>
+          <p:cNvSpPr>
+            <a:spLocks noGrp="1"/>
+          </p:cNvSpPr>
+          <p:nvPr>
+            <p:ph type="sldNum" sz="quarter" idx="12"/>
+          </p:nvPr>
+        </p:nvSpPr>
+        <p:spPr/>
+        <p:txBody>
+          <a:bodyPr/>
+          <a:lstStyle/>
+          <a:p>
+            <a:fld id="{40743BAD-0FD4-4AFD-913F-F1B3782AF393}" type="slidenum">
+              <a:rPr lang="fr-FR" smtClean="0"/>
+              <a:t>13</a:t>
+            </a:fld>
+            <a:endParaRPr lang="fr-FR"/>
+          </a:p>
+        </p:txBody>
+      </p:sp>
+    </p:spTree>
+    <p:extLst>
+      <p:ext uri="{BB962C8B-B14F-4D97-AF65-F5344CB8AC3E}">
+        <p14:creationId xmlns:p14="http://schemas.microsoft.com/office/powerpoint/2010/main" val="1571382793"/>
+      </p:ext>
+    </p:extLst>
+  </p:cSld>
+  <p:clrMapOvr>
+    <a:masterClrMapping/>
+  </p:clrMapOvr>
+</p:sld>
+</file>
+
+<file path=ppt/slides/slide14.xml><?xml version="1.0" encoding="utf-8"?>
+<p:sld xmlns:a="http://schemas.openxmlformats.org/drawingml/2006/main" xmlns:r="http://schemas.openxmlformats.org/officeDocument/2006/relationships" xmlns:p="http://schemas.openxmlformats.org/presentationml/2006/main">
+  <p:cSld>
+    <p:spTree>
+      <p:nvGrpSpPr>
+        <p:cNvPr id="1" name=""/>
+        <p:cNvGrpSpPr/>
+        <p:nvPr/>
+      </p:nvGrpSpPr>
+      <p:grpSpPr>
+        <a:xfrm>
+          <a:off x="0" y="0"/>
+          <a:ext cx="0" cy="0"/>
+          <a:chOff x="0" y="0"/>
+          <a:chExt cx="0" cy="0"/>
+        </a:xfrm>
+      </p:grpSpPr>
+      <p:sp>
+        <p:nvSpPr>
+          <p:cNvPr id="2" name="Titre 1">
+            <a:extLst>
+              <a:ext uri="{FF2B5EF4-FFF2-40B4-BE49-F238E27FC236}">
+                <a16:creationId xmlns:a16="http://schemas.microsoft.com/office/drawing/2014/main" id="{D207AE10-0D6E-484C-A4D1-EF01B7DC2F17}"/>
+              </a:ext>
+            </a:extLst>
+          </p:cNvPr>
+          <p:cNvSpPr>
+            <a:spLocks noGrp="1"/>
+          </p:cNvSpPr>
+          <p:nvPr>
+            <p:ph type="title"/>
+          </p:nvPr>
+        </p:nvSpPr>
+        <p:spPr/>
+        <p:txBody>
+          <a:bodyPr/>
+          <a:lstStyle/>
+          <a:p>
+            <a:r>
+              <a:rPr lang="fr-FR" dirty="0"/>
+              <a:t>Synoptique de la séquence</a:t>
+            </a:r>
+          </a:p>
+        </p:txBody>
+      </p:sp>
+      <p:sp>
+        <p:nvSpPr>
+          <p:cNvPr id="4" name="Espace réservé du numéro de diapositive 3">
+            <a:extLst>
+              <a:ext uri="{FF2B5EF4-FFF2-40B4-BE49-F238E27FC236}">
+                <a16:creationId xmlns:a16="http://schemas.microsoft.com/office/drawing/2014/main" id="{4C693421-6FEB-101A-4A73-C0DFBBEB1CDF}"/>
+              </a:ext>
+            </a:extLst>
+          </p:cNvPr>
+          <p:cNvSpPr>
+            <a:spLocks noGrp="1"/>
+          </p:cNvSpPr>
+          <p:nvPr>
+            <p:ph type="sldNum" sz="quarter" idx="12"/>
+          </p:nvPr>
+        </p:nvSpPr>
+        <p:spPr/>
+        <p:txBody>
+          <a:bodyPr/>
+          <a:lstStyle/>
+          <a:p>
+            <a:fld id="{40743BAD-0FD4-4AFD-913F-F1B3782AF393}" type="slidenum">
+              <a:rPr lang="fr-FR" smtClean="0"/>
+              <a:t>14</a:t>
+            </a:fld>
+            <a:endParaRPr lang="fr-FR"/>
+          </a:p>
+        </p:txBody>
+      </p:sp>
+      <p:graphicFrame>
+        <p:nvGraphicFramePr>
+          <p:cNvPr id="14" name="Espace réservé du contenu 4">
+            <a:extLst>
+              <a:ext uri="{FF2B5EF4-FFF2-40B4-BE49-F238E27FC236}">
+                <a16:creationId xmlns:a16="http://schemas.microsoft.com/office/drawing/2014/main" id="{5028D434-C6FE-C63B-A423-07874B64E1EF}"/>
+              </a:ext>
+            </a:extLst>
+          </p:cNvPr>
+          <p:cNvGraphicFramePr>
+            <a:graphicFrameLocks noGrp="1"/>
+          </p:cNvGraphicFramePr>
+          <p:nvPr>
+            <p:ph idx="1"/>
+            <p:extLst>
+              <p:ext uri="{D42A27DB-BD31-4B8C-83A1-F6EECF244321}">
+                <p14:modId xmlns:p14="http://schemas.microsoft.com/office/powerpoint/2010/main" val="3236764502"/>
+              </p:ext>
+            </p:extLst>
+          </p:nvPr>
+        </p:nvGraphicFramePr>
+        <p:xfrm>
+          <a:off x="456453" y="1853826"/>
+          <a:ext cx="12090400" cy="3981450"/>
+        </p:xfrm>
+        <a:graphic>
+          <a:graphicData uri="http://schemas.openxmlformats.org/drawingml/2006/diagram">
+            <dgm:relIds xmlns:dgm="http://schemas.openxmlformats.org/drawingml/2006/diagram" xmlns:r="http://schemas.openxmlformats.org/officeDocument/2006/relationships" r:dm="rId2" r:lo="rId3" r:qs="rId4" r:cs="rId5"/>
+          </a:graphicData>
+        </a:graphic>
+      </p:graphicFrame>
+      <p:sp>
+        <p:nvSpPr>
+          <p:cNvPr id="15" name="Rectangle 14">
+            <a:extLst>
+              <a:ext uri="{FF2B5EF4-FFF2-40B4-BE49-F238E27FC236}">
+                <a16:creationId xmlns:a16="http://schemas.microsoft.com/office/drawing/2014/main" id="{073C1F20-990E-D57A-DD17-433EAA63164D}"/>
+              </a:ext>
+            </a:extLst>
+          </p:cNvPr>
+          <p:cNvSpPr/>
+          <p:nvPr/>
+        </p:nvSpPr>
+        <p:spPr>
+          <a:xfrm>
+            <a:off x="475502" y="0"/>
+            <a:ext cx="250211" cy="6858000"/>
+          </a:xfrm>
+          <a:prstGeom prst="rect">
+            <a:avLst/>
+          </a:prstGeom>
+          <a:solidFill>
+            <a:schemeClr val="tx1"/>
+          </a:solidFill>
+          <a:ln>
+            <a:noFill/>
+          </a:ln>
+        </p:spPr>
+        <p:style>
+          <a:lnRef idx="2">
+            <a:schemeClr val="accent1">
+              <a:shade val="15000"/>
+            </a:schemeClr>
+          </a:lnRef>
+          <a:fillRef idx="1">
+            <a:schemeClr val="accent1"/>
+          </a:fillRef>
+          <a:effectRef idx="0">
+            <a:schemeClr val="accent1"/>
+          </a:effectRef>
+          <a:fontRef idx="minor">
+            <a:schemeClr val="lt1"/>
+          </a:fontRef>
+        </p:style>
+        <p:txBody>
+          <a:bodyPr rtlCol="0" anchor="ctr"/>
+          <a:lstStyle/>
+          <a:p>
+            <a:pPr algn="ctr"/>
+            <a:endParaRPr lang="fr-FR"/>
+          </a:p>
+        </p:txBody>
+      </p:sp>
+      <p:sp>
+        <p:nvSpPr>
+          <p:cNvPr id="16" name="ZoneTexte 15">
+            <a:extLst>
+              <a:ext uri="{FF2B5EF4-FFF2-40B4-BE49-F238E27FC236}">
+                <a16:creationId xmlns:a16="http://schemas.microsoft.com/office/drawing/2014/main" id="{D68C94E2-BEB0-56E5-8DB1-C9E4A9294FF7}"/>
+              </a:ext>
+            </a:extLst>
+          </p:cNvPr>
+          <p:cNvSpPr txBox="1"/>
+          <p:nvPr/>
+        </p:nvSpPr>
+        <p:spPr>
+          <a:xfrm>
+            <a:off x="1988457" y="6172200"/>
+            <a:ext cx="1155829" cy="369332"/>
+          </a:xfrm>
+          <a:prstGeom prst="rect">
+            <a:avLst/>
+          </a:prstGeom>
+          <a:noFill/>
+        </p:spPr>
+        <p:txBody>
+          <a:bodyPr wrap="none" rtlCol="0">
+            <a:spAutoFit/>
+          </a:bodyPr>
+          <a:lstStyle/>
+          <a:p>
+            <a:r>
+              <a:rPr lang="fr-FR" dirty="0"/>
+              <a:t>Déductive</a:t>
+            </a:r>
+          </a:p>
+        </p:txBody>
+      </p:sp>
+    </p:spTree>
+    <p:extLst>
+      <p:ext uri="{BB962C8B-B14F-4D97-AF65-F5344CB8AC3E}">
+        <p14:creationId xmlns:p14="http://schemas.microsoft.com/office/powerpoint/2010/main" val="770851389"/>
+      </p:ext>
+    </p:extLst>
+  </p:cSld>
+  <p:clrMapOvr>
+    <a:masterClrMapping/>
+  </p:clrMapOvr>
+</p:sld>
+</file>
+
+<file path=ppt/slides/slide15.xml><?xml version="1.0" encoding="utf-8"?>
+<p:sld xmlns:a="http://schemas.openxmlformats.org/drawingml/2006/main" xmlns:r="http://schemas.openxmlformats.org/officeDocument/2006/relationships" xmlns:p="http://schemas.openxmlformats.org/presentationml/2006/main">
+  <p:cSld>
+    <p:spTree>
+      <p:nvGrpSpPr>
+        <p:cNvPr id="1" name=""/>
+        <p:cNvGrpSpPr/>
+        <p:nvPr/>
+      </p:nvGrpSpPr>
+      <p:grpSpPr>
+        <a:xfrm>
+          <a:off x="0" y="0"/>
+          <a:ext cx="0" cy="0"/>
+          <a:chOff x="0" y="0"/>
+          <a:chExt cx="0" cy="0"/>
+        </a:xfrm>
+      </p:grpSpPr>
+      <mc:AlternateContent xmlns:mc="http://schemas.openxmlformats.org/markup-compatibility/2006">
+        <mc:Choice xmlns:pslz="http://schemas.microsoft.com/office/powerpoint/2016/slidezoom" Requires="pslz">
+          <p:graphicFrame>
+            <p:nvGraphicFramePr>
+              <p:cNvPr id="11" name="Zoom de diapositive 10">
+                <a:extLst>
+                  <a:ext uri="{FF2B5EF4-FFF2-40B4-BE49-F238E27FC236}">
+                    <a16:creationId xmlns:a16="http://schemas.microsoft.com/office/drawing/2014/main" id="{61FD7CF5-140D-4D14-9DC3-191E80019378}"/>
+                  </a:ext>
+                </a:extLst>
+              </p:cNvPr>
+              <p:cNvGraphicFramePr>
+                <a:graphicFrameLocks noChangeAspect="1"/>
+              </p:cNvGraphicFramePr>
+              <p:nvPr>
+                <p:extLst>
+                  <p:ext uri="{D42A27DB-BD31-4B8C-83A1-F6EECF244321}">
+                    <p14:modId xmlns:p14="http://schemas.microsoft.com/office/powerpoint/2010/main" val="19869028"/>
+                  </p:ext>
+                </p:extLst>
+              </p:nvPr>
+            </p:nvGraphicFramePr>
+            <p:xfrm>
+              <a:off x="-306182" y="-2106461"/>
+              <a:ext cx="15012990" cy="8556321"/>
+            </p:xfrm>
+            <a:graphic>
+              <a:graphicData uri="http://schemas.microsoft.com/office/powerpoint/2016/slidezoom">
+                <pslz:sldZm>
+                  <pslz:sldZmObj sldId="269" cId="770851389">
+                    <pslz:zmPr id="{66B86378-28D1-4E17-B736-D7FC193FC814}" returnToParent="0" transitionDur="1000">
+                      <p166:blipFill xmlns:p166="http://schemas.microsoft.com/office/powerpoint/2016/6/main">
+                        <a:blip r:embed="rId2"/>
+                        <a:stretch>
+                          <a:fillRect/>
+                        </a:stretch>
+                      </p166:blipFill>
+                      <p166:spPr xmlns:p166="http://schemas.microsoft.com/office/powerpoint/2016/6/main">
+                        <a:xfrm>
+                          <a:off x="0" y="0"/>
+                          <a:ext cx="15012990" cy="8556321"/>
+                        </a:xfrm>
+                        <a:prstGeom prst="rect">
+                          <a:avLst/>
+                        </a:prstGeom>
+                        <a:ln w="3175">
+                          <a:solidFill>
+                            <a:prstClr val="ltGray"/>
+                          </a:solidFill>
+                        </a:ln>
+                      </p166:spPr>
+                    </pslz:zmPr>
+                  </pslz:sldZmObj>
+                </pslz:sldZm>
+              </a:graphicData>
+            </a:graphic>
+          </p:graphicFrame>
+        </mc:Choice>
+        <mc:Fallback>
+          <p:pic>
+            <p:nvPicPr>
+              <p:cNvPr id="11" name="Zoom de diapositive 10">
+                <a:hlinkClick r:id="rId3" action="ppaction://hlinksldjump"/>
+                <a:extLst>
+                  <a:ext uri="{FF2B5EF4-FFF2-40B4-BE49-F238E27FC236}">
+                    <a16:creationId xmlns:a16="http://schemas.microsoft.com/office/drawing/2014/main" id="{61FD7CF5-140D-4D14-9DC3-191E80019378}"/>
+                  </a:ext>
+                </a:extLst>
+              </p:cNvPr>
+              <p:cNvPicPr>
+                <a:picLocks noGrp="1" noRot="1" noChangeAspect="1" noMove="1" noResize="1" noEditPoints="1" noAdjustHandles="1" noChangeArrowheads="1" noChangeShapeType="1"/>
+              </p:cNvPicPr>
+              <p:nvPr/>
+            </p:nvPicPr>
+            <p:blipFill>
+              <a:blip r:embed="rId2"/>
+              <a:stretch>
+                <a:fillRect/>
+              </a:stretch>
+            </p:blipFill>
+            <p:spPr>
+              <a:xfrm>
+                <a:off x="-306182" y="-2106461"/>
+                <a:ext cx="15012990" cy="8556321"/>
+              </a:xfrm>
+              <a:prstGeom prst="rect">
+                <a:avLst/>
+              </a:prstGeom>
+              <a:ln w="3175">
+                <a:solidFill>
+                  <a:prstClr val="ltGray"/>
+                </a:solidFill>
+              </a:ln>
+            </p:spPr>
+          </p:pic>
+        </mc:Fallback>
+      </mc:AlternateContent>
+      <p:sp>
+        <p:nvSpPr>
+          <p:cNvPr id="12" name="Rectangle 11">
+            <a:extLst>
+              <a:ext uri="{FF2B5EF4-FFF2-40B4-BE49-F238E27FC236}">
+                <a16:creationId xmlns:a16="http://schemas.microsoft.com/office/drawing/2014/main" id="{D44A82EB-775B-07F1-B3DD-1299858E17C6}"/>
+              </a:ext>
+            </a:extLst>
+          </p:cNvPr>
+          <p:cNvSpPr/>
+          <p:nvPr/>
+        </p:nvSpPr>
+        <p:spPr>
+          <a:xfrm>
+            <a:off x="1371600" y="2579839"/>
+            <a:ext cx="11352627" cy="6858000"/>
+          </a:xfrm>
+          <a:prstGeom prst="rect">
+            <a:avLst/>
+          </a:prstGeom>
+          <a:solidFill>
+            <a:schemeClr val="bg2"/>
+          </a:solidFill>
+          <a:ln>
+            <a:noFill/>
+          </a:ln>
+        </p:spPr>
+        <p:style>
+          <a:lnRef idx="2">
+            <a:schemeClr val="accent1">
+              <a:shade val="15000"/>
+            </a:schemeClr>
+          </a:lnRef>
+          <a:fillRef idx="1">
+            <a:schemeClr val="accent1"/>
+          </a:fillRef>
+          <a:effectRef idx="0">
+            <a:schemeClr val="accent1"/>
+          </a:effectRef>
+          <a:fontRef idx="minor">
+            <a:schemeClr val="lt1"/>
+          </a:fontRef>
+        </p:style>
+        <p:txBody>
+          <a:bodyPr rtlCol="0" anchor="ctr"/>
+          <a:lstStyle/>
+          <a:p>
+            <a:pPr algn="ctr"/>
+            <a:endParaRPr lang="fr-FR"/>
+          </a:p>
+        </p:txBody>
+      </p:sp>
+      <p:sp>
+        <p:nvSpPr>
+          <p:cNvPr id="13" name="Rectangle 12">
+            <a:extLst>
+              <a:ext uri="{FF2B5EF4-FFF2-40B4-BE49-F238E27FC236}">
+                <a16:creationId xmlns:a16="http://schemas.microsoft.com/office/drawing/2014/main" id="{EF55C1CF-48BB-34E9-40FE-DF80283E2A22}"/>
+              </a:ext>
+            </a:extLst>
+          </p:cNvPr>
+          <p:cNvSpPr/>
+          <p:nvPr/>
+        </p:nvSpPr>
+        <p:spPr>
+          <a:xfrm>
+            <a:off x="839373" y="-5429250"/>
+            <a:ext cx="11352627" cy="6858000"/>
+          </a:xfrm>
+          <a:prstGeom prst="rect">
+            <a:avLst/>
+          </a:prstGeom>
+          <a:solidFill>
+            <a:schemeClr val="bg2"/>
+          </a:solidFill>
+          <a:ln>
+            <a:noFill/>
+          </a:ln>
+        </p:spPr>
+        <p:style>
+          <a:lnRef idx="2">
+            <a:schemeClr val="accent1">
+              <a:shade val="15000"/>
+            </a:schemeClr>
+          </a:lnRef>
+          <a:fillRef idx="1">
+            <a:schemeClr val="accent1"/>
+          </a:fillRef>
+          <a:effectRef idx="0">
+            <a:schemeClr val="accent1"/>
+          </a:effectRef>
+          <a:fontRef idx="minor">
+            <a:schemeClr val="lt1"/>
+          </a:fontRef>
+        </p:style>
+        <p:txBody>
+          <a:bodyPr rtlCol="0" anchor="ctr"/>
+          <a:lstStyle/>
+          <a:p>
+            <a:pPr algn="ctr"/>
+            <a:endParaRPr lang="fr-FR"/>
+          </a:p>
+        </p:txBody>
+      </p:sp>
+      <p:sp>
+        <p:nvSpPr>
+          <p:cNvPr id="2" name="Titre 1">
+            <a:extLst>
+              <a:ext uri="{FF2B5EF4-FFF2-40B4-BE49-F238E27FC236}">
+                <a16:creationId xmlns:a16="http://schemas.microsoft.com/office/drawing/2014/main" id="{E34493F7-65D9-33DA-0D18-9E169863CD58}"/>
+              </a:ext>
+            </a:extLst>
+          </p:cNvPr>
+          <p:cNvSpPr>
+            <a:spLocks noGrp="1"/>
+          </p:cNvSpPr>
+          <p:nvPr>
+            <p:ph type="title"/>
+          </p:nvPr>
+        </p:nvSpPr>
+        <p:spPr/>
+        <p:txBody>
+          <a:bodyPr/>
+          <a:lstStyle/>
+          <a:p>
+            <a:r>
+              <a:rPr lang="fr-FR" dirty="0"/>
+              <a:t>Semaine 2</a:t>
+            </a:r>
+          </a:p>
+        </p:txBody>
+      </p:sp>
+      <p:sp>
+        <p:nvSpPr>
+          <p:cNvPr id="4" name="Espace réservé du numéro de diapositive 3">
+            <a:extLst>
+              <a:ext uri="{FF2B5EF4-FFF2-40B4-BE49-F238E27FC236}">
+                <a16:creationId xmlns:a16="http://schemas.microsoft.com/office/drawing/2014/main" id="{F7E99361-8176-41CE-9B56-1C79C1775D68}"/>
+              </a:ext>
+            </a:extLst>
+          </p:cNvPr>
+          <p:cNvSpPr>
+            <a:spLocks noGrp="1"/>
+          </p:cNvSpPr>
+          <p:nvPr>
+            <p:ph type="sldNum" sz="quarter" idx="12"/>
+          </p:nvPr>
+        </p:nvSpPr>
+        <p:spPr/>
+        <p:txBody>
+          <a:bodyPr/>
+          <a:lstStyle/>
+          <a:p>
+            <a:fld id="{40743BAD-0FD4-4AFD-913F-F1B3782AF393}" type="slidenum">
+              <a:rPr lang="fr-FR" smtClean="0"/>
+              <a:t>15</a:t>
+            </a:fld>
+            <a:endParaRPr lang="fr-FR"/>
+          </a:p>
+        </p:txBody>
+      </p:sp>
+      <p:sp>
+        <p:nvSpPr>
+          <p:cNvPr id="14" name="Rectangle 13">
+            <a:extLst>
+              <a:ext uri="{FF2B5EF4-FFF2-40B4-BE49-F238E27FC236}">
+                <a16:creationId xmlns:a16="http://schemas.microsoft.com/office/drawing/2014/main" id="{659C59E3-6493-C6D0-709F-E59A698BAA39}"/>
+              </a:ext>
+            </a:extLst>
+          </p:cNvPr>
+          <p:cNvSpPr/>
+          <p:nvPr/>
+        </p:nvSpPr>
+        <p:spPr>
+          <a:xfrm>
+            <a:off x="1478807" y="2496620"/>
+            <a:ext cx="11352627" cy="6858000"/>
+          </a:xfrm>
+          <a:prstGeom prst="rect">
+            <a:avLst/>
+          </a:prstGeom>
+          <a:solidFill>
+            <a:schemeClr val="bg2"/>
+          </a:solidFill>
+          <a:ln>
+            <a:noFill/>
+          </a:ln>
+        </p:spPr>
+        <p:style>
+          <a:lnRef idx="2">
+            <a:schemeClr val="accent1">
+              <a:shade val="15000"/>
+            </a:schemeClr>
+          </a:lnRef>
+          <a:fillRef idx="1">
+            <a:schemeClr val="accent1"/>
+          </a:fillRef>
+          <a:effectRef idx="0">
+            <a:schemeClr val="accent1"/>
+          </a:effectRef>
+          <a:fontRef idx="minor">
+            <a:schemeClr val="lt1"/>
+          </a:fontRef>
+        </p:style>
+        <p:txBody>
+          <a:bodyPr rtlCol="0" anchor="ctr"/>
+          <a:lstStyle/>
+          <a:p>
+            <a:pPr algn="ctr"/>
+            <a:endParaRPr lang="fr-FR"/>
+          </a:p>
+        </p:txBody>
+      </p:sp>
+      <p:sp>
+        <p:nvSpPr>
+          <p:cNvPr id="15" name="Rectangle 14">
+            <a:extLst>
+              <a:ext uri="{FF2B5EF4-FFF2-40B4-BE49-F238E27FC236}">
+                <a16:creationId xmlns:a16="http://schemas.microsoft.com/office/drawing/2014/main" id="{AC1E5B07-2D98-BF7F-4A90-7B70CDA5BF2E}"/>
+              </a:ext>
+            </a:extLst>
+          </p:cNvPr>
+          <p:cNvSpPr/>
+          <p:nvPr/>
+        </p:nvSpPr>
+        <p:spPr>
+          <a:xfrm rot="5400000">
+            <a:off x="-7886114" y="-849162"/>
+            <a:ext cx="11352627" cy="6858000"/>
+          </a:xfrm>
+          <a:prstGeom prst="rect">
+            <a:avLst/>
+          </a:prstGeom>
+          <a:solidFill>
+            <a:schemeClr val="bg2"/>
+          </a:solidFill>
+          <a:ln>
+            <a:noFill/>
+          </a:ln>
+        </p:spPr>
+        <p:style>
+          <a:lnRef idx="2">
+            <a:schemeClr val="accent1">
+              <a:shade val="15000"/>
+            </a:schemeClr>
+          </a:lnRef>
+          <a:fillRef idx="1">
+            <a:schemeClr val="accent1"/>
+          </a:fillRef>
+          <a:effectRef idx="0">
+            <a:schemeClr val="accent1"/>
+          </a:effectRef>
+          <a:fontRef idx="minor">
+            <a:schemeClr val="lt1"/>
+          </a:fontRef>
+        </p:style>
+        <p:txBody>
+          <a:bodyPr rtlCol="0" anchor="ctr"/>
+          <a:lstStyle/>
+          <a:p>
+            <a:pPr algn="ctr"/>
+            <a:endParaRPr lang="fr-FR"/>
+          </a:p>
+        </p:txBody>
+      </p:sp>
+      <p:sp>
+        <p:nvSpPr>
+          <p:cNvPr id="16" name="Rectangle 15">
+            <a:extLst>
+              <a:ext uri="{FF2B5EF4-FFF2-40B4-BE49-F238E27FC236}">
+                <a16:creationId xmlns:a16="http://schemas.microsoft.com/office/drawing/2014/main" id="{D54BEDD1-8A10-CEFD-4AB1-9D2378B3FB99}"/>
+              </a:ext>
+            </a:extLst>
+          </p:cNvPr>
+          <p:cNvSpPr/>
+          <p:nvPr/>
+        </p:nvSpPr>
+        <p:spPr>
+          <a:xfrm>
+            <a:off x="475502" y="0"/>
+            <a:ext cx="250211" cy="6858000"/>
+          </a:xfrm>
+          <a:prstGeom prst="rect">
+            <a:avLst/>
+          </a:prstGeom>
+          <a:solidFill>
+            <a:schemeClr val="tx1"/>
+          </a:solidFill>
+          <a:ln>
+            <a:noFill/>
+          </a:ln>
+        </p:spPr>
+        <p:style>
+          <a:lnRef idx="2">
+            <a:schemeClr val="accent1">
+              <a:shade val="15000"/>
+            </a:schemeClr>
+          </a:lnRef>
+          <a:fillRef idx="1">
+            <a:schemeClr val="accent1"/>
+          </a:fillRef>
+          <a:effectRef idx="0">
+            <a:schemeClr val="accent1"/>
+          </a:effectRef>
+          <a:fontRef idx="minor">
+            <a:schemeClr val="lt1"/>
+          </a:fontRef>
+        </p:style>
+        <p:txBody>
+          <a:bodyPr rtlCol="0" anchor="ctr"/>
+          <a:lstStyle/>
+          <a:p>
+            <a:pPr algn="ctr"/>
+            <a:endParaRPr lang="fr-FR"/>
+          </a:p>
+        </p:txBody>
+      </p:sp>
+      <p:sp>
+        <p:nvSpPr>
+          <p:cNvPr id="17" name="ZoneTexte 16">
+            <a:extLst>
+              <a:ext uri="{FF2B5EF4-FFF2-40B4-BE49-F238E27FC236}">
+                <a16:creationId xmlns:a16="http://schemas.microsoft.com/office/drawing/2014/main" id="{A74D7A94-837B-15E9-A46A-C3362747743B}"/>
+              </a:ext>
+            </a:extLst>
+          </p:cNvPr>
+          <p:cNvSpPr txBox="1"/>
+          <p:nvPr/>
+        </p:nvSpPr>
+        <p:spPr>
+          <a:xfrm>
+            <a:off x="1299601" y="3292181"/>
+            <a:ext cx="1986306" cy="1477328"/>
+          </a:xfrm>
+          <a:prstGeom prst="rect">
+            <a:avLst/>
+          </a:prstGeom>
+          <a:noFill/>
+        </p:spPr>
+        <p:txBody>
+          <a:bodyPr wrap="square" rtlCol="0">
+            <a:spAutoFit/>
+          </a:bodyPr>
+          <a:lstStyle/>
+          <a:p>
+            <a:r>
+              <a:rPr lang="fr-FR" dirty="0"/>
+              <a:t>Modalité :</a:t>
+            </a:r>
+          </a:p>
+          <a:p>
+            <a:endParaRPr lang="fr-FR" dirty="0"/>
+          </a:p>
+          <a:p>
+            <a:pPr marL="285750" indent="-285750">
+              <a:buFont typeface="Arial" panose="020B0604020202020204" pitchFamily="34" charset="0"/>
+              <a:buChar char="•"/>
+            </a:pPr>
+            <a:r>
+              <a:rPr lang="fr-FR" dirty="0"/>
+              <a:t>Demi-groupe</a:t>
+            </a:r>
+          </a:p>
+          <a:p>
+            <a:pPr marL="285750" indent="-285750">
+              <a:buFont typeface="Arial" panose="020B0604020202020204" pitchFamily="34" charset="0"/>
+              <a:buChar char="•"/>
+            </a:pPr>
+            <a:r>
+              <a:rPr lang="fr-FR" dirty="0"/>
+              <a:t>Simulation</a:t>
+            </a:r>
+          </a:p>
+          <a:p>
+            <a:endParaRPr lang="fr-FR" dirty="0"/>
+          </a:p>
+        </p:txBody>
+      </p:sp>
+      <p:sp>
+        <p:nvSpPr>
+          <p:cNvPr id="18" name="ZoneTexte 17">
+            <a:extLst>
+              <a:ext uri="{FF2B5EF4-FFF2-40B4-BE49-F238E27FC236}">
+                <a16:creationId xmlns:a16="http://schemas.microsoft.com/office/drawing/2014/main" id="{D29C5B16-2BCB-E58A-0D1A-BAB3536018F2}"/>
+              </a:ext>
+            </a:extLst>
+          </p:cNvPr>
+          <p:cNvSpPr txBox="1"/>
+          <p:nvPr/>
+        </p:nvSpPr>
+        <p:spPr>
+          <a:xfrm>
+            <a:off x="3545514" y="3292181"/>
+            <a:ext cx="3958372" cy="1477328"/>
+          </a:xfrm>
+          <a:prstGeom prst="rect">
+            <a:avLst/>
+          </a:prstGeom>
+          <a:noFill/>
+        </p:spPr>
+        <p:txBody>
+          <a:bodyPr wrap="square" rtlCol="0">
+            <a:spAutoFit/>
+          </a:bodyPr>
+          <a:lstStyle/>
+          <a:p>
+            <a:r>
+              <a:rPr lang="fr-FR" dirty="0"/>
+              <a:t>Contenu :</a:t>
+            </a:r>
+          </a:p>
+          <a:p>
+            <a:endParaRPr lang="fr-FR" dirty="0"/>
+          </a:p>
+          <a:p>
+            <a:pPr marL="285750" indent="-285750">
+              <a:buFont typeface="Arial" panose="020B0604020202020204" pitchFamily="34" charset="0"/>
+              <a:buChar char="•"/>
+            </a:pPr>
+            <a:r>
+              <a:rPr lang="fr-FR" dirty="0"/>
+              <a:t>40 min : Logique combinatoire </a:t>
+            </a:r>
+          </a:p>
+          <a:p>
+            <a:pPr marL="285750" indent="-285750">
+              <a:buFont typeface="Arial" panose="020B0604020202020204" pitchFamily="34" charset="0"/>
+              <a:buChar char="•"/>
+            </a:pPr>
+            <a:r>
+              <a:rPr lang="fr-FR" dirty="0"/>
+              <a:t>40 min : Logique séquentielle</a:t>
+            </a:r>
+          </a:p>
+          <a:p>
+            <a:pPr marL="285750" indent="-285750">
+              <a:buFont typeface="Arial" panose="020B0604020202020204" pitchFamily="34" charset="0"/>
+              <a:buChar char="•"/>
+            </a:pPr>
+            <a:r>
+              <a:rPr lang="fr-FR" dirty="0"/>
+              <a:t>40 min : </a:t>
+            </a:r>
+            <a:r>
+              <a:rPr lang="fr-FR" dirty="0" err="1"/>
+              <a:t>TypEs</a:t>
+            </a:r>
+            <a:r>
+              <a:rPr lang="fr-FR" dirty="0"/>
+              <a:t> de mémoire</a:t>
+            </a:r>
+          </a:p>
+        </p:txBody>
+      </p:sp>
+      <p:sp>
+        <p:nvSpPr>
+          <p:cNvPr id="21" name="ZoneTexte 20">
+            <a:extLst>
+              <a:ext uri="{FF2B5EF4-FFF2-40B4-BE49-F238E27FC236}">
+                <a16:creationId xmlns:a16="http://schemas.microsoft.com/office/drawing/2014/main" id="{67F621CC-9BE6-0941-F7BF-46CD75CB963C}"/>
+              </a:ext>
+            </a:extLst>
+          </p:cNvPr>
+          <p:cNvSpPr txBox="1"/>
+          <p:nvPr/>
+        </p:nvSpPr>
+        <p:spPr>
+          <a:xfrm>
+            <a:off x="3613150" y="5653534"/>
+            <a:ext cx="2116157" cy="923330"/>
+          </a:xfrm>
+          <a:prstGeom prst="rect">
+            <a:avLst/>
+          </a:prstGeom>
+          <a:noFill/>
+        </p:spPr>
+        <p:txBody>
+          <a:bodyPr wrap="none" rtlCol="0">
+            <a:spAutoFit/>
+          </a:bodyPr>
+          <a:lstStyle/>
+          <a:p>
+            <a:r>
+              <a:rPr lang="fr-FR" dirty="0"/>
+              <a:t>Points de blocage :</a:t>
+            </a:r>
+          </a:p>
+          <a:p>
+            <a:pPr marL="285750" indent="-285750">
+              <a:buFont typeface="Arial" panose="020B0604020202020204" pitchFamily="34" charset="0"/>
+              <a:buChar char="•"/>
+            </a:pPr>
+            <a:r>
+              <a:rPr lang="fr-FR" dirty="0"/>
+              <a:t>Program Counter</a:t>
+            </a:r>
+          </a:p>
+          <a:p>
+            <a:endParaRPr lang="fr-FR" dirty="0"/>
+          </a:p>
+        </p:txBody>
+      </p:sp>
+      <p:sp>
+        <p:nvSpPr>
+          <p:cNvPr id="22" name="Ellipse 21">
+            <a:extLst>
+              <a:ext uri="{FF2B5EF4-FFF2-40B4-BE49-F238E27FC236}">
+                <a16:creationId xmlns:a16="http://schemas.microsoft.com/office/drawing/2014/main" id="{BC368B84-4C81-BF4A-2916-7773A62456DF}"/>
+              </a:ext>
+            </a:extLst>
+          </p:cNvPr>
+          <p:cNvSpPr/>
+          <p:nvPr/>
+        </p:nvSpPr>
+        <p:spPr>
+          <a:xfrm>
+            <a:off x="8761262" y="2726992"/>
+            <a:ext cx="154138" cy="154138"/>
+          </a:xfrm>
+          <a:prstGeom prst="ellipse">
+            <a:avLst/>
+          </a:prstGeom>
+        </p:spPr>
+        <p:style>
+          <a:lnRef idx="2">
+            <a:schemeClr val="dk1">
+              <a:shade val="15000"/>
+            </a:schemeClr>
+          </a:lnRef>
+          <a:fillRef idx="1">
+            <a:schemeClr val="dk1"/>
+          </a:fillRef>
+          <a:effectRef idx="0">
+            <a:schemeClr val="dk1"/>
+          </a:effectRef>
+          <a:fontRef idx="minor">
+            <a:schemeClr val="lt1"/>
+          </a:fontRef>
+        </p:style>
+        <p:txBody>
+          <a:bodyPr rtlCol="0" anchor="ctr"/>
+          <a:lstStyle/>
+          <a:p>
+            <a:pPr algn="ctr"/>
+            <a:endParaRPr lang="fr-FR"/>
+          </a:p>
+        </p:txBody>
+      </p:sp>
+    </p:spTree>
+    <p:extLst>
+      <p:ext uri="{BB962C8B-B14F-4D97-AF65-F5344CB8AC3E}">
+        <p14:creationId xmlns:p14="http://schemas.microsoft.com/office/powerpoint/2010/main" val="179134556"/>
+      </p:ext>
+    </p:extLst>
+  </p:cSld>
+  <p:clrMapOvr>
+    <a:masterClrMapping/>
+  </p:clrMapOvr>
+</p:sld>
+</file>
+
+<file path=ppt/slides/slide16.xml><?xml version="1.0" encoding="utf-8"?>
+<p:sld xmlns:a="http://schemas.openxmlformats.org/drawingml/2006/main" xmlns:r="http://schemas.openxmlformats.org/officeDocument/2006/relationships" xmlns:p="http://schemas.openxmlformats.org/presentationml/2006/main">
+  <p:cSld>
+    <p:spTree>
+      <p:nvGrpSpPr>
+        <p:cNvPr id="1" name="">
+          <a:extLst>
+            <a:ext uri="{FF2B5EF4-FFF2-40B4-BE49-F238E27FC236}">
+              <a16:creationId xmlns:a16="http://schemas.microsoft.com/office/drawing/2014/main" id="{DF7D7C68-35B7-2875-A283-C71E60B7049A}"/>
+            </a:ext>
+          </a:extLst>
+        </p:cNvPr>
+        <p:cNvGrpSpPr/>
+        <p:nvPr/>
+      </p:nvGrpSpPr>
+      <p:grpSpPr>
+        <a:xfrm>
+          <a:off x="0" y="0"/>
+          <a:ext cx="0" cy="0"/>
+          <a:chOff x="0" y="0"/>
+          <a:chExt cx="0" cy="0"/>
+        </a:xfrm>
+      </p:grpSpPr>
+      <p:sp>
+        <p:nvSpPr>
+          <p:cNvPr id="2" name="Titre 1">
+            <a:extLst>
+              <a:ext uri="{FF2B5EF4-FFF2-40B4-BE49-F238E27FC236}">
+                <a16:creationId xmlns:a16="http://schemas.microsoft.com/office/drawing/2014/main" id="{2D01AC89-8A3E-4D2B-2C21-19099182DCD4}"/>
+              </a:ext>
+            </a:extLst>
+          </p:cNvPr>
+          <p:cNvSpPr>
+            <a:spLocks noGrp="1"/>
+          </p:cNvSpPr>
+          <p:nvPr>
+            <p:ph type="title"/>
+          </p:nvPr>
+        </p:nvSpPr>
+        <p:spPr/>
+        <p:txBody>
+          <a:bodyPr/>
+          <a:lstStyle/>
+          <a:p>
+            <a:r>
+              <a:rPr lang="fr-FR" dirty="0"/>
+              <a:t>Évaluations</a:t>
+            </a:r>
+          </a:p>
+        </p:txBody>
+      </p:sp>
+      <p:sp>
+        <p:nvSpPr>
+          <p:cNvPr id="3" name="Espace réservé du contenu 2">
+            <a:extLst>
+              <a:ext uri="{FF2B5EF4-FFF2-40B4-BE49-F238E27FC236}">
+                <a16:creationId xmlns:a16="http://schemas.microsoft.com/office/drawing/2014/main" id="{B8C46222-44DB-9C24-3A43-3FFB2E9FD537}"/>
+              </a:ext>
+            </a:extLst>
+          </p:cNvPr>
+          <p:cNvSpPr>
+            <a:spLocks noGrp="1"/>
+          </p:cNvSpPr>
+          <p:nvPr>
+            <p:ph idx="1"/>
+          </p:nvPr>
+        </p:nvSpPr>
+        <p:spPr/>
+        <p:txBody>
+          <a:bodyPr>
+            <a:normAutofit lnSpcReduction="10000"/>
+          </a:bodyPr>
+          <a:lstStyle/>
+          <a:p>
+            <a:r>
+              <a:rPr lang="fr-FR" dirty="0"/>
+              <a:t>Évaluations diagnostiques:</a:t>
+            </a:r>
+          </a:p>
+          <a:p>
+            <a:pPr lvl="1"/>
+            <a:r>
+              <a:rPr lang="fr-FR" dirty="0" err="1"/>
+              <a:t>Kahoot</a:t>
+            </a:r>
+            <a:r>
+              <a:rPr lang="fr-FR" dirty="0"/>
+              <a:t> de chaque cours</a:t>
+            </a:r>
+          </a:p>
+          <a:p>
+            <a:pPr lvl="1"/>
+            <a:r>
+              <a:rPr lang="fr-FR" dirty="0"/>
+              <a:t>Remédiation sur le cours qui suit</a:t>
+            </a:r>
+          </a:p>
+          <a:p>
+            <a:r>
+              <a:rPr lang="fr-FR" dirty="0"/>
+              <a:t>Évaluations sommatives :</a:t>
+            </a:r>
+          </a:p>
+          <a:p>
+            <a:pPr lvl="1"/>
+            <a:r>
+              <a:rPr lang="fr-FR" dirty="0"/>
+              <a:t>DS de 1h sur feuille</a:t>
+            </a:r>
+          </a:p>
+          <a:p>
+            <a:pPr lvl="2"/>
+            <a:r>
+              <a:rPr lang="fr-FR" dirty="0"/>
+              <a:t>15 min : Mise en situation, transpondeur (base octale)</a:t>
+            </a:r>
+          </a:p>
+          <a:p>
+            <a:pPr lvl="2"/>
+            <a:r>
+              <a:rPr lang="fr-FR" dirty="0"/>
+              <a:t>15 min : Cas d’usage, backup d’une entreprise choix d’une mémoire</a:t>
+            </a:r>
+          </a:p>
+          <a:p>
+            <a:pPr lvl="2"/>
+            <a:r>
+              <a:rPr lang="fr-FR" dirty="0"/>
+              <a:t>30 min : Additionneur (?) formé de porte-logique</a:t>
+            </a:r>
+          </a:p>
+          <a:p>
+            <a:pPr lvl="1"/>
+            <a:r>
+              <a:rPr lang="fr-FR" dirty="0"/>
+              <a:t>Soutenance de 5 min + 3 min de questions</a:t>
+            </a:r>
+          </a:p>
+          <a:p>
+            <a:pPr lvl="2"/>
+            <a:r>
+              <a:rPr lang="fr-FR" dirty="0"/>
+              <a:t>Calcul avec Arduino et affichage par LED</a:t>
+            </a:r>
+          </a:p>
+          <a:p>
+            <a:endParaRPr lang="fr-FR" dirty="0"/>
+          </a:p>
+        </p:txBody>
+      </p:sp>
+      <p:sp>
+        <p:nvSpPr>
+          <p:cNvPr id="4" name="Espace réservé du numéro de diapositive 3">
+            <a:extLst>
+              <a:ext uri="{FF2B5EF4-FFF2-40B4-BE49-F238E27FC236}">
+                <a16:creationId xmlns:a16="http://schemas.microsoft.com/office/drawing/2014/main" id="{7B5AE1AC-CC59-2CBD-917B-7064F06DB6C2}"/>
+              </a:ext>
+            </a:extLst>
+          </p:cNvPr>
+          <p:cNvSpPr>
+            <a:spLocks noGrp="1"/>
+          </p:cNvSpPr>
+          <p:nvPr>
+            <p:ph type="sldNum" sz="quarter" idx="12"/>
+          </p:nvPr>
+        </p:nvSpPr>
+        <p:spPr/>
+        <p:txBody>
+          <a:bodyPr/>
+          <a:lstStyle/>
+          <a:p>
+            <a:fld id="{40743BAD-0FD4-4AFD-913F-F1B3782AF393}" type="slidenum">
+              <a:rPr lang="fr-FR" smtClean="0"/>
+              <a:t>16</a:t>
+            </a:fld>
+            <a:endParaRPr lang="fr-FR"/>
+          </a:p>
+        </p:txBody>
+      </p:sp>
+    </p:spTree>
+    <p:extLst>
+      <p:ext uri="{BB962C8B-B14F-4D97-AF65-F5344CB8AC3E}">
+        <p14:creationId xmlns:p14="http://schemas.microsoft.com/office/powerpoint/2010/main" val="1929971073"/>
+      </p:ext>
+    </p:extLst>
+  </p:cSld>
+  <p:clrMapOvr>
+    <a:masterClrMapping/>
+  </p:clrMapOvr>
+</p:sld>
+</file>
+
+<file path=ppt/slides/slide17.xml><?xml version="1.0" encoding="utf-8"?>
+<p:sld xmlns:a="http://schemas.openxmlformats.org/drawingml/2006/main" xmlns:r="http://schemas.openxmlformats.org/officeDocument/2006/relationships" xmlns:p="http://schemas.openxmlformats.org/presentationml/2006/main">
+  <p:cSld>
+    <p:spTree>
+      <p:nvGrpSpPr>
+        <p:cNvPr id="1" name=""/>
+        <p:cNvGrpSpPr/>
+        <p:nvPr/>
+      </p:nvGrpSpPr>
+      <p:grpSpPr>
+        <a:xfrm>
+          <a:off x="0" y="0"/>
+          <a:ext cx="0" cy="0"/>
+          <a:chOff x="0" y="0"/>
+          <a:chExt cx="0" cy="0"/>
+        </a:xfrm>
+      </p:grpSpPr>
+      <p:sp>
+        <p:nvSpPr>
+          <p:cNvPr id="2" name="Titre 1">
+            <a:extLst>
+              <a:ext uri="{FF2B5EF4-FFF2-40B4-BE49-F238E27FC236}">
+                <a16:creationId xmlns:a16="http://schemas.microsoft.com/office/drawing/2014/main" id="{5292882A-6A23-7729-8E0C-C2D6342D9873}"/>
+              </a:ext>
+            </a:extLst>
+          </p:cNvPr>
+          <p:cNvSpPr>
+            <a:spLocks noGrp="1"/>
+          </p:cNvSpPr>
+          <p:nvPr>
+            <p:ph type="title"/>
+          </p:nvPr>
+        </p:nvSpPr>
+        <p:spPr/>
+        <p:txBody>
+          <a:bodyPr/>
+          <a:lstStyle/>
+          <a:p>
+            <a:r>
+              <a:rPr lang="fr-FR" dirty="0"/>
+              <a:t>Séance à caractère expérimental</a:t>
+            </a:r>
+          </a:p>
+        </p:txBody>
+      </p:sp>
+      <p:sp>
+        <p:nvSpPr>
+          <p:cNvPr id="3" name="Espace réservé du contenu 2">
+            <a:extLst>
+              <a:ext uri="{FF2B5EF4-FFF2-40B4-BE49-F238E27FC236}">
+                <a16:creationId xmlns:a16="http://schemas.microsoft.com/office/drawing/2014/main" id="{2FDDC7E0-F770-9294-DF66-C61EF77503C5}"/>
+              </a:ext>
+            </a:extLst>
+          </p:cNvPr>
+          <p:cNvSpPr>
+            <a:spLocks noGrp="1"/>
+          </p:cNvSpPr>
+          <p:nvPr>
+            <p:ph idx="1"/>
+          </p:nvPr>
+        </p:nvSpPr>
+        <p:spPr/>
+        <p:txBody>
+          <a:bodyPr/>
+          <a:lstStyle/>
+          <a:p>
+            <a:r>
+              <a:rPr lang="fr-FR" dirty="0"/>
+              <a:t>Prérequis</a:t>
+            </a:r>
+          </a:p>
+          <a:p>
+            <a:endParaRPr lang="fr-FR" dirty="0"/>
+          </a:p>
+          <a:p>
+            <a:r>
+              <a:rPr lang="fr-FR" dirty="0"/>
+              <a:t>Groupe de combien </a:t>
+            </a:r>
+          </a:p>
+          <a:p>
+            <a:pPr lvl="1"/>
+            <a:r>
+              <a:rPr lang="fr-FR" dirty="0"/>
+              <a:t>Faits </a:t>
+            </a:r>
+            <a:r>
+              <a:rPr lang="fr-FR" dirty="0" err="1"/>
+              <a:t>comments</a:t>
+            </a:r>
+            <a:endParaRPr lang="fr-FR" dirty="0"/>
+          </a:p>
+          <a:p>
+            <a:r>
+              <a:rPr lang="fr-FR" dirty="0"/>
+              <a:t>Type de sujet</a:t>
+            </a:r>
+          </a:p>
+          <a:p>
+            <a:r>
+              <a:rPr lang="fr-FR" dirty="0"/>
+              <a:t>Matériel</a:t>
+            </a:r>
+          </a:p>
+        </p:txBody>
+      </p:sp>
+      <p:sp>
+        <p:nvSpPr>
+          <p:cNvPr id="4" name="Espace réservé du numéro de diapositive 3">
+            <a:extLst>
+              <a:ext uri="{FF2B5EF4-FFF2-40B4-BE49-F238E27FC236}">
+                <a16:creationId xmlns:a16="http://schemas.microsoft.com/office/drawing/2014/main" id="{E33CE686-4F3D-7869-6CC3-4ABFDD7ED954}"/>
+              </a:ext>
+            </a:extLst>
+          </p:cNvPr>
+          <p:cNvSpPr>
+            <a:spLocks noGrp="1"/>
+          </p:cNvSpPr>
+          <p:nvPr>
+            <p:ph type="sldNum" sz="quarter" idx="12"/>
+          </p:nvPr>
+        </p:nvSpPr>
+        <p:spPr/>
+        <p:txBody>
+          <a:bodyPr/>
+          <a:lstStyle/>
+          <a:p>
+            <a:fld id="{40743BAD-0FD4-4AFD-913F-F1B3782AF393}" type="slidenum">
+              <a:rPr lang="fr-FR" smtClean="0"/>
+              <a:t>17</a:t>
+            </a:fld>
+            <a:endParaRPr lang="fr-FR"/>
+          </a:p>
+        </p:txBody>
+      </p:sp>
+      <p:sp>
+        <p:nvSpPr>
+          <p:cNvPr id="6" name="ZoneTexte 5">
+            <a:extLst>
+              <a:ext uri="{FF2B5EF4-FFF2-40B4-BE49-F238E27FC236}">
+                <a16:creationId xmlns:a16="http://schemas.microsoft.com/office/drawing/2014/main" id="{85027EFF-7006-3DCD-FE60-0325BE8738C8}"/>
+              </a:ext>
+            </a:extLst>
+          </p:cNvPr>
+          <p:cNvSpPr txBox="1"/>
+          <p:nvPr/>
+        </p:nvSpPr>
+        <p:spPr>
+          <a:xfrm>
+            <a:off x="1371600" y="1488217"/>
+            <a:ext cx="8537274" cy="646331"/>
+          </a:xfrm>
+          <a:prstGeom prst="rect">
+            <a:avLst/>
+          </a:prstGeom>
+          <a:noFill/>
+        </p:spPr>
+        <p:txBody>
+          <a:bodyPr wrap="none" rtlCol="0">
+            <a:spAutoFit/>
+          </a:bodyPr>
+          <a:lstStyle/>
+          <a:p>
+            <a:r>
+              <a:rPr lang="fr-FR" dirty="0"/>
+              <a:t>Problématique de la séance : Comment réaliser des opérations arithmétiques à l’aide </a:t>
+            </a:r>
+          </a:p>
+          <a:p>
+            <a:r>
+              <a:rPr lang="fr-FR" dirty="0"/>
+              <a:t>de fonctions logiques</a:t>
+            </a:r>
+          </a:p>
+        </p:txBody>
+      </p:sp>
+    </p:spTree>
+    <p:extLst>
+      <p:ext uri="{BB962C8B-B14F-4D97-AF65-F5344CB8AC3E}">
+        <p14:creationId xmlns:p14="http://schemas.microsoft.com/office/powerpoint/2010/main" val="3616338366"/>
+      </p:ext>
+    </p:extLst>
+  </p:cSld>
+  <p:clrMapOvr>
+    <a:masterClrMapping/>
+  </p:clrMapOvr>
+</p:sld>
+</file>
+
+<file path=ppt/slides/slide18.xml><?xml version="1.0" encoding="utf-8"?>
+<p:sld xmlns:a="http://schemas.openxmlformats.org/drawingml/2006/main" xmlns:r="http://schemas.openxmlformats.org/officeDocument/2006/relationships" xmlns:p="http://schemas.openxmlformats.org/presentationml/2006/main">
+  <p:cSld>
+    <p:spTree>
+      <p:nvGrpSpPr>
+        <p:cNvPr id="1" name="">
+          <a:extLst>
+            <a:ext uri="{FF2B5EF4-FFF2-40B4-BE49-F238E27FC236}">
+              <a16:creationId xmlns:a16="http://schemas.microsoft.com/office/drawing/2014/main" id="{6407EBB0-3111-E0C4-0AC5-5FB29251A141}"/>
+            </a:ext>
+          </a:extLst>
+        </p:cNvPr>
+        <p:cNvGrpSpPr/>
+        <p:nvPr/>
+      </p:nvGrpSpPr>
+      <p:grpSpPr>
+        <a:xfrm>
+          <a:off x="0" y="0"/>
+          <a:ext cx="0" cy="0"/>
+          <a:chOff x="0" y="0"/>
+          <a:chExt cx="0" cy="0"/>
+        </a:xfrm>
+      </p:grpSpPr>
+      <p:sp>
+        <p:nvSpPr>
+          <p:cNvPr id="2" name="Titre 1">
+            <a:extLst>
+              <a:ext uri="{FF2B5EF4-FFF2-40B4-BE49-F238E27FC236}">
+                <a16:creationId xmlns:a16="http://schemas.microsoft.com/office/drawing/2014/main" id="{49EC1A5A-2E17-4CDB-7D99-A42971EA67E3}"/>
+              </a:ext>
+            </a:extLst>
+          </p:cNvPr>
+          <p:cNvSpPr>
+            <a:spLocks noGrp="1"/>
+          </p:cNvSpPr>
+          <p:nvPr>
+            <p:ph type="title"/>
+          </p:nvPr>
+        </p:nvSpPr>
+        <p:spPr/>
+        <p:txBody>
+          <a:bodyPr/>
+          <a:lstStyle/>
+          <a:p>
+            <a:r>
+              <a:rPr lang="fr-FR" dirty="0"/>
+              <a:t>Séance à caractère expérimental</a:t>
+            </a:r>
+          </a:p>
+        </p:txBody>
+      </p:sp>
+      <p:sp>
+        <p:nvSpPr>
+          <p:cNvPr id="3" name="Espace réservé du contenu 2">
+            <a:extLst>
+              <a:ext uri="{FF2B5EF4-FFF2-40B4-BE49-F238E27FC236}">
+                <a16:creationId xmlns:a16="http://schemas.microsoft.com/office/drawing/2014/main" id="{0C6A0B65-58B3-D32E-462D-503A242A8CFE}"/>
+              </a:ext>
+            </a:extLst>
+          </p:cNvPr>
+          <p:cNvSpPr>
+            <a:spLocks noGrp="1"/>
+          </p:cNvSpPr>
+          <p:nvPr>
+            <p:ph idx="1"/>
+          </p:nvPr>
+        </p:nvSpPr>
+        <p:spPr/>
+        <p:txBody>
+          <a:bodyPr/>
+          <a:lstStyle/>
+          <a:p>
+            <a:r>
+              <a:rPr lang="fr-FR" dirty="0"/>
+              <a:t>Organisation temporelle</a:t>
+            </a:r>
+          </a:p>
+          <a:p>
+            <a:pPr lvl="1"/>
+            <a:r>
+              <a:rPr lang="fr-FR" dirty="0"/>
+              <a:t>15 min : Répartition des groupes, choix du sujet et mise en place</a:t>
+            </a:r>
+          </a:p>
+          <a:p>
+            <a:pPr lvl="1"/>
+            <a:r>
+              <a:rPr lang="fr-FR" dirty="0"/>
+              <a:t>13 min</a:t>
+            </a:r>
+          </a:p>
+        </p:txBody>
+      </p:sp>
+      <p:sp>
+        <p:nvSpPr>
+          <p:cNvPr id="4" name="Espace réservé du numéro de diapositive 3">
+            <a:extLst>
+              <a:ext uri="{FF2B5EF4-FFF2-40B4-BE49-F238E27FC236}">
+                <a16:creationId xmlns:a16="http://schemas.microsoft.com/office/drawing/2014/main" id="{428547EC-05CE-65AA-C62D-FB695A7EE514}"/>
+              </a:ext>
+            </a:extLst>
+          </p:cNvPr>
+          <p:cNvSpPr>
+            <a:spLocks noGrp="1"/>
+          </p:cNvSpPr>
+          <p:nvPr>
+            <p:ph type="sldNum" sz="quarter" idx="12"/>
+          </p:nvPr>
+        </p:nvSpPr>
+        <p:spPr/>
+        <p:txBody>
+          <a:bodyPr/>
+          <a:lstStyle/>
+          <a:p>
+            <a:fld id="{40743BAD-0FD4-4AFD-913F-F1B3782AF393}" type="slidenum">
+              <a:rPr lang="fr-FR" smtClean="0"/>
+              <a:t>18</a:t>
+            </a:fld>
+            <a:endParaRPr lang="fr-FR"/>
+          </a:p>
+        </p:txBody>
+      </p:sp>
+    </p:spTree>
+    <p:extLst>
+      <p:ext uri="{BB962C8B-B14F-4D97-AF65-F5344CB8AC3E}">
+        <p14:creationId xmlns:p14="http://schemas.microsoft.com/office/powerpoint/2010/main" val="3429497297"/>
+      </p:ext>
+    </p:extLst>
+  </p:cSld>
+  <p:clrMapOvr>
+    <a:masterClrMapping/>
+  </p:clrMapOvr>
+</p:sld>
+</file>
+
+<file path=ppt/slides/slide19.xml><?xml version="1.0" encoding="utf-8"?>
+<p:sld xmlns:a="http://schemas.openxmlformats.org/drawingml/2006/main" xmlns:r="http://schemas.openxmlformats.org/officeDocument/2006/relationships" xmlns:p="http://schemas.openxmlformats.org/presentationml/2006/main">
+  <p:cSld>
+    <p:spTree>
+      <p:nvGrpSpPr>
+        <p:cNvPr id="1" name=""/>
+        <p:cNvGrpSpPr/>
+        <p:nvPr/>
+      </p:nvGrpSpPr>
+      <p:grpSpPr>
+        <a:xfrm>
+          <a:off x="0" y="0"/>
+          <a:ext cx="0" cy="0"/>
+          <a:chOff x="0" y="0"/>
+          <a:chExt cx="0" cy="0"/>
+        </a:xfrm>
+      </p:grpSpPr>
+      <p:sp>
+        <p:nvSpPr>
+          <p:cNvPr id="2" name="Titre 1">
+            <a:extLst>
+              <a:ext uri="{FF2B5EF4-FFF2-40B4-BE49-F238E27FC236}">
+                <a16:creationId xmlns:a16="http://schemas.microsoft.com/office/drawing/2014/main" id="{6BBFA69D-2D73-D6D6-ECCF-2EC1A15B15CB}"/>
+              </a:ext>
+            </a:extLst>
+          </p:cNvPr>
+          <p:cNvSpPr>
+            <a:spLocks noGrp="1"/>
+          </p:cNvSpPr>
+          <p:nvPr>
+            <p:ph type="title"/>
+          </p:nvPr>
+        </p:nvSpPr>
+        <p:spPr/>
+        <p:txBody>
+          <a:bodyPr/>
+          <a:lstStyle/>
+          <a:p>
+            <a:r>
+              <a:rPr lang="fr-FR" dirty="0"/>
+              <a:t>Conclusion</a:t>
+            </a:r>
+          </a:p>
+        </p:txBody>
+      </p:sp>
+      <p:sp>
+        <p:nvSpPr>
+          <p:cNvPr id="3" name="Espace réservé du contenu 2">
+            <a:extLst>
+              <a:ext uri="{FF2B5EF4-FFF2-40B4-BE49-F238E27FC236}">
+                <a16:creationId xmlns:a16="http://schemas.microsoft.com/office/drawing/2014/main" id="{F2B9CA79-BC79-9CA9-057B-8FC9C2A8B057}"/>
+              </a:ext>
+            </a:extLst>
+          </p:cNvPr>
+          <p:cNvSpPr>
+            <a:spLocks noGrp="1"/>
+          </p:cNvSpPr>
+          <p:nvPr>
+            <p:ph idx="1"/>
+          </p:nvPr>
+        </p:nvSpPr>
+        <p:spPr/>
+        <p:txBody>
+          <a:bodyPr/>
+          <a:lstStyle/>
+          <a:p>
+            <a:r>
+              <a:rPr lang="fr-FR" dirty="0"/>
+              <a:t>Formation</a:t>
+            </a:r>
+          </a:p>
+          <a:p>
+            <a:endParaRPr lang="fr-FR" dirty="0"/>
+          </a:p>
+          <a:p>
+            <a:r>
+              <a:rPr lang="fr-FR" dirty="0"/>
+              <a:t>Cours</a:t>
+            </a:r>
+          </a:p>
+          <a:p>
+            <a:endParaRPr lang="fr-FR" dirty="0"/>
+          </a:p>
+          <a:p>
+            <a:r>
+              <a:rPr lang="fr-FR" dirty="0"/>
+              <a:t>Support utilisé</a:t>
+            </a:r>
+          </a:p>
+          <a:p>
+            <a:endParaRPr lang="fr-FR" dirty="0"/>
+          </a:p>
+          <a:p>
+            <a:r>
+              <a:rPr lang="fr-FR" dirty="0"/>
+              <a:t>Sa prise en main</a:t>
+            </a:r>
+          </a:p>
+        </p:txBody>
+      </p:sp>
+      <p:sp>
+        <p:nvSpPr>
+          <p:cNvPr id="4" name="Espace réservé du numéro de diapositive 3">
+            <a:extLst>
+              <a:ext uri="{FF2B5EF4-FFF2-40B4-BE49-F238E27FC236}">
+                <a16:creationId xmlns:a16="http://schemas.microsoft.com/office/drawing/2014/main" id="{68A26825-C757-2957-6098-D92C01295D1E}"/>
+              </a:ext>
+            </a:extLst>
+          </p:cNvPr>
+          <p:cNvSpPr>
+            <a:spLocks noGrp="1"/>
+          </p:cNvSpPr>
+          <p:nvPr>
+            <p:ph type="sldNum" sz="quarter" idx="12"/>
+          </p:nvPr>
+        </p:nvSpPr>
+        <p:spPr/>
+        <p:txBody>
+          <a:bodyPr/>
+          <a:lstStyle/>
+          <a:p>
+            <a:fld id="{40743BAD-0FD4-4AFD-913F-F1B3782AF393}" type="slidenum">
+              <a:rPr lang="fr-FR" smtClean="0"/>
+              <a:t>19</a:t>
+            </a:fld>
+            <a:endParaRPr lang="fr-FR"/>
+          </a:p>
+        </p:txBody>
+      </p:sp>
+    </p:spTree>
+    <p:extLst>
+      <p:ext uri="{BB962C8B-B14F-4D97-AF65-F5344CB8AC3E}">
+        <p14:creationId xmlns:p14="http://schemas.microsoft.com/office/powerpoint/2010/main" val="3538785201"/>
       </p:ext>
     </p:extLst>
   </p:cSld>
@@ -4621,6 +11361,118 @@
     <p:extLst>
       <p:ext uri="{BB962C8B-B14F-4D97-AF65-F5344CB8AC3E}">
         <p14:creationId xmlns:p14="http://schemas.microsoft.com/office/powerpoint/2010/main" val="1111395170"/>
+      </p:ext>
+    </p:extLst>
+  </p:cSld>
+  <p:clrMapOvr>
+    <a:masterClrMapping/>
+  </p:clrMapOvr>
+</p:sld>
+</file>
+
+<file path=ppt/slides/slide20.xml><?xml version="1.0" encoding="utf-8"?>
+<p:sld xmlns:a="http://schemas.openxmlformats.org/drawingml/2006/main" xmlns:r="http://schemas.openxmlformats.org/officeDocument/2006/relationships" xmlns:p="http://schemas.openxmlformats.org/presentationml/2006/main">
+  <p:cSld>
+    <p:spTree>
+      <p:nvGrpSpPr>
+        <p:cNvPr id="1" name=""/>
+        <p:cNvGrpSpPr/>
+        <p:nvPr/>
+      </p:nvGrpSpPr>
+      <p:grpSpPr>
+        <a:xfrm>
+          <a:off x="0" y="0"/>
+          <a:ext cx="0" cy="0"/>
+          <a:chOff x="0" y="0"/>
+          <a:chExt cx="0" cy="0"/>
+        </a:xfrm>
+      </p:grpSpPr>
+      <p:sp>
+        <p:nvSpPr>
+          <p:cNvPr id="5" name="Titre 4">
+            <a:extLst>
+              <a:ext uri="{FF2B5EF4-FFF2-40B4-BE49-F238E27FC236}">
+                <a16:creationId xmlns:a16="http://schemas.microsoft.com/office/drawing/2014/main" id="{9D661177-94E1-E513-C079-B256272578B8}"/>
+              </a:ext>
+            </a:extLst>
+          </p:cNvPr>
+          <p:cNvSpPr>
+            <a:spLocks noGrp="1"/>
+          </p:cNvSpPr>
+          <p:nvPr>
+            <p:ph type="ctrTitle"/>
+          </p:nvPr>
+        </p:nvSpPr>
+        <p:spPr/>
+        <p:txBody>
+          <a:bodyPr/>
+          <a:lstStyle/>
+          <a:p>
+            <a:r>
+              <a:rPr lang="fr-FR" dirty="0"/>
+              <a:t>Merci pour votre attention</a:t>
+            </a:r>
+          </a:p>
+        </p:txBody>
+      </p:sp>
+      <p:sp>
+        <p:nvSpPr>
+          <p:cNvPr id="6" name="Sous-titre 5">
+            <a:extLst>
+              <a:ext uri="{FF2B5EF4-FFF2-40B4-BE49-F238E27FC236}">
+                <a16:creationId xmlns:a16="http://schemas.microsoft.com/office/drawing/2014/main" id="{2658BCEA-2EA0-8BF0-A837-12E19D495FE3}"/>
+              </a:ext>
+            </a:extLst>
+          </p:cNvPr>
+          <p:cNvSpPr>
+            <a:spLocks noGrp="1"/>
+          </p:cNvSpPr>
+          <p:nvPr>
+            <p:ph type="subTitle" idx="1"/>
+          </p:nvPr>
+        </p:nvSpPr>
+        <p:spPr/>
+        <p:txBody>
+          <a:bodyPr/>
+          <a:lstStyle/>
+          <a:p>
+            <a:endParaRPr lang="fr-FR" dirty="0"/>
+          </a:p>
+        </p:txBody>
+      </p:sp>
+      <p:sp>
+        <p:nvSpPr>
+          <p:cNvPr id="4" name="Espace réservé du numéro de diapositive 3">
+            <a:extLst>
+              <a:ext uri="{FF2B5EF4-FFF2-40B4-BE49-F238E27FC236}">
+                <a16:creationId xmlns:a16="http://schemas.microsoft.com/office/drawing/2014/main" id="{0E742B32-04E6-FACF-A907-DB5F8873D0A6}"/>
+              </a:ext>
+            </a:extLst>
+          </p:cNvPr>
+          <p:cNvSpPr>
+            <a:spLocks noGrp="1"/>
+          </p:cNvSpPr>
+          <p:nvPr>
+            <p:ph type="sldNum" sz="quarter" idx="4"/>
+          </p:nvPr>
+        </p:nvSpPr>
+        <p:spPr/>
+        <p:txBody>
+          <a:bodyPr/>
+          <a:lstStyle/>
+          <a:p>
+            <a:fld id="{40743BAD-0FD4-4AFD-913F-F1B3782AF393}" type="slidenum">
+              <a:rPr lang="fr-FR" smtClean="0"/>
+              <a:t>20</a:t>
+            </a:fld>
+            <a:endParaRPr lang="fr-FR"/>
+          </a:p>
+        </p:txBody>
+      </p:sp>
+    </p:spTree>
+    <p:extLst>
+      <p:ext uri="{BB962C8B-B14F-4D97-AF65-F5344CB8AC3E}">
+        <p14:creationId xmlns:p14="http://schemas.microsoft.com/office/powerpoint/2010/main" val="3880549696"/>
       </p:ext>
     </p:extLst>
   </p:cSld>
@@ -5306,7 +12158,7 @@
 </file>
 
 <file path=ppt/slides/slide9.xml><?xml version="1.0" encoding="utf-8"?>
-<p:sld xmlns:a="http://schemas.openxmlformats.org/drawingml/2006/main" xmlns:r="http://schemas.openxmlformats.org/officeDocument/2006/relationships" xmlns:p="http://schemas.openxmlformats.org/presentationml/2006/main">
+<p:sld xmlns:a="http://schemas.openxmlformats.org/drawingml/2006/main" xmlns:r="http://schemas.openxmlformats.org/officeDocument/2006/relationships" xmlns:p="http://schemas.openxmlformats.org/presentationml/2006/main" show="0">
   <p:cSld>
     <p:spTree>
       <p:nvGrpSpPr>

--- a/fichiers/presentation/PresSpe.pptx
+++ b/fichiers/presentation/PresSpe.pptx
@@ -9148,9 +9148,10 @@
           </a:p>
           <a:p>
             <a:r>
-              <a:rPr lang="fr-FR" dirty="0"/>
-              <a:t>HUMBERT Tanguy</a:t>
-            </a:r>
+              <a:rPr lang="fr-FR"/>
+              <a:t>NOM Prénom</a:t>
+            </a:r>
+            <a:endParaRPr lang="fr-FR" dirty="0"/>
           </a:p>
           <a:p>
             <a:endParaRPr lang="fr-FR" dirty="0"/>
@@ -9915,8 +9916,8 @@
           <a:chExt cx="0" cy="0"/>
         </a:xfrm>
       </p:grpSpPr>
-      <mc:AlternateContent xmlns:mc="http://schemas.openxmlformats.org/markup-compatibility/2006">
-        <mc:Choice xmlns:pslz="http://schemas.microsoft.com/office/powerpoint/2016/slidezoom" Requires="pslz">
+      <mc:AlternateContent xmlns:mc="http://schemas.openxmlformats.org/markup-compatibility/2006" xmlns:pslz="http://schemas.microsoft.com/office/powerpoint/2016/slidezoom">
+        <mc:Choice Requires="pslz">
           <p:graphicFrame>
             <p:nvGraphicFramePr>
               <p:cNvPr id="11" name="Zoom de diapositive 10">
@@ -9973,7 +9974,7 @@
             </a:graphic>
           </p:graphicFrame>
         </mc:Choice>
-        <mc:Fallback>
+        <mc:Fallback xmlns="">
           <p:pic>
             <p:nvPicPr>
               <p:cNvPr id="11" name="Zoom de diapositive 10">
@@ -9990,7 +9991,7 @@
               <p:nvPr/>
             </p:nvPicPr>
             <p:blipFill>
-              <a:blip r:embed="rId2"/>
+              <a:blip r:embed="rId4"/>
               <a:stretch>
                 <a:fillRect/>
               </a:stretch>

--- a/fichiers/presentation/PresSpe.pptx
+++ b/fichiers/presentation/PresSpe.pptx
@@ -5,29 +5,32 @@
     <p:sldMasterId id="2147483797" r:id="rId1"/>
   </p:sldMasterIdLst>
   <p:notesMasterIdLst>
-    <p:notesMasterId r:id="rId22"/>
+    <p:notesMasterId r:id="rId25"/>
   </p:notesMasterIdLst>
   <p:sldIdLst>
     <p:sldId id="256" r:id="rId2"/>
     <p:sldId id="257" r:id="rId3"/>
-    <p:sldId id="258" r:id="rId4"/>
-    <p:sldId id="259" r:id="rId5"/>
-    <p:sldId id="260" r:id="rId6"/>
-    <p:sldId id="261" r:id="rId7"/>
-    <p:sldId id="262" r:id="rId8"/>
-    <p:sldId id="263" r:id="rId9"/>
-    <p:sldId id="264" r:id="rId10"/>
-    <p:sldId id="265" r:id="rId11"/>
-    <p:sldId id="266" r:id="rId12"/>
-    <p:sldId id="267" r:id="rId13"/>
-    <p:sldId id="268" r:id="rId14"/>
-    <p:sldId id="269" r:id="rId15"/>
-    <p:sldId id="270" r:id="rId16"/>
-    <p:sldId id="271" r:id="rId17"/>
-    <p:sldId id="272" r:id="rId18"/>
-    <p:sldId id="273" r:id="rId19"/>
-    <p:sldId id="274" r:id="rId20"/>
-    <p:sldId id="275" r:id="rId21"/>
+    <p:sldId id="276" r:id="rId4"/>
+    <p:sldId id="258" r:id="rId5"/>
+    <p:sldId id="259" r:id="rId6"/>
+    <p:sldId id="260" r:id="rId7"/>
+    <p:sldId id="261" r:id="rId8"/>
+    <p:sldId id="262" r:id="rId9"/>
+    <p:sldId id="263" r:id="rId10"/>
+    <p:sldId id="264" r:id="rId11"/>
+    <p:sldId id="265" r:id="rId12"/>
+    <p:sldId id="266" r:id="rId13"/>
+    <p:sldId id="267" r:id="rId14"/>
+    <p:sldId id="268" r:id="rId15"/>
+    <p:sldId id="269" r:id="rId16"/>
+    <p:sldId id="270" r:id="rId17"/>
+    <p:sldId id="271" r:id="rId18"/>
+    <p:sldId id="277" r:id="rId19"/>
+    <p:sldId id="272" r:id="rId20"/>
+    <p:sldId id="278" r:id="rId21"/>
+    <p:sldId id="273" r:id="rId22"/>
+    <p:sldId id="274" r:id="rId23"/>
+    <p:sldId id="275" r:id="rId24"/>
   </p:sldIdLst>
   <p:sldSz cx="12192000" cy="6858000"/>
   <p:notesSz cx="6858000" cy="9144000"/>
@@ -141,6 +144,7 @@
         </p14:section>
         <p14:section name="Présentation du système" id="{74DEC717-5837-470B-A99A-3F477BCBD0C6}">
           <p14:sldIdLst>
+            <p14:sldId id="276"/>
             <p14:sldId id="258"/>
             <p14:sldId id="259"/>
           </p14:sldIdLst>
@@ -187,7 +191,9 @@
         </p14:section>
         <p14:section name="Séance à Caractère Expérimenal" id="{FD44380C-DC21-43B1-8CFB-1A441F1C1420}">
           <p14:sldIdLst>
+            <p14:sldId id="277"/>
             <p14:sldId id="272"/>
+            <p14:sldId id="278"/>
             <p14:sldId id="273"/>
           </p14:sldIdLst>
         </p14:section>
@@ -4919,7 +4925,7 @@
           <a:p>
             <a:fld id="{1438A7C7-51D5-4CE9-848C-73CCDCB5AD2A}" type="datetimeFigureOut">
               <a:rPr lang="fr-FR" smtClean="0"/>
-              <a:t>06/06/2026</a:t>
+              <a:t>12/06/2026</a:t>
             </a:fld>
             <a:endParaRPr lang="fr-FR"/>
           </a:p>
@@ -5355,7 +5361,7 @@
           <a:p>
             <a:fld id="{25BF4BE5-493C-4950-8611-4B73EBA124A3}" type="datetime1">
               <a:rPr lang="fr-FR" smtClean="0"/>
-              <a:t>06/06/2026</a:t>
+              <a:t>12/06/2026</a:t>
             </a:fld>
             <a:endParaRPr lang="fr-FR"/>
           </a:p>
@@ -5709,7 +5715,7 @@
           <a:p>
             <a:fld id="{7440509C-B4B3-4DBB-BCC9-40D57FCA4C66}" type="datetime1">
               <a:rPr lang="fr-FR" smtClean="0"/>
-              <a:t>06/06/2026</a:t>
+              <a:t>12/06/2026</a:t>
             </a:fld>
             <a:endParaRPr lang="fr-FR"/>
           </a:p>
@@ -5889,7 +5895,7 @@
           <a:p>
             <a:fld id="{F751CFBF-E380-4D91-9539-BDFDF7AF5C45}" type="datetime1">
               <a:rPr lang="fr-FR" smtClean="0"/>
-              <a:t>06/06/2026</a:t>
+              <a:t>12/06/2026</a:t>
             </a:fld>
             <a:endParaRPr lang="fr-FR"/>
           </a:p>
@@ -6059,7 +6065,7 @@
           <a:p>
             <a:fld id="{D2B74F8F-65AC-4766-A2F7-69AD9EC8EDDE}" type="datetime1">
               <a:rPr lang="fr-FR" smtClean="0"/>
-              <a:t>06/06/2026</a:t>
+              <a:t>12/06/2026</a:t>
             </a:fld>
             <a:endParaRPr lang="fr-FR"/>
           </a:p>
@@ -6336,7 +6342,7 @@
           <a:p>
             <a:fld id="{B4EF0BDA-B3DF-4C30-B725-2619B0E62ACD}" type="datetime1">
               <a:rPr lang="fr-FR" smtClean="0"/>
-              <a:t>06/06/2026</a:t>
+              <a:t>12/06/2026</a:t>
             </a:fld>
             <a:endParaRPr lang="fr-FR"/>
           </a:p>
@@ -6747,7 +6753,7 @@
           <a:p>
             <a:fld id="{2BB7BCF4-2F57-44BE-86E1-4D2E12B5FC6A}" type="datetime1">
               <a:rPr lang="fr-FR" smtClean="0"/>
-              <a:t>06/06/2026</a:t>
+              <a:t>12/06/2026</a:t>
             </a:fld>
             <a:endParaRPr lang="fr-FR"/>
           </a:p>
@@ -7224,7 +7230,7 @@
           <a:p>
             <a:fld id="{6321D020-EA2F-4E08-9F19-25238FB1646F}" type="datetime1">
               <a:rPr lang="fr-FR" smtClean="0"/>
-              <a:t>06/06/2026</a:t>
+              <a:t>12/06/2026</a:t>
             </a:fld>
             <a:endParaRPr lang="fr-FR"/>
           </a:p>
@@ -7342,7 +7348,7 @@
           <a:p>
             <a:fld id="{13019C80-4ECC-4A86-ACB8-43004AF15481}" type="datetime1">
               <a:rPr lang="fr-FR" smtClean="0"/>
-              <a:t>06/06/2026</a:t>
+              <a:t>12/06/2026</a:t>
             </a:fld>
             <a:endParaRPr lang="fr-FR"/>
           </a:p>
@@ -7437,7 +7443,7 @@
           <a:p>
             <a:fld id="{D5B1220C-94C3-4D23-98DD-B536DE4A6F2C}" type="datetime1">
               <a:rPr lang="fr-FR" smtClean="0"/>
-              <a:t>06/06/2026</a:t>
+              <a:t>12/06/2026</a:t>
             </a:fld>
             <a:endParaRPr lang="fr-FR"/>
           </a:p>
@@ -7783,7 +7789,7 @@
           <a:p>
             <a:fld id="{D77193F2-5089-4D6D-B951-141B92746967}" type="datetime1">
               <a:rPr lang="fr-FR" smtClean="0"/>
-              <a:t>06/06/2026</a:t>
+              <a:t>12/06/2026</a:t>
             </a:fld>
             <a:endParaRPr lang="fr-FR"/>
           </a:p>
@@ -8181,7 +8187,7 @@
           <a:p>
             <a:fld id="{2155EEFE-CE4B-45B5-811F-7C771B7BD159}" type="datetime1">
               <a:rPr lang="fr-FR" smtClean="0"/>
-              <a:t>06/06/2026</a:t>
+              <a:t>12/06/2026</a:t>
             </a:fld>
             <a:endParaRPr lang="fr-FR"/>
           </a:p>
@@ -8469,7 +8475,7 @@
           <a:p>
             <a:fld id="{8865F967-DFD5-47C5-B34E-026F86C5401C}" type="datetime1">
               <a:rPr lang="fr-FR" smtClean="0"/>
-              <a:t>06/06/2026</a:t>
+              <a:t>12/06/2026</a:t>
             </a:fld>
             <a:endParaRPr lang="fr-FR"/>
           </a:p>
@@ -9172,6 +9178,125 @@
 </file>
 
 <file path=ppt/slides/slide10.xml><?xml version="1.0" encoding="utf-8"?>
+<p:sld xmlns:a="http://schemas.openxmlformats.org/drawingml/2006/main" xmlns:r="http://schemas.openxmlformats.org/officeDocument/2006/relationships" xmlns:p="http://schemas.openxmlformats.org/presentationml/2006/main" show="0">
+  <p:cSld>
+    <p:spTree>
+      <p:nvGrpSpPr>
+        <p:cNvPr id="1" name="">
+          <a:extLst>
+            <a:ext uri="{FF2B5EF4-FFF2-40B4-BE49-F238E27FC236}">
+              <a16:creationId xmlns:a16="http://schemas.microsoft.com/office/drawing/2014/main" id="{32A059D3-1033-C21A-D549-35D825E06049}"/>
+            </a:ext>
+          </a:extLst>
+        </p:cNvPr>
+        <p:cNvGrpSpPr/>
+        <p:nvPr/>
+      </p:nvGrpSpPr>
+      <p:grpSpPr>
+        <a:xfrm>
+          <a:off x="0" y="0"/>
+          <a:ext cx="0" cy="0"/>
+          <a:chOff x="0" y="0"/>
+          <a:chExt cx="0" cy="0"/>
+        </a:xfrm>
+      </p:grpSpPr>
+      <p:sp>
+        <p:nvSpPr>
+          <p:cNvPr id="5" name="Titre 4">
+            <a:extLst>
+              <a:ext uri="{FF2B5EF4-FFF2-40B4-BE49-F238E27FC236}">
+                <a16:creationId xmlns:a16="http://schemas.microsoft.com/office/drawing/2014/main" id="{E220F5FB-4AEA-0E53-3119-A81032826553}"/>
+              </a:ext>
+            </a:extLst>
+          </p:cNvPr>
+          <p:cNvSpPr>
+            <a:spLocks noGrp="1"/>
+          </p:cNvSpPr>
+          <p:nvPr>
+            <p:ph type="title"/>
+          </p:nvPr>
+        </p:nvSpPr>
+        <p:spPr/>
+        <p:txBody>
+          <a:bodyPr/>
+          <a:lstStyle/>
+          <a:p>
+            <a:r>
+              <a:rPr lang="fr-FR" dirty="0"/>
+              <a:t>Démarches pédagogiques</a:t>
+            </a:r>
+          </a:p>
+        </p:txBody>
+      </p:sp>
+      <p:sp>
+        <p:nvSpPr>
+          <p:cNvPr id="6" name="Espace réservé du contenu 5">
+            <a:extLst>
+              <a:ext uri="{FF2B5EF4-FFF2-40B4-BE49-F238E27FC236}">
+                <a16:creationId xmlns:a16="http://schemas.microsoft.com/office/drawing/2014/main" id="{0C5343DC-792C-558F-8832-07AFEDF38666}"/>
+              </a:ext>
+            </a:extLst>
+          </p:cNvPr>
+          <p:cNvSpPr>
+            <a:spLocks noGrp="1"/>
+          </p:cNvSpPr>
+          <p:nvPr>
+            <p:ph idx="1"/>
+          </p:nvPr>
+        </p:nvSpPr>
+        <p:spPr/>
+        <p:txBody>
+          <a:bodyPr/>
+          <a:lstStyle/>
+          <a:p>
+            <a:endParaRPr lang="fr-FR" dirty="0"/>
+          </a:p>
+        </p:txBody>
+      </p:sp>
+      <p:sp>
+        <p:nvSpPr>
+          <p:cNvPr id="4" name="Espace réservé du numéro de diapositive 3">
+            <a:extLst>
+              <a:ext uri="{FF2B5EF4-FFF2-40B4-BE49-F238E27FC236}">
+                <a16:creationId xmlns:a16="http://schemas.microsoft.com/office/drawing/2014/main" id="{46DED23E-DF72-BBC0-6CE6-BE6D2253A243}"/>
+              </a:ext>
+            </a:extLst>
+          </p:cNvPr>
+          <p:cNvSpPr>
+            <a:spLocks noGrp="1"/>
+          </p:cNvSpPr>
+          <p:nvPr>
+            <p:ph type="sldNum" sz="quarter" idx="12"/>
+          </p:nvPr>
+        </p:nvSpPr>
+        <p:spPr/>
+        <p:txBody>
+          <a:bodyPr/>
+          <a:lstStyle/>
+          <a:p>
+            <a:fld id="{40743BAD-0FD4-4AFD-913F-F1B3782AF393}" type="slidenum">
+              <a:rPr lang="fr-FR" smtClean="0"/>
+              <a:pPr/>
+              <a:t>10</a:t>
+            </a:fld>
+            <a:endParaRPr lang="fr-FR" dirty="0"/>
+          </a:p>
+        </p:txBody>
+      </p:sp>
+    </p:spTree>
+    <p:extLst>
+      <p:ext uri="{BB962C8B-B14F-4D97-AF65-F5344CB8AC3E}">
+        <p14:creationId xmlns:p14="http://schemas.microsoft.com/office/powerpoint/2010/main" val="2948027405"/>
+      </p:ext>
+    </p:extLst>
+  </p:cSld>
+  <p:clrMapOvr>
+    <a:masterClrMapping/>
+  </p:clrMapOvr>
+</p:sld>
+</file>
+
+<file path=ppt/slides/slide11.xml><?xml version="1.0" encoding="utf-8"?>
 <p:sld xmlns:a="http://schemas.openxmlformats.org/drawingml/2006/main" xmlns:r="http://schemas.openxmlformats.org/officeDocument/2006/relationships" xmlns:p="http://schemas.openxmlformats.org/presentationml/2006/main">
   <p:cSld>
     <p:spTree>
@@ -9302,7 +9427,7 @@
           <a:p>
             <a:fld id="{40743BAD-0FD4-4AFD-913F-F1B3782AF393}" type="slidenum">
               <a:rPr lang="fr-FR" smtClean="0"/>
-              <a:t>10</a:t>
+              <a:t>11</a:t>
             </a:fld>
             <a:endParaRPr lang="fr-FR"/>
           </a:p>
@@ -9321,7 +9446,7 @@
 </p:sld>
 </file>
 
-<file path=ppt/slides/slide11.xml><?xml version="1.0" encoding="utf-8"?>
+<file path=ppt/slides/slide12.xml><?xml version="1.0" encoding="utf-8"?>
 <p:sld xmlns:a="http://schemas.openxmlformats.org/drawingml/2006/main" xmlns:r="http://schemas.openxmlformats.org/officeDocument/2006/relationships" xmlns:p="http://schemas.openxmlformats.org/presentationml/2006/main">
   <p:cSld>
     <p:spTree>
@@ -9432,7 +9557,7 @@
           <a:p>
             <a:fld id="{40743BAD-0FD4-4AFD-913F-F1B3782AF393}" type="slidenum">
               <a:rPr lang="fr-FR" smtClean="0"/>
-              <a:t>11</a:t>
+              <a:t>12</a:t>
             </a:fld>
             <a:endParaRPr lang="fr-FR"/>
           </a:p>
@@ -9451,7 +9576,7 @@
 </p:sld>
 </file>
 
-<file path=ppt/slides/slide12.xml><?xml version="1.0" encoding="utf-8"?>
+<file path=ppt/slides/slide13.xml><?xml version="1.0" encoding="utf-8"?>
 <p:sld xmlns:a="http://schemas.openxmlformats.org/drawingml/2006/main" xmlns:r="http://schemas.openxmlformats.org/officeDocument/2006/relationships" xmlns:p="http://schemas.openxmlformats.org/presentationml/2006/main" show="0">
   <p:cSld>
     <p:spTree>
@@ -9563,7 +9688,7 @@
           <a:p>
             <a:fld id="{40743BAD-0FD4-4AFD-913F-F1B3782AF393}" type="slidenum">
               <a:rPr lang="fr-FR" smtClean="0"/>
-              <a:t>12</a:t>
+              <a:t>13</a:t>
             </a:fld>
             <a:endParaRPr lang="fr-FR"/>
           </a:p>
@@ -9573,118 +9698,6 @@
     <p:extLst>
       <p:ext uri="{BB962C8B-B14F-4D97-AF65-F5344CB8AC3E}">
         <p14:creationId xmlns:p14="http://schemas.microsoft.com/office/powerpoint/2010/main" val="145118700"/>
-      </p:ext>
-    </p:extLst>
-  </p:cSld>
-  <p:clrMapOvr>
-    <a:masterClrMapping/>
-  </p:clrMapOvr>
-</p:sld>
-</file>
-
-<file path=ppt/slides/slide13.xml><?xml version="1.0" encoding="utf-8"?>
-<p:sld xmlns:a="http://schemas.openxmlformats.org/drawingml/2006/main" xmlns:r="http://schemas.openxmlformats.org/officeDocument/2006/relationships" xmlns:p="http://schemas.openxmlformats.org/presentationml/2006/main">
-  <p:cSld>
-    <p:spTree>
-      <p:nvGrpSpPr>
-        <p:cNvPr id="1" name=""/>
-        <p:cNvGrpSpPr/>
-        <p:nvPr/>
-      </p:nvGrpSpPr>
-      <p:grpSpPr>
-        <a:xfrm>
-          <a:off x="0" y="0"/>
-          <a:ext cx="0" cy="0"/>
-          <a:chOff x="0" y="0"/>
-          <a:chExt cx="0" cy="0"/>
-        </a:xfrm>
-      </p:grpSpPr>
-      <p:sp>
-        <p:nvSpPr>
-          <p:cNvPr id="2" name="Titre 1">
-            <a:extLst>
-              <a:ext uri="{FF2B5EF4-FFF2-40B4-BE49-F238E27FC236}">
-                <a16:creationId xmlns:a16="http://schemas.microsoft.com/office/drawing/2014/main" id="{A4657B54-AA24-7066-80DA-0CDBC518717F}"/>
-              </a:ext>
-            </a:extLst>
-          </p:cNvPr>
-          <p:cNvSpPr>
-            <a:spLocks noGrp="1"/>
-          </p:cNvSpPr>
-          <p:nvPr>
-            <p:ph type="title"/>
-          </p:nvPr>
-        </p:nvSpPr>
-        <p:spPr/>
-        <p:txBody>
-          <a:bodyPr/>
-          <a:lstStyle/>
-          <a:p>
-            <a:r>
-              <a:rPr lang="fr-FR" dirty="0"/>
-              <a:t>Prérequis</a:t>
-            </a:r>
-          </a:p>
-        </p:txBody>
-      </p:sp>
-      <p:sp>
-        <p:nvSpPr>
-          <p:cNvPr id="3" name="Espace réservé du contenu 2">
-            <a:extLst>
-              <a:ext uri="{FF2B5EF4-FFF2-40B4-BE49-F238E27FC236}">
-                <a16:creationId xmlns:a16="http://schemas.microsoft.com/office/drawing/2014/main" id="{E013E3C4-B673-022E-905C-ACF95E0E2451}"/>
-              </a:ext>
-            </a:extLst>
-          </p:cNvPr>
-          <p:cNvSpPr>
-            <a:spLocks noGrp="1"/>
-          </p:cNvSpPr>
-          <p:nvPr>
-            <p:ph idx="1"/>
-          </p:nvPr>
-        </p:nvSpPr>
-        <p:spPr/>
-        <p:txBody>
-          <a:bodyPr/>
-          <a:lstStyle/>
-          <a:p>
-            <a:endParaRPr lang="fr-FR" dirty="0"/>
-          </a:p>
-        </p:txBody>
-      </p:sp>
-      <p:sp>
-        <p:nvSpPr>
-          <p:cNvPr id="4" name="Espace réservé du numéro de diapositive 3">
-            <a:extLst>
-              <a:ext uri="{FF2B5EF4-FFF2-40B4-BE49-F238E27FC236}">
-                <a16:creationId xmlns:a16="http://schemas.microsoft.com/office/drawing/2014/main" id="{ABAE06D8-4854-B1BC-D251-6AFBE808D67D}"/>
-              </a:ext>
-            </a:extLst>
-          </p:cNvPr>
-          <p:cNvSpPr>
-            <a:spLocks noGrp="1"/>
-          </p:cNvSpPr>
-          <p:nvPr>
-            <p:ph type="sldNum" sz="quarter" idx="12"/>
-          </p:nvPr>
-        </p:nvSpPr>
-        <p:spPr/>
-        <p:txBody>
-          <a:bodyPr/>
-          <a:lstStyle/>
-          <a:p>
-            <a:fld id="{40743BAD-0FD4-4AFD-913F-F1B3782AF393}" type="slidenum">
-              <a:rPr lang="fr-FR" smtClean="0"/>
-              <a:t>13</a:t>
-            </a:fld>
-            <a:endParaRPr lang="fr-FR"/>
-          </a:p>
-        </p:txBody>
-      </p:sp>
-    </p:spTree>
-    <p:extLst>
-      <p:ext uri="{BB962C8B-B14F-4D97-AF65-F5344CB8AC3E}">
-        <p14:creationId xmlns:p14="http://schemas.microsoft.com/office/powerpoint/2010/main" val="1571382793"/>
       </p:ext>
     </p:extLst>
   </p:cSld>
@@ -9716,6 +9729,118 @@
           <p:cNvPr id="2" name="Titre 1">
             <a:extLst>
               <a:ext uri="{FF2B5EF4-FFF2-40B4-BE49-F238E27FC236}">
+                <a16:creationId xmlns:a16="http://schemas.microsoft.com/office/drawing/2014/main" id="{A4657B54-AA24-7066-80DA-0CDBC518717F}"/>
+              </a:ext>
+            </a:extLst>
+          </p:cNvPr>
+          <p:cNvSpPr>
+            <a:spLocks noGrp="1"/>
+          </p:cNvSpPr>
+          <p:nvPr>
+            <p:ph type="title"/>
+          </p:nvPr>
+        </p:nvSpPr>
+        <p:spPr/>
+        <p:txBody>
+          <a:bodyPr/>
+          <a:lstStyle/>
+          <a:p>
+            <a:r>
+              <a:rPr lang="fr-FR" dirty="0"/>
+              <a:t>Prérequis</a:t>
+            </a:r>
+          </a:p>
+        </p:txBody>
+      </p:sp>
+      <p:sp>
+        <p:nvSpPr>
+          <p:cNvPr id="3" name="Espace réservé du contenu 2">
+            <a:extLst>
+              <a:ext uri="{FF2B5EF4-FFF2-40B4-BE49-F238E27FC236}">
+                <a16:creationId xmlns:a16="http://schemas.microsoft.com/office/drawing/2014/main" id="{E013E3C4-B673-022E-905C-ACF95E0E2451}"/>
+              </a:ext>
+            </a:extLst>
+          </p:cNvPr>
+          <p:cNvSpPr>
+            <a:spLocks noGrp="1"/>
+          </p:cNvSpPr>
+          <p:nvPr>
+            <p:ph idx="1"/>
+          </p:nvPr>
+        </p:nvSpPr>
+        <p:spPr/>
+        <p:txBody>
+          <a:bodyPr/>
+          <a:lstStyle/>
+          <a:p>
+            <a:endParaRPr lang="fr-FR" dirty="0"/>
+          </a:p>
+        </p:txBody>
+      </p:sp>
+      <p:sp>
+        <p:nvSpPr>
+          <p:cNvPr id="4" name="Espace réservé du numéro de diapositive 3">
+            <a:extLst>
+              <a:ext uri="{FF2B5EF4-FFF2-40B4-BE49-F238E27FC236}">
+                <a16:creationId xmlns:a16="http://schemas.microsoft.com/office/drawing/2014/main" id="{ABAE06D8-4854-B1BC-D251-6AFBE808D67D}"/>
+              </a:ext>
+            </a:extLst>
+          </p:cNvPr>
+          <p:cNvSpPr>
+            <a:spLocks noGrp="1"/>
+          </p:cNvSpPr>
+          <p:nvPr>
+            <p:ph type="sldNum" sz="quarter" idx="12"/>
+          </p:nvPr>
+        </p:nvSpPr>
+        <p:spPr/>
+        <p:txBody>
+          <a:bodyPr/>
+          <a:lstStyle/>
+          <a:p>
+            <a:fld id="{40743BAD-0FD4-4AFD-913F-F1B3782AF393}" type="slidenum">
+              <a:rPr lang="fr-FR" smtClean="0"/>
+              <a:t>14</a:t>
+            </a:fld>
+            <a:endParaRPr lang="fr-FR"/>
+          </a:p>
+        </p:txBody>
+      </p:sp>
+    </p:spTree>
+    <p:extLst>
+      <p:ext uri="{BB962C8B-B14F-4D97-AF65-F5344CB8AC3E}">
+        <p14:creationId xmlns:p14="http://schemas.microsoft.com/office/powerpoint/2010/main" val="1571382793"/>
+      </p:ext>
+    </p:extLst>
+  </p:cSld>
+  <p:clrMapOvr>
+    <a:masterClrMapping/>
+  </p:clrMapOvr>
+</p:sld>
+</file>
+
+<file path=ppt/slides/slide15.xml><?xml version="1.0" encoding="utf-8"?>
+<p:sld xmlns:a="http://schemas.openxmlformats.org/drawingml/2006/main" xmlns:r="http://schemas.openxmlformats.org/officeDocument/2006/relationships" xmlns:p="http://schemas.openxmlformats.org/presentationml/2006/main">
+  <p:cSld>
+    <p:spTree>
+      <p:nvGrpSpPr>
+        <p:cNvPr id="1" name=""/>
+        <p:cNvGrpSpPr/>
+        <p:nvPr/>
+      </p:nvGrpSpPr>
+      <p:grpSpPr>
+        <a:xfrm>
+          <a:off x="0" y="0"/>
+          <a:ext cx="0" cy="0"/>
+          <a:chOff x="0" y="0"/>
+          <a:chExt cx="0" cy="0"/>
+        </a:xfrm>
+      </p:grpSpPr>
+      <p:sp>
+        <p:nvSpPr>
+          <p:cNvPr id="2" name="Titre 1">
+            <a:extLst>
+              <a:ext uri="{FF2B5EF4-FFF2-40B4-BE49-F238E27FC236}">
                 <a16:creationId xmlns:a16="http://schemas.microsoft.com/office/drawing/2014/main" id="{D207AE10-0D6E-484C-A4D1-EF01B7DC2F17}"/>
               </a:ext>
             </a:extLst>
@@ -9762,7 +9887,7 @@
           <a:p>
             <a:fld id="{40743BAD-0FD4-4AFD-913F-F1B3782AF393}" type="slidenum">
               <a:rPr lang="fr-FR" smtClean="0"/>
-              <a:t>14</a:t>
+              <a:t>15</a:t>
             </a:fld>
             <a:endParaRPr lang="fr-FR"/>
           </a:p>
@@ -9899,7 +10024,7 @@
 </p:sld>
 </file>
 
-<file path=ppt/slides/slide15.xml><?xml version="1.0" encoding="utf-8"?>
+<file path=ppt/slides/slide16.xml><?xml version="1.0" encoding="utf-8"?>
 <p:sld xmlns:a="http://schemas.openxmlformats.org/drawingml/2006/main" xmlns:r="http://schemas.openxmlformats.org/officeDocument/2006/relationships" xmlns:p="http://schemas.openxmlformats.org/presentationml/2006/main">
   <p:cSld>
     <p:spTree>
@@ -10168,7 +10293,7 @@
           <a:p>
             <a:fld id="{40743BAD-0FD4-4AFD-913F-F1B3782AF393}" type="slidenum">
               <a:rPr lang="fr-FR" smtClean="0"/>
-              <a:t>15</a:t>
+              <a:t>16</a:t>
             </a:fld>
             <a:endParaRPr lang="fr-FR"/>
           </a:p>
@@ -10574,7 +10699,7 @@
 </p:sld>
 </file>
 
-<file path=ppt/slides/slide16.xml><?xml version="1.0" encoding="utf-8"?>
+<file path=ppt/slides/slide17.xml><?xml version="1.0" encoding="utf-8"?>
 <p:sld xmlns:a="http://schemas.openxmlformats.org/drawingml/2006/main" xmlns:r="http://schemas.openxmlformats.org/officeDocument/2006/relationships" xmlns:p="http://schemas.openxmlformats.org/presentationml/2006/main">
   <p:cSld>
     <p:spTree>
@@ -10620,7 +10745,7 @@
           <a:p>
             <a:r>
               <a:rPr lang="fr-FR" dirty="0"/>
-              <a:t>Évaluations</a:t>
+              <a:t>Évaluation des compétences</a:t>
             </a:r>
           </a:p>
         </p:txBody>
@@ -10747,7 +10872,7 @@
           <a:p>
             <a:fld id="{40743BAD-0FD4-4AFD-913F-F1B3782AF393}" type="slidenum">
               <a:rPr lang="fr-FR" smtClean="0"/>
-              <a:t>16</a:t>
+              <a:t>17</a:t>
             </a:fld>
             <a:endParaRPr lang="fr-FR"/>
           </a:p>
@@ -10766,7 +10891,7 @@
 </p:sld>
 </file>
 
-<file path=ppt/slides/slide17.xml><?xml version="1.0" encoding="utf-8"?>
+<file path=ppt/slides/slide18.xml><?xml version="1.0" encoding="utf-8"?>
 <p:sld xmlns:a="http://schemas.openxmlformats.org/drawingml/2006/main" xmlns:r="http://schemas.openxmlformats.org/officeDocument/2006/relationships" xmlns:p="http://schemas.openxmlformats.org/presentationml/2006/main">
   <p:cSld>
     <p:spTree>
@@ -10788,7 +10913,7 @@
           <p:cNvPr id="2" name="Titre 1">
             <a:extLst>
               <a:ext uri="{FF2B5EF4-FFF2-40B4-BE49-F238E27FC236}">
-                <a16:creationId xmlns:a16="http://schemas.microsoft.com/office/drawing/2014/main" id="{5292882A-6A23-7729-8E0C-C2D6342D9873}"/>
+                <a16:creationId xmlns:a16="http://schemas.microsoft.com/office/drawing/2014/main" id="{2A9347A0-48FD-2080-B3D2-20F4730C2540}"/>
               </a:ext>
             </a:extLst>
           </p:cNvPr>
@@ -10806,7 +10931,7 @@
           <a:p>
             <a:r>
               <a:rPr lang="fr-FR" dirty="0"/>
-              <a:t>Séance à caractère expérimental</a:t>
+              <a:t>SCE : Objectifs de la séance</a:t>
             </a:r>
           </a:p>
         </p:txBody>
@@ -10816,7 +10941,7 @@
           <p:cNvPr id="3" name="Espace réservé du contenu 2">
             <a:extLst>
               <a:ext uri="{FF2B5EF4-FFF2-40B4-BE49-F238E27FC236}">
-                <a16:creationId xmlns:a16="http://schemas.microsoft.com/office/drawing/2014/main" id="{2FDDC7E0-F770-9294-DF66-C61EF77503C5}"/>
+                <a16:creationId xmlns:a16="http://schemas.microsoft.com/office/drawing/2014/main" id="{4B15AE46-E577-214F-7643-EFF7FCF7458E}"/>
               </a:ext>
             </a:extLst>
           </p:cNvPr>
@@ -10832,43 +10957,7 @@
           <a:bodyPr/>
           <a:lstStyle/>
           <a:p>
-            <a:r>
-              <a:rPr lang="fr-FR" dirty="0"/>
-              <a:t>Prérequis</a:t>
-            </a:r>
-          </a:p>
-          <a:p>
-            <a:endParaRPr lang="fr-FR" dirty="0"/>
-          </a:p>
-          <a:p>
-            <a:r>
-              <a:rPr lang="fr-FR" dirty="0"/>
-              <a:t>Groupe de combien </a:t>
-            </a:r>
-          </a:p>
-          <a:p>
-            <a:pPr lvl="1"/>
-            <a:r>
-              <a:rPr lang="fr-FR" dirty="0"/>
-              <a:t>Faits </a:t>
-            </a:r>
-            <a:r>
-              <a:rPr lang="fr-FR" dirty="0" err="1"/>
-              <a:t>comments</a:t>
-            </a:r>
-            <a:endParaRPr lang="fr-FR" dirty="0"/>
-          </a:p>
-          <a:p>
-            <a:r>
-              <a:rPr lang="fr-FR" dirty="0"/>
-              <a:t>Type de sujet</a:t>
-            </a:r>
-          </a:p>
-          <a:p>
-            <a:r>
-              <a:rPr lang="fr-FR" dirty="0"/>
-              <a:t>Matériel</a:t>
-            </a:r>
+            <a:endParaRPr lang="fr-FR"/>
           </a:p>
         </p:txBody>
       </p:sp>
@@ -10877,183 +10966,7 @@
           <p:cNvPr id="4" name="Espace réservé du numéro de diapositive 3">
             <a:extLst>
               <a:ext uri="{FF2B5EF4-FFF2-40B4-BE49-F238E27FC236}">
-                <a16:creationId xmlns:a16="http://schemas.microsoft.com/office/drawing/2014/main" id="{E33CE686-4F3D-7869-6CC3-4ABFDD7ED954}"/>
-              </a:ext>
-            </a:extLst>
-          </p:cNvPr>
-          <p:cNvSpPr>
-            <a:spLocks noGrp="1"/>
-          </p:cNvSpPr>
-          <p:nvPr>
-            <p:ph type="sldNum" sz="quarter" idx="12"/>
-          </p:nvPr>
-        </p:nvSpPr>
-        <p:spPr/>
-        <p:txBody>
-          <a:bodyPr/>
-          <a:lstStyle/>
-          <a:p>
-            <a:fld id="{40743BAD-0FD4-4AFD-913F-F1B3782AF393}" type="slidenum">
-              <a:rPr lang="fr-FR" smtClean="0"/>
-              <a:t>17</a:t>
-            </a:fld>
-            <a:endParaRPr lang="fr-FR"/>
-          </a:p>
-        </p:txBody>
-      </p:sp>
-      <p:sp>
-        <p:nvSpPr>
-          <p:cNvPr id="6" name="ZoneTexte 5">
-            <a:extLst>
-              <a:ext uri="{FF2B5EF4-FFF2-40B4-BE49-F238E27FC236}">
-                <a16:creationId xmlns:a16="http://schemas.microsoft.com/office/drawing/2014/main" id="{85027EFF-7006-3DCD-FE60-0325BE8738C8}"/>
-              </a:ext>
-            </a:extLst>
-          </p:cNvPr>
-          <p:cNvSpPr txBox="1"/>
-          <p:nvPr/>
-        </p:nvSpPr>
-        <p:spPr>
-          <a:xfrm>
-            <a:off x="1371600" y="1488217"/>
-            <a:ext cx="8537274" cy="646331"/>
-          </a:xfrm>
-          <a:prstGeom prst="rect">
-            <a:avLst/>
-          </a:prstGeom>
-          <a:noFill/>
-        </p:spPr>
-        <p:txBody>
-          <a:bodyPr wrap="none" rtlCol="0">
-            <a:spAutoFit/>
-          </a:bodyPr>
-          <a:lstStyle/>
-          <a:p>
-            <a:r>
-              <a:rPr lang="fr-FR" dirty="0"/>
-              <a:t>Problématique de la séance : Comment réaliser des opérations arithmétiques à l’aide </a:t>
-            </a:r>
-          </a:p>
-          <a:p>
-            <a:r>
-              <a:rPr lang="fr-FR" dirty="0"/>
-              <a:t>de fonctions logiques</a:t>
-            </a:r>
-          </a:p>
-        </p:txBody>
-      </p:sp>
-    </p:spTree>
-    <p:extLst>
-      <p:ext uri="{BB962C8B-B14F-4D97-AF65-F5344CB8AC3E}">
-        <p14:creationId xmlns:p14="http://schemas.microsoft.com/office/powerpoint/2010/main" val="3616338366"/>
-      </p:ext>
-    </p:extLst>
-  </p:cSld>
-  <p:clrMapOvr>
-    <a:masterClrMapping/>
-  </p:clrMapOvr>
-</p:sld>
-</file>
-
-<file path=ppt/slides/slide18.xml><?xml version="1.0" encoding="utf-8"?>
-<p:sld xmlns:a="http://schemas.openxmlformats.org/drawingml/2006/main" xmlns:r="http://schemas.openxmlformats.org/officeDocument/2006/relationships" xmlns:p="http://schemas.openxmlformats.org/presentationml/2006/main">
-  <p:cSld>
-    <p:spTree>
-      <p:nvGrpSpPr>
-        <p:cNvPr id="1" name="">
-          <a:extLst>
-            <a:ext uri="{FF2B5EF4-FFF2-40B4-BE49-F238E27FC236}">
-              <a16:creationId xmlns:a16="http://schemas.microsoft.com/office/drawing/2014/main" id="{6407EBB0-3111-E0C4-0AC5-5FB29251A141}"/>
-            </a:ext>
-          </a:extLst>
-        </p:cNvPr>
-        <p:cNvGrpSpPr/>
-        <p:nvPr/>
-      </p:nvGrpSpPr>
-      <p:grpSpPr>
-        <a:xfrm>
-          <a:off x="0" y="0"/>
-          <a:ext cx="0" cy="0"/>
-          <a:chOff x="0" y="0"/>
-          <a:chExt cx="0" cy="0"/>
-        </a:xfrm>
-      </p:grpSpPr>
-      <p:sp>
-        <p:nvSpPr>
-          <p:cNvPr id="2" name="Titre 1">
-            <a:extLst>
-              <a:ext uri="{FF2B5EF4-FFF2-40B4-BE49-F238E27FC236}">
-                <a16:creationId xmlns:a16="http://schemas.microsoft.com/office/drawing/2014/main" id="{49EC1A5A-2E17-4CDB-7D99-A42971EA67E3}"/>
-              </a:ext>
-            </a:extLst>
-          </p:cNvPr>
-          <p:cNvSpPr>
-            <a:spLocks noGrp="1"/>
-          </p:cNvSpPr>
-          <p:nvPr>
-            <p:ph type="title"/>
-          </p:nvPr>
-        </p:nvSpPr>
-        <p:spPr/>
-        <p:txBody>
-          <a:bodyPr/>
-          <a:lstStyle/>
-          <a:p>
-            <a:r>
-              <a:rPr lang="fr-FR" dirty="0"/>
-              <a:t>Séance à caractère expérimental</a:t>
-            </a:r>
-          </a:p>
-        </p:txBody>
-      </p:sp>
-      <p:sp>
-        <p:nvSpPr>
-          <p:cNvPr id="3" name="Espace réservé du contenu 2">
-            <a:extLst>
-              <a:ext uri="{FF2B5EF4-FFF2-40B4-BE49-F238E27FC236}">
-                <a16:creationId xmlns:a16="http://schemas.microsoft.com/office/drawing/2014/main" id="{0C6A0B65-58B3-D32E-462D-503A242A8CFE}"/>
-              </a:ext>
-            </a:extLst>
-          </p:cNvPr>
-          <p:cNvSpPr>
-            <a:spLocks noGrp="1"/>
-          </p:cNvSpPr>
-          <p:nvPr>
-            <p:ph idx="1"/>
-          </p:nvPr>
-        </p:nvSpPr>
-        <p:spPr/>
-        <p:txBody>
-          <a:bodyPr/>
-          <a:lstStyle/>
-          <a:p>
-            <a:r>
-              <a:rPr lang="fr-FR" dirty="0"/>
-              <a:t>Organisation temporelle</a:t>
-            </a:r>
-          </a:p>
-          <a:p>
-            <a:pPr lvl="1"/>
-            <a:r>
-              <a:rPr lang="fr-FR" dirty="0"/>
-              <a:t>15 min : Répartition des groupes, choix du sujet et mise en place</a:t>
-            </a:r>
-          </a:p>
-          <a:p>
-            <a:pPr lvl="1"/>
-            <a:r>
-              <a:rPr lang="fr-FR" dirty="0"/>
-              <a:t>13 min</a:t>
-            </a:r>
-          </a:p>
-        </p:txBody>
-      </p:sp>
-      <p:sp>
-        <p:nvSpPr>
-          <p:cNvPr id="4" name="Espace réservé du numéro de diapositive 3">
-            <a:extLst>
-              <a:ext uri="{FF2B5EF4-FFF2-40B4-BE49-F238E27FC236}">
-                <a16:creationId xmlns:a16="http://schemas.microsoft.com/office/drawing/2014/main" id="{428547EC-05CE-65AA-C62D-FB695A7EE514}"/>
+                <a16:creationId xmlns:a16="http://schemas.microsoft.com/office/drawing/2014/main" id="{7325C6C9-6C2E-E2B9-3F51-BA3D661513A7}"/>
               </a:ext>
             </a:extLst>
           </p:cNvPr>
@@ -11080,7 +10993,7 @@
     </p:spTree>
     <p:extLst>
       <p:ext uri="{BB962C8B-B14F-4D97-AF65-F5344CB8AC3E}">
-        <p14:creationId xmlns:p14="http://schemas.microsoft.com/office/powerpoint/2010/main" val="3429497297"/>
+        <p14:creationId xmlns:p14="http://schemas.microsoft.com/office/powerpoint/2010/main" val="1555774064"/>
       </p:ext>
     </p:extLst>
   </p:cSld>
@@ -11112,7 +11025,7 @@
           <p:cNvPr id="2" name="Titre 1">
             <a:extLst>
               <a:ext uri="{FF2B5EF4-FFF2-40B4-BE49-F238E27FC236}">
-                <a16:creationId xmlns:a16="http://schemas.microsoft.com/office/drawing/2014/main" id="{6BBFA69D-2D73-D6D6-ECCF-2EC1A15B15CB}"/>
+                <a16:creationId xmlns:a16="http://schemas.microsoft.com/office/drawing/2014/main" id="{5292882A-6A23-7729-8E0C-C2D6342D9873}"/>
               </a:ext>
             </a:extLst>
           </p:cNvPr>
@@ -11130,7 +11043,7 @@
           <a:p>
             <a:r>
               <a:rPr lang="fr-FR" dirty="0"/>
-              <a:t>Conclusion</a:t>
+              <a:t>SCE : Modalités</a:t>
             </a:r>
           </a:p>
         </p:txBody>
@@ -11140,7 +11053,7 @@
           <p:cNvPr id="3" name="Espace réservé du contenu 2">
             <a:extLst>
               <a:ext uri="{FF2B5EF4-FFF2-40B4-BE49-F238E27FC236}">
-                <a16:creationId xmlns:a16="http://schemas.microsoft.com/office/drawing/2014/main" id="{F2B9CA79-BC79-9CA9-057B-8FC9C2A8B057}"/>
+                <a16:creationId xmlns:a16="http://schemas.microsoft.com/office/drawing/2014/main" id="{2FDDC7E0-F770-9294-DF66-C61EF77503C5}"/>
               </a:ext>
             </a:extLst>
           </p:cNvPr>
@@ -11158,7 +11071,7 @@
           <a:p>
             <a:r>
               <a:rPr lang="fr-FR" dirty="0"/>
-              <a:t>Formation</a:t>
+              <a:t>Prérequis</a:t>
             </a:r>
           </a:p>
           <a:p>
@@ -11167,25 +11080,31 @@
           <a:p>
             <a:r>
               <a:rPr lang="fr-FR" dirty="0"/>
-              <a:t>Cours</a:t>
-            </a:r>
-          </a:p>
-          <a:p>
+              <a:t>Groupe de combien </a:t>
+            </a:r>
+          </a:p>
+          <a:p>
+            <a:pPr lvl="1"/>
+            <a:r>
+              <a:rPr lang="fr-FR" dirty="0"/>
+              <a:t>Faits </a:t>
+            </a:r>
+            <a:r>
+              <a:rPr lang="fr-FR" dirty="0" err="1"/>
+              <a:t>comments</a:t>
+            </a:r>
             <a:endParaRPr lang="fr-FR" dirty="0"/>
           </a:p>
           <a:p>
             <a:r>
               <a:rPr lang="fr-FR" dirty="0"/>
-              <a:t>Support utilisé</a:t>
-            </a:r>
-          </a:p>
-          <a:p>
-            <a:endParaRPr lang="fr-FR" dirty="0"/>
+              <a:t>Type de sujet</a:t>
+            </a:r>
           </a:p>
           <a:p>
             <a:r>
               <a:rPr lang="fr-FR" dirty="0"/>
-              <a:t>Sa prise en main</a:t>
+              <a:t>Matériel</a:t>
             </a:r>
           </a:p>
         </p:txBody>
@@ -11195,7 +11114,7 @@
           <p:cNvPr id="4" name="Espace réservé du numéro de diapositive 3">
             <a:extLst>
               <a:ext uri="{FF2B5EF4-FFF2-40B4-BE49-F238E27FC236}">
-                <a16:creationId xmlns:a16="http://schemas.microsoft.com/office/drawing/2014/main" id="{68A26825-C757-2957-6098-D92C01295D1E}"/>
+                <a16:creationId xmlns:a16="http://schemas.microsoft.com/office/drawing/2014/main" id="{E33CE686-4F3D-7869-6CC3-4ABFDD7ED954}"/>
               </a:ext>
             </a:extLst>
           </p:cNvPr>
@@ -11219,10 +11138,51 @@
           </a:p>
         </p:txBody>
       </p:sp>
+      <p:sp>
+        <p:nvSpPr>
+          <p:cNvPr id="6" name="ZoneTexte 5">
+            <a:extLst>
+              <a:ext uri="{FF2B5EF4-FFF2-40B4-BE49-F238E27FC236}">
+                <a16:creationId xmlns:a16="http://schemas.microsoft.com/office/drawing/2014/main" id="{85027EFF-7006-3DCD-FE60-0325BE8738C8}"/>
+              </a:ext>
+            </a:extLst>
+          </p:cNvPr>
+          <p:cNvSpPr txBox="1"/>
+          <p:nvPr/>
+        </p:nvSpPr>
+        <p:spPr>
+          <a:xfrm>
+            <a:off x="1371600" y="1488217"/>
+            <a:ext cx="8537274" cy="646331"/>
+          </a:xfrm>
+          <a:prstGeom prst="rect">
+            <a:avLst/>
+          </a:prstGeom>
+          <a:noFill/>
+        </p:spPr>
+        <p:txBody>
+          <a:bodyPr wrap="none" rtlCol="0">
+            <a:spAutoFit/>
+          </a:bodyPr>
+          <a:lstStyle/>
+          <a:p>
+            <a:r>
+              <a:rPr lang="fr-FR" dirty="0"/>
+              <a:t>Problématique de la séance : Comment réaliser des opérations arithmétiques à l’aide </a:t>
+            </a:r>
+          </a:p>
+          <a:p>
+            <a:r>
+              <a:rPr lang="fr-FR" dirty="0"/>
+              <a:t>de fonctions logiques</a:t>
+            </a:r>
+          </a:p>
+        </p:txBody>
+      </p:sp>
     </p:spTree>
     <p:extLst>
       <p:ext uri="{BB962C8B-B14F-4D97-AF65-F5344CB8AC3E}">
-        <p14:creationId xmlns:p14="http://schemas.microsoft.com/office/powerpoint/2010/main" val="3538785201"/>
+        <p14:creationId xmlns:p14="http://schemas.microsoft.com/office/powerpoint/2010/main" val="3616338366"/>
       </p:ext>
     </p:extLst>
   </p:cSld>
@@ -11390,6 +11350,395 @@
       </p:grpSpPr>
       <p:sp>
         <p:nvSpPr>
+          <p:cNvPr id="2" name="Titre 1">
+            <a:extLst>
+              <a:ext uri="{FF2B5EF4-FFF2-40B4-BE49-F238E27FC236}">
+                <a16:creationId xmlns:a16="http://schemas.microsoft.com/office/drawing/2014/main" id="{010455FF-8118-BCB6-7CE3-20F47C23B897}"/>
+              </a:ext>
+            </a:extLst>
+          </p:cNvPr>
+          <p:cNvSpPr>
+            <a:spLocks noGrp="1"/>
+          </p:cNvSpPr>
+          <p:nvPr>
+            <p:ph type="title"/>
+          </p:nvPr>
+        </p:nvSpPr>
+        <p:spPr/>
+        <p:txBody>
+          <a:bodyPr/>
+          <a:lstStyle/>
+          <a:p>
+            <a:r>
+              <a:rPr lang="fr-FR" dirty="0"/>
+              <a:t>SCE : Expérimentation réalisée par les élèves</a:t>
+            </a:r>
+          </a:p>
+        </p:txBody>
+      </p:sp>
+      <p:sp>
+        <p:nvSpPr>
+          <p:cNvPr id="3" name="Espace réservé du contenu 2">
+            <a:extLst>
+              <a:ext uri="{FF2B5EF4-FFF2-40B4-BE49-F238E27FC236}">
+                <a16:creationId xmlns:a16="http://schemas.microsoft.com/office/drawing/2014/main" id="{279CD0B0-C3E7-E52F-5856-28656EB34091}"/>
+              </a:ext>
+            </a:extLst>
+          </p:cNvPr>
+          <p:cNvSpPr>
+            <a:spLocks noGrp="1"/>
+          </p:cNvSpPr>
+          <p:nvPr>
+            <p:ph idx="1"/>
+          </p:nvPr>
+        </p:nvSpPr>
+        <p:spPr/>
+        <p:txBody>
+          <a:bodyPr/>
+          <a:lstStyle/>
+          <a:p>
+            <a:endParaRPr lang="fr-FR"/>
+          </a:p>
+        </p:txBody>
+      </p:sp>
+      <p:sp>
+        <p:nvSpPr>
+          <p:cNvPr id="4" name="Espace réservé du numéro de diapositive 3">
+            <a:extLst>
+              <a:ext uri="{FF2B5EF4-FFF2-40B4-BE49-F238E27FC236}">
+                <a16:creationId xmlns:a16="http://schemas.microsoft.com/office/drawing/2014/main" id="{C4A57807-BE4A-1C41-84DC-D79D5AEE56C6}"/>
+              </a:ext>
+            </a:extLst>
+          </p:cNvPr>
+          <p:cNvSpPr>
+            <a:spLocks noGrp="1"/>
+          </p:cNvSpPr>
+          <p:nvPr>
+            <p:ph type="sldNum" sz="quarter" idx="12"/>
+          </p:nvPr>
+        </p:nvSpPr>
+        <p:spPr/>
+        <p:txBody>
+          <a:bodyPr/>
+          <a:lstStyle/>
+          <a:p>
+            <a:fld id="{40743BAD-0FD4-4AFD-913F-F1B3782AF393}" type="slidenum">
+              <a:rPr lang="fr-FR" smtClean="0"/>
+              <a:t>20</a:t>
+            </a:fld>
+            <a:endParaRPr lang="fr-FR"/>
+          </a:p>
+        </p:txBody>
+      </p:sp>
+    </p:spTree>
+    <p:extLst>
+      <p:ext uri="{BB962C8B-B14F-4D97-AF65-F5344CB8AC3E}">
+        <p14:creationId xmlns:p14="http://schemas.microsoft.com/office/powerpoint/2010/main" val="3726188143"/>
+      </p:ext>
+    </p:extLst>
+  </p:cSld>
+  <p:clrMapOvr>
+    <a:masterClrMapping/>
+  </p:clrMapOvr>
+</p:sld>
+</file>
+
+<file path=ppt/slides/slide21.xml><?xml version="1.0" encoding="utf-8"?>
+<p:sld xmlns:a="http://schemas.openxmlformats.org/drawingml/2006/main" xmlns:r="http://schemas.openxmlformats.org/officeDocument/2006/relationships" xmlns:p="http://schemas.openxmlformats.org/presentationml/2006/main">
+  <p:cSld>
+    <p:spTree>
+      <p:nvGrpSpPr>
+        <p:cNvPr id="1" name="">
+          <a:extLst>
+            <a:ext uri="{FF2B5EF4-FFF2-40B4-BE49-F238E27FC236}">
+              <a16:creationId xmlns:a16="http://schemas.microsoft.com/office/drawing/2014/main" id="{6407EBB0-3111-E0C4-0AC5-5FB29251A141}"/>
+            </a:ext>
+          </a:extLst>
+        </p:cNvPr>
+        <p:cNvGrpSpPr/>
+        <p:nvPr/>
+      </p:nvGrpSpPr>
+      <p:grpSpPr>
+        <a:xfrm>
+          <a:off x="0" y="0"/>
+          <a:ext cx="0" cy="0"/>
+          <a:chOff x="0" y="0"/>
+          <a:chExt cx="0" cy="0"/>
+        </a:xfrm>
+      </p:grpSpPr>
+      <p:sp>
+        <p:nvSpPr>
+          <p:cNvPr id="2" name="Titre 1">
+            <a:extLst>
+              <a:ext uri="{FF2B5EF4-FFF2-40B4-BE49-F238E27FC236}">
+                <a16:creationId xmlns:a16="http://schemas.microsoft.com/office/drawing/2014/main" id="{49EC1A5A-2E17-4CDB-7D99-A42971EA67E3}"/>
+              </a:ext>
+            </a:extLst>
+          </p:cNvPr>
+          <p:cNvSpPr>
+            <a:spLocks noGrp="1"/>
+          </p:cNvSpPr>
+          <p:nvPr>
+            <p:ph type="title"/>
+          </p:nvPr>
+        </p:nvSpPr>
+        <p:spPr/>
+        <p:txBody>
+          <a:bodyPr/>
+          <a:lstStyle/>
+          <a:p>
+            <a:r>
+              <a:rPr lang="fr-FR" dirty="0"/>
+              <a:t>SCE : Enchainement des activités</a:t>
+            </a:r>
+          </a:p>
+        </p:txBody>
+      </p:sp>
+      <p:sp>
+        <p:nvSpPr>
+          <p:cNvPr id="3" name="Espace réservé du contenu 2">
+            <a:extLst>
+              <a:ext uri="{FF2B5EF4-FFF2-40B4-BE49-F238E27FC236}">
+                <a16:creationId xmlns:a16="http://schemas.microsoft.com/office/drawing/2014/main" id="{0C6A0B65-58B3-D32E-462D-503A242A8CFE}"/>
+              </a:ext>
+            </a:extLst>
+          </p:cNvPr>
+          <p:cNvSpPr>
+            <a:spLocks noGrp="1"/>
+          </p:cNvSpPr>
+          <p:nvPr>
+            <p:ph idx="1"/>
+          </p:nvPr>
+        </p:nvSpPr>
+        <p:spPr/>
+        <p:txBody>
+          <a:bodyPr/>
+          <a:lstStyle/>
+          <a:p>
+            <a:r>
+              <a:rPr lang="fr-FR" dirty="0"/>
+              <a:t>Enchainement </a:t>
+            </a:r>
+          </a:p>
+          <a:p>
+            <a:pPr lvl="1"/>
+            <a:r>
+              <a:rPr lang="fr-FR" dirty="0"/>
+              <a:t>15 min : Répartition des groupes, choix du sujet et mise en place</a:t>
+            </a:r>
+          </a:p>
+          <a:p>
+            <a:pPr lvl="1"/>
+            <a:r>
+              <a:rPr lang="fr-FR" dirty="0"/>
+              <a:t>13 min</a:t>
+            </a:r>
+          </a:p>
+        </p:txBody>
+      </p:sp>
+      <p:sp>
+        <p:nvSpPr>
+          <p:cNvPr id="4" name="Espace réservé du numéro de diapositive 3">
+            <a:extLst>
+              <a:ext uri="{FF2B5EF4-FFF2-40B4-BE49-F238E27FC236}">
+                <a16:creationId xmlns:a16="http://schemas.microsoft.com/office/drawing/2014/main" id="{428547EC-05CE-65AA-C62D-FB695A7EE514}"/>
+              </a:ext>
+            </a:extLst>
+          </p:cNvPr>
+          <p:cNvSpPr>
+            <a:spLocks noGrp="1"/>
+          </p:cNvSpPr>
+          <p:nvPr>
+            <p:ph type="sldNum" sz="quarter" idx="12"/>
+          </p:nvPr>
+        </p:nvSpPr>
+        <p:spPr/>
+        <p:txBody>
+          <a:bodyPr/>
+          <a:lstStyle/>
+          <a:p>
+            <a:fld id="{40743BAD-0FD4-4AFD-913F-F1B3782AF393}" type="slidenum">
+              <a:rPr lang="fr-FR" smtClean="0"/>
+              <a:t>21</a:t>
+            </a:fld>
+            <a:endParaRPr lang="fr-FR"/>
+          </a:p>
+        </p:txBody>
+      </p:sp>
+    </p:spTree>
+    <p:extLst>
+      <p:ext uri="{BB962C8B-B14F-4D97-AF65-F5344CB8AC3E}">
+        <p14:creationId xmlns:p14="http://schemas.microsoft.com/office/powerpoint/2010/main" val="3429497297"/>
+      </p:ext>
+    </p:extLst>
+  </p:cSld>
+  <p:clrMapOvr>
+    <a:masterClrMapping/>
+  </p:clrMapOvr>
+</p:sld>
+</file>
+
+<file path=ppt/slides/slide22.xml><?xml version="1.0" encoding="utf-8"?>
+<p:sld xmlns:a="http://schemas.openxmlformats.org/drawingml/2006/main" xmlns:r="http://schemas.openxmlformats.org/officeDocument/2006/relationships" xmlns:p="http://schemas.openxmlformats.org/presentationml/2006/main">
+  <p:cSld>
+    <p:spTree>
+      <p:nvGrpSpPr>
+        <p:cNvPr id="1" name=""/>
+        <p:cNvGrpSpPr/>
+        <p:nvPr/>
+      </p:nvGrpSpPr>
+      <p:grpSpPr>
+        <a:xfrm>
+          <a:off x="0" y="0"/>
+          <a:ext cx="0" cy="0"/>
+          <a:chOff x="0" y="0"/>
+          <a:chExt cx="0" cy="0"/>
+        </a:xfrm>
+      </p:grpSpPr>
+      <p:sp>
+        <p:nvSpPr>
+          <p:cNvPr id="2" name="Titre 1">
+            <a:extLst>
+              <a:ext uri="{FF2B5EF4-FFF2-40B4-BE49-F238E27FC236}">
+                <a16:creationId xmlns:a16="http://schemas.microsoft.com/office/drawing/2014/main" id="{6BBFA69D-2D73-D6D6-ECCF-2EC1A15B15CB}"/>
+              </a:ext>
+            </a:extLst>
+          </p:cNvPr>
+          <p:cNvSpPr>
+            <a:spLocks noGrp="1"/>
+          </p:cNvSpPr>
+          <p:nvPr>
+            <p:ph type="title"/>
+          </p:nvPr>
+        </p:nvSpPr>
+        <p:spPr/>
+        <p:txBody>
+          <a:bodyPr/>
+          <a:lstStyle/>
+          <a:p>
+            <a:r>
+              <a:rPr lang="fr-FR" dirty="0"/>
+              <a:t>Conclusion</a:t>
+            </a:r>
+          </a:p>
+        </p:txBody>
+      </p:sp>
+      <p:sp>
+        <p:nvSpPr>
+          <p:cNvPr id="3" name="Espace réservé du contenu 2">
+            <a:extLst>
+              <a:ext uri="{FF2B5EF4-FFF2-40B4-BE49-F238E27FC236}">
+                <a16:creationId xmlns:a16="http://schemas.microsoft.com/office/drawing/2014/main" id="{F2B9CA79-BC79-9CA9-057B-8FC9C2A8B057}"/>
+              </a:ext>
+            </a:extLst>
+          </p:cNvPr>
+          <p:cNvSpPr>
+            <a:spLocks noGrp="1"/>
+          </p:cNvSpPr>
+          <p:nvPr>
+            <p:ph idx="1"/>
+          </p:nvPr>
+        </p:nvSpPr>
+        <p:spPr/>
+        <p:txBody>
+          <a:bodyPr/>
+          <a:lstStyle/>
+          <a:p>
+            <a:r>
+              <a:rPr lang="fr-FR" dirty="0"/>
+              <a:t>Formation</a:t>
+            </a:r>
+          </a:p>
+          <a:p>
+            <a:endParaRPr lang="fr-FR" dirty="0"/>
+          </a:p>
+          <a:p>
+            <a:r>
+              <a:rPr lang="fr-FR" dirty="0"/>
+              <a:t>Cours</a:t>
+            </a:r>
+          </a:p>
+          <a:p>
+            <a:endParaRPr lang="fr-FR" dirty="0"/>
+          </a:p>
+          <a:p>
+            <a:r>
+              <a:rPr lang="fr-FR" dirty="0"/>
+              <a:t>Support utilisé</a:t>
+            </a:r>
+          </a:p>
+          <a:p>
+            <a:endParaRPr lang="fr-FR" dirty="0"/>
+          </a:p>
+          <a:p>
+            <a:r>
+              <a:rPr lang="fr-FR" dirty="0"/>
+              <a:t>Sa prise en main</a:t>
+            </a:r>
+          </a:p>
+        </p:txBody>
+      </p:sp>
+      <p:sp>
+        <p:nvSpPr>
+          <p:cNvPr id="4" name="Espace réservé du numéro de diapositive 3">
+            <a:extLst>
+              <a:ext uri="{FF2B5EF4-FFF2-40B4-BE49-F238E27FC236}">
+                <a16:creationId xmlns:a16="http://schemas.microsoft.com/office/drawing/2014/main" id="{68A26825-C757-2957-6098-D92C01295D1E}"/>
+              </a:ext>
+            </a:extLst>
+          </p:cNvPr>
+          <p:cNvSpPr>
+            <a:spLocks noGrp="1"/>
+          </p:cNvSpPr>
+          <p:nvPr>
+            <p:ph type="sldNum" sz="quarter" idx="12"/>
+          </p:nvPr>
+        </p:nvSpPr>
+        <p:spPr/>
+        <p:txBody>
+          <a:bodyPr/>
+          <a:lstStyle/>
+          <a:p>
+            <a:fld id="{40743BAD-0FD4-4AFD-913F-F1B3782AF393}" type="slidenum">
+              <a:rPr lang="fr-FR" smtClean="0"/>
+              <a:t>22</a:t>
+            </a:fld>
+            <a:endParaRPr lang="fr-FR"/>
+          </a:p>
+        </p:txBody>
+      </p:sp>
+    </p:spTree>
+    <p:extLst>
+      <p:ext uri="{BB962C8B-B14F-4D97-AF65-F5344CB8AC3E}">
+        <p14:creationId xmlns:p14="http://schemas.microsoft.com/office/powerpoint/2010/main" val="3538785201"/>
+      </p:ext>
+    </p:extLst>
+  </p:cSld>
+  <p:clrMapOvr>
+    <a:masterClrMapping/>
+  </p:clrMapOvr>
+</p:sld>
+</file>
+
+<file path=ppt/slides/slide23.xml><?xml version="1.0" encoding="utf-8"?>
+<p:sld xmlns:a="http://schemas.openxmlformats.org/drawingml/2006/main" xmlns:r="http://schemas.openxmlformats.org/officeDocument/2006/relationships" xmlns:p="http://schemas.openxmlformats.org/presentationml/2006/main">
+  <p:cSld>
+    <p:spTree>
+      <p:nvGrpSpPr>
+        <p:cNvPr id="1" name=""/>
+        <p:cNvGrpSpPr/>
+        <p:nvPr/>
+      </p:nvGrpSpPr>
+      <p:grpSpPr>
+        <a:xfrm>
+          <a:off x="0" y="0"/>
+          <a:ext cx="0" cy="0"/>
+          <a:chOff x="0" y="0"/>
+          <a:chExt cx="0" cy="0"/>
+        </a:xfrm>
+      </p:grpSpPr>
+      <p:sp>
+        <p:nvSpPr>
           <p:cNvPr id="5" name="Titre 4">
             <a:extLst>
               <a:ext uri="{FF2B5EF4-FFF2-40B4-BE49-F238E27FC236}">
@@ -11464,7 +11813,7 @@
           <a:p>
             <a:fld id="{40743BAD-0FD4-4AFD-913F-F1B3782AF393}" type="slidenum">
               <a:rPr lang="fr-FR" smtClean="0"/>
-              <a:t>20</a:t>
+              <a:t>23</a:t>
             </a:fld>
             <a:endParaRPr lang="fr-FR"/>
           </a:p>
@@ -11488,7 +11837,13 @@
   <p:cSld>
     <p:spTree>
       <p:nvGrpSpPr>
-        <p:cNvPr id="1" name=""/>
+        <p:cNvPr id="1" name="">
+          <a:extLst>
+            <a:ext uri="{FF2B5EF4-FFF2-40B4-BE49-F238E27FC236}">
+              <a16:creationId xmlns:a16="http://schemas.microsoft.com/office/drawing/2014/main" id="{9D4FF934-A427-4BE6-DEC5-459168F24A0F}"/>
+            </a:ext>
+          </a:extLst>
+        </p:cNvPr>
         <p:cNvGrpSpPr/>
         <p:nvPr/>
       </p:nvGrpSpPr>
@@ -11502,10 +11857,10 @@
       </p:grpSpPr>
       <p:sp>
         <p:nvSpPr>
-          <p:cNvPr id="2" name="Titre 1">
+          <p:cNvPr id="5" name="Titre 4">
             <a:extLst>
               <a:ext uri="{FF2B5EF4-FFF2-40B4-BE49-F238E27FC236}">
-                <a16:creationId xmlns:a16="http://schemas.microsoft.com/office/drawing/2014/main" id="{09A23A54-C0BF-168C-902F-A4032063C6C1}"/>
+                <a16:creationId xmlns:a16="http://schemas.microsoft.com/office/drawing/2014/main" id="{94024539-55A2-2D8D-59C6-085CE61829BE}"/>
               </a:ext>
             </a:extLst>
           </p:cNvPr>
@@ -11518,22 +11873,24 @@
         </p:nvSpPr>
         <p:spPr/>
         <p:txBody>
-          <a:bodyPr/>
+          <a:bodyPr>
+            <a:normAutofit/>
+          </a:bodyPr>
           <a:lstStyle/>
           <a:p>
             <a:r>
               <a:rPr lang="fr-FR" dirty="0"/>
-              <a:t>Système global</a:t>
-            </a:r>
-          </a:p>
-        </p:txBody>
-      </p:sp>
-      <p:sp>
-        <p:nvSpPr>
-          <p:cNvPr id="3" name="Espace réservé du contenu 2">
+              <a:t>DESCRIPTION Du système</a:t>
+            </a:r>
+          </a:p>
+        </p:txBody>
+      </p:sp>
+      <p:sp>
+        <p:nvSpPr>
+          <p:cNvPr id="6" name="Espace réservé du texte 5">
             <a:extLst>
               <a:ext uri="{FF2B5EF4-FFF2-40B4-BE49-F238E27FC236}">
-                <a16:creationId xmlns:a16="http://schemas.microsoft.com/office/drawing/2014/main" id="{6D7D4A73-6C3F-5E24-329E-5775875616E2}"/>
+                <a16:creationId xmlns:a16="http://schemas.microsoft.com/office/drawing/2014/main" id="{19C307F1-7AA0-E855-4B16-66773A49E11B}"/>
               </a:ext>
             </a:extLst>
           </p:cNvPr>
@@ -11541,7 +11898,7 @@
             <a:spLocks noGrp="1"/>
           </p:cNvSpPr>
           <p:nvPr>
-            <p:ph idx="1"/>
+            <p:ph type="body" idx="1"/>
           </p:nvPr>
         </p:nvSpPr>
         <p:spPr/>
@@ -11558,7 +11915,7 @@
           <p:cNvPr id="4" name="Espace réservé du numéro de diapositive 3">
             <a:extLst>
               <a:ext uri="{FF2B5EF4-FFF2-40B4-BE49-F238E27FC236}">
-                <a16:creationId xmlns:a16="http://schemas.microsoft.com/office/drawing/2014/main" id="{4F23FC63-172B-2BC0-EF46-EF974F675A60}"/>
+                <a16:creationId xmlns:a16="http://schemas.microsoft.com/office/drawing/2014/main" id="{467E4559-4191-C7FD-59C2-1B9EBFB8A91F}"/>
               </a:ext>
             </a:extLst>
           </p:cNvPr>
@@ -11566,7 +11923,7 @@
             <a:spLocks noGrp="1"/>
           </p:cNvSpPr>
           <p:nvPr>
-            <p:ph type="sldNum" sz="quarter" idx="12"/>
+            <p:ph type="sldNum" sz="quarter" idx="4"/>
           </p:nvPr>
         </p:nvSpPr>
         <p:spPr/>
@@ -11585,7 +11942,7 @@
     </p:spTree>
     <p:extLst>
       <p:ext uri="{BB962C8B-B14F-4D97-AF65-F5344CB8AC3E}">
-        <p14:creationId xmlns:p14="http://schemas.microsoft.com/office/powerpoint/2010/main" val="1743646265"/>
+        <p14:creationId xmlns:p14="http://schemas.microsoft.com/office/powerpoint/2010/main" val="2365735675"/>
       </p:ext>
     </p:extLst>
   </p:cSld>
@@ -11617,7 +11974,7 @@
           <p:cNvPr id="2" name="Titre 1">
             <a:extLst>
               <a:ext uri="{FF2B5EF4-FFF2-40B4-BE49-F238E27FC236}">
-                <a16:creationId xmlns:a16="http://schemas.microsoft.com/office/drawing/2014/main" id="{1ABC6E94-C296-4FA6-2B52-8B461FE387E3}"/>
+                <a16:creationId xmlns:a16="http://schemas.microsoft.com/office/drawing/2014/main" id="{09A23A54-C0BF-168C-902F-A4032063C6C1}"/>
               </a:ext>
             </a:extLst>
           </p:cNvPr>
@@ -11635,7 +11992,7 @@
           <a:p>
             <a:r>
               <a:rPr lang="fr-FR" dirty="0"/>
-              <a:t>Potentialités didactiques</a:t>
+              <a:t>Système global</a:t>
             </a:r>
           </a:p>
         </p:txBody>
@@ -11645,7 +12002,7 @@
           <p:cNvPr id="3" name="Espace réservé du contenu 2">
             <a:extLst>
               <a:ext uri="{FF2B5EF4-FFF2-40B4-BE49-F238E27FC236}">
-                <a16:creationId xmlns:a16="http://schemas.microsoft.com/office/drawing/2014/main" id="{5C97CB6E-F688-808B-117F-61ED85AE49B2}"/>
+                <a16:creationId xmlns:a16="http://schemas.microsoft.com/office/drawing/2014/main" id="{6D7D4A73-6C3F-5E24-329E-5775875616E2}"/>
               </a:ext>
             </a:extLst>
           </p:cNvPr>
@@ -11661,7 +12018,7 @@
           <a:bodyPr/>
           <a:lstStyle/>
           <a:p>
-            <a:endParaRPr lang="fr-FR" dirty="0"/>
+            <a:endParaRPr lang="fr-FR"/>
           </a:p>
         </p:txBody>
       </p:sp>
@@ -11670,7 +12027,7 @@
           <p:cNvPr id="4" name="Espace réservé du numéro de diapositive 3">
             <a:extLst>
               <a:ext uri="{FF2B5EF4-FFF2-40B4-BE49-F238E27FC236}">
-                <a16:creationId xmlns:a16="http://schemas.microsoft.com/office/drawing/2014/main" id="{B7FFB85E-5A38-63B7-2A8E-FCB94D103CFF}"/>
+                <a16:creationId xmlns:a16="http://schemas.microsoft.com/office/drawing/2014/main" id="{4F23FC63-172B-2BC0-EF46-EF974F675A60}"/>
               </a:ext>
             </a:extLst>
           </p:cNvPr>
@@ -11697,7 +12054,7 @@
     </p:spTree>
     <p:extLst>
       <p:ext uri="{BB962C8B-B14F-4D97-AF65-F5344CB8AC3E}">
-        <p14:creationId xmlns:p14="http://schemas.microsoft.com/office/powerpoint/2010/main" val="1057165519"/>
+        <p14:creationId xmlns:p14="http://schemas.microsoft.com/office/powerpoint/2010/main" val="1743646265"/>
       </p:ext>
     </p:extLst>
   </p:cSld>
@@ -11726,10 +12083,10 @@
       </p:grpSpPr>
       <p:sp>
         <p:nvSpPr>
-          <p:cNvPr id="5" name="Titre 4">
+          <p:cNvPr id="2" name="Titre 1">
             <a:extLst>
               <a:ext uri="{FF2B5EF4-FFF2-40B4-BE49-F238E27FC236}">
-                <a16:creationId xmlns:a16="http://schemas.microsoft.com/office/drawing/2014/main" id="{4BF94A4F-B7ED-DDE5-0174-D5F9E739145C}"/>
+                <a16:creationId xmlns:a16="http://schemas.microsoft.com/office/drawing/2014/main" id="{1ABC6E94-C296-4FA6-2B52-8B461FE387E3}"/>
               </a:ext>
             </a:extLst>
           </p:cNvPr>
@@ -11742,24 +12099,22 @@
         </p:nvSpPr>
         <p:spPr/>
         <p:txBody>
-          <a:bodyPr>
-            <a:normAutofit fontScale="90000"/>
-          </a:bodyPr>
+          <a:bodyPr/>
           <a:lstStyle/>
           <a:p>
             <a:r>
               <a:rPr lang="fr-FR" dirty="0"/>
-              <a:t>Présentation des manipulations réalisées</a:t>
-            </a:r>
-          </a:p>
-        </p:txBody>
-      </p:sp>
-      <p:sp>
-        <p:nvSpPr>
-          <p:cNvPr id="6" name="Espace réservé du texte 5">
+              <a:t>Potentialités didactiques</a:t>
+            </a:r>
+          </a:p>
+        </p:txBody>
+      </p:sp>
+      <p:sp>
+        <p:nvSpPr>
+          <p:cNvPr id="3" name="Espace réservé du contenu 2">
             <a:extLst>
               <a:ext uri="{FF2B5EF4-FFF2-40B4-BE49-F238E27FC236}">
-                <a16:creationId xmlns:a16="http://schemas.microsoft.com/office/drawing/2014/main" id="{98989753-6C0F-ECFD-5470-E4E96160B4A2}"/>
+                <a16:creationId xmlns:a16="http://schemas.microsoft.com/office/drawing/2014/main" id="{5C97CB6E-F688-808B-117F-61ED85AE49B2}"/>
               </a:ext>
             </a:extLst>
           </p:cNvPr>
@@ -11767,7 +12122,7 @@
             <a:spLocks noGrp="1"/>
           </p:cNvSpPr>
           <p:nvPr>
-            <p:ph type="body" idx="1"/>
+            <p:ph idx="1"/>
           </p:nvPr>
         </p:nvSpPr>
         <p:spPr/>
@@ -11775,7 +12130,7 @@
           <a:bodyPr/>
           <a:lstStyle/>
           <a:p>
-            <a:endParaRPr lang="fr-FR"/>
+            <a:endParaRPr lang="fr-FR" dirty="0"/>
           </a:p>
         </p:txBody>
       </p:sp>
@@ -11784,7 +12139,7 @@
           <p:cNvPr id="4" name="Espace réservé du numéro de diapositive 3">
             <a:extLst>
               <a:ext uri="{FF2B5EF4-FFF2-40B4-BE49-F238E27FC236}">
-                <a16:creationId xmlns:a16="http://schemas.microsoft.com/office/drawing/2014/main" id="{FC56BF3B-EC0B-ABCA-0499-3DB2CFDE0403}"/>
+                <a16:creationId xmlns:a16="http://schemas.microsoft.com/office/drawing/2014/main" id="{B7FFB85E-5A38-63B7-2A8E-FCB94D103CFF}"/>
               </a:ext>
             </a:extLst>
           </p:cNvPr>
@@ -11792,7 +12147,7 @@
             <a:spLocks noGrp="1"/>
           </p:cNvSpPr>
           <p:nvPr>
-            <p:ph type="sldNum" sz="quarter" idx="4"/>
+            <p:ph type="sldNum" sz="quarter" idx="12"/>
           </p:nvPr>
         </p:nvSpPr>
         <p:spPr/>
@@ -11811,7 +12166,7 @@
     </p:spTree>
     <p:extLst>
       <p:ext uri="{BB962C8B-B14F-4D97-AF65-F5344CB8AC3E}">
-        <p14:creationId xmlns:p14="http://schemas.microsoft.com/office/powerpoint/2010/main" val="1179456515"/>
+        <p14:creationId xmlns:p14="http://schemas.microsoft.com/office/powerpoint/2010/main" val="1057165519"/>
       </p:ext>
     </p:extLst>
   </p:cSld>
@@ -11843,7 +12198,7 @@
           <p:cNvPr id="5" name="Titre 4">
             <a:extLst>
               <a:ext uri="{FF2B5EF4-FFF2-40B4-BE49-F238E27FC236}">
-                <a16:creationId xmlns:a16="http://schemas.microsoft.com/office/drawing/2014/main" id="{64015CF7-56D8-0727-1E0D-3444C9FEC38A}"/>
+                <a16:creationId xmlns:a16="http://schemas.microsoft.com/office/drawing/2014/main" id="{4BF94A4F-B7ED-DDE5-0174-D5F9E739145C}"/>
               </a:ext>
             </a:extLst>
           </p:cNvPr>
@@ -11856,19 +12211,24 @@
         </p:nvSpPr>
         <p:spPr/>
         <p:txBody>
-          <a:bodyPr/>
+          <a:bodyPr>
+            <a:normAutofit fontScale="90000"/>
+          </a:bodyPr>
           <a:lstStyle/>
           <a:p>
-            <a:endParaRPr lang="fr-FR"/>
-          </a:p>
-        </p:txBody>
-      </p:sp>
-      <p:sp>
-        <p:nvSpPr>
-          <p:cNvPr id="6" name="Espace réservé du contenu 5">
+            <a:r>
+              <a:rPr lang="fr-FR" dirty="0"/>
+              <a:t>DESCRIPTION des manipulations réalisées</a:t>
+            </a:r>
+          </a:p>
+        </p:txBody>
+      </p:sp>
+      <p:sp>
+        <p:nvSpPr>
+          <p:cNvPr id="6" name="Espace réservé du texte 5">
             <a:extLst>
               <a:ext uri="{FF2B5EF4-FFF2-40B4-BE49-F238E27FC236}">
-                <a16:creationId xmlns:a16="http://schemas.microsoft.com/office/drawing/2014/main" id="{C8B37360-714F-F41A-CE43-60C98F430CF4}"/>
+                <a16:creationId xmlns:a16="http://schemas.microsoft.com/office/drawing/2014/main" id="{98989753-6C0F-ECFD-5470-E4E96160B4A2}"/>
               </a:ext>
             </a:extLst>
           </p:cNvPr>
@@ -11876,7 +12236,7 @@
             <a:spLocks noGrp="1"/>
           </p:cNvSpPr>
           <p:nvPr>
-            <p:ph idx="1"/>
+            <p:ph type="body" idx="1"/>
           </p:nvPr>
         </p:nvSpPr>
         <p:spPr/>
@@ -11893,7 +12253,7 @@
           <p:cNvPr id="4" name="Espace réservé du numéro de diapositive 3">
             <a:extLst>
               <a:ext uri="{FF2B5EF4-FFF2-40B4-BE49-F238E27FC236}">
-                <a16:creationId xmlns:a16="http://schemas.microsoft.com/office/drawing/2014/main" id="{CFC4B19D-3F27-A52C-6A13-1C732FFE3A8C}"/>
+                <a16:creationId xmlns:a16="http://schemas.microsoft.com/office/drawing/2014/main" id="{FC56BF3B-EC0B-ABCA-0499-3DB2CFDE0403}"/>
               </a:ext>
             </a:extLst>
           </p:cNvPr>
@@ -11901,7 +12261,7 @@
             <a:spLocks noGrp="1"/>
           </p:cNvSpPr>
           <p:nvPr>
-            <p:ph type="sldNum" sz="quarter" idx="12"/>
+            <p:ph type="sldNum" sz="quarter" idx="4"/>
           </p:nvPr>
         </p:nvSpPr>
         <p:spPr/>
@@ -11911,17 +12271,16 @@
           <a:p>
             <a:fld id="{40743BAD-0FD4-4AFD-913F-F1B3782AF393}" type="slidenum">
               <a:rPr lang="fr-FR" smtClean="0"/>
-              <a:pPr/>
               <a:t>6</a:t>
             </a:fld>
-            <a:endParaRPr lang="fr-FR" dirty="0"/>
+            <a:endParaRPr lang="fr-FR"/>
           </a:p>
         </p:txBody>
       </p:sp>
     </p:spTree>
     <p:extLst>
       <p:ext uri="{BB962C8B-B14F-4D97-AF65-F5344CB8AC3E}">
-        <p14:creationId xmlns:p14="http://schemas.microsoft.com/office/powerpoint/2010/main" val="2653643583"/>
+        <p14:creationId xmlns:p14="http://schemas.microsoft.com/office/powerpoint/2010/main" val="1179456515"/>
       </p:ext>
     </p:extLst>
   </p:cSld>
@@ -11953,7 +12312,7 @@
           <p:cNvPr id="5" name="Titre 4">
             <a:extLst>
               <a:ext uri="{FF2B5EF4-FFF2-40B4-BE49-F238E27FC236}">
-                <a16:creationId xmlns:a16="http://schemas.microsoft.com/office/drawing/2014/main" id="{1422FC55-0445-5EEB-F3E6-3206A7ACB207}"/>
+                <a16:creationId xmlns:a16="http://schemas.microsoft.com/office/drawing/2014/main" id="{64015CF7-56D8-0727-1E0D-3444C9FEC38A}"/>
               </a:ext>
             </a:extLst>
           </p:cNvPr>
@@ -11966,24 +12325,19 @@
         </p:nvSpPr>
         <p:spPr/>
         <p:txBody>
-          <a:bodyPr>
-            <a:normAutofit fontScale="90000"/>
-          </a:bodyPr>
+          <a:bodyPr/>
           <a:lstStyle/>
           <a:p>
-            <a:r>
-              <a:rPr lang="fr-FR" dirty="0"/>
-              <a:t>Présentation de la séquence pédagogique</a:t>
-            </a:r>
-          </a:p>
-        </p:txBody>
-      </p:sp>
-      <p:sp>
-        <p:nvSpPr>
-          <p:cNvPr id="6" name="Espace réservé du texte 5">
+            <a:endParaRPr lang="fr-FR"/>
+          </a:p>
+        </p:txBody>
+      </p:sp>
+      <p:sp>
+        <p:nvSpPr>
+          <p:cNvPr id="6" name="Espace réservé du contenu 5">
             <a:extLst>
               <a:ext uri="{FF2B5EF4-FFF2-40B4-BE49-F238E27FC236}">
-                <a16:creationId xmlns:a16="http://schemas.microsoft.com/office/drawing/2014/main" id="{F7F0CCBD-BC96-E09F-AAEA-5835D192F407}"/>
+                <a16:creationId xmlns:a16="http://schemas.microsoft.com/office/drawing/2014/main" id="{C8B37360-714F-F41A-CE43-60C98F430CF4}"/>
               </a:ext>
             </a:extLst>
           </p:cNvPr>
@@ -11991,7 +12345,7 @@
             <a:spLocks noGrp="1"/>
           </p:cNvSpPr>
           <p:nvPr>
-            <p:ph type="body" idx="1"/>
+            <p:ph idx="1"/>
           </p:nvPr>
         </p:nvSpPr>
         <p:spPr/>
@@ -12008,7 +12362,7 @@
           <p:cNvPr id="4" name="Espace réservé du numéro de diapositive 3">
             <a:extLst>
               <a:ext uri="{FF2B5EF4-FFF2-40B4-BE49-F238E27FC236}">
-                <a16:creationId xmlns:a16="http://schemas.microsoft.com/office/drawing/2014/main" id="{5193003F-EBAA-FB9D-F1DD-FB8D5FF2C044}"/>
+                <a16:creationId xmlns:a16="http://schemas.microsoft.com/office/drawing/2014/main" id="{CFC4B19D-3F27-A52C-6A13-1C732FFE3A8C}"/>
               </a:ext>
             </a:extLst>
           </p:cNvPr>
@@ -12016,7 +12370,7 @@
             <a:spLocks noGrp="1"/>
           </p:cNvSpPr>
           <p:nvPr>
-            <p:ph type="sldNum" sz="quarter" idx="4"/>
+            <p:ph type="sldNum" sz="quarter" idx="12"/>
           </p:nvPr>
         </p:nvSpPr>
         <p:spPr/>
@@ -12026,16 +12380,17 @@
           <a:p>
             <a:fld id="{40743BAD-0FD4-4AFD-913F-F1B3782AF393}" type="slidenum">
               <a:rPr lang="fr-FR" smtClean="0"/>
+              <a:pPr/>
               <a:t>7</a:t>
             </a:fld>
-            <a:endParaRPr lang="fr-FR"/>
+            <a:endParaRPr lang="fr-FR" dirty="0"/>
           </a:p>
         </p:txBody>
       </p:sp>
     </p:spTree>
     <p:extLst>
       <p:ext uri="{BB962C8B-B14F-4D97-AF65-F5344CB8AC3E}">
-        <p14:creationId xmlns:p14="http://schemas.microsoft.com/office/powerpoint/2010/main" val="1471523159"/>
+        <p14:creationId xmlns:p14="http://schemas.microsoft.com/office/powerpoint/2010/main" val="2653643583"/>
       </p:ext>
     </p:extLst>
   </p:cSld>
@@ -12067,7 +12422,7 @@
           <p:cNvPr id="5" name="Titre 4">
             <a:extLst>
               <a:ext uri="{FF2B5EF4-FFF2-40B4-BE49-F238E27FC236}">
-                <a16:creationId xmlns:a16="http://schemas.microsoft.com/office/drawing/2014/main" id="{4F5B5EE8-418A-F11D-D63F-BFCEE1F1286D}"/>
+                <a16:creationId xmlns:a16="http://schemas.microsoft.com/office/drawing/2014/main" id="{1422FC55-0445-5EEB-F3E6-3206A7ACB207}"/>
               </a:ext>
             </a:extLst>
           </p:cNvPr>
@@ -12080,22 +12435,24 @@
         </p:nvSpPr>
         <p:spPr/>
         <p:txBody>
-          <a:bodyPr/>
+          <a:bodyPr>
+            <a:normAutofit fontScale="90000"/>
+          </a:bodyPr>
           <a:lstStyle/>
           <a:p>
             <a:r>
               <a:rPr lang="fr-FR" dirty="0"/>
-              <a:t>Contexte</a:t>
-            </a:r>
-          </a:p>
-        </p:txBody>
-      </p:sp>
-      <p:sp>
-        <p:nvSpPr>
-          <p:cNvPr id="6" name="Espace réservé du contenu 5">
+              <a:t>Présentation de la séquence pédagogique</a:t>
+            </a:r>
+          </a:p>
+        </p:txBody>
+      </p:sp>
+      <p:sp>
+        <p:nvSpPr>
+          <p:cNvPr id="6" name="Espace réservé du texte 5">
             <a:extLst>
               <a:ext uri="{FF2B5EF4-FFF2-40B4-BE49-F238E27FC236}">
-                <a16:creationId xmlns:a16="http://schemas.microsoft.com/office/drawing/2014/main" id="{F29118A1-C019-6AED-F2EC-687E34070E8B}"/>
+                <a16:creationId xmlns:a16="http://schemas.microsoft.com/office/drawing/2014/main" id="{F7F0CCBD-BC96-E09F-AAEA-5835D192F407}"/>
               </a:ext>
             </a:extLst>
           </p:cNvPr>
@@ -12103,7 +12460,7 @@
             <a:spLocks noGrp="1"/>
           </p:cNvSpPr>
           <p:nvPr>
-            <p:ph idx="1"/>
+            <p:ph type="body" idx="1"/>
           </p:nvPr>
         </p:nvSpPr>
         <p:spPr/>
@@ -12120,7 +12477,7 @@
           <p:cNvPr id="4" name="Espace réservé du numéro de diapositive 3">
             <a:extLst>
               <a:ext uri="{FF2B5EF4-FFF2-40B4-BE49-F238E27FC236}">
-                <a16:creationId xmlns:a16="http://schemas.microsoft.com/office/drawing/2014/main" id="{FBDDA493-C0B5-0055-5885-4AF89AFB8A78}"/>
+                <a16:creationId xmlns:a16="http://schemas.microsoft.com/office/drawing/2014/main" id="{5193003F-EBAA-FB9D-F1DD-FB8D5FF2C044}"/>
               </a:ext>
             </a:extLst>
           </p:cNvPr>
@@ -12128,7 +12485,7 @@
             <a:spLocks noGrp="1"/>
           </p:cNvSpPr>
           <p:nvPr>
-            <p:ph type="sldNum" sz="quarter" idx="12"/>
+            <p:ph type="sldNum" sz="quarter" idx="4"/>
           </p:nvPr>
         </p:nvSpPr>
         <p:spPr/>
@@ -12138,17 +12495,16 @@
           <a:p>
             <a:fld id="{40743BAD-0FD4-4AFD-913F-F1B3782AF393}" type="slidenum">
               <a:rPr lang="fr-FR" smtClean="0"/>
-              <a:pPr/>
               <a:t>8</a:t>
             </a:fld>
-            <a:endParaRPr lang="fr-FR" dirty="0"/>
+            <a:endParaRPr lang="fr-FR"/>
           </a:p>
         </p:txBody>
       </p:sp>
     </p:spTree>
     <p:extLst>
       <p:ext uri="{BB962C8B-B14F-4D97-AF65-F5344CB8AC3E}">
-        <p14:creationId xmlns:p14="http://schemas.microsoft.com/office/powerpoint/2010/main" val="2020172637"/>
+        <p14:creationId xmlns:p14="http://schemas.microsoft.com/office/powerpoint/2010/main" val="1471523159"/>
       </p:ext>
     </p:extLst>
   </p:cSld>
@@ -12159,17 +12515,11 @@
 </file>
 
 <file path=ppt/slides/slide9.xml><?xml version="1.0" encoding="utf-8"?>
-<p:sld xmlns:a="http://schemas.openxmlformats.org/drawingml/2006/main" xmlns:r="http://schemas.openxmlformats.org/officeDocument/2006/relationships" xmlns:p="http://schemas.openxmlformats.org/presentationml/2006/main" show="0">
+<p:sld xmlns:a="http://schemas.openxmlformats.org/drawingml/2006/main" xmlns:r="http://schemas.openxmlformats.org/officeDocument/2006/relationships" xmlns:p="http://schemas.openxmlformats.org/presentationml/2006/main">
   <p:cSld>
     <p:spTree>
       <p:nvGrpSpPr>
-        <p:cNvPr id="1" name="">
-          <a:extLst>
-            <a:ext uri="{FF2B5EF4-FFF2-40B4-BE49-F238E27FC236}">
-              <a16:creationId xmlns:a16="http://schemas.microsoft.com/office/drawing/2014/main" id="{32A059D3-1033-C21A-D549-35D825E06049}"/>
-            </a:ext>
-          </a:extLst>
-        </p:cNvPr>
+        <p:cNvPr id="1" name=""/>
         <p:cNvGrpSpPr/>
         <p:nvPr/>
       </p:nvGrpSpPr>
@@ -12186,7 +12536,7 @@
           <p:cNvPr id="5" name="Titre 4">
             <a:extLst>
               <a:ext uri="{FF2B5EF4-FFF2-40B4-BE49-F238E27FC236}">
-                <a16:creationId xmlns:a16="http://schemas.microsoft.com/office/drawing/2014/main" id="{E220F5FB-4AEA-0E53-3119-A81032826553}"/>
+                <a16:creationId xmlns:a16="http://schemas.microsoft.com/office/drawing/2014/main" id="{4F5B5EE8-418A-F11D-D63F-BFCEE1F1286D}"/>
               </a:ext>
             </a:extLst>
           </p:cNvPr>
@@ -12204,7 +12554,7 @@
           <a:p>
             <a:r>
               <a:rPr lang="fr-FR" dirty="0"/>
-              <a:t>Démarches pédagogiques</a:t>
+              <a:t>Contexte</a:t>
             </a:r>
           </a:p>
         </p:txBody>
@@ -12214,7 +12564,7 @@
           <p:cNvPr id="6" name="Espace réservé du contenu 5">
             <a:extLst>
               <a:ext uri="{FF2B5EF4-FFF2-40B4-BE49-F238E27FC236}">
-                <a16:creationId xmlns:a16="http://schemas.microsoft.com/office/drawing/2014/main" id="{0C5343DC-792C-558F-8832-07AFEDF38666}"/>
+                <a16:creationId xmlns:a16="http://schemas.microsoft.com/office/drawing/2014/main" id="{F29118A1-C019-6AED-F2EC-687E34070E8B}"/>
               </a:ext>
             </a:extLst>
           </p:cNvPr>
@@ -12230,7 +12580,7 @@
           <a:bodyPr/>
           <a:lstStyle/>
           <a:p>
-            <a:endParaRPr lang="fr-FR" dirty="0"/>
+            <a:endParaRPr lang="fr-FR"/>
           </a:p>
         </p:txBody>
       </p:sp>
@@ -12239,7 +12589,7 @@
           <p:cNvPr id="4" name="Espace réservé du numéro de diapositive 3">
             <a:extLst>
               <a:ext uri="{FF2B5EF4-FFF2-40B4-BE49-F238E27FC236}">
-                <a16:creationId xmlns:a16="http://schemas.microsoft.com/office/drawing/2014/main" id="{46DED23E-DF72-BBC0-6CE6-BE6D2253A243}"/>
+                <a16:creationId xmlns:a16="http://schemas.microsoft.com/office/drawing/2014/main" id="{FBDDA493-C0B5-0055-5885-4AF89AFB8A78}"/>
               </a:ext>
             </a:extLst>
           </p:cNvPr>
@@ -12267,7 +12617,7 @@
     </p:spTree>
     <p:extLst>
       <p:ext uri="{BB962C8B-B14F-4D97-AF65-F5344CB8AC3E}">
-        <p14:creationId xmlns:p14="http://schemas.microsoft.com/office/powerpoint/2010/main" val="2948027405"/>
+        <p14:creationId xmlns:p14="http://schemas.microsoft.com/office/powerpoint/2010/main" val="2020172637"/>
       </p:ext>
     </p:extLst>
   </p:cSld>
